--- a/course_v2/slides/lesson07_while_and_validation.pptx
+++ b/course_v2/slides/lesson07_while_and_validation.pptx
@@ -2,30 +2,31 @@
 <file path=ppt/presentation.xml><?xml version="1.0" encoding="utf-8"?>
 <p:presentation xmlns:p="http://schemas.openxmlformats.org/presentationml/2006/main">
   <p:sldMasterIdLst>
-    <p:sldMasterId xmlns:r="http://schemas.openxmlformats.org/officeDocument/2006/relationships" id="2147483648" r:id="R37fb12ec42f34dd0"/>
+    <p:sldMasterId xmlns:r="http://schemas.openxmlformats.org/officeDocument/2006/relationships" id="2147483648" r:id="R702752f6ae79406b"/>
   </p:sldMasterIdLst>
   <p:notesMasterIdLst>
-    <p:notesMasterId xmlns:r="http://schemas.openxmlformats.org/officeDocument/2006/relationships" r:id="R6e402c8784e649af"/>
+    <p:notesMasterId xmlns:r="http://schemas.openxmlformats.org/officeDocument/2006/relationships" r:id="Rddd1bc772e5c4bdb"/>
   </p:notesMasterIdLst>
   <p:sldIdLst>
-    <p:sldId xmlns:r="http://schemas.openxmlformats.org/officeDocument/2006/relationships" id="256" r:id="R344fd1e846124e06"/>
-    <p:sldId xmlns:r="http://schemas.openxmlformats.org/officeDocument/2006/relationships" id="257" r:id="Ra8cfb2c364f14b89"/>
-    <p:sldId xmlns:r="http://schemas.openxmlformats.org/officeDocument/2006/relationships" id="258" r:id="Rfd743409529049f2"/>
-    <p:sldId xmlns:r="http://schemas.openxmlformats.org/officeDocument/2006/relationships" id="259" r:id="Rbaf39a97bab24c9a"/>
-    <p:sldId xmlns:r="http://schemas.openxmlformats.org/officeDocument/2006/relationships" id="260" r:id="R0c7303d1f06b4bb8"/>
-    <p:sldId xmlns:r="http://schemas.openxmlformats.org/officeDocument/2006/relationships" id="261" r:id="Rb6f98478e2b24ab7"/>
-    <p:sldId xmlns:r="http://schemas.openxmlformats.org/officeDocument/2006/relationships" id="262" r:id="R595cc1c38a8641e2"/>
-    <p:sldId xmlns:r="http://schemas.openxmlformats.org/officeDocument/2006/relationships" id="263" r:id="R336ae5b949a04b41"/>
-    <p:sldId xmlns:r="http://schemas.openxmlformats.org/officeDocument/2006/relationships" id="264" r:id="Re8cc9a30dd774861"/>
-    <p:sldId xmlns:r="http://schemas.openxmlformats.org/officeDocument/2006/relationships" id="265" r:id="R8cd13d25acc1436e"/>
-    <p:sldId xmlns:r="http://schemas.openxmlformats.org/officeDocument/2006/relationships" id="266" r:id="R21136dd780b84eb2"/>
-    <p:sldId xmlns:r="http://schemas.openxmlformats.org/officeDocument/2006/relationships" id="267" r:id="R304c9c4518fc4f32"/>
-    <p:sldId xmlns:r="http://schemas.openxmlformats.org/officeDocument/2006/relationships" id="268" r:id="Rcf141d2e7a7c4c68"/>
-    <p:sldId xmlns:r="http://schemas.openxmlformats.org/officeDocument/2006/relationships" id="269" r:id="Rcaa358fe313a4a11"/>
-    <p:sldId xmlns:r="http://schemas.openxmlformats.org/officeDocument/2006/relationships" id="270" r:id="Rd02965ecfe63421c"/>
-    <p:sldId xmlns:r="http://schemas.openxmlformats.org/officeDocument/2006/relationships" id="271" r:id="R0c66377fc1794faa"/>
-    <p:sldId xmlns:r="http://schemas.openxmlformats.org/officeDocument/2006/relationships" id="272" r:id="R2531f7cad6dc4031"/>
-    <p:sldId xmlns:r="http://schemas.openxmlformats.org/officeDocument/2006/relationships" id="273" r:id="Rcbba0de58c184307"/>
+    <p:sldId xmlns:r="http://schemas.openxmlformats.org/officeDocument/2006/relationships" id="256" r:id="R050002ce206a4b1f"/>
+    <p:sldId xmlns:r="http://schemas.openxmlformats.org/officeDocument/2006/relationships" id="257" r:id="R6d55ba08b4774885"/>
+    <p:sldId xmlns:r="http://schemas.openxmlformats.org/officeDocument/2006/relationships" id="258" r:id="R3248c4f12dd4408b"/>
+    <p:sldId xmlns:r="http://schemas.openxmlformats.org/officeDocument/2006/relationships" id="259" r:id="Rbd74563f9fe740a3"/>
+    <p:sldId xmlns:r="http://schemas.openxmlformats.org/officeDocument/2006/relationships" id="260" r:id="Rcef5de434799432b"/>
+    <p:sldId xmlns:r="http://schemas.openxmlformats.org/officeDocument/2006/relationships" id="261" r:id="Rea9a0859f9fc4ccc"/>
+    <p:sldId xmlns:r="http://schemas.openxmlformats.org/officeDocument/2006/relationships" id="262" r:id="R68d34c9336b8426e"/>
+    <p:sldId xmlns:r="http://schemas.openxmlformats.org/officeDocument/2006/relationships" id="263" r:id="R1cab685959274ac9"/>
+    <p:sldId xmlns:r="http://schemas.openxmlformats.org/officeDocument/2006/relationships" id="264" r:id="Ra50cc53b015f48f6"/>
+    <p:sldId xmlns:r="http://schemas.openxmlformats.org/officeDocument/2006/relationships" id="265" r:id="R5e8bac17da744936"/>
+    <p:sldId xmlns:r="http://schemas.openxmlformats.org/officeDocument/2006/relationships" id="266" r:id="R354b115f9c39429d"/>
+    <p:sldId xmlns:r="http://schemas.openxmlformats.org/officeDocument/2006/relationships" id="267" r:id="R1343aacc16024396"/>
+    <p:sldId xmlns:r="http://schemas.openxmlformats.org/officeDocument/2006/relationships" id="268" r:id="R2a971316fd614d09"/>
+    <p:sldId xmlns:r="http://schemas.openxmlformats.org/officeDocument/2006/relationships" id="269" r:id="R63ea1f5c57f54170"/>
+    <p:sldId xmlns:r="http://schemas.openxmlformats.org/officeDocument/2006/relationships" id="270" r:id="Raeb867e4b57a41e4"/>
+    <p:sldId xmlns:r="http://schemas.openxmlformats.org/officeDocument/2006/relationships" id="271" r:id="Rb64f53a0bf5a4eac"/>
+    <p:sldId xmlns:r="http://schemas.openxmlformats.org/officeDocument/2006/relationships" id="272" r:id="Rbc73daa9946d43a6"/>
+    <p:sldId xmlns:r="http://schemas.openxmlformats.org/officeDocument/2006/relationships" id="273" r:id="R13e506089c6e4fc5"/>
+    <p:sldId xmlns:r="http://schemas.openxmlformats.org/officeDocument/2006/relationships" id="274" r:id="R5f88be7756854cd3"/>
   </p:sldIdLst>
   <p:sldSz cx="12192000" cy="6858000"/>
   <p:notesSz cx="6858000" cy="9144000"/>
@@ -1079,6 +1080,72 @@
 </p:notes>
 </file>
 
+<file path=ppt/notesSlides/notesSlide19.xml><?xml version="1.0" encoding="utf-8"?>
+<p:notes xmlns:p="http://schemas.openxmlformats.org/presentationml/2006/main">
+  <p:cSld>
+    <p:spTree>
+      <p:nvGrpSpPr>
+        <p:cNvPr id="1" name=""/>
+        <p:cNvGrpSpPr/>
+        <p:nvPr/>
+      </p:nvGrpSpPr>
+      <p:grpSpPr>
+        <a:xfrm xmlns:a="http://schemas.openxmlformats.org/drawingml/2006/main"/>
+      </p:grpSpPr>
+      <p:sp>
+        <p:nvSpPr>
+          <p:cNvPr id="2" name="Slide Image Placeholder 1"/>
+          <p:cNvSpPr>
+            <a:spLocks xmlns:a="http://schemas.openxmlformats.org/drawingml/2006/main" noGrp="1"/>
+          </p:cNvSpPr>
+          <p:nvPr>
+            <p:ph type="sldImg" idx="0"/>
+          </p:nvPr>
+        </p:nvSpPr>
+        <p:spPr/>
+      </p:sp>
+      <p:sp>
+        <p:nvSpPr>
+          <p:cNvPr id="3" name="Notes Placeholder 2"/>
+          <p:cNvSpPr>
+            <a:spLocks xmlns:a="http://schemas.openxmlformats.org/drawingml/2006/main" noGrp="1"/>
+          </p:cNvSpPr>
+          <p:nvPr>
+            <p:ph type="body" idx="1"/>
+          </p:nvPr>
+        </p:nvSpPr>
+        <p:spPr/>
+        <p:txBody>
+          <a:bodyPr xmlns:a="http://schemas.openxmlformats.org/drawingml/2006/main"/>
+          <a:lstStyle xmlns:a="http://schemas.openxmlformats.org/drawingml/2006/main"/>
+          <a:p xmlns:a="http://schemas.openxmlformats.org/drawingml/2006/main"/>
+        </p:txBody>
+      </p:sp>
+      <p:sp>
+        <p:nvSpPr>
+          <p:cNvPr id="4" name="Slide Number Placeholder 3"/>
+          <p:cNvSpPr>
+            <a:spLocks xmlns:a="http://schemas.openxmlformats.org/drawingml/2006/main" noGrp="1"/>
+          </p:cNvSpPr>
+          <p:nvPr>
+            <p:ph type="sldNum" idx="5"/>
+          </p:nvPr>
+        </p:nvSpPr>
+        <p:spPr/>
+        <p:txBody>
+          <a:bodyPr xmlns:a="http://schemas.openxmlformats.org/drawingml/2006/main"/>
+          <a:lstStyle xmlns:a="http://schemas.openxmlformats.org/drawingml/2006/main"/>
+          <a:p xmlns:a="http://schemas.openxmlformats.org/drawingml/2006/main"/>
+        </p:txBody>
+      </p:sp>
+    </p:spTree>
+  </p:cSld>
+  <p:clrMapOvr>
+    <a:masterClrMapping xmlns:a="http://schemas.openxmlformats.org/drawingml/2006/main"/>
+  </p:clrMapOvr>
+</p:notes>
+</file>
+
 <file path=ppt/notesSlides/notesSlide2.xml><?xml version="1.0" encoding="utf-8"?>
 <p:notes xmlns:p="http://schemas.openxmlformats.org/presentationml/2006/main">
   <p:cSld>
@@ -1645,7 +1712,7 @@
   </p:cSld>
   <p:clrMap bg1="lt1" tx1="dk1" bg2="lt2" tx2="dk2" accent1="accent1" accent2="accent2" accent3="accent3" accent4="accent4" accent5="accent5" accent6="accent6" hlink="hlink" folHlink="folHlink"/>
   <p:sldLayoutIdLst>
-    <p:sldLayoutId xmlns:r="http://schemas.openxmlformats.org/officeDocument/2006/relationships" id="2147483649" r:id="Rc869564f3bf54afe"/>
+    <p:sldLayoutId xmlns:r="http://schemas.openxmlformats.org/officeDocument/2006/relationships" id="2147483649" r:id="R2d6b914b02c34549"/>
   </p:sldLayoutIdLst>
   <p:txStyles>
     <p:titleStyle>
@@ -2643,10 +2710,10 @@
       </p:grpSpPr>
       <p:sp>
         <p:nvSpPr>
-          <p:cNvPr id="12" name="">
-            <a:extLst xmlns:a="http://schemas.openxmlformats.org/drawingml/2006/main">
-              <a:ext uri="{FF2B5EF4-FFF2-40B4-BE49-F238E27FC236}">
-                <a16:creationId xmlns:a16="http://schemas.microsoft.com/office/drawing/2014/main" id="{4B4AE87D-3233-4225-B198-B362DB324177}"/>
+          <p:cNvPr id="8" name="">
+            <a:extLst xmlns:a="http://schemas.openxmlformats.org/drawingml/2006/main">
+              <a:ext uri="{FF2B5EF4-FFF2-40B4-BE49-F238E27FC236}">
+                <a16:creationId xmlns:a16="http://schemas.microsoft.com/office/drawing/2014/main" id="{5F116DC5-4F1D-4CF5-9D76-1B9BDD10AFB6}"/>
               </a:ext>
             </a:extLst>
           </p:cNvPr>
@@ -2677,7 +2744,7 @@
           <p:cNvPr id="2" name="">
             <a:extLst xmlns:a="http://schemas.openxmlformats.org/drawingml/2006/main">
               <a:ext uri="{FF2B5EF4-FFF2-40B4-BE49-F238E27FC236}">
-                <a16:creationId xmlns:a16="http://schemas.microsoft.com/office/drawing/2014/main" id="{F73EA08E-D439-4CC2-BECE-590464CDF14A}"/>
+                <a16:creationId xmlns:a16="http://schemas.microsoft.com/office/drawing/2014/main" id="{874FE8DB-E3E1-4584-BB1C-5F37F925AC76}"/>
               </a:ext>
             </a:extLst>
           </p:cNvPr>
@@ -2718,7 +2785,7 @@
                   <a:srgbClr val="1F9AA5"/>
                 </a:solidFill>
               </a:rPr>
-              <a:t>雙重驗證</a:t>
+              <a:t>數字驗證</a:t>
             </a:r>
           </a:p>
         </p:txBody>
@@ -2728,7 +2795,7 @@
           <p:cNvPr id="3" name="">
             <a:extLst xmlns:a="http://schemas.openxmlformats.org/drawingml/2006/main">
               <a:ext uri="{FF2B5EF4-FFF2-40B4-BE49-F238E27FC236}">
-                <a16:creationId xmlns:a16="http://schemas.microsoft.com/office/drawing/2014/main" id="{9A14A75B-ED97-4B55-A2C0-F1554F316F2E}"/>
+                <a16:creationId xmlns:a16="http://schemas.microsoft.com/office/drawing/2014/main" id="{A5E6831C-8781-4E70-94C4-EFA164EEDB11}"/>
               </a:ext>
             </a:extLst>
           </p:cNvPr>
@@ -2769,7 +2836,7 @@
                   <a:srgbClr val="0B2239"/>
                 </a:solidFill>
               </a:rPr>
-              <a:t>先確認是數字，再確認範圍</a:t>
+              <a:t>input 得到字串，轉型可能失敗</a:t>
             </a:r>
           </a:p>
         </p:txBody>
@@ -2779,7 +2846,7 @@
           <p:cNvPr id="4" name="">
             <a:extLst xmlns:a="http://schemas.openxmlformats.org/drawingml/2006/main">
               <a:ext uri="{FF2B5EF4-FFF2-40B4-BE49-F238E27FC236}">
-                <a16:creationId xmlns:a16="http://schemas.microsoft.com/office/drawing/2014/main" id="{2A306BA7-9909-42E5-A5AE-EAA93C5BDA24}"/>
+                <a16:creationId xmlns:a16="http://schemas.microsoft.com/office/drawing/2014/main" id="{F0CDCEA7-2959-4491-B486-CCBCF922EC93}"/>
               </a:ext>
             </a:extLst>
           </p:cNvPr>
@@ -2830,32 +2897,30 @@
           <p:cNvPr id="5" name="">
             <a:extLst xmlns:a="http://schemas.openxmlformats.org/drawingml/2006/main">
               <a:ext uri="{FF2B5EF4-FFF2-40B4-BE49-F238E27FC236}">
-                <a16:creationId xmlns:a16="http://schemas.microsoft.com/office/drawing/2014/main" id="{27DA2008-4B94-4427-9436-E82974E54676}"/>
-              </a:ext>
-            </a:extLst>
-          </p:cNvPr>
-          <p:cNvSpPr>
-            <a:spLocks xmlns:a="http://schemas.openxmlformats.org/drawingml/2006/main" noGrp="1"/>
-          </p:cNvSpPr>
-          <p:nvPr/>
-        </p:nvSpPr>
-        <p:spPr>
-          <a:xfrm xmlns:a="http://schemas.openxmlformats.org/drawingml/2006/main">
-            <a:off x="952500" y="2000250"/>
-            <a:ext cx="4762500" cy="2762250"/>
+                <a16:creationId xmlns:a16="http://schemas.microsoft.com/office/drawing/2014/main" id="{55CA46A3-90E1-43AF-879E-0755E3C26768}"/>
+              </a:ext>
+            </a:extLst>
+          </p:cNvPr>
+          <p:cNvSpPr>
+            <a:spLocks xmlns:a="http://schemas.openxmlformats.org/drawingml/2006/main" noGrp="1"/>
+          </p:cNvSpPr>
+          <p:nvPr/>
+        </p:nvSpPr>
+        <p:spPr>
+          <a:xfrm xmlns:a="http://schemas.openxmlformats.org/drawingml/2006/main">
+            <a:off x="1714500" y="2095500"/>
+            <a:ext cx="8763000" cy="2333625"/>
           </a:xfrm>
           <a:prstGeom xmlns:a="http://schemas.openxmlformats.org/drawingml/2006/main" prst="roundRect">
             <a:avLst>
-              <a:gd name="adj" fmla="val 5517"/>
+              <a:gd name="adj" fmla="val 6531"/>
             </a:avLst>
           </a:prstGeom>
           <a:solidFill xmlns:a="http://schemas.openxmlformats.org/drawingml/2006/main">
-            <a:srgbClr val="FFFFFF"/>
+            <a:srgbClr val="0B2239"/>
           </a:solidFill>
-          <a:ln xmlns:a="http://schemas.openxmlformats.org/drawingml/2006/main" w="9525">
-            <a:solidFill>
-              <a:srgbClr val="D5DEE5"/>
-            </a:solidFill>
+          <a:ln xmlns:a="http://schemas.openxmlformats.org/drawingml/2006/main" w="0">
+            <a:noFill/>
             <a:prstDash val="solid"/>
           </a:ln>
         </p:spPr>
@@ -2865,48 +2930,48 @@
           <p:cNvPr id="6" name="">
             <a:extLst xmlns:a="http://schemas.openxmlformats.org/drawingml/2006/main">
               <a:ext uri="{FF2B5EF4-FFF2-40B4-BE49-F238E27FC236}">
-                <a16:creationId xmlns:a16="http://schemas.microsoft.com/office/drawing/2014/main" id="{2367DD3A-F515-423B-B647-FAC17BE51A18}"/>
-              </a:ext>
-            </a:extLst>
-          </p:cNvPr>
-          <p:cNvSpPr>
-            <a:spLocks xmlns:a="http://schemas.openxmlformats.org/drawingml/2006/main" noGrp="1"/>
-          </p:cNvSpPr>
-          <p:nvPr/>
-        </p:nvSpPr>
-        <p:spPr>
-          <a:xfrm xmlns:a="http://schemas.openxmlformats.org/drawingml/2006/main">
-            <a:off x="1333500" y="2381250"/>
-            <a:ext cx="4000500" cy="457200"/>
-          </a:xfrm>
-          <a:prstGeom xmlns:a="http://schemas.openxmlformats.org/drawingml/2006/main" prst="rect">
-            <a:avLst/>
-          </a:prstGeom>
-          <a:noFill xmlns:a="http://schemas.openxmlformats.org/drawingml/2006/main"/>
-          <a:ln xmlns:a="http://schemas.openxmlformats.org/drawingml/2006/main" w="0">
-            <a:noFill/>
-            <a:prstDash val="solid"/>
-          </a:ln>
-        </p:spPr>
-        <p:txBody>
-          <a:bodyPr xmlns:a="http://schemas.openxmlformats.org/drawingml/2006/main"/>
-          <a:lstStyle xmlns:a="http://schemas.openxmlformats.org/drawingml/2006/main"/>
-          <a:p xmlns:a="http://schemas.openxmlformats.org/drawingml/2006/main">
-            <a:pPr algn="l">
-              <a:buNone/>
-              <a:defRPr sz="2400" b="1">
-                <a:solidFill>
-                  <a:srgbClr val="0B2239"/>
-                </a:solidFill>
-              </a:defRPr>
-            </a:pPr>
-            <a:r>
-              <a:rPr sz="2400" b="1">
-                <a:solidFill>
-                  <a:srgbClr val="0B2239"/>
-                </a:solidFill>
-              </a:rPr>
-              <a:t>格式</a:t>
+                <a16:creationId xmlns:a16="http://schemas.microsoft.com/office/drawing/2014/main" id="{23613AEB-12AD-435B-AE84-7E9D42CB0268}"/>
+              </a:ext>
+            </a:extLst>
+          </p:cNvPr>
+          <p:cNvSpPr>
+            <a:spLocks xmlns:a="http://schemas.openxmlformats.org/drawingml/2006/main" noGrp="1"/>
+          </p:cNvSpPr>
+          <p:nvPr/>
+        </p:nvSpPr>
+        <p:spPr>
+          <a:xfrm xmlns:a="http://schemas.openxmlformats.org/drawingml/2006/main">
+            <a:off x="2190750" y="2714625"/>
+            <a:ext cx="7810500" cy="590550"/>
+          </a:xfrm>
+          <a:prstGeom xmlns:a="http://schemas.openxmlformats.org/drawingml/2006/main" prst="rect">
+            <a:avLst/>
+          </a:prstGeom>
+          <a:noFill xmlns:a="http://schemas.openxmlformats.org/drawingml/2006/main"/>
+          <a:ln xmlns:a="http://schemas.openxmlformats.org/drawingml/2006/main" w="0">
+            <a:noFill/>
+            <a:prstDash val="solid"/>
+          </a:ln>
+        </p:spPr>
+        <p:txBody>
+          <a:bodyPr xmlns:a="http://schemas.openxmlformats.org/drawingml/2006/main"/>
+          <a:lstStyle xmlns:a="http://schemas.openxmlformats.org/drawingml/2006/main"/>
+          <a:p xmlns:a="http://schemas.openxmlformats.org/drawingml/2006/main">
+            <a:pPr algn="ctr">
+              <a:buNone/>
+              <a:defRPr sz="2850" b="1">
+                <a:solidFill>
+                  <a:srgbClr val="FFFFFF"/>
+                </a:solidFill>
+              </a:defRPr>
+            </a:pPr>
+            <a:r>
+              <a:rPr sz="2850" b="1">
+                <a:solidFill>
+                  <a:srgbClr val="FFFFFF"/>
+                </a:solidFill>
+              </a:rPr>
+              <a:t>try → int(input()) → except ValueError</a:t>
             </a:r>
           </a:p>
         </p:txBody>
@@ -2916,207 +2981,19 @@
           <p:cNvPr id="7" name="">
             <a:extLst xmlns:a="http://schemas.openxmlformats.org/drawingml/2006/main">
               <a:ext uri="{FF2B5EF4-FFF2-40B4-BE49-F238E27FC236}">
-                <a16:creationId xmlns:a16="http://schemas.microsoft.com/office/drawing/2014/main" id="{1FBBDD78-2C27-45D5-AB13-F850AF2B0407}"/>
-              </a:ext>
-            </a:extLst>
-          </p:cNvPr>
-          <p:cNvSpPr>
-            <a:spLocks xmlns:a="http://schemas.openxmlformats.org/drawingml/2006/main" noGrp="1"/>
-          </p:cNvSpPr>
-          <p:nvPr/>
-        </p:nvSpPr>
-        <p:spPr>
-          <a:xfrm xmlns:a="http://schemas.openxmlformats.org/drawingml/2006/main">
-            <a:off x="1333500" y="3143250"/>
-            <a:ext cx="4000500" cy="876300"/>
-          </a:xfrm>
-          <a:prstGeom xmlns:a="http://schemas.openxmlformats.org/drawingml/2006/main" prst="rect">
-            <a:avLst/>
-          </a:prstGeom>
-          <a:noFill xmlns:a="http://schemas.openxmlformats.org/drawingml/2006/main"/>
-          <a:ln xmlns:a="http://schemas.openxmlformats.org/drawingml/2006/main" w="0">
-            <a:noFill/>
-            <a:prstDash val="solid"/>
-          </a:ln>
-        </p:spPr>
-        <p:txBody>
-          <a:bodyPr xmlns:a="http://schemas.openxmlformats.org/drawingml/2006/main"/>
-          <a:lstStyle xmlns:a="http://schemas.openxmlformats.org/drawingml/2006/main"/>
-          <a:p xmlns:a="http://schemas.openxmlformats.org/drawingml/2006/main">
-            <a:pPr algn="l">
-              <a:buNone/>
-              <a:defRPr sz="1875" b="0">
-                <a:solidFill>
-                  <a:srgbClr val="15202B"/>
-                </a:solidFill>
-              </a:defRPr>
-            </a:pPr>
-            <a:r>
-              <a:rPr sz="1875" b="0">
-                <a:solidFill>
-                  <a:srgbClr val="15202B"/>
-                </a:solidFill>
-              </a:rPr>
-              <a:t>try / except 處理無法轉成整數</a:t>
-            </a:r>
-          </a:p>
-        </p:txBody>
-      </p:sp>
-      <p:sp>
-        <p:nvSpPr>
-          <p:cNvPr id="8" name="">
-            <a:extLst xmlns:a="http://schemas.openxmlformats.org/drawingml/2006/main">
-              <a:ext uri="{FF2B5EF4-FFF2-40B4-BE49-F238E27FC236}">
-                <a16:creationId xmlns:a16="http://schemas.microsoft.com/office/drawing/2014/main" id="{A6DD0F98-6A17-4B8B-8A96-42CFD35E785F}"/>
-              </a:ext>
-            </a:extLst>
-          </p:cNvPr>
-          <p:cNvSpPr>
-            <a:spLocks xmlns:a="http://schemas.openxmlformats.org/drawingml/2006/main" noGrp="1"/>
-          </p:cNvSpPr>
-          <p:nvPr/>
-        </p:nvSpPr>
-        <p:spPr>
-          <a:xfrm xmlns:a="http://schemas.openxmlformats.org/drawingml/2006/main">
-            <a:off x="6477000" y="2000250"/>
-            <a:ext cx="4762500" cy="2762250"/>
-          </a:xfrm>
-          <a:prstGeom xmlns:a="http://schemas.openxmlformats.org/drawingml/2006/main" prst="roundRect">
-            <a:avLst>
-              <a:gd name="adj" fmla="val 5517"/>
-            </a:avLst>
-          </a:prstGeom>
-          <a:solidFill xmlns:a="http://schemas.openxmlformats.org/drawingml/2006/main">
-            <a:srgbClr val="FFFFFF"/>
-          </a:solidFill>
-          <a:ln xmlns:a="http://schemas.openxmlformats.org/drawingml/2006/main" w="9525">
-            <a:solidFill>
-              <a:srgbClr val="D5DEE5"/>
-            </a:solidFill>
-            <a:prstDash val="solid"/>
-          </a:ln>
-        </p:spPr>
-      </p:sp>
-      <p:sp>
-        <p:nvSpPr>
-          <p:cNvPr id="9" name="">
-            <a:extLst xmlns:a="http://schemas.openxmlformats.org/drawingml/2006/main">
-              <a:ext uri="{FF2B5EF4-FFF2-40B4-BE49-F238E27FC236}">
-                <a16:creationId xmlns:a16="http://schemas.microsoft.com/office/drawing/2014/main" id="{6EB1593D-1635-4E5D-A3C7-5FEF6E82C1B0}"/>
-              </a:ext>
-            </a:extLst>
-          </p:cNvPr>
-          <p:cNvSpPr>
-            <a:spLocks xmlns:a="http://schemas.openxmlformats.org/drawingml/2006/main" noGrp="1"/>
-          </p:cNvSpPr>
-          <p:nvPr/>
-        </p:nvSpPr>
-        <p:spPr>
-          <a:xfrm xmlns:a="http://schemas.openxmlformats.org/drawingml/2006/main">
-            <a:off x="6858000" y="2381250"/>
-            <a:ext cx="4000500" cy="457200"/>
-          </a:xfrm>
-          <a:prstGeom xmlns:a="http://schemas.openxmlformats.org/drawingml/2006/main" prst="rect">
-            <a:avLst/>
-          </a:prstGeom>
-          <a:noFill xmlns:a="http://schemas.openxmlformats.org/drawingml/2006/main"/>
-          <a:ln xmlns:a="http://schemas.openxmlformats.org/drawingml/2006/main" w="0">
-            <a:noFill/>
-            <a:prstDash val="solid"/>
-          </a:ln>
-        </p:spPr>
-        <p:txBody>
-          <a:bodyPr xmlns:a="http://schemas.openxmlformats.org/drawingml/2006/main"/>
-          <a:lstStyle xmlns:a="http://schemas.openxmlformats.org/drawingml/2006/main"/>
-          <a:p xmlns:a="http://schemas.openxmlformats.org/drawingml/2006/main">
-            <a:pPr algn="l">
-              <a:buNone/>
-              <a:defRPr sz="2400" b="1">
-                <a:solidFill>
-                  <a:srgbClr val="0B2239"/>
-                </a:solidFill>
-              </a:defRPr>
-            </a:pPr>
-            <a:r>
-              <a:rPr sz="2400" b="1">
-                <a:solidFill>
-                  <a:srgbClr val="0B2239"/>
-                </a:solidFill>
-              </a:rPr>
-              <a:t>範圍</a:t>
-            </a:r>
-          </a:p>
-        </p:txBody>
-      </p:sp>
-      <p:sp>
-        <p:nvSpPr>
-          <p:cNvPr id="10" name="">
-            <a:extLst xmlns:a="http://schemas.openxmlformats.org/drawingml/2006/main">
-              <a:ext uri="{FF2B5EF4-FFF2-40B4-BE49-F238E27FC236}">
-                <a16:creationId xmlns:a16="http://schemas.microsoft.com/office/drawing/2014/main" id="{78B454FA-3372-4723-84EB-176C0F5937CA}"/>
-              </a:ext>
-            </a:extLst>
-          </p:cNvPr>
-          <p:cNvSpPr>
-            <a:spLocks xmlns:a="http://schemas.openxmlformats.org/drawingml/2006/main" noGrp="1"/>
-          </p:cNvSpPr>
-          <p:nvPr/>
-        </p:nvSpPr>
-        <p:spPr>
-          <a:xfrm xmlns:a="http://schemas.openxmlformats.org/drawingml/2006/main">
-            <a:off x="6858000" y="3143250"/>
-            <a:ext cx="4000500" cy="876300"/>
-          </a:xfrm>
-          <a:prstGeom xmlns:a="http://schemas.openxmlformats.org/drawingml/2006/main" prst="rect">
-            <a:avLst/>
-          </a:prstGeom>
-          <a:noFill xmlns:a="http://schemas.openxmlformats.org/drawingml/2006/main"/>
-          <a:ln xmlns:a="http://schemas.openxmlformats.org/drawingml/2006/main" w="0">
-            <a:noFill/>
-            <a:prstDash val="solid"/>
-          </a:ln>
-        </p:spPr>
-        <p:txBody>
-          <a:bodyPr xmlns:a="http://schemas.openxmlformats.org/drawingml/2006/main"/>
-          <a:lstStyle xmlns:a="http://schemas.openxmlformats.org/drawingml/2006/main"/>
-          <a:p xmlns:a="http://schemas.openxmlformats.org/drawingml/2006/main">
-            <a:pPr algn="l">
-              <a:buNone/>
-              <a:defRPr sz="1875" b="0">
-                <a:solidFill>
-                  <a:srgbClr val="15202B"/>
-                </a:solidFill>
-              </a:defRPr>
-            </a:pPr>
-            <a:r>
-              <a:rPr sz="1875" b="0">
-                <a:solidFill>
-                  <a:srgbClr val="15202B"/>
-                </a:solidFill>
-              </a:rPr>
-              <a:t>0 &lt;= score &lt;= 100 才接受</a:t>
-            </a:r>
-          </a:p>
-        </p:txBody>
-      </p:sp>
-      <p:sp>
-        <p:nvSpPr>
-          <p:cNvPr id="11" name="">
-            <a:extLst xmlns:a="http://schemas.openxmlformats.org/drawingml/2006/main">
-              <a:ext uri="{FF2B5EF4-FFF2-40B4-BE49-F238E27FC236}">
-                <a16:creationId xmlns:a16="http://schemas.microsoft.com/office/drawing/2014/main" id="{58284F44-D155-44C7-8C06-042BD2D93910}"/>
-              </a:ext>
-            </a:extLst>
-          </p:cNvPr>
-          <p:cNvSpPr>
-            <a:spLocks xmlns:a="http://schemas.openxmlformats.org/drawingml/2006/main" noGrp="1"/>
-          </p:cNvSpPr>
-          <p:nvPr/>
-        </p:nvSpPr>
-        <p:spPr>
-          <a:xfrm xmlns:a="http://schemas.openxmlformats.org/drawingml/2006/main">
-            <a:off x="4381500" y="5286375"/>
-            <a:ext cx="3429000" cy="361950"/>
+                <a16:creationId xmlns:a16="http://schemas.microsoft.com/office/drawing/2014/main" id="{C73AD7C5-BA28-4AA0-8662-E48330CEBD0C}"/>
+              </a:ext>
+            </a:extLst>
+          </p:cNvPr>
+          <p:cNvSpPr>
+            <a:spLocks xmlns:a="http://schemas.openxmlformats.org/drawingml/2006/main" noGrp="1"/>
+          </p:cNvSpPr>
+          <p:nvPr/>
+        </p:nvSpPr>
+        <p:spPr>
+          <a:xfrm xmlns:a="http://schemas.openxmlformats.org/drawingml/2006/main">
+            <a:off x="2190750" y="3571875"/>
+            <a:ext cx="7810500" cy="342900"/>
           </a:xfrm>
           <a:prstGeom xmlns:a="http://schemas.openxmlformats.org/drawingml/2006/main" prst="rect">
             <a:avLst/>
@@ -3133,19 +3010,19 @@
           <a:p xmlns:a="http://schemas.openxmlformats.org/drawingml/2006/main">
             <a:pPr algn="ctr">
               <a:buNone/>
-              <a:defRPr sz="1650" b="1">
-                <a:solidFill>
-                  <a:srgbClr val="1F9AA5"/>
-                </a:solidFill>
-              </a:defRPr>
-            </a:pPr>
-            <a:r>
-              <a:rPr sz="1650" b="1">
-                <a:solidFill>
-                  <a:srgbClr val="1F9AA5"/>
-                </a:solidFill>
-              </a:rPr>
-              <a:t>兩關都通過後才 break</a:t>
+              <a:defRPr sz="1650" b="0">
+                <a:solidFill>
+                  <a:srgbClr val="84D6D9"/>
+                </a:solidFill>
+              </a:defRPr>
+            </a:pPr>
+            <a:r>
+              <a:rPr sz="1650" b="0">
+                <a:solidFill>
+                  <a:srgbClr val="84D6D9"/>
+                </a:solidFill>
+              </a:rPr>
+              <a:t>輸入整數後再檢查合理範圍</a:t>
             </a:r>
           </a:p>
         </p:txBody>
@@ -3153,7 +3030,7 @@
     </p:spTree>
     <p:extLst>
       <p:ext uri="{BB962C8B-B14F-4D97-AF65-F5344CB8AC3E}">
-        <p14:creationId xmlns:p14="http://schemas.microsoft.com/office/powerpoint/2010/main" val="944044043"/>
+        <p14:creationId xmlns:p14="http://schemas.microsoft.com/office/powerpoint/2010/main" val="1667864155"/>
       </p:ext>
     </p:extLst>
   </p:cSld>
@@ -3181,10 +3058,10 @@
       </p:grpSpPr>
       <p:sp>
         <p:nvSpPr>
-          <p:cNvPr id="10" name="">
-            <a:extLst xmlns:a="http://schemas.openxmlformats.org/drawingml/2006/main">
-              <a:ext uri="{FF2B5EF4-FFF2-40B4-BE49-F238E27FC236}">
-                <a16:creationId xmlns:a16="http://schemas.microsoft.com/office/drawing/2014/main" id="{50F95076-F1DD-46C9-AFA6-4615A94B7B35}"/>
+          <p:cNvPr id="12" name="">
+            <a:extLst xmlns:a="http://schemas.openxmlformats.org/drawingml/2006/main">
+              <a:ext uri="{FF2B5EF4-FFF2-40B4-BE49-F238E27FC236}">
+                <a16:creationId xmlns:a16="http://schemas.microsoft.com/office/drawing/2014/main" id="{4B4AE87D-3233-4225-B198-B362DB324177}"/>
               </a:ext>
             </a:extLst>
           </p:cNvPr>
@@ -3215,7 +3092,7 @@
           <p:cNvPr id="2" name="">
             <a:extLst xmlns:a="http://schemas.openxmlformats.org/drawingml/2006/main">
               <a:ext uri="{FF2B5EF4-FFF2-40B4-BE49-F238E27FC236}">
-                <a16:creationId xmlns:a16="http://schemas.microsoft.com/office/drawing/2014/main" id="{BA613601-2D42-42AA-AFD8-5737E4D980A9}"/>
+                <a16:creationId xmlns:a16="http://schemas.microsoft.com/office/drawing/2014/main" id="{F73EA08E-D439-4CC2-BECE-590464CDF14A}"/>
               </a:ext>
             </a:extLst>
           </p:cNvPr>
@@ -3256,7 +3133,7 @@
                   <a:srgbClr val="1F9AA5"/>
                 </a:solidFill>
               </a:rPr>
-              <a:t>選單迴圈</a:t>
+              <a:t>雙重驗證</a:t>
             </a:r>
           </a:p>
         </p:txBody>
@@ -3266,7 +3143,7 @@
           <p:cNvPr id="3" name="">
             <a:extLst xmlns:a="http://schemas.openxmlformats.org/drawingml/2006/main">
               <a:ext uri="{FF2B5EF4-FFF2-40B4-BE49-F238E27FC236}">
-                <a16:creationId xmlns:a16="http://schemas.microsoft.com/office/drawing/2014/main" id="{DC8E39A3-56B4-4DFE-B8A7-2EFDA42D2D4A}"/>
+                <a16:creationId xmlns:a16="http://schemas.microsoft.com/office/drawing/2014/main" id="{9A14A75B-ED97-4B55-A2C0-F1554F316F2E}"/>
               </a:ext>
             </a:extLst>
           </p:cNvPr>
@@ -3307,7 +3184,7 @@
                   <a:srgbClr val="0B2239"/>
                 </a:solidFill>
               </a:rPr>
-              <a:t>顯示選項、執行功能、直到離開</a:t>
+              <a:t>先確認是數字，再確認範圍</a:t>
             </a:r>
           </a:p>
         </p:txBody>
@@ -3317,7 +3194,7 @@
           <p:cNvPr id="4" name="">
             <a:extLst xmlns:a="http://schemas.openxmlformats.org/drawingml/2006/main">
               <a:ext uri="{FF2B5EF4-FFF2-40B4-BE49-F238E27FC236}">
-                <a16:creationId xmlns:a16="http://schemas.microsoft.com/office/drawing/2014/main" id="{D8410DF5-AD97-4675-9A48-97A4A27714F5}"/>
+                <a16:creationId xmlns:a16="http://schemas.microsoft.com/office/drawing/2014/main" id="{2A306BA7-9909-42E5-A5AE-EAA93C5BDA24}"/>
               </a:ext>
             </a:extLst>
           </p:cNvPr>
@@ -3368,30 +3245,32 @@
           <p:cNvPr id="5" name="">
             <a:extLst xmlns:a="http://schemas.openxmlformats.org/drawingml/2006/main">
               <a:ext uri="{FF2B5EF4-FFF2-40B4-BE49-F238E27FC236}">
-                <a16:creationId xmlns:a16="http://schemas.microsoft.com/office/drawing/2014/main" id="{20B027BA-CEE8-46D7-A57E-0E38ABAFE562}"/>
-              </a:ext>
-            </a:extLst>
-          </p:cNvPr>
-          <p:cNvSpPr>
-            <a:spLocks xmlns:a="http://schemas.openxmlformats.org/drawingml/2006/main" noGrp="1"/>
-          </p:cNvSpPr>
-          <p:nvPr/>
-        </p:nvSpPr>
-        <p:spPr>
-          <a:xfrm xmlns:a="http://schemas.openxmlformats.org/drawingml/2006/main">
-            <a:off x="2095500" y="2190750"/>
-            <a:ext cx="8001000" cy="1905000"/>
+                <a16:creationId xmlns:a16="http://schemas.microsoft.com/office/drawing/2014/main" id="{27DA2008-4B94-4427-9436-E82974E54676}"/>
+              </a:ext>
+            </a:extLst>
+          </p:cNvPr>
+          <p:cNvSpPr>
+            <a:spLocks xmlns:a="http://schemas.openxmlformats.org/drawingml/2006/main" noGrp="1"/>
+          </p:cNvSpPr>
+          <p:nvPr/>
+        </p:nvSpPr>
+        <p:spPr>
+          <a:xfrm xmlns:a="http://schemas.openxmlformats.org/drawingml/2006/main">
+            <a:off x="952500" y="2000250"/>
+            <a:ext cx="4762500" cy="2762250"/>
           </a:xfrm>
           <a:prstGeom xmlns:a="http://schemas.openxmlformats.org/drawingml/2006/main" prst="roundRect">
             <a:avLst>
-              <a:gd name="adj" fmla="val 8000"/>
+              <a:gd name="adj" fmla="val 5517"/>
             </a:avLst>
           </a:prstGeom>
           <a:solidFill xmlns:a="http://schemas.openxmlformats.org/drawingml/2006/main">
-            <a:srgbClr val="0B2239"/>
+            <a:srgbClr val="FFFFFF"/>
           </a:solidFill>
-          <a:ln xmlns:a="http://schemas.openxmlformats.org/drawingml/2006/main" w="0">
-            <a:noFill/>
+          <a:ln xmlns:a="http://schemas.openxmlformats.org/drawingml/2006/main" w="9525">
+            <a:solidFill>
+              <a:srgbClr val="D5DEE5"/>
+            </a:solidFill>
             <a:prstDash val="solid"/>
           </a:ln>
         </p:spPr>
@@ -3401,19 +3280,258 @@
           <p:cNvPr id="6" name="">
             <a:extLst xmlns:a="http://schemas.openxmlformats.org/drawingml/2006/main">
               <a:ext uri="{FF2B5EF4-FFF2-40B4-BE49-F238E27FC236}">
-                <a16:creationId xmlns:a16="http://schemas.microsoft.com/office/drawing/2014/main" id="{780C91DC-A97B-4734-A642-3543B7955C75}"/>
-              </a:ext>
-            </a:extLst>
-          </p:cNvPr>
-          <p:cNvSpPr>
-            <a:spLocks xmlns:a="http://schemas.openxmlformats.org/drawingml/2006/main" noGrp="1"/>
-          </p:cNvSpPr>
-          <p:nvPr/>
-        </p:nvSpPr>
-        <p:spPr>
-          <a:xfrm xmlns:a="http://schemas.openxmlformats.org/drawingml/2006/main">
-            <a:off x="2905125" y="2714625"/>
-            <a:ext cx="2000250" cy="666750"/>
+                <a16:creationId xmlns:a16="http://schemas.microsoft.com/office/drawing/2014/main" id="{2367DD3A-F515-423B-B647-FAC17BE51A18}"/>
+              </a:ext>
+            </a:extLst>
+          </p:cNvPr>
+          <p:cNvSpPr>
+            <a:spLocks xmlns:a="http://schemas.openxmlformats.org/drawingml/2006/main" noGrp="1"/>
+          </p:cNvSpPr>
+          <p:nvPr/>
+        </p:nvSpPr>
+        <p:spPr>
+          <a:xfrm xmlns:a="http://schemas.openxmlformats.org/drawingml/2006/main">
+            <a:off x="1333500" y="2381250"/>
+            <a:ext cx="4000500" cy="457200"/>
+          </a:xfrm>
+          <a:prstGeom xmlns:a="http://schemas.openxmlformats.org/drawingml/2006/main" prst="rect">
+            <a:avLst/>
+          </a:prstGeom>
+          <a:noFill xmlns:a="http://schemas.openxmlformats.org/drawingml/2006/main"/>
+          <a:ln xmlns:a="http://schemas.openxmlformats.org/drawingml/2006/main" w="0">
+            <a:noFill/>
+            <a:prstDash val="solid"/>
+          </a:ln>
+        </p:spPr>
+        <p:txBody>
+          <a:bodyPr xmlns:a="http://schemas.openxmlformats.org/drawingml/2006/main"/>
+          <a:lstStyle xmlns:a="http://schemas.openxmlformats.org/drawingml/2006/main"/>
+          <a:p xmlns:a="http://schemas.openxmlformats.org/drawingml/2006/main">
+            <a:pPr algn="l">
+              <a:buNone/>
+              <a:defRPr sz="2400" b="1">
+                <a:solidFill>
+                  <a:srgbClr val="0B2239"/>
+                </a:solidFill>
+              </a:defRPr>
+            </a:pPr>
+            <a:r>
+              <a:rPr sz="2400" b="1">
+                <a:solidFill>
+                  <a:srgbClr val="0B2239"/>
+                </a:solidFill>
+              </a:rPr>
+              <a:t>格式</a:t>
+            </a:r>
+          </a:p>
+        </p:txBody>
+      </p:sp>
+      <p:sp>
+        <p:nvSpPr>
+          <p:cNvPr id="7" name="">
+            <a:extLst xmlns:a="http://schemas.openxmlformats.org/drawingml/2006/main">
+              <a:ext uri="{FF2B5EF4-FFF2-40B4-BE49-F238E27FC236}">
+                <a16:creationId xmlns:a16="http://schemas.microsoft.com/office/drawing/2014/main" id="{1FBBDD78-2C27-45D5-AB13-F850AF2B0407}"/>
+              </a:ext>
+            </a:extLst>
+          </p:cNvPr>
+          <p:cNvSpPr>
+            <a:spLocks xmlns:a="http://schemas.openxmlformats.org/drawingml/2006/main" noGrp="1"/>
+          </p:cNvSpPr>
+          <p:nvPr/>
+        </p:nvSpPr>
+        <p:spPr>
+          <a:xfrm xmlns:a="http://schemas.openxmlformats.org/drawingml/2006/main">
+            <a:off x="1333500" y="3143250"/>
+            <a:ext cx="4000500" cy="876300"/>
+          </a:xfrm>
+          <a:prstGeom xmlns:a="http://schemas.openxmlformats.org/drawingml/2006/main" prst="rect">
+            <a:avLst/>
+          </a:prstGeom>
+          <a:noFill xmlns:a="http://schemas.openxmlformats.org/drawingml/2006/main"/>
+          <a:ln xmlns:a="http://schemas.openxmlformats.org/drawingml/2006/main" w="0">
+            <a:noFill/>
+            <a:prstDash val="solid"/>
+          </a:ln>
+        </p:spPr>
+        <p:txBody>
+          <a:bodyPr xmlns:a="http://schemas.openxmlformats.org/drawingml/2006/main"/>
+          <a:lstStyle xmlns:a="http://schemas.openxmlformats.org/drawingml/2006/main"/>
+          <a:p xmlns:a="http://schemas.openxmlformats.org/drawingml/2006/main">
+            <a:pPr algn="l">
+              <a:buNone/>
+              <a:defRPr sz="1875" b="0">
+                <a:solidFill>
+                  <a:srgbClr val="15202B"/>
+                </a:solidFill>
+              </a:defRPr>
+            </a:pPr>
+            <a:r>
+              <a:rPr sz="1875" b="0">
+                <a:solidFill>
+                  <a:srgbClr val="15202B"/>
+                </a:solidFill>
+              </a:rPr>
+              <a:t>try / except 處理無法轉成整數</a:t>
+            </a:r>
+          </a:p>
+        </p:txBody>
+      </p:sp>
+      <p:sp>
+        <p:nvSpPr>
+          <p:cNvPr id="8" name="">
+            <a:extLst xmlns:a="http://schemas.openxmlformats.org/drawingml/2006/main">
+              <a:ext uri="{FF2B5EF4-FFF2-40B4-BE49-F238E27FC236}">
+                <a16:creationId xmlns:a16="http://schemas.microsoft.com/office/drawing/2014/main" id="{A6DD0F98-6A17-4B8B-8A96-42CFD35E785F}"/>
+              </a:ext>
+            </a:extLst>
+          </p:cNvPr>
+          <p:cNvSpPr>
+            <a:spLocks xmlns:a="http://schemas.openxmlformats.org/drawingml/2006/main" noGrp="1"/>
+          </p:cNvSpPr>
+          <p:nvPr/>
+        </p:nvSpPr>
+        <p:spPr>
+          <a:xfrm xmlns:a="http://schemas.openxmlformats.org/drawingml/2006/main">
+            <a:off x="6477000" y="2000250"/>
+            <a:ext cx="4762500" cy="2762250"/>
+          </a:xfrm>
+          <a:prstGeom xmlns:a="http://schemas.openxmlformats.org/drawingml/2006/main" prst="roundRect">
+            <a:avLst>
+              <a:gd name="adj" fmla="val 5517"/>
+            </a:avLst>
+          </a:prstGeom>
+          <a:solidFill xmlns:a="http://schemas.openxmlformats.org/drawingml/2006/main">
+            <a:srgbClr val="FFFFFF"/>
+          </a:solidFill>
+          <a:ln xmlns:a="http://schemas.openxmlformats.org/drawingml/2006/main" w="9525">
+            <a:solidFill>
+              <a:srgbClr val="D5DEE5"/>
+            </a:solidFill>
+            <a:prstDash val="solid"/>
+          </a:ln>
+        </p:spPr>
+      </p:sp>
+      <p:sp>
+        <p:nvSpPr>
+          <p:cNvPr id="9" name="">
+            <a:extLst xmlns:a="http://schemas.openxmlformats.org/drawingml/2006/main">
+              <a:ext uri="{FF2B5EF4-FFF2-40B4-BE49-F238E27FC236}">
+                <a16:creationId xmlns:a16="http://schemas.microsoft.com/office/drawing/2014/main" id="{6EB1593D-1635-4E5D-A3C7-5FEF6E82C1B0}"/>
+              </a:ext>
+            </a:extLst>
+          </p:cNvPr>
+          <p:cNvSpPr>
+            <a:spLocks xmlns:a="http://schemas.openxmlformats.org/drawingml/2006/main" noGrp="1"/>
+          </p:cNvSpPr>
+          <p:nvPr/>
+        </p:nvSpPr>
+        <p:spPr>
+          <a:xfrm xmlns:a="http://schemas.openxmlformats.org/drawingml/2006/main">
+            <a:off x="6858000" y="2381250"/>
+            <a:ext cx="4000500" cy="457200"/>
+          </a:xfrm>
+          <a:prstGeom xmlns:a="http://schemas.openxmlformats.org/drawingml/2006/main" prst="rect">
+            <a:avLst/>
+          </a:prstGeom>
+          <a:noFill xmlns:a="http://schemas.openxmlformats.org/drawingml/2006/main"/>
+          <a:ln xmlns:a="http://schemas.openxmlformats.org/drawingml/2006/main" w="0">
+            <a:noFill/>
+            <a:prstDash val="solid"/>
+          </a:ln>
+        </p:spPr>
+        <p:txBody>
+          <a:bodyPr xmlns:a="http://schemas.openxmlformats.org/drawingml/2006/main"/>
+          <a:lstStyle xmlns:a="http://schemas.openxmlformats.org/drawingml/2006/main"/>
+          <a:p xmlns:a="http://schemas.openxmlformats.org/drawingml/2006/main">
+            <a:pPr algn="l">
+              <a:buNone/>
+              <a:defRPr sz="2400" b="1">
+                <a:solidFill>
+                  <a:srgbClr val="0B2239"/>
+                </a:solidFill>
+              </a:defRPr>
+            </a:pPr>
+            <a:r>
+              <a:rPr sz="2400" b="1">
+                <a:solidFill>
+                  <a:srgbClr val="0B2239"/>
+                </a:solidFill>
+              </a:rPr>
+              <a:t>範圍</a:t>
+            </a:r>
+          </a:p>
+        </p:txBody>
+      </p:sp>
+      <p:sp>
+        <p:nvSpPr>
+          <p:cNvPr id="10" name="">
+            <a:extLst xmlns:a="http://schemas.openxmlformats.org/drawingml/2006/main">
+              <a:ext uri="{FF2B5EF4-FFF2-40B4-BE49-F238E27FC236}">
+                <a16:creationId xmlns:a16="http://schemas.microsoft.com/office/drawing/2014/main" id="{78B454FA-3372-4723-84EB-176C0F5937CA}"/>
+              </a:ext>
+            </a:extLst>
+          </p:cNvPr>
+          <p:cNvSpPr>
+            <a:spLocks xmlns:a="http://schemas.openxmlformats.org/drawingml/2006/main" noGrp="1"/>
+          </p:cNvSpPr>
+          <p:nvPr/>
+        </p:nvSpPr>
+        <p:spPr>
+          <a:xfrm xmlns:a="http://schemas.openxmlformats.org/drawingml/2006/main">
+            <a:off x="6858000" y="3143250"/>
+            <a:ext cx="4000500" cy="876300"/>
+          </a:xfrm>
+          <a:prstGeom xmlns:a="http://schemas.openxmlformats.org/drawingml/2006/main" prst="rect">
+            <a:avLst/>
+          </a:prstGeom>
+          <a:noFill xmlns:a="http://schemas.openxmlformats.org/drawingml/2006/main"/>
+          <a:ln xmlns:a="http://schemas.openxmlformats.org/drawingml/2006/main" w="0">
+            <a:noFill/>
+            <a:prstDash val="solid"/>
+          </a:ln>
+        </p:spPr>
+        <p:txBody>
+          <a:bodyPr xmlns:a="http://schemas.openxmlformats.org/drawingml/2006/main"/>
+          <a:lstStyle xmlns:a="http://schemas.openxmlformats.org/drawingml/2006/main"/>
+          <a:p xmlns:a="http://schemas.openxmlformats.org/drawingml/2006/main">
+            <a:pPr algn="l">
+              <a:buNone/>
+              <a:defRPr sz="1875" b="0">
+                <a:solidFill>
+                  <a:srgbClr val="15202B"/>
+                </a:solidFill>
+              </a:defRPr>
+            </a:pPr>
+            <a:r>
+              <a:rPr sz="1875" b="0">
+                <a:solidFill>
+                  <a:srgbClr val="15202B"/>
+                </a:solidFill>
+              </a:rPr>
+              <a:t>0 &lt;= score &lt;= 100 才接受</a:t>
+            </a:r>
+          </a:p>
+        </p:txBody>
+      </p:sp>
+      <p:sp>
+        <p:nvSpPr>
+          <p:cNvPr id="11" name="">
+            <a:extLst xmlns:a="http://schemas.openxmlformats.org/drawingml/2006/main">
+              <a:ext uri="{FF2B5EF4-FFF2-40B4-BE49-F238E27FC236}">
+                <a16:creationId xmlns:a16="http://schemas.microsoft.com/office/drawing/2014/main" id="{58284F44-D155-44C7-8C06-042BD2D93910}"/>
+              </a:ext>
+            </a:extLst>
+          </p:cNvPr>
+          <p:cNvSpPr>
+            <a:spLocks xmlns:a="http://schemas.openxmlformats.org/drawingml/2006/main" noGrp="1"/>
+          </p:cNvSpPr>
+          <p:nvPr/>
+        </p:nvSpPr>
+        <p:spPr>
+          <a:xfrm xmlns:a="http://schemas.openxmlformats.org/drawingml/2006/main">
+            <a:off x="4381500" y="5286375"/>
+            <a:ext cx="3429000" cy="361950"/>
           </a:xfrm>
           <a:prstGeom xmlns:a="http://schemas.openxmlformats.org/drawingml/2006/main" prst="rect">
             <a:avLst/>
@@ -3430,172 +3548,19 @@
           <a:p xmlns:a="http://schemas.openxmlformats.org/drawingml/2006/main">
             <a:pPr algn="ctr">
               <a:buNone/>
-              <a:defRPr sz="3150" b="1">
-                <a:solidFill>
-                  <a:srgbClr val="FFFFFF"/>
-                </a:solidFill>
-              </a:defRPr>
-            </a:pPr>
-            <a:r>
-              <a:rPr sz="3150" b="1">
-                <a:solidFill>
-                  <a:srgbClr val="FFFFFF"/>
-                </a:solidFill>
-              </a:rPr>
-              <a:t>顯示選單</a:t>
-            </a:r>
-          </a:p>
-        </p:txBody>
-      </p:sp>
-      <p:sp>
-        <p:nvSpPr>
-          <p:cNvPr id="7" name="">
-            <a:extLst xmlns:a="http://schemas.openxmlformats.org/drawingml/2006/main">
-              <a:ext uri="{FF2B5EF4-FFF2-40B4-BE49-F238E27FC236}">
-                <a16:creationId xmlns:a16="http://schemas.microsoft.com/office/drawing/2014/main" id="{30526C36-1247-47F3-89D7-203FB6444014}"/>
-              </a:ext>
-            </a:extLst>
-          </p:cNvPr>
-          <p:cNvSpPr>
-            <a:spLocks xmlns:a="http://schemas.openxmlformats.org/drawingml/2006/main" noGrp="1"/>
-          </p:cNvSpPr>
-          <p:nvPr/>
-        </p:nvSpPr>
-        <p:spPr>
-          <a:xfrm xmlns:a="http://schemas.openxmlformats.org/drawingml/2006/main">
-            <a:off x="5095875" y="2714625"/>
-            <a:ext cx="762000" cy="666750"/>
-          </a:xfrm>
-          <a:prstGeom xmlns:a="http://schemas.openxmlformats.org/drawingml/2006/main" prst="rect">
-            <a:avLst/>
-          </a:prstGeom>
-          <a:noFill xmlns:a="http://schemas.openxmlformats.org/drawingml/2006/main"/>
-          <a:ln xmlns:a="http://schemas.openxmlformats.org/drawingml/2006/main" w="0">
-            <a:noFill/>
-            <a:prstDash val="solid"/>
-          </a:ln>
-        </p:spPr>
-        <p:txBody>
-          <a:bodyPr xmlns:a="http://schemas.openxmlformats.org/drawingml/2006/main"/>
-          <a:lstStyle xmlns:a="http://schemas.openxmlformats.org/drawingml/2006/main"/>
-          <a:p xmlns:a="http://schemas.openxmlformats.org/drawingml/2006/main">
-            <a:pPr algn="ctr">
-              <a:buNone/>
-              <a:defRPr sz="3150" b="1">
-                <a:solidFill>
-                  <a:srgbClr val="84D6D9"/>
-                </a:solidFill>
-              </a:defRPr>
-            </a:pPr>
-            <a:r>
-              <a:rPr sz="3150" b="1">
-                <a:solidFill>
-                  <a:srgbClr val="84D6D9"/>
-                </a:solidFill>
-              </a:rPr>
-              <a:t>→</a:t>
-            </a:r>
-          </a:p>
-        </p:txBody>
-      </p:sp>
-      <p:sp>
-        <p:nvSpPr>
-          <p:cNvPr id="8" name="">
-            <a:extLst xmlns:a="http://schemas.openxmlformats.org/drawingml/2006/main">
-              <a:ext uri="{FF2B5EF4-FFF2-40B4-BE49-F238E27FC236}">
-                <a16:creationId xmlns:a16="http://schemas.microsoft.com/office/drawing/2014/main" id="{366099EF-E226-462B-A8F5-B064109252A5}"/>
-              </a:ext>
-            </a:extLst>
-          </p:cNvPr>
-          <p:cNvSpPr>
-            <a:spLocks xmlns:a="http://schemas.openxmlformats.org/drawingml/2006/main" noGrp="1"/>
-          </p:cNvSpPr>
-          <p:nvPr/>
-        </p:nvSpPr>
-        <p:spPr>
-          <a:xfrm xmlns:a="http://schemas.openxmlformats.org/drawingml/2006/main">
-            <a:off x="6048375" y="2714625"/>
-            <a:ext cx="2857500" cy="666750"/>
-          </a:xfrm>
-          <a:prstGeom xmlns:a="http://schemas.openxmlformats.org/drawingml/2006/main" prst="rect">
-            <a:avLst/>
-          </a:prstGeom>
-          <a:noFill xmlns:a="http://schemas.openxmlformats.org/drawingml/2006/main"/>
-          <a:ln xmlns:a="http://schemas.openxmlformats.org/drawingml/2006/main" w="0">
-            <a:noFill/>
-            <a:prstDash val="solid"/>
-          </a:ln>
-        </p:spPr>
-        <p:txBody>
-          <a:bodyPr xmlns:a="http://schemas.openxmlformats.org/drawingml/2006/main"/>
-          <a:lstStyle xmlns:a="http://schemas.openxmlformats.org/drawingml/2006/main"/>
-          <a:p xmlns:a="http://schemas.openxmlformats.org/drawingml/2006/main">
-            <a:pPr algn="ctr">
-              <a:buNone/>
-              <a:defRPr sz="3150" b="1">
-                <a:solidFill>
-                  <a:srgbClr val="FFFFFF"/>
-                </a:solidFill>
-              </a:defRPr>
-            </a:pPr>
-            <a:r>
-              <a:rPr sz="3150" b="1">
-                <a:solidFill>
-                  <a:srgbClr val="FFFFFF"/>
-                </a:solidFill>
-              </a:rPr>
-              <a:t>執行功能</a:t>
-            </a:r>
-          </a:p>
-        </p:txBody>
-      </p:sp>
-      <p:sp>
-        <p:nvSpPr>
-          <p:cNvPr id="9" name="">
-            <a:extLst xmlns:a="http://schemas.openxmlformats.org/drawingml/2006/main">
-              <a:ext uri="{FF2B5EF4-FFF2-40B4-BE49-F238E27FC236}">
-                <a16:creationId xmlns:a16="http://schemas.microsoft.com/office/drawing/2014/main" id="{E1FF3FE8-E659-4DD1-9BB1-E2A1330ED154}"/>
-              </a:ext>
-            </a:extLst>
-          </p:cNvPr>
-          <p:cNvSpPr>
-            <a:spLocks xmlns:a="http://schemas.openxmlformats.org/drawingml/2006/main" noGrp="1"/>
-          </p:cNvSpPr>
-          <p:nvPr/>
-        </p:nvSpPr>
-        <p:spPr>
-          <a:xfrm xmlns:a="http://schemas.openxmlformats.org/drawingml/2006/main">
-            <a:off x="3143250" y="4667250"/>
-            <a:ext cx="5905500" cy="400050"/>
-          </a:xfrm>
-          <a:prstGeom xmlns:a="http://schemas.openxmlformats.org/drawingml/2006/main" prst="rect">
-            <a:avLst/>
-          </a:prstGeom>
-          <a:noFill xmlns:a="http://schemas.openxmlformats.org/drawingml/2006/main"/>
-          <a:ln xmlns:a="http://schemas.openxmlformats.org/drawingml/2006/main" w="0">
-            <a:noFill/>
-            <a:prstDash val="solid"/>
-          </a:ln>
-        </p:spPr>
-        <p:txBody>
-          <a:bodyPr xmlns:a="http://schemas.openxmlformats.org/drawingml/2006/main"/>
-          <a:lstStyle xmlns:a="http://schemas.openxmlformats.org/drawingml/2006/main"/>
-          <a:p xmlns:a="http://schemas.openxmlformats.org/drawingml/2006/main">
-            <a:pPr algn="ctr">
-              <a:buNone/>
-              <a:defRPr sz="1875" b="0">
-                <a:solidFill>
-                  <a:srgbClr val="536271"/>
-                </a:solidFill>
-              </a:defRPr>
-            </a:pPr>
-            <a:r>
-              <a:rPr sz="1875" b="0">
-                <a:solidFill>
-                  <a:srgbClr val="536271"/>
-                </a:solidFill>
-              </a:rPr>
-              <a:t>輸入 0 時 break，其他錯誤選項要提示。</a:t>
+              <a:defRPr sz="1650" b="1">
+                <a:solidFill>
+                  <a:srgbClr val="1F9AA5"/>
+                </a:solidFill>
+              </a:defRPr>
+            </a:pPr>
+            <a:r>
+              <a:rPr sz="1650" b="1">
+                <a:solidFill>
+                  <a:srgbClr val="1F9AA5"/>
+                </a:solidFill>
+              </a:rPr>
+              <a:t>兩關都通過後才 break</a:t>
             </a:r>
           </a:p>
         </p:txBody>
@@ -3603,7 +3568,7 @@
     </p:spTree>
     <p:extLst>
       <p:ext uri="{BB962C8B-B14F-4D97-AF65-F5344CB8AC3E}">
-        <p14:creationId xmlns:p14="http://schemas.microsoft.com/office/powerpoint/2010/main" val="369534694"/>
+        <p14:creationId xmlns:p14="http://schemas.microsoft.com/office/powerpoint/2010/main" val="944044043"/>
       </p:ext>
     </p:extLst>
   </p:cSld>
@@ -3631,10 +3596,10 @@
       </p:grpSpPr>
       <p:sp>
         <p:nvSpPr>
-          <p:cNvPr id="9" name="">
-            <a:extLst xmlns:a="http://schemas.openxmlformats.org/drawingml/2006/main">
-              <a:ext uri="{FF2B5EF4-FFF2-40B4-BE49-F238E27FC236}">
-                <a16:creationId xmlns:a16="http://schemas.microsoft.com/office/drawing/2014/main" id="{FF31E2E0-0DD6-4239-BEAD-0696C5ABA3E8}"/>
+          <p:cNvPr id="10" name="">
+            <a:extLst xmlns:a="http://schemas.openxmlformats.org/drawingml/2006/main">
+              <a:ext uri="{FF2B5EF4-FFF2-40B4-BE49-F238E27FC236}">
+                <a16:creationId xmlns:a16="http://schemas.microsoft.com/office/drawing/2014/main" id="{50F95076-F1DD-46C9-AFA6-4615A94B7B35}"/>
               </a:ext>
             </a:extLst>
           </p:cNvPr>
@@ -3665,7 +3630,7 @@
           <p:cNvPr id="2" name="">
             <a:extLst xmlns:a="http://schemas.openxmlformats.org/drawingml/2006/main">
               <a:ext uri="{FF2B5EF4-FFF2-40B4-BE49-F238E27FC236}">
-                <a16:creationId xmlns:a16="http://schemas.microsoft.com/office/drawing/2014/main" id="{1F8875F0-983B-4AB5-A23C-4493E1F6C4D9}"/>
+                <a16:creationId xmlns:a16="http://schemas.microsoft.com/office/drawing/2014/main" id="{BA613601-2D42-42AA-AFD8-5737E4D980A9}"/>
               </a:ext>
             </a:extLst>
           </p:cNvPr>
@@ -3706,7 +3671,7 @@
                   <a:srgbClr val="1F9AA5"/>
                 </a:solidFill>
               </a:rPr>
-              <a:t>程式骨架</a:t>
+              <a:t>選單迴圈</a:t>
             </a:r>
           </a:p>
         </p:txBody>
@@ -3716,7 +3681,7 @@
           <p:cNvPr id="3" name="">
             <a:extLst xmlns:a="http://schemas.openxmlformats.org/drawingml/2006/main">
               <a:ext uri="{FF2B5EF4-FFF2-40B4-BE49-F238E27FC236}">
-                <a16:creationId xmlns:a16="http://schemas.microsoft.com/office/drawing/2014/main" id="{F7E60527-114F-42DB-AC42-EC10CE02387A}"/>
+                <a16:creationId xmlns:a16="http://schemas.microsoft.com/office/drawing/2014/main" id="{DC8E39A3-56B4-4DFE-B8A7-2EFDA42D2D4A}"/>
               </a:ext>
             </a:extLst>
           </p:cNvPr>
@@ -3757,7 +3722,7 @@
                   <a:srgbClr val="0B2239"/>
                 </a:solidFill>
               </a:rPr>
-              <a:t>把選單放進 while True</a:t>
+              <a:t>顯示選項、執行功能、直到離開</a:t>
             </a:r>
           </a:p>
         </p:txBody>
@@ -3767,7 +3732,7 @@
           <p:cNvPr id="4" name="">
             <a:extLst xmlns:a="http://schemas.openxmlformats.org/drawingml/2006/main">
               <a:ext uri="{FF2B5EF4-FFF2-40B4-BE49-F238E27FC236}">
-                <a16:creationId xmlns:a16="http://schemas.microsoft.com/office/drawing/2014/main" id="{E4B55339-02C1-4B5C-969D-54677D99234C}"/>
+                <a16:creationId xmlns:a16="http://schemas.microsoft.com/office/drawing/2014/main" id="{D8410DF5-AD97-4675-9A48-97A4A27714F5}"/>
               </a:ext>
             </a:extLst>
           </p:cNvPr>
@@ -3818,27 +3783,27 @@
           <p:cNvPr id="5" name="">
             <a:extLst xmlns:a="http://schemas.openxmlformats.org/drawingml/2006/main">
               <a:ext uri="{FF2B5EF4-FFF2-40B4-BE49-F238E27FC236}">
-                <a16:creationId xmlns:a16="http://schemas.microsoft.com/office/drawing/2014/main" id="{DAAAC354-BEC1-438F-86E0-C3DCA693D590}"/>
-              </a:ext>
-            </a:extLst>
-          </p:cNvPr>
-          <p:cNvSpPr>
-            <a:spLocks xmlns:a="http://schemas.openxmlformats.org/drawingml/2006/main" noGrp="1"/>
-          </p:cNvSpPr>
-          <p:nvPr/>
-        </p:nvSpPr>
-        <p:spPr>
-          <a:xfrm xmlns:a="http://schemas.openxmlformats.org/drawingml/2006/main">
-            <a:off x="1333500" y="2095500"/>
-            <a:ext cx="9525000" cy="1619250"/>
+                <a16:creationId xmlns:a16="http://schemas.microsoft.com/office/drawing/2014/main" id="{20B027BA-CEE8-46D7-A57E-0E38ABAFE562}"/>
+              </a:ext>
+            </a:extLst>
+          </p:cNvPr>
+          <p:cNvSpPr>
+            <a:spLocks xmlns:a="http://schemas.openxmlformats.org/drawingml/2006/main" noGrp="1"/>
+          </p:cNvSpPr>
+          <p:nvPr/>
+        </p:nvSpPr>
+        <p:spPr>
+          <a:xfrm xmlns:a="http://schemas.openxmlformats.org/drawingml/2006/main">
+            <a:off x="2095500" y="2190750"/>
+            <a:ext cx="8001000" cy="1905000"/>
           </a:xfrm>
           <a:prstGeom xmlns:a="http://schemas.openxmlformats.org/drawingml/2006/main" prst="roundRect">
             <a:avLst>
-              <a:gd name="adj" fmla="val 9412"/>
+              <a:gd name="adj" fmla="val 8000"/>
             </a:avLst>
           </a:prstGeom>
           <a:solidFill xmlns:a="http://schemas.openxmlformats.org/drawingml/2006/main">
-            <a:srgbClr val="101820"/>
+            <a:srgbClr val="0B2239"/>
           </a:solidFill>
           <a:ln xmlns:a="http://schemas.openxmlformats.org/drawingml/2006/main" w="0">
             <a:noFill/>
@@ -3851,102 +3816,48 @@
           <p:cNvPr id="6" name="">
             <a:extLst xmlns:a="http://schemas.openxmlformats.org/drawingml/2006/main">
               <a:ext uri="{FF2B5EF4-FFF2-40B4-BE49-F238E27FC236}">
-                <a16:creationId xmlns:a16="http://schemas.microsoft.com/office/drawing/2014/main" id="{8ED4DCDB-91D1-44F9-9745-8A565CA77640}"/>
-              </a:ext>
-            </a:extLst>
-          </p:cNvPr>
-          <p:cNvSpPr>
-            <a:spLocks xmlns:a="http://schemas.openxmlformats.org/drawingml/2006/main" noGrp="1"/>
-          </p:cNvSpPr>
-          <p:nvPr/>
-        </p:nvSpPr>
-        <p:spPr>
-          <a:xfrm xmlns:a="http://schemas.openxmlformats.org/drawingml/2006/main">
-            <a:off x="1762125" y="2543175"/>
-            <a:ext cx="8667750" cy="628650"/>
-          </a:xfrm>
-          <a:prstGeom xmlns:a="http://schemas.openxmlformats.org/drawingml/2006/main" prst="rect">
-            <a:avLst/>
-          </a:prstGeom>
-          <a:noFill xmlns:a="http://schemas.openxmlformats.org/drawingml/2006/main"/>
-          <a:ln xmlns:a="http://schemas.openxmlformats.org/drawingml/2006/main" w="0">
-            <a:noFill/>
-            <a:prstDash val="solid"/>
-          </a:ln>
-        </p:spPr>
-        <p:txBody>
-          <a:bodyPr xmlns:a="http://schemas.openxmlformats.org/drawingml/2006/main"/>
-          <a:lstStyle xmlns:a="http://schemas.openxmlformats.org/drawingml/2006/main"/>
-          <a:p xmlns:a="http://schemas.openxmlformats.org/drawingml/2006/main">
-            <a:pPr algn="l">
-              <a:buNone/>
-              <a:defRPr sz="2850" b="1">
-                <a:solidFill>
-                  <a:srgbClr val="A8E6CF"/>
-                </a:solidFill>
-              </a:defRPr>
-            </a:pPr>
-            <a:r>
-              <a:rPr sz="2850" b="1">
-                <a:solidFill>
-                  <a:srgbClr val="A8E6CF"/>
-                </a:solidFill>
-              </a:rPr>
-              <a:t>while True:</a:t>
-            </a:r>
-          </a:p>
-          <a:p xmlns:a="http://schemas.openxmlformats.org/drawingml/2006/main">
-            <a:pPr algn="l">
-              <a:buNone/>
-              <a:defRPr sz="2850" b="1">
-                <a:solidFill>
-                  <a:srgbClr val="A8E6CF"/>
-                </a:solidFill>
-              </a:defRPr>
-            </a:pPr>
-            <a:r>
-              <a:rPr sz="2850" b="1">
-                <a:solidFill>
-                  <a:srgbClr val="A8E6CF"/>
-                </a:solidFill>
-              </a:rPr>
-              <a:t>    choice = input("1 查詢／0 離開：")</a:t>
-            </a:r>
-          </a:p>
-          <a:p xmlns:a="http://schemas.openxmlformats.org/drawingml/2006/main">
-            <a:pPr algn="l">
-              <a:buNone/>
-              <a:defRPr sz="2850" b="1">
-                <a:solidFill>
-                  <a:srgbClr val="A8E6CF"/>
-                </a:solidFill>
-              </a:defRPr>
-            </a:pPr>
-            <a:r>
-              <a:rPr sz="2850" b="1">
-                <a:solidFill>
-                  <a:srgbClr val="A8E6CF"/>
-                </a:solidFill>
-              </a:rPr>
-              <a:t>    if choice == "0":</a:t>
-            </a:r>
-          </a:p>
-          <a:p xmlns:a="http://schemas.openxmlformats.org/drawingml/2006/main">
-            <a:pPr algn="l">
-              <a:buNone/>
-              <a:defRPr sz="2850" b="1">
-                <a:solidFill>
-                  <a:srgbClr val="A8E6CF"/>
-                </a:solidFill>
-              </a:defRPr>
-            </a:pPr>
-            <a:r>
-              <a:rPr sz="2850" b="1">
-                <a:solidFill>
-                  <a:srgbClr val="A8E6CF"/>
-                </a:solidFill>
-              </a:rPr>
-              <a:t>        break</a:t>
+                <a16:creationId xmlns:a16="http://schemas.microsoft.com/office/drawing/2014/main" id="{780C91DC-A97B-4734-A642-3543B7955C75}"/>
+              </a:ext>
+            </a:extLst>
+          </p:cNvPr>
+          <p:cNvSpPr>
+            <a:spLocks xmlns:a="http://schemas.openxmlformats.org/drawingml/2006/main" noGrp="1"/>
+          </p:cNvSpPr>
+          <p:nvPr/>
+        </p:nvSpPr>
+        <p:spPr>
+          <a:xfrm xmlns:a="http://schemas.openxmlformats.org/drawingml/2006/main">
+            <a:off x="2905125" y="2714625"/>
+            <a:ext cx="2000250" cy="666750"/>
+          </a:xfrm>
+          <a:prstGeom xmlns:a="http://schemas.openxmlformats.org/drawingml/2006/main" prst="rect">
+            <a:avLst/>
+          </a:prstGeom>
+          <a:noFill xmlns:a="http://schemas.openxmlformats.org/drawingml/2006/main"/>
+          <a:ln xmlns:a="http://schemas.openxmlformats.org/drawingml/2006/main" w="0">
+            <a:noFill/>
+            <a:prstDash val="solid"/>
+          </a:ln>
+        </p:spPr>
+        <p:txBody>
+          <a:bodyPr xmlns:a="http://schemas.openxmlformats.org/drawingml/2006/main"/>
+          <a:lstStyle xmlns:a="http://schemas.openxmlformats.org/drawingml/2006/main"/>
+          <a:p xmlns:a="http://schemas.openxmlformats.org/drawingml/2006/main">
+            <a:pPr algn="ctr">
+              <a:buNone/>
+              <a:defRPr sz="3150" b="1">
+                <a:solidFill>
+                  <a:srgbClr val="FFFFFF"/>
+                </a:solidFill>
+              </a:defRPr>
+            </a:pPr>
+            <a:r>
+              <a:rPr sz="3150" b="1">
+                <a:solidFill>
+                  <a:srgbClr val="FFFFFF"/>
+                </a:solidFill>
+              </a:rPr>
+              <a:t>顯示選單</a:t>
             </a:r>
           </a:p>
         </p:txBody>
@@ -3956,18 +3867,120 @@
           <p:cNvPr id="7" name="">
             <a:extLst xmlns:a="http://schemas.openxmlformats.org/drawingml/2006/main">
               <a:ext uri="{FF2B5EF4-FFF2-40B4-BE49-F238E27FC236}">
-                <a16:creationId xmlns:a16="http://schemas.microsoft.com/office/drawing/2014/main" id="{5032790A-D7F9-4E54-8E26-366577F8BEE9}"/>
-              </a:ext>
-            </a:extLst>
-          </p:cNvPr>
-          <p:cNvSpPr>
-            <a:spLocks xmlns:a="http://schemas.openxmlformats.org/drawingml/2006/main" noGrp="1"/>
-          </p:cNvSpPr>
-          <p:nvPr/>
-        </p:nvSpPr>
-        <p:spPr>
-          <a:xfrm xmlns:a="http://schemas.openxmlformats.org/drawingml/2006/main">
-            <a:off x="3143250" y="4238625"/>
+                <a16:creationId xmlns:a16="http://schemas.microsoft.com/office/drawing/2014/main" id="{30526C36-1247-47F3-89D7-203FB6444014}"/>
+              </a:ext>
+            </a:extLst>
+          </p:cNvPr>
+          <p:cNvSpPr>
+            <a:spLocks xmlns:a="http://schemas.openxmlformats.org/drawingml/2006/main" noGrp="1"/>
+          </p:cNvSpPr>
+          <p:nvPr/>
+        </p:nvSpPr>
+        <p:spPr>
+          <a:xfrm xmlns:a="http://schemas.openxmlformats.org/drawingml/2006/main">
+            <a:off x="5095875" y="2714625"/>
+            <a:ext cx="762000" cy="666750"/>
+          </a:xfrm>
+          <a:prstGeom xmlns:a="http://schemas.openxmlformats.org/drawingml/2006/main" prst="rect">
+            <a:avLst/>
+          </a:prstGeom>
+          <a:noFill xmlns:a="http://schemas.openxmlformats.org/drawingml/2006/main"/>
+          <a:ln xmlns:a="http://schemas.openxmlformats.org/drawingml/2006/main" w="0">
+            <a:noFill/>
+            <a:prstDash val="solid"/>
+          </a:ln>
+        </p:spPr>
+        <p:txBody>
+          <a:bodyPr xmlns:a="http://schemas.openxmlformats.org/drawingml/2006/main"/>
+          <a:lstStyle xmlns:a="http://schemas.openxmlformats.org/drawingml/2006/main"/>
+          <a:p xmlns:a="http://schemas.openxmlformats.org/drawingml/2006/main">
+            <a:pPr algn="ctr">
+              <a:buNone/>
+              <a:defRPr sz="3150" b="1">
+                <a:solidFill>
+                  <a:srgbClr val="84D6D9"/>
+                </a:solidFill>
+              </a:defRPr>
+            </a:pPr>
+            <a:r>
+              <a:rPr sz="3150" b="1">
+                <a:solidFill>
+                  <a:srgbClr val="84D6D9"/>
+                </a:solidFill>
+              </a:rPr>
+              <a:t>→</a:t>
+            </a:r>
+          </a:p>
+        </p:txBody>
+      </p:sp>
+      <p:sp>
+        <p:nvSpPr>
+          <p:cNvPr id="8" name="">
+            <a:extLst xmlns:a="http://schemas.openxmlformats.org/drawingml/2006/main">
+              <a:ext uri="{FF2B5EF4-FFF2-40B4-BE49-F238E27FC236}">
+                <a16:creationId xmlns:a16="http://schemas.microsoft.com/office/drawing/2014/main" id="{366099EF-E226-462B-A8F5-B064109252A5}"/>
+              </a:ext>
+            </a:extLst>
+          </p:cNvPr>
+          <p:cNvSpPr>
+            <a:spLocks xmlns:a="http://schemas.openxmlformats.org/drawingml/2006/main" noGrp="1"/>
+          </p:cNvSpPr>
+          <p:nvPr/>
+        </p:nvSpPr>
+        <p:spPr>
+          <a:xfrm xmlns:a="http://schemas.openxmlformats.org/drawingml/2006/main">
+            <a:off x="6048375" y="2714625"/>
+            <a:ext cx="2857500" cy="666750"/>
+          </a:xfrm>
+          <a:prstGeom xmlns:a="http://schemas.openxmlformats.org/drawingml/2006/main" prst="rect">
+            <a:avLst/>
+          </a:prstGeom>
+          <a:noFill xmlns:a="http://schemas.openxmlformats.org/drawingml/2006/main"/>
+          <a:ln xmlns:a="http://schemas.openxmlformats.org/drawingml/2006/main" w="0">
+            <a:noFill/>
+            <a:prstDash val="solid"/>
+          </a:ln>
+        </p:spPr>
+        <p:txBody>
+          <a:bodyPr xmlns:a="http://schemas.openxmlformats.org/drawingml/2006/main"/>
+          <a:lstStyle xmlns:a="http://schemas.openxmlformats.org/drawingml/2006/main"/>
+          <a:p xmlns:a="http://schemas.openxmlformats.org/drawingml/2006/main">
+            <a:pPr algn="ctr">
+              <a:buNone/>
+              <a:defRPr sz="3150" b="1">
+                <a:solidFill>
+                  <a:srgbClr val="FFFFFF"/>
+                </a:solidFill>
+              </a:defRPr>
+            </a:pPr>
+            <a:r>
+              <a:rPr sz="3150" b="1">
+                <a:solidFill>
+                  <a:srgbClr val="FFFFFF"/>
+                </a:solidFill>
+              </a:rPr>
+              <a:t>執行功能</a:t>
+            </a:r>
+          </a:p>
+        </p:txBody>
+      </p:sp>
+      <p:sp>
+        <p:nvSpPr>
+          <p:cNvPr id="9" name="">
+            <a:extLst xmlns:a="http://schemas.openxmlformats.org/drawingml/2006/main">
+              <a:ext uri="{FF2B5EF4-FFF2-40B4-BE49-F238E27FC236}">
+                <a16:creationId xmlns:a16="http://schemas.microsoft.com/office/drawing/2014/main" id="{E1FF3FE8-E659-4DD1-9BB1-E2A1330ED154}"/>
+              </a:ext>
+            </a:extLst>
+          </p:cNvPr>
+          <p:cNvSpPr>
+            <a:spLocks xmlns:a="http://schemas.openxmlformats.org/drawingml/2006/main" noGrp="1"/>
+          </p:cNvSpPr>
+          <p:nvPr/>
+        </p:nvSpPr>
+        <p:spPr>
+          <a:xfrm xmlns:a="http://schemas.openxmlformats.org/drawingml/2006/main">
+            <a:off x="3143250" y="4667250"/>
             <a:ext cx="5905500" cy="400050"/>
           </a:xfrm>
           <a:prstGeom xmlns:a="http://schemas.openxmlformats.org/drawingml/2006/main" prst="rect">
@@ -3985,70 +3998,19 @@
           <a:p xmlns:a="http://schemas.openxmlformats.org/drawingml/2006/main">
             <a:pPr algn="ctr">
               <a:buNone/>
-              <a:defRPr sz="1875" b="1">
-                <a:solidFill>
-                  <a:srgbClr val="0B2239"/>
-                </a:solidFill>
-              </a:defRPr>
-            </a:pPr>
-            <a:r>
-              <a:rPr sz="1875" b="1">
-                <a:solidFill>
-                  <a:srgbClr val="0B2239"/>
-                </a:solidFill>
-              </a:rPr>
-              <a:t>輸入 0 時結束</a:t>
-            </a:r>
-          </a:p>
-        </p:txBody>
-      </p:sp>
-      <p:sp>
-        <p:nvSpPr>
-          <p:cNvPr id="8" name="">
-            <a:extLst xmlns:a="http://schemas.openxmlformats.org/drawingml/2006/main">
-              <a:ext uri="{FF2B5EF4-FFF2-40B4-BE49-F238E27FC236}">
-                <a16:creationId xmlns:a16="http://schemas.microsoft.com/office/drawing/2014/main" id="{164E6B63-4E73-4B03-BA82-F4277A570626}"/>
-              </a:ext>
-            </a:extLst>
-          </p:cNvPr>
-          <p:cNvSpPr>
-            <a:spLocks xmlns:a="http://schemas.openxmlformats.org/drawingml/2006/main" noGrp="1"/>
-          </p:cNvSpPr>
-          <p:nvPr/>
-        </p:nvSpPr>
-        <p:spPr>
-          <a:xfrm xmlns:a="http://schemas.openxmlformats.org/drawingml/2006/main">
-            <a:off x="2857500" y="4905375"/>
-            <a:ext cx="6477000" cy="381000"/>
-          </a:xfrm>
-          <a:prstGeom xmlns:a="http://schemas.openxmlformats.org/drawingml/2006/main" prst="rect">
-            <a:avLst/>
-          </a:prstGeom>
-          <a:noFill xmlns:a="http://schemas.openxmlformats.org/drawingml/2006/main"/>
-          <a:ln xmlns:a="http://schemas.openxmlformats.org/drawingml/2006/main" w="0">
-            <a:noFill/>
-            <a:prstDash val="solid"/>
-          </a:ln>
-        </p:spPr>
-        <p:txBody>
-          <a:bodyPr xmlns:a="http://schemas.openxmlformats.org/drawingml/2006/main"/>
-          <a:lstStyle xmlns:a="http://schemas.openxmlformats.org/drawingml/2006/main"/>
-          <a:p xmlns:a="http://schemas.openxmlformats.org/drawingml/2006/main">
-            <a:pPr algn="ctr">
-              <a:buNone/>
-              <a:defRPr sz="1650" b="1">
-                <a:solidFill>
-                  <a:srgbClr val="1F9AA5"/>
-                </a:solidFill>
-              </a:defRPr>
-            </a:pPr>
-            <a:r>
-              <a:rPr sz="1650" b="1">
-                <a:solidFill>
-                  <a:srgbClr val="1F9AA5"/>
-                </a:solidFill>
-              </a:rPr>
-              <a:t>每個分支只負責一個清楚動作。</a:t>
+              <a:defRPr sz="1875" b="0">
+                <a:solidFill>
+                  <a:srgbClr val="536271"/>
+                </a:solidFill>
+              </a:defRPr>
+            </a:pPr>
+            <a:r>
+              <a:rPr sz="1875" b="0">
+                <a:solidFill>
+                  <a:srgbClr val="536271"/>
+                </a:solidFill>
+              </a:rPr>
+              <a:t>輸入 0 時 break，其他錯誤選項要提示。</a:t>
             </a:r>
           </a:p>
         </p:txBody>
@@ -4056,7 +4018,7 @@
     </p:spTree>
     <p:extLst>
       <p:ext uri="{BB962C8B-B14F-4D97-AF65-F5344CB8AC3E}">
-        <p14:creationId xmlns:p14="http://schemas.microsoft.com/office/powerpoint/2010/main" val="26227141"/>
+        <p14:creationId xmlns:p14="http://schemas.microsoft.com/office/powerpoint/2010/main" val="369534694"/>
       </p:ext>
     </p:extLst>
   </p:cSld>
@@ -4084,10 +4046,10 @@
       </p:grpSpPr>
       <p:sp>
         <p:nvSpPr>
-          <p:cNvPr id="13" name="">
-            <a:extLst xmlns:a="http://schemas.openxmlformats.org/drawingml/2006/main">
-              <a:ext uri="{FF2B5EF4-FFF2-40B4-BE49-F238E27FC236}">
-                <a16:creationId xmlns:a16="http://schemas.microsoft.com/office/drawing/2014/main" id="{0FBC4F33-1979-4E14-9397-6CB7EBE03FE6}"/>
+          <p:cNvPr id="9" name="">
+            <a:extLst xmlns:a="http://schemas.openxmlformats.org/drawingml/2006/main">
+              <a:ext uri="{FF2B5EF4-FFF2-40B4-BE49-F238E27FC236}">
+                <a16:creationId xmlns:a16="http://schemas.microsoft.com/office/drawing/2014/main" id="{FF31E2E0-0DD6-4239-BEAD-0696C5ABA3E8}"/>
               </a:ext>
             </a:extLst>
           </p:cNvPr>
@@ -4118,7 +4080,7 @@
           <p:cNvPr id="2" name="">
             <a:extLst xmlns:a="http://schemas.openxmlformats.org/drawingml/2006/main">
               <a:ext uri="{FF2B5EF4-FFF2-40B4-BE49-F238E27FC236}">
-                <a16:creationId xmlns:a16="http://schemas.microsoft.com/office/drawing/2014/main" id="{7F8189A1-0089-40AA-8A28-AD24AF900216}"/>
+                <a16:creationId xmlns:a16="http://schemas.microsoft.com/office/drawing/2014/main" id="{1F8875F0-983B-4AB5-A23C-4493E1F6C4D9}"/>
               </a:ext>
             </a:extLst>
           </p:cNvPr>
@@ -4159,7 +4121,7 @@
                   <a:srgbClr val="1F9AA5"/>
                 </a:solidFill>
               </a:rPr>
-              <a:t>動手練習</a:t>
+              <a:t>程式骨架</a:t>
             </a:r>
           </a:p>
         </p:txBody>
@@ -4169,7 +4131,7 @@
           <p:cNvPr id="3" name="">
             <a:extLst xmlns:a="http://schemas.openxmlformats.org/drawingml/2006/main">
               <a:ext uri="{FF2B5EF4-FFF2-40B4-BE49-F238E27FC236}">
-                <a16:creationId xmlns:a16="http://schemas.microsoft.com/office/drawing/2014/main" id="{75C5B2DF-125B-4567-95E6-B3C368BEBBDE}"/>
+                <a16:creationId xmlns:a16="http://schemas.microsoft.com/office/drawing/2014/main" id="{F7E60527-114F-42DB-AC42-EC10CE02387A}"/>
               </a:ext>
             </a:extLst>
           </p:cNvPr>
@@ -4210,7 +4172,7 @@
                   <a:srgbClr val="0B2239"/>
                 </a:solidFill>
               </a:rPr>
-              <a:t>完成「分數 0 到 100」輸入驗證</a:t>
+              <a:t>把選單放進 while True</a:t>
             </a:r>
           </a:p>
         </p:txBody>
@@ -4220,7 +4182,7 @@
           <p:cNvPr id="4" name="">
             <a:extLst xmlns:a="http://schemas.openxmlformats.org/drawingml/2006/main">
               <a:ext uri="{FF2B5EF4-FFF2-40B4-BE49-F238E27FC236}">
-                <a16:creationId xmlns:a16="http://schemas.microsoft.com/office/drawing/2014/main" id="{550BBFF0-5A73-4490-B440-893FC59CD4ED}"/>
+                <a16:creationId xmlns:a16="http://schemas.microsoft.com/office/drawing/2014/main" id="{E4B55339-02C1-4B5C-969D-54677D99234C}"/>
               </a:ext>
             </a:extLst>
           </p:cNvPr>
@@ -4271,19 +4233,52 @@
           <p:cNvPr id="5" name="">
             <a:extLst xmlns:a="http://schemas.openxmlformats.org/drawingml/2006/main">
               <a:ext uri="{FF2B5EF4-FFF2-40B4-BE49-F238E27FC236}">
-                <a16:creationId xmlns:a16="http://schemas.microsoft.com/office/drawing/2014/main" id="{58EC49D8-89CD-46D4-B227-C4F0421281C9}"/>
-              </a:ext>
-            </a:extLst>
-          </p:cNvPr>
-          <p:cNvSpPr>
-            <a:spLocks xmlns:a="http://schemas.openxmlformats.org/drawingml/2006/main" noGrp="1"/>
-          </p:cNvSpPr>
-          <p:nvPr/>
-        </p:nvSpPr>
-        <p:spPr>
-          <a:xfrm xmlns:a="http://schemas.openxmlformats.org/drawingml/2006/main">
-            <a:off x="1143000" y="1762125"/>
-            <a:ext cx="266700" cy="381000"/>
+                <a16:creationId xmlns:a16="http://schemas.microsoft.com/office/drawing/2014/main" id="{DAAAC354-BEC1-438F-86E0-C3DCA693D590}"/>
+              </a:ext>
+            </a:extLst>
+          </p:cNvPr>
+          <p:cNvSpPr>
+            <a:spLocks xmlns:a="http://schemas.openxmlformats.org/drawingml/2006/main" noGrp="1"/>
+          </p:cNvSpPr>
+          <p:nvPr/>
+        </p:nvSpPr>
+        <p:spPr>
+          <a:xfrm xmlns:a="http://schemas.openxmlformats.org/drawingml/2006/main">
+            <a:off x="1333500" y="2095500"/>
+            <a:ext cx="9525000" cy="1619250"/>
+          </a:xfrm>
+          <a:prstGeom xmlns:a="http://schemas.openxmlformats.org/drawingml/2006/main" prst="roundRect">
+            <a:avLst>
+              <a:gd name="adj" fmla="val 9412"/>
+            </a:avLst>
+          </a:prstGeom>
+          <a:solidFill xmlns:a="http://schemas.openxmlformats.org/drawingml/2006/main">
+            <a:srgbClr val="101820"/>
+          </a:solidFill>
+          <a:ln xmlns:a="http://schemas.openxmlformats.org/drawingml/2006/main" w="0">
+            <a:noFill/>
+            <a:prstDash val="solid"/>
+          </a:ln>
+        </p:spPr>
+      </p:sp>
+      <p:sp>
+        <p:nvSpPr>
+          <p:cNvPr id="6" name="">
+            <a:extLst xmlns:a="http://schemas.openxmlformats.org/drawingml/2006/main">
+              <a:ext uri="{FF2B5EF4-FFF2-40B4-BE49-F238E27FC236}">
+                <a16:creationId xmlns:a16="http://schemas.microsoft.com/office/drawing/2014/main" id="{8ED4DCDB-91D1-44F9-9745-8A565CA77640}"/>
+              </a:ext>
+            </a:extLst>
+          </p:cNvPr>
+          <p:cNvSpPr>
+            <a:spLocks xmlns:a="http://schemas.openxmlformats.org/drawingml/2006/main" noGrp="1"/>
+          </p:cNvSpPr>
+          <p:nvPr/>
+        </p:nvSpPr>
+        <p:spPr>
+          <a:xfrm xmlns:a="http://schemas.openxmlformats.org/drawingml/2006/main">
+            <a:off x="1762125" y="2543175"/>
+            <a:ext cx="8667750" cy="628650"/>
           </a:xfrm>
           <a:prstGeom xmlns:a="http://schemas.openxmlformats.org/drawingml/2006/main" prst="rect">
             <a:avLst/>
@@ -4300,376 +4295,175 @@
           <a:p xmlns:a="http://schemas.openxmlformats.org/drawingml/2006/main">
             <a:pPr algn="l">
               <a:buNone/>
-              <a:defRPr sz="2250" b="1">
+              <a:defRPr sz="2850" b="1">
+                <a:solidFill>
+                  <a:srgbClr val="A8E6CF"/>
+                </a:solidFill>
+              </a:defRPr>
+            </a:pPr>
+            <a:r>
+              <a:rPr sz="2850" b="1">
+                <a:solidFill>
+                  <a:srgbClr val="A8E6CF"/>
+                </a:solidFill>
+              </a:rPr>
+              <a:t>while True:</a:t>
+            </a:r>
+          </a:p>
+          <a:p xmlns:a="http://schemas.openxmlformats.org/drawingml/2006/main">
+            <a:pPr algn="l">
+              <a:buNone/>
+              <a:defRPr sz="2850" b="1">
+                <a:solidFill>
+                  <a:srgbClr val="A8E6CF"/>
+                </a:solidFill>
+              </a:defRPr>
+            </a:pPr>
+            <a:r>
+              <a:rPr sz="2850" b="1">
+                <a:solidFill>
+                  <a:srgbClr val="A8E6CF"/>
+                </a:solidFill>
+              </a:rPr>
+              <a:t>    choice = input("1 查詢／0 離開：")</a:t>
+            </a:r>
+          </a:p>
+          <a:p xmlns:a="http://schemas.openxmlformats.org/drawingml/2006/main">
+            <a:pPr algn="l">
+              <a:buNone/>
+              <a:defRPr sz="2850" b="1">
+                <a:solidFill>
+                  <a:srgbClr val="A8E6CF"/>
+                </a:solidFill>
+              </a:defRPr>
+            </a:pPr>
+            <a:r>
+              <a:rPr sz="2850" b="1">
+                <a:solidFill>
+                  <a:srgbClr val="A8E6CF"/>
+                </a:solidFill>
+              </a:rPr>
+              <a:t>    if choice == "0":</a:t>
+            </a:r>
+          </a:p>
+          <a:p xmlns:a="http://schemas.openxmlformats.org/drawingml/2006/main">
+            <a:pPr algn="l">
+              <a:buNone/>
+              <a:defRPr sz="2850" b="1">
+                <a:solidFill>
+                  <a:srgbClr val="A8E6CF"/>
+                </a:solidFill>
+              </a:defRPr>
+            </a:pPr>
+            <a:r>
+              <a:rPr sz="2850" b="1">
+                <a:solidFill>
+                  <a:srgbClr val="A8E6CF"/>
+                </a:solidFill>
+              </a:rPr>
+              <a:t>        break</a:t>
+            </a:r>
+          </a:p>
+        </p:txBody>
+      </p:sp>
+      <p:sp>
+        <p:nvSpPr>
+          <p:cNvPr id="7" name="">
+            <a:extLst xmlns:a="http://schemas.openxmlformats.org/drawingml/2006/main">
+              <a:ext uri="{FF2B5EF4-FFF2-40B4-BE49-F238E27FC236}">
+                <a16:creationId xmlns:a16="http://schemas.microsoft.com/office/drawing/2014/main" id="{5032790A-D7F9-4E54-8E26-366577F8BEE9}"/>
+              </a:ext>
+            </a:extLst>
+          </p:cNvPr>
+          <p:cNvSpPr>
+            <a:spLocks xmlns:a="http://schemas.openxmlformats.org/drawingml/2006/main" noGrp="1"/>
+          </p:cNvSpPr>
+          <p:nvPr/>
+        </p:nvSpPr>
+        <p:spPr>
+          <a:xfrm xmlns:a="http://schemas.openxmlformats.org/drawingml/2006/main">
+            <a:off x="3143250" y="4238625"/>
+            <a:ext cx="5905500" cy="400050"/>
+          </a:xfrm>
+          <a:prstGeom xmlns:a="http://schemas.openxmlformats.org/drawingml/2006/main" prst="rect">
+            <a:avLst/>
+          </a:prstGeom>
+          <a:noFill xmlns:a="http://schemas.openxmlformats.org/drawingml/2006/main"/>
+          <a:ln xmlns:a="http://schemas.openxmlformats.org/drawingml/2006/main" w="0">
+            <a:noFill/>
+            <a:prstDash val="solid"/>
+          </a:ln>
+        </p:spPr>
+        <p:txBody>
+          <a:bodyPr xmlns:a="http://schemas.openxmlformats.org/drawingml/2006/main"/>
+          <a:lstStyle xmlns:a="http://schemas.openxmlformats.org/drawingml/2006/main"/>
+          <a:p xmlns:a="http://schemas.openxmlformats.org/drawingml/2006/main">
+            <a:pPr algn="ctr">
+              <a:buNone/>
+              <a:defRPr sz="1875" b="1">
+                <a:solidFill>
+                  <a:srgbClr val="0B2239"/>
+                </a:solidFill>
+              </a:defRPr>
+            </a:pPr>
+            <a:r>
+              <a:rPr sz="1875" b="1">
+                <a:solidFill>
+                  <a:srgbClr val="0B2239"/>
+                </a:solidFill>
+              </a:rPr>
+              <a:t>輸入 0 時結束</a:t>
+            </a:r>
+          </a:p>
+        </p:txBody>
+      </p:sp>
+      <p:sp>
+        <p:nvSpPr>
+          <p:cNvPr id="8" name="">
+            <a:extLst xmlns:a="http://schemas.openxmlformats.org/drawingml/2006/main">
+              <a:ext uri="{FF2B5EF4-FFF2-40B4-BE49-F238E27FC236}">
+                <a16:creationId xmlns:a16="http://schemas.microsoft.com/office/drawing/2014/main" id="{164E6B63-4E73-4B03-BA82-F4277A570626}"/>
+              </a:ext>
+            </a:extLst>
+          </p:cNvPr>
+          <p:cNvSpPr>
+            <a:spLocks xmlns:a="http://schemas.openxmlformats.org/drawingml/2006/main" noGrp="1"/>
+          </p:cNvSpPr>
+          <p:nvPr/>
+        </p:nvSpPr>
+        <p:spPr>
+          <a:xfrm xmlns:a="http://schemas.openxmlformats.org/drawingml/2006/main">
+            <a:off x="2857500" y="4905375"/>
+            <a:ext cx="6477000" cy="381000"/>
+          </a:xfrm>
+          <a:prstGeom xmlns:a="http://schemas.openxmlformats.org/drawingml/2006/main" prst="rect">
+            <a:avLst/>
+          </a:prstGeom>
+          <a:noFill xmlns:a="http://schemas.openxmlformats.org/drawingml/2006/main"/>
+          <a:ln xmlns:a="http://schemas.openxmlformats.org/drawingml/2006/main" w="0">
+            <a:noFill/>
+            <a:prstDash val="solid"/>
+          </a:ln>
+        </p:spPr>
+        <p:txBody>
+          <a:bodyPr xmlns:a="http://schemas.openxmlformats.org/drawingml/2006/main"/>
+          <a:lstStyle xmlns:a="http://schemas.openxmlformats.org/drawingml/2006/main"/>
+          <a:p xmlns:a="http://schemas.openxmlformats.org/drawingml/2006/main">
+            <a:pPr algn="ctr">
+              <a:buNone/>
+              <a:defRPr sz="1650" b="1">
                 <a:solidFill>
                   <a:srgbClr val="1F9AA5"/>
                 </a:solidFill>
               </a:defRPr>
             </a:pPr>
             <a:r>
-              <a:rPr sz="2250" b="1">
+              <a:rPr sz="1650" b="1">
                 <a:solidFill>
                   <a:srgbClr val="1F9AA5"/>
                 </a:solidFill>
               </a:rPr>
-              <a:t>1</a:t>
-            </a:r>
-          </a:p>
-        </p:txBody>
-      </p:sp>
-      <p:sp>
-        <p:nvSpPr>
-          <p:cNvPr id="6" name="">
-            <a:extLst xmlns:a="http://schemas.openxmlformats.org/drawingml/2006/main">
-              <a:ext uri="{FF2B5EF4-FFF2-40B4-BE49-F238E27FC236}">
-                <a16:creationId xmlns:a16="http://schemas.microsoft.com/office/drawing/2014/main" id="{FD25B366-00DC-4098-B8F7-094DB12EA7A2}"/>
-              </a:ext>
-            </a:extLst>
-          </p:cNvPr>
-          <p:cNvSpPr>
-            <a:spLocks xmlns:a="http://schemas.openxmlformats.org/drawingml/2006/main" noGrp="1"/>
-          </p:cNvSpPr>
-          <p:nvPr/>
-        </p:nvSpPr>
-        <p:spPr>
-          <a:xfrm xmlns:a="http://schemas.openxmlformats.org/drawingml/2006/main">
-            <a:off x="1524000" y="1762125"/>
-            <a:ext cx="9525000" cy="552450"/>
-          </a:xfrm>
-          <a:prstGeom xmlns:a="http://schemas.openxmlformats.org/drawingml/2006/main" prst="rect">
-            <a:avLst/>
-          </a:prstGeom>
-          <a:noFill xmlns:a="http://schemas.openxmlformats.org/drawingml/2006/main"/>
-          <a:ln xmlns:a="http://schemas.openxmlformats.org/drawingml/2006/main" w="0">
-            <a:noFill/>
-            <a:prstDash val="solid"/>
-          </a:ln>
-        </p:spPr>
-        <p:txBody>
-          <a:bodyPr xmlns:a="http://schemas.openxmlformats.org/drawingml/2006/main"/>
-          <a:lstStyle xmlns:a="http://schemas.openxmlformats.org/drawingml/2006/main"/>
-          <a:p xmlns:a="http://schemas.openxmlformats.org/drawingml/2006/main">
-            <a:pPr algn="l">
-              <a:buNone/>
-              <a:defRPr sz="2025" b="0">
-                <a:solidFill>
-                  <a:srgbClr val="15202B"/>
-                </a:solidFill>
-              </a:defRPr>
-            </a:pPr>
-            <a:r>
-              <a:rPr sz="2025" b="0">
-                <a:solidFill>
-                  <a:srgbClr val="15202B"/>
-                </a:solidFill>
-              </a:rPr>
-              <a:t>使用 while True</a:t>
-            </a:r>
-          </a:p>
-        </p:txBody>
-      </p:sp>
-      <p:sp>
-        <p:nvSpPr>
-          <p:cNvPr id="7" name="">
-            <a:extLst xmlns:a="http://schemas.openxmlformats.org/drawingml/2006/main">
-              <a:ext uri="{FF2B5EF4-FFF2-40B4-BE49-F238E27FC236}">
-                <a16:creationId xmlns:a16="http://schemas.microsoft.com/office/drawing/2014/main" id="{099C2F95-FDD3-4F84-804B-25BFA7A323F4}"/>
-              </a:ext>
-            </a:extLst>
-          </p:cNvPr>
-          <p:cNvSpPr>
-            <a:spLocks xmlns:a="http://schemas.openxmlformats.org/drawingml/2006/main" noGrp="1"/>
-          </p:cNvSpPr>
-          <p:nvPr/>
-        </p:nvSpPr>
-        <p:spPr>
-          <a:xfrm xmlns:a="http://schemas.openxmlformats.org/drawingml/2006/main">
-            <a:off x="1143000" y="2600325"/>
-            <a:ext cx="266700" cy="381000"/>
-          </a:xfrm>
-          <a:prstGeom xmlns:a="http://schemas.openxmlformats.org/drawingml/2006/main" prst="rect">
-            <a:avLst/>
-          </a:prstGeom>
-          <a:noFill xmlns:a="http://schemas.openxmlformats.org/drawingml/2006/main"/>
-          <a:ln xmlns:a="http://schemas.openxmlformats.org/drawingml/2006/main" w="0">
-            <a:noFill/>
-            <a:prstDash val="solid"/>
-          </a:ln>
-        </p:spPr>
-        <p:txBody>
-          <a:bodyPr xmlns:a="http://schemas.openxmlformats.org/drawingml/2006/main"/>
-          <a:lstStyle xmlns:a="http://schemas.openxmlformats.org/drawingml/2006/main"/>
-          <a:p xmlns:a="http://schemas.openxmlformats.org/drawingml/2006/main">
-            <a:pPr algn="l">
-              <a:buNone/>
-              <a:defRPr sz="2250" b="1">
-                <a:solidFill>
-                  <a:srgbClr val="1F9AA5"/>
-                </a:solidFill>
-              </a:defRPr>
-            </a:pPr>
-            <a:r>
-              <a:rPr sz="2250" b="1">
-                <a:solidFill>
-                  <a:srgbClr val="1F9AA5"/>
-                </a:solidFill>
-              </a:rPr>
-              <a:t>2</a:t>
-            </a:r>
-          </a:p>
-        </p:txBody>
-      </p:sp>
-      <p:sp>
-        <p:nvSpPr>
-          <p:cNvPr id="8" name="">
-            <a:extLst xmlns:a="http://schemas.openxmlformats.org/drawingml/2006/main">
-              <a:ext uri="{FF2B5EF4-FFF2-40B4-BE49-F238E27FC236}">
-                <a16:creationId xmlns:a16="http://schemas.microsoft.com/office/drawing/2014/main" id="{6A9137B5-5B8A-4871-9FC3-4962C0153BFB}"/>
-              </a:ext>
-            </a:extLst>
-          </p:cNvPr>
-          <p:cNvSpPr>
-            <a:spLocks xmlns:a="http://schemas.openxmlformats.org/drawingml/2006/main" noGrp="1"/>
-          </p:cNvSpPr>
-          <p:nvPr/>
-        </p:nvSpPr>
-        <p:spPr>
-          <a:xfrm xmlns:a="http://schemas.openxmlformats.org/drawingml/2006/main">
-            <a:off x="1524000" y="2600325"/>
-            <a:ext cx="9525000" cy="552450"/>
-          </a:xfrm>
-          <a:prstGeom xmlns:a="http://schemas.openxmlformats.org/drawingml/2006/main" prst="rect">
-            <a:avLst/>
-          </a:prstGeom>
-          <a:noFill xmlns:a="http://schemas.openxmlformats.org/drawingml/2006/main"/>
-          <a:ln xmlns:a="http://schemas.openxmlformats.org/drawingml/2006/main" w="0">
-            <a:noFill/>
-            <a:prstDash val="solid"/>
-          </a:ln>
-        </p:spPr>
-        <p:txBody>
-          <a:bodyPr xmlns:a="http://schemas.openxmlformats.org/drawingml/2006/main"/>
-          <a:lstStyle xmlns:a="http://schemas.openxmlformats.org/drawingml/2006/main"/>
-          <a:p xmlns:a="http://schemas.openxmlformats.org/drawingml/2006/main">
-            <a:pPr algn="l">
-              <a:buNone/>
-              <a:defRPr sz="2025" b="0">
-                <a:solidFill>
-                  <a:srgbClr val="15202B"/>
-                </a:solidFill>
-              </a:defRPr>
-            </a:pPr>
-            <a:r>
-              <a:rPr sz="2025" b="0">
-                <a:solidFill>
-                  <a:srgbClr val="15202B"/>
-                </a:solidFill>
-              </a:rPr>
-              <a:t>用 try / except 轉成整數</a:t>
-            </a:r>
-          </a:p>
-        </p:txBody>
-      </p:sp>
-      <p:sp>
-        <p:nvSpPr>
-          <p:cNvPr id="9" name="">
-            <a:extLst xmlns:a="http://schemas.openxmlformats.org/drawingml/2006/main">
-              <a:ext uri="{FF2B5EF4-FFF2-40B4-BE49-F238E27FC236}">
-                <a16:creationId xmlns:a16="http://schemas.microsoft.com/office/drawing/2014/main" id="{AE0C3813-6D1F-48D0-8C9E-ADDFD66E759F}"/>
-              </a:ext>
-            </a:extLst>
-          </p:cNvPr>
-          <p:cNvSpPr>
-            <a:spLocks xmlns:a="http://schemas.openxmlformats.org/drawingml/2006/main" noGrp="1"/>
-          </p:cNvSpPr>
-          <p:nvPr/>
-        </p:nvSpPr>
-        <p:spPr>
-          <a:xfrm xmlns:a="http://schemas.openxmlformats.org/drawingml/2006/main">
-            <a:off x="1143000" y="3438525"/>
-            <a:ext cx="266700" cy="381000"/>
-          </a:xfrm>
-          <a:prstGeom xmlns:a="http://schemas.openxmlformats.org/drawingml/2006/main" prst="rect">
-            <a:avLst/>
-          </a:prstGeom>
-          <a:noFill xmlns:a="http://schemas.openxmlformats.org/drawingml/2006/main"/>
-          <a:ln xmlns:a="http://schemas.openxmlformats.org/drawingml/2006/main" w="0">
-            <a:noFill/>
-            <a:prstDash val="solid"/>
-          </a:ln>
-        </p:spPr>
-        <p:txBody>
-          <a:bodyPr xmlns:a="http://schemas.openxmlformats.org/drawingml/2006/main"/>
-          <a:lstStyle xmlns:a="http://schemas.openxmlformats.org/drawingml/2006/main"/>
-          <a:p xmlns:a="http://schemas.openxmlformats.org/drawingml/2006/main">
-            <a:pPr algn="l">
-              <a:buNone/>
-              <a:defRPr sz="2250" b="1">
-                <a:solidFill>
-                  <a:srgbClr val="1F9AA5"/>
-                </a:solidFill>
-              </a:defRPr>
-            </a:pPr>
-            <a:r>
-              <a:rPr sz="2250" b="1">
-                <a:solidFill>
-                  <a:srgbClr val="1F9AA5"/>
-                </a:solidFill>
-              </a:rPr>
-              <a:t>3</a:t>
-            </a:r>
-          </a:p>
-        </p:txBody>
-      </p:sp>
-      <p:sp>
-        <p:nvSpPr>
-          <p:cNvPr id="10" name="">
-            <a:extLst xmlns:a="http://schemas.openxmlformats.org/drawingml/2006/main">
-              <a:ext uri="{FF2B5EF4-FFF2-40B4-BE49-F238E27FC236}">
-                <a16:creationId xmlns:a16="http://schemas.microsoft.com/office/drawing/2014/main" id="{772C6935-F5FB-4F10-9927-700352314352}"/>
-              </a:ext>
-            </a:extLst>
-          </p:cNvPr>
-          <p:cNvSpPr>
-            <a:spLocks xmlns:a="http://schemas.openxmlformats.org/drawingml/2006/main" noGrp="1"/>
-          </p:cNvSpPr>
-          <p:nvPr/>
-        </p:nvSpPr>
-        <p:spPr>
-          <a:xfrm xmlns:a="http://schemas.openxmlformats.org/drawingml/2006/main">
-            <a:off x="1524000" y="3438525"/>
-            <a:ext cx="9525000" cy="552450"/>
-          </a:xfrm>
-          <a:prstGeom xmlns:a="http://schemas.openxmlformats.org/drawingml/2006/main" prst="rect">
-            <a:avLst/>
-          </a:prstGeom>
-          <a:noFill xmlns:a="http://schemas.openxmlformats.org/drawingml/2006/main"/>
-          <a:ln xmlns:a="http://schemas.openxmlformats.org/drawingml/2006/main" w="0">
-            <a:noFill/>
-            <a:prstDash val="solid"/>
-          </a:ln>
-        </p:spPr>
-        <p:txBody>
-          <a:bodyPr xmlns:a="http://schemas.openxmlformats.org/drawingml/2006/main"/>
-          <a:lstStyle xmlns:a="http://schemas.openxmlformats.org/drawingml/2006/main"/>
-          <a:p xmlns:a="http://schemas.openxmlformats.org/drawingml/2006/main">
-            <a:pPr algn="l">
-              <a:buNone/>
-              <a:defRPr sz="2025" b="0">
-                <a:solidFill>
-                  <a:srgbClr val="15202B"/>
-                </a:solidFill>
-              </a:defRPr>
-            </a:pPr>
-            <a:r>
-              <a:rPr sz="2025" b="0">
-                <a:solidFill>
-                  <a:srgbClr val="15202B"/>
-                </a:solidFill>
-              </a:rPr>
-              <a:t>檢查 0 &lt;= score &lt;= 100</a:t>
-            </a:r>
-          </a:p>
-        </p:txBody>
-      </p:sp>
-      <p:sp>
-        <p:nvSpPr>
-          <p:cNvPr id="11" name="">
-            <a:extLst xmlns:a="http://schemas.openxmlformats.org/drawingml/2006/main">
-              <a:ext uri="{FF2B5EF4-FFF2-40B4-BE49-F238E27FC236}">
-                <a16:creationId xmlns:a16="http://schemas.microsoft.com/office/drawing/2014/main" id="{8C34E41C-D9FE-4793-A513-7CFF8056B124}"/>
-              </a:ext>
-            </a:extLst>
-          </p:cNvPr>
-          <p:cNvSpPr>
-            <a:spLocks xmlns:a="http://schemas.openxmlformats.org/drawingml/2006/main" noGrp="1"/>
-          </p:cNvSpPr>
-          <p:nvPr/>
-        </p:nvSpPr>
-        <p:spPr>
-          <a:xfrm xmlns:a="http://schemas.openxmlformats.org/drawingml/2006/main">
-            <a:off x="1143000" y="4276725"/>
-            <a:ext cx="266700" cy="381000"/>
-          </a:xfrm>
-          <a:prstGeom xmlns:a="http://schemas.openxmlformats.org/drawingml/2006/main" prst="rect">
-            <a:avLst/>
-          </a:prstGeom>
-          <a:noFill xmlns:a="http://schemas.openxmlformats.org/drawingml/2006/main"/>
-          <a:ln xmlns:a="http://schemas.openxmlformats.org/drawingml/2006/main" w="0">
-            <a:noFill/>
-            <a:prstDash val="solid"/>
-          </a:ln>
-        </p:spPr>
-        <p:txBody>
-          <a:bodyPr xmlns:a="http://schemas.openxmlformats.org/drawingml/2006/main"/>
-          <a:lstStyle xmlns:a="http://schemas.openxmlformats.org/drawingml/2006/main"/>
-          <a:p xmlns:a="http://schemas.openxmlformats.org/drawingml/2006/main">
-            <a:pPr algn="l">
-              <a:buNone/>
-              <a:defRPr sz="2250" b="1">
-                <a:solidFill>
-                  <a:srgbClr val="1F9AA5"/>
-                </a:solidFill>
-              </a:defRPr>
-            </a:pPr>
-            <a:r>
-              <a:rPr sz="2250" b="1">
-                <a:solidFill>
-                  <a:srgbClr val="1F9AA5"/>
-                </a:solidFill>
-              </a:rPr>
-              <a:t>4</a:t>
-            </a:r>
-          </a:p>
-        </p:txBody>
-      </p:sp>
-      <p:sp>
-        <p:nvSpPr>
-          <p:cNvPr id="12" name="">
-            <a:extLst xmlns:a="http://schemas.openxmlformats.org/drawingml/2006/main">
-              <a:ext uri="{FF2B5EF4-FFF2-40B4-BE49-F238E27FC236}">
-                <a16:creationId xmlns:a16="http://schemas.microsoft.com/office/drawing/2014/main" id="{AFC043F9-CDA4-4D6A-B87F-9226C5ECEAD2}"/>
-              </a:ext>
-            </a:extLst>
-          </p:cNvPr>
-          <p:cNvSpPr>
-            <a:spLocks xmlns:a="http://schemas.openxmlformats.org/drawingml/2006/main" noGrp="1"/>
-          </p:cNvSpPr>
-          <p:nvPr/>
-        </p:nvSpPr>
-        <p:spPr>
-          <a:xfrm xmlns:a="http://schemas.openxmlformats.org/drawingml/2006/main">
-            <a:off x="1524000" y="4276725"/>
-            <a:ext cx="9525000" cy="552450"/>
-          </a:xfrm>
-          <a:prstGeom xmlns:a="http://schemas.openxmlformats.org/drawingml/2006/main" prst="rect">
-            <a:avLst/>
-          </a:prstGeom>
-          <a:noFill xmlns:a="http://schemas.openxmlformats.org/drawingml/2006/main"/>
-          <a:ln xmlns:a="http://schemas.openxmlformats.org/drawingml/2006/main" w="0">
-            <a:noFill/>
-            <a:prstDash val="solid"/>
-          </a:ln>
-        </p:spPr>
-        <p:txBody>
-          <a:bodyPr xmlns:a="http://schemas.openxmlformats.org/drawingml/2006/main"/>
-          <a:lstStyle xmlns:a="http://schemas.openxmlformats.org/drawingml/2006/main"/>
-          <a:p xmlns:a="http://schemas.openxmlformats.org/drawingml/2006/main">
-            <a:pPr algn="l">
-              <a:buNone/>
-              <a:defRPr sz="2025" b="0">
-                <a:solidFill>
-                  <a:srgbClr val="15202B"/>
-                </a:solidFill>
-              </a:defRPr>
-            </a:pPr>
-            <a:r>
-              <a:rPr sz="2025" b="0">
-                <a:solidFill>
-                  <a:srgbClr val="15202B"/>
-                </a:solidFill>
-              </a:rPr>
-              <a:t>成功後 break 並印出結果</a:t>
+              <a:t>每個分支只負責一個清楚動作。</a:t>
             </a:r>
           </a:p>
         </p:txBody>
@@ -4677,7 +4471,7 @@
     </p:spTree>
     <p:extLst>
       <p:ext uri="{BB962C8B-B14F-4D97-AF65-F5344CB8AC3E}">
-        <p14:creationId xmlns:p14="http://schemas.microsoft.com/office/powerpoint/2010/main" val="731737351"/>
+        <p14:creationId xmlns:p14="http://schemas.microsoft.com/office/powerpoint/2010/main" val="26227141"/>
       </p:ext>
     </p:extLst>
   </p:cSld>
@@ -4708,7 +4502,7 @@
           <p:cNvPr id="13" name="">
             <a:extLst xmlns:a="http://schemas.openxmlformats.org/drawingml/2006/main">
               <a:ext uri="{FF2B5EF4-FFF2-40B4-BE49-F238E27FC236}">
-                <a16:creationId xmlns:a16="http://schemas.microsoft.com/office/drawing/2014/main" id="{B30974A1-CA65-48BA-ABA8-3E89BECE3F3D}"/>
+                <a16:creationId xmlns:a16="http://schemas.microsoft.com/office/drawing/2014/main" id="{0FBC4F33-1979-4E14-9397-6CB7EBE03FE6}"/>
               </a:ext>
             </a:extLst>
           </p:cNvPr>
@@ -4739,7 +4533,7 @@
           <p:cNvPr id="2" name="">
             <a:extLst xmlns:a="http://schemas.openxmlformats.org/drawingml/2006/main">
               <a:ext uri="{FF2B5EF4-FFF2-40B4-BE49-F238E27FC236}">
-                <a16:creationId xmlns:a16="http://schemas.microsoft.com/office/drawing/2014/main" id="{858C98D5-8F52-4957-8588-CD9A9DE91F28}"/>
+                <a16:creationId xmlns:a16="http://schemas.microsoft.com/office/drawing/2014/main" id="{7F8189A1-0089-40AA-8A28-AD24AF900216}"/>
               </a:ext>
             </a:extLst>
           </p:cNvPr>
@@ -4780,7 +4574,7 @@
                   <a:srgbClr val="1F9AA5"/>
                 </a:solidFill>
               </a:rPr>
-              <a:t>常見錯誤</a:t>
+              <a:t>動手練習</a:t>
             </a:r>
           </a:p>
         </p:txBody>
@@ -4790,7 +4584,7 @@
           <p:cNvPr id="3" name="">
             <a:extLst xmlns:a="http://schemas.openxmlformats.org/drawingml/2006/main">
               <a:ext uri="{FF2B5EF4-FFF2-40B4-BE49-F238E27FC236}">
-                <a16:creationId xmlns:a16="http://schemas.microsoft.com/office/drawing/2014/main" id="{16F046D4-A610-410F-8F96-1AE4C4786A41}"/>
+                <a16:creationId xmlns:a16="http://schemas.microsoft.com/office/drawing/2014/main" id="{75C5B2DF-125B-4567-95E6-B3C368BEBBDE}"/>
               </a:ext>
             </a:extLst>
           </p:cNvPr>
@@ -4831,7 +4625,7 @@
                   <a:srgbClr val="0B2239"/>
                 </a:solidFill>
               </a:rPr>
-              <a:t>程式停不下來時，先找更新與 break</a:t>
+              <a:t>完成「分數 0 到 100」輸入驗證</a:t>
             </a:r>
           </a:p>
         </p:txBody>
@@ -4841,7 +4635,7 @@
           <p:cNvPr id="4" name="">
             <a:extLst xmlns:a="http://schemas.openxmlformats.org/drawingml/2006/main">
               <a:ext uri="{FF2B5EF4-FFF2-40B4-BE49-F238E27FC236}">
-                <a16:creationId xmlns:a16="http://schemas.microsoft.com/office/drawing/2014/main" id="{620FD9CC-5D88-4EAD-9A43-A056E3B220A3}"/>
+                <a16:creationId xmlns:a16="http://schemas.microsoft.com/office/drawing/2014/main" id="{550BBFF0-5A73-4490-B440-893FC59CD4ED}"/>
               </a:ext>
             </a:extLst>
           </p:cNvPr>
@@ -4892,18 +4686,18 @@
           <p:cNvPr id="5" name="">
             <a:extLst xmlns:a="http://schemas.openxmlformats.org/drawingml/2006/main">
               <a:ext uri="{FF2B5EF4-FFF2-40B4-BE49-F238E27FC236}">
-                <a16:creationId xmlns:a16="http://schemas.microsoft.com/office/drawing/2014/main" id="{7DB9A262-A5DE-492A-A094-D9F37847D4E9}"/>
-              </a:ext>
-            </a:extLst>
-          </p:cNvPr>
-          <p:cNvSpPr>
-            <a:spLocks xmlns:a="http://schemas.openxmlformats.org/drawingml/2006/main" noGrp="1"/>
-          </p:cNvSpPr>
-          <p:nvPr/>
-        </p:nvSpPr>
-        <p:spPr>
-          <a:xfrm xmlns:a="http://schemas.openxmlformats.org/drawingml/2006/main">
-            <a:off x="742950" y="1762125"/>
+                <a16:creationId xmlns:a16="http://schemas.microsoft.com/office/drawing/2014/main" id="{58EC49D8-89CD-46D4-B227-C4F0421281C9}"/>
+              </a:ext>
+            </a:extLst>
+          </p:cNvPr>
+          <p:cNvSpPr>
+            <a:spLocks xmlns:a="http://schemas.openxmlformats.org/drawingml/2006/main" noGrp="1"/>
+          </p:cNvSpPr>
+          <p:nvPr/>
+        </p:nvSpPr>
+        <p:spPr>
+          <a:xfrm xmlns:a="http://schemas.openxmlformats.org/drawingml/2006/main">
+            <a:off x="1143000" y="1762125"/>
             <a:ext cx="266700" cy="381000"/>
           </a:xfrm>
           <a:prstGeom xmlns:a="http://schemas.openxmlformats.org/drawingml/2006/main" prst="rect">
@@ -4921,19 +4715,19 @@
           <a:p xmlns:a="http://schemas.openxmlformats.org/drawingml/2006/main">
             <a:pPr algn="l">
               <a:buNone/>
-              <a:defRPr sz="2175" b="1">
+              <a:defRPr sz="2250" b="1">
                 <a:solidFill>
                   <a:srgbClr val="1F9AA5"/>
                 </a:solidFill>
               </a:defRPr>
             </a:pPr>
             <a:r>
-              <a:rPr sz="2175" b="1">
+              <a:rPr sz="2250" b="1">
                 <a:solidFill>
                   <a:srgbClr val="1F9AA5"/>
                 </a:solidFill>
               </a:rPr>
-              <a:t>•</a:t>
+              <a:t>1</a:t>
             </a:r>
           </a:p>
         </p:txBody>
@@ -4943,19 +4737,19 @@
           <p:cNvPr id="6" name="">
             <a:extLst xmlns:a="http://schemas.openxmlformats.org/drawingml/2006/main">
               <a:ext uri="{FF2B5EF4-FFF2-40B4-BE49-F238E27FC236}">
-                <a16:creationId xmlns:a16="http://schemas.microsoft.com/office/drawing/2014/main" id="{E8642703-14BC-4D15-A412-E0E3BC4A3287}"/>
-              </a:ext>
-            </a:extLst>
-          </p:cNvPr>
-          <p:cNvSpPr>
-            <a:spLocks xmlns:a="http://schemas.openxmlformats.org/drawingml/2006/main" noGrp="1"/>
-          </p:cNvSpPr>
-          <p:nvPr/>
-        </p:nvSpPr>
-        <p:spPr>
-          <a:xfrm xmlns:a="http://schemas.openxmlformats.org/drawingml/2006/main">
-            <a:off x="1123950" y="1762125"/>
-            <a:ext cx="10287000" cy="552450"/>
+                <a16:creationId xmlns:a16="http://schemas.microsoft.com/office/drawing/2014/main" id="{FD25B366-00DC-4098-B8F7-094DB12EA7A2}"/>
+              </a:ext>
+            </a:extLst>
+          </p:cNvPr>
+          <p:cNvSpPr>
+            <a:spLocks xmlns:a="http://schemas.openxmlformats.org/drawingml/2006/main" noGrp="1"/>
+          </p:cNvSpPr>
+          <p:nvPr/>
+        </p:nvSpPr>
+        <p:spPr>
+          <a:xfrm xmlns:a="http://schemas.openxmlformats.org/drawingml/2006/main">
+            <a:off x="1524000" y="1762125"/>
+            <a:ext cx="9525000" cy="552450"/>
           </a:xfrm>
           <a:prstGeom xmlns:a="http://schemas.openxmlformats.org/drawingml/2006/main" prst="rect">
             <a:avLst/>
@@ -4972,19 +4766,19 @@
           <a:p xmlns:a="http://schemas.openxmlformats.org/drawingml/2006/main">
             <a:pPr algn="l">
               <a:buNone/>
-              <a:defRPr sz="1950" b="0">
+              <a:defRPr sz="2025" b="0">
                 <a:solidFill>
                   <a:srgbClr val="15202B"/>
                 </a:solidFill>
               </a:defRPr>
             </a:pPr>
             <a:r>
-              <a:rPr sz="1950" b="0">
+              <a:rPr sz="2025" b="0">
                 <a:solidFill>
                   <a:srgbClr val="15202B"/>
                 </a:solidFill>
               </a:rPr>
-              <a:t>忘記 count += 1</a:t>
+              <a:t>使用 while True</a:t>
             </a:r>
           </a:p>
         </p:txBody>
@@ -4994,18 +4788,18 @@
           <p:cNvPr id="7" name="">
             <a:extLst xmlns:a="http://schemas.openxmlformats.org/drawingml/2006/main">
               <a:ext uri="{FF2B5EF4-FFF2-40B4-BE49-F238E27FC236}">
-                <a16:creationId xmlns:a16="http://schemas.microsoft.com/office/drawing/2014/main" id="{7237EB9D-A6B0-4BEB-891A-EF273F980745}"/>
-              </a:ext>
-            </a:extLst>
-          </p:cNvPr>
-          <p:cNvSpPr>
-            <a:spLocks xmlns:a="http://schemas.openxmlformats.org/drawingml/2006/main" noGrp="1"/>
-          </p:cNvSpPr>
-          <p:nvPr/>
-        </p:nvSpPr>
-        <p:spPr>
-          <a:xfrm xmlns:a="http://schemas.openxmlformats.org/drawingml/2006/main">
-            <a:off x="742950" y="2600325"/>
+                <a16:creationId xmlns:a16="http://schemas.microsoft.com/office/drawing/2014/main" id="{099C2F95-FDD3-4F84-804B-25BFA7A323F4}"/>
+              </a:ext>
+            </a:extLst>
+          </p:cNvPr>
+          <p:cNvSpPr>
+            <a:spLocks xmlns:a="http://schemas.openxmlformats.org/drawingml/2006/main" noGrp="1"/>
+          </p:cNvSpPr>
+          <p:nvPr/>
+        </p:nvSpPr>
+        <p:spPr>
+          <a:xfrm xmlns:a="http://schemas.openxmlformats.org/drawingml/2006/main">
+            <a:off x="1143000" y="2600325"/>
             <a:ext cx="266700" cy="381000"/>
           </a:xfrm>
           <a:prstGeom xmlns:a="http://schemas.openxmlformats.org/drawingml/2006/main" prst="rect">
@@ -5023,19 +4817,19 @@
           <a:p xmlns:a="http://schemas.openxmlformats.org/drawingml/2006/main">
             <a:pPr algn="l">
               <a:buNone/>
-              <a:defRPr sz="2175" b="1">
+              <a:defRPr sz="2250" b="1">
                 <a:solidFill>
                   <a:srgbClr val="1F9AA5"/>
                 </a:solidFill>
               </a:defRPr>
             </a:pPr>
             <a:r>
-              <a:rPr sz="2175" b="1">
+              <a:rPr sz="2250" b="1">
                 <a:solidFill>
                   <a:srgbClr val="1F9AA5"/>
                 </a:solidFill>
               </a:rPr>
-              <a:t>•</a:t>
+              <a:t>2</a:t>
             </a:r>
           </a:p>
         </p:txBody>
@@ -5045,19 +4839,19 @@
           <p:cNvPr id="8" name="">
             <a:extLst xmlns:a="http://schemas.openxmlformats.org/drawingml/2006/main">
               <a:ext uri="{FF2B5EF4-FFF2-40B4-BE49-F238E27FC236}">
-                <a16:creationId xmlns:a16="http://schemas.microsoft.com/office/drawing/2014/main" id="{88C10C2E-5820-43F2-8AB5-799F371322D0}"/>
-              </a:ext>
-            </a:extLst>
-          </p:cNvPr>
-          <p:cNvSpPr>
-            <a:spLocks xmlns:a="http://schemas.openxmlformats.org/drawingml/2006/main" noGrp="1"/>
-          </p:cNvSpPr>
-          <p:nvPr/>
-        </p:nvSpPr>
-        <p:spPr>
-          <a:xfrm xmlns:a="http://schemas.openxmlformats.org/drawingml/2006/main">
-            <a:off x="1123950" y="2600325"/>
-            <a:ext cx="10287000" cy="552450"/>
+                <a16:creationId xmlns:a16="http://schemas.microsoft.com/office/drawing/2014/main" id="{6A9137B5-5B8A-4871-9FC3-4962C0153BFB}"/>
+              </a:ext>
+            </a:extLst>
+          </p:cNvPr>
+          <p:cNvSpPr>
+            <a:spLocks xmlns:a="http://schemas.openxmlformats.org/drawingml/2006/main" noGrp="1"/>
+          </p:cNvSpPr>
+          <p:nvPr/>
+        </p:nvSpPr>
+        <p:spPr>
+          <a:xfrm xmlns:a="http://schemas.openxmlformats.org/drawingml/2006/main">
+            <a:off x="1524000" y="2600325"/>
+            <a:ext cx="9525000" cy="552450"/>
           </a:xfrm>
           <a:prstGeom xmlns:a="http://schemas.openxmlformats.org/drawingml/2006/main" prst="rect">
             <a:avLst/>
@@ -5074,19 +4868,19 @@
           <a:p xmlns:a="http://schemas.openxmlformats.org/drawingml/2006/main">
             <a:pPr algn="l">
               <a:buNone/>
-              <a:defRPr sz="1950" b="0">
+              <a:defRPr sz="2025" b="0">
                 <a:solidFill>
                   <a:srgbClr val="15202B"/>
                 </a:solidFill>
               </a:defRPr>
             </a:pPr>
             <a:r>
-              <a:rPr sz="1950" b="0">
+              <a:rPr sz="2025" b="0">
                 <a:solidFill>
                   <a:srgbClr val="15202B"/>
                 </a:solidFill>
               </a:rPr>
-              <a:t>成功後忘記 break</a:t>
+              <a:t>用 try / except 轉成整數</a:t>
             </a:r>
           </a:p>
         </p:txBody>
@@ -5096,18 +4890,18 @@
           <p:cNvPr id="9" name="">
             <a:extLst xmlns:a="http://schemas.openxmlformats.org/drawingml/2006/main">
               <a:ext uri="{FF2B5EF4-FFF2-40B4-BE49-F238E27FC236}">
-                <a16:creationId xmlns:a16="http://schemas.microsoft.com/office/drawing/2014/main" id="{74531E7A-28E8-41F6-A7FC-120BF2213FE4}"/>
-              </a:ext>
-            </a:extLst>
-          </p:cNvPr>
-          <p:cNvSpPr>
-            <a:spLocks xmlns:a="http://schemas.openxmlformats.org/drawingml/2006/main" noGrp="1"/>
-          </p:cNvSpPr>
-          <p:nvPr/>
-        </p:nvSpPr>
-        <p:spPr>
-          <a:xfrm xmlns:a="http://schemas.openxmlformats.org/drawingml/2006/main">
-            <a:off x="742950" y="3438525"/>
+                <a16:creationId xmlns:a16="http://schemas.microsoft.com/office/drawing/2014/main" id="{AE0C3813-6D1F-48D0-8C9E-ADDFD66E759F}"/>
+              </a:ext>
+            </a:extLst>
+          </p:cNvPr>
+          <p:cNvSpPr>
+            <a:spLocks xmlns:a="http://schemas.openxmlformats.org/drawingml/2006/main" noGrp="1"/>
+          </p:cNvSpPr>
+          <p:nvPr/>
+        </p:nvSpPr>
+        <p:spPr>
+          <a:xfrm xmlns:a="http://schemas.openxmlformats.org/drawingml/2006/main">
+            <a:off x="1143000" y="3438525"/>
             <a:ext cx="266700" cy="381000"/>
           </a:xfrm>
           <a:prstGeom xmlns:a="http://schemas.openxmlformats.org/drawingml/2006/main" prst="rect">
@@ -5125,19 +4919,19 @@
           <a:p xmlns:a="http://schemas.openxmlformats.org/drawingml/2006/main">
             <a:pPr algn="l">
               <a:buNone/>
-              <a:defRPr sz="2175" b="1">
+              <a:defRPr sz="2250" b="1">
                 <a:solidFill>
                   <a:srgbClr val="1F9AA5"/>
                 </a:solidFill>
               </a:defRPr>
             </a:pPr>
             <a:r>
-              <a:rPr sz="2175" b="1">
+              <a:rPr sz="2250" b="1">
                 <a:solidFill>
                   <a:srgbClr val="1F9AA5"/>
                 </a:solidFill>
               </a:rPr>
-              <a:t>•</a:t>
+              <a:t>3</a:t>
             </a:r>
           </a:p>
         </p:txBody>
@@ -5147,19 +4941,19 @@
           <p:cNvPr id="10" name="">
             <a:extLst xmlns:a="http://schemas.openxmlformats.org/drawingml/2006/main">
               <a:ext uri="{FF2B5EF4-FFF2-40B4-BE49-F238E27FC236}">
-                <a16:creationId xmlns:a16="http://schemas.microsoft.com/office/drawing/2014/main" id="{CDCE8F9B-A4C9-4778-94CF-94FDDA70CA31}"/>
-              </a:ext>
-            </a:extLst>
-          </p:cNvPr>
-          <p:cNvSpPr>
-            <a:spLocks xmlns:a="http://schemas.openxmlformats.org/drawingml/2006/main" noGrp="1"/>
-          </p:cNvSpPr>
-          <p:nvPr/>
-        </p:nvSpPr>
-        <p:spPr>
-          <a:xfrm xmlns:a="http://schemas.openxmlformats.org/drawingml/2006/main">
-            <a:off x="1123950" y="3438525"/>
-            <a:ext cx="10287000" cy="552450"/>
+                <a16:creationId xmlns:a16="http://schemas.microsoft.com/office/drawing/2014/main" id="{772C6935-F5FB-4F10-9927-700352314352}"/>
+              </a:ext>
+            </a:extLst>
+          </p:cNvPr>
+          <p:cNvSpPr>
+            <a:spLocks xmlns:a="http://schemas.openxmlformats.org/drawingml/2006/main" noGrp="1"/>
+          </p:cNvSpPr>
+          <p:nvPr/>
+        </p:nvSpPr>
+        <p:spPr>
+          <a:xfrm xmlns:a="http://schemas.openxmlformats.org/drawingml/2006/main">
+            <a:off x="1524000" y="3438525"/>
+            <a:ext cx="9525000" cy="552450"/>
           </a:xfrm>
           <a:prstGeom xmlns:a="http://schemas.openxmlformats.org/drawingml/2006/main" prst="rect">
             <a:avLst/>
@@ -5176,19 +4970,19 @@
           <a:p xmlns:a="http://schemas.openxmlformats.org/drawingml/2006/main">
             <a:pPr algn="l">
               <a:buNone/>
-              <a:defRPr sz="1950" b="0">
+              <a:defRPr sz="2025" b="0">
                 <a:solidFill>
                   <a:srgbClr val="15202B"/>
                 </a:solidFill>
               </a:defRPr>
             </a:pPr>
             <a:r>
-              <a:rPr sz="1950" b="0">
+              <a:rPr sz="2025" b="0">
                 <a:solidFill>
                   <a:srgbClr val="15202B"/>
                 </a:solidFill>
               </a:rPr>
-              <a:t>continue 前沒有更新控制變數</a:t>
+              <a:t>檢查 0 &lt;= score &lt;= 100</a:t>
             </a:r>
           </a:p>
         </p:txBody>
@@ -5198,18 +4992,18 @@
           <p:cNvPr id="11" name="">
             <a:extLst xmlns:a="http://schemas.openxmlformats.org/drawingml/2006/main">
               <a:ext uri="{FF2B5EF4-FFF2-40B4-BE49-F238E27FC236}">
-                <a16:creationId xmlns:a16="http://schemas.microsoft.com/office/drawing/2014/main" id="{FA65B500-2B7C-4DD7-836E-09F6279AA4E4}"/>
-              </a:ext>
-            </a:extLst>
-          </p:cNvPr>
-          <p:cNvSpPr>
-            <a:spLocks xmlns:a="http://schemas.openxmlformats.org/drawingml/2006/main" noGrp="1"/>
-          </p:cNvSpPr>
-          <p:nvPr/>
-        </p:nvSpPr>
-        <p:spPr>
-          <a:xfrm xmlns:a="http://schemas.openxmlformats.org/drawingml/2006/main">
-            <a:off x="742950" y="4276725"/>
+                <a16:creationId xmlns:a16="http://schemas.microsoft.com/office/drawing/2014/main" id="{8C34E41C-D9FE-4793-A513-7CFF8056B124}"/>
+              </a:ext>
+            </a:extLst>
+          </p:cNvPr>
+          <p:cNvSpPr>
+            <a:spLocks xmlns:a="http://schemas.openxmlformats.org/drawingml/2006/main" noGrp="1"/>
+          </p:cNvSpPr>
+          <p:nvPr/>
+        </p:nvSpPr>
+        <p:spPr>
+          <a:xfrm xmlns:a="http://schemas.openxmlformats.org/drawingml/2006/main">
+            <a:off x="1143000" y="4276725"/>
             <a:ext cx="266700" cy="381000"/>
           </a:xfrm>
           <a:prstGeom xmlns:a="http://schemas.openxmlformats.org/drawingml/2006/main" prst="rect">
@@ -5227,19 +5021,19 @@
           <a:p xmlns:a="http://schemas.openxmlformats.org/drawingml/2006/main">
             <a:pPr algn="l">
               <a:buNone/>
-              <a:defRPr sz="2175" b="1">
+              <a:defRPr sz="2250" b="1">
                 <a:solidFill>
                   <a:srgbClr val="1F9AA5"/>
                 </a:solidFill>
               </a:defRPr>
             </a:pPr>
             <a:r>
-              <a:rPr sz="2175" b="1">
+              <a:rPr sz="2250" b="1">
                 <a:solidFill>
                   <a:srgbClr val="1F9AA5"/>
                 </a:solidFill>
               </a:rPr>
-              <a:t>•</a:t>
+              <a:t>4</a:t>
             </a:r>
           </a:p>
         </p:txBody>
@@ -5249,19 +5043,19 @@
           <p:cNvPr id="12" name="">
             <a:extLst xmlns:a="http://schemas.openxmlformats.org/drawingml/2006/main">
               <a:ext uri="{FF2B5EF4-FFF2-40B4-BE49-F238E27FC236}">
-                <a16:creationId xmlns:a16="http://schemas.microsoft.com/office/drawing/2014/main" id="{0AA0C2CA-8000-43F1-8A81-A29D5928BEFB}"/>
-              </a:ext>
-            </a:extLst>
-          </p:cNvPr>
-          <p:cNvSpPr>
-            <a:spLocks xmlns:a="http://schemas.openxmlformats.org/drawingml/2006/main" noGrp="1"/>
-          </p:cNvSpPr>
-          <p:nvPr/>
-        </p:nvSpPr>
-        <p:spPr>
-          <a:xfrm xmlns:a="http://schemas.openxmlformats.org/drawingml/2006/main">
-            <a:off x="1123950" y="4276725"/>
-            <a:ext cx="10287000" cy="552450"/>
+                <a16:creationId xmlns:a16="http://schemas.microsoft.com/office/drawing/2014/main" id="{AFC043F9-CDA4-4D6A-B87F-9226C5ECEAD2}"/>
+              </a:ext>
+            </a:extLst>
+          </p:cNvPr>
+          <p:cNvSpPr>
+            <a:spLocks xmlns:a="http://schemas.openxmlformats.org/drawingml/2006/main" noGrp="1"/>
+          </p:cNvSpPr>
+          <p:nvPr/>
+        </p:nvSpPr>
+        <p:spPr>
+          <a:xfrm xmlns:a="http://schemas.openxmlformats.org/drawingml/2006/main">
+            <a:off x="1524000" y="4276725"/>
+            <a:ext cx="9525000" cy="552450"/>
           </a:xfrm>
           <a:prstGeom xmlns:a="http://schemas.openxmlformats.org/drawingml/2006/main" prst="rect">
             <a:avLst/>
@@ -5278,19 +5072,19 @@
           <a:p xmlns:a="http://schemas.openxmlformats.org/drawingml/2006/main">
             <a:pPr algn="l">
               <a:buNone/>
-              <a:defRPr sz="1950" b="0">
+              <a:defRPr sz="2025" b="0">
                 <a:solidFill>
                   <a:srgbClr val="15202B"/>
                 </a:solidFill>
               </a:defRPr>
             </a:pPr>
             <a:r>
-              <a:rPr sz="1950" b="0">
+              <a:rPr sz="2025" b="0">
                 <a:solidFill>
                   <a:srgbClr val="15202B"/>
                 </a:solidFill>
               </a:rPr>
-              <a:t>把 input 當成數字直接比較</a:t>
+              <a:t>成功後 break 並印出結果</a:t>
             </a:r>
           </a:p>
         </p:txBody>
@@ -5298,7 +5092,7 @@
     </p:spTree>
     <p:extLst>
       <p:ext uri="{BB962C8B-B14F-4D97-AF65-F5344CB8AC3E}">
-        <p14:creationId xmlns:p14="http://schemas.microsoft.com/office/powerpoint/2010/main" val="1940456672"/>
+        <p14:creationId xmlns:p14="http://schemas.microsoft.com/office/powerpoint/2010/main" val="731737351"/>
       </p:ext>
     </p:extLst>
   </p:cSld>
@@ -5326,10 +5120,10 @@
       </p:grpSpPr>
       <p:sp>
         <p:nvSpPr>
-          <p:cNvPr id="16" name="">
-            <a:extLst xmlns:a="http://schemas.openxmlformats.org/drawingml/2006/main">
-              <a:ext uri="{FF2B5EF4-FFF2-40B4-BE49-F238E27FC236}">
-                <a16:creationId xmlns:a16="http://schemas.microsoft.com/office/drawing/2014/main" id="{D2F1CAE4-187A-4F0A-9022-7437844E17DF}"/>
+          <p:cNvPr id="13" name="">
+            <a:extLst xmlns:a="http://schemas.openxmlformats.org/drawingml/2006/main">
+              <a:ext uri="{FF2B5EF4-FFF2-40B4-BE49-F238E27FC236}">
+                <a16:creationId xmlns:a16="http://schemas.microsoft.com/office/drawing/2014/main" id="{B30974A1-CA65-48BA-ABA8-3E89BECE3F3D}"/>
               </a:ext>
             </a:extLst>
           </p:cNvPr>
@@ -5360,7 +5154,7 @@
           <p:cNvPr id="2" name="">
             <a:extLst xmlns:a="http://schemas.openxmlformats.org/drawingml/2006/main">
               <a:ext uri="{FF2B5EF4-FFF2-40B4-BE49-F238E27FC236}">
-                <a16:creationId xmlns:a16="http://schemas.microsoft.com/office/drawing/2014/main" id="{2715A867-3276-404D-8C24-77366B37ED2B}"/>
+                <a16:creationId xmlns:a16="http://schemas.microsoft.com/office/drawing/2014/main" id="{858C98D5-8F52-4957-8588-CD9A9DE91F28}"/>
               </a:ext>
             </a:extLst>
           </p:cNvPr>
@@ -5401,7 +5195,7 @@
                   <a:srgbClr val="1F9AA5"/>
                 </a:solidFill>
               </a:rPr>
-              <a:t>小作品</a:t>
+              <a:t>常見錯誤</a:t>
             </a:r>
           </a:p>
         </p:txBody>
@@ -5411,7 +5205,7 @@
           <p:cNvPr id="3" name="">
             <a:extLst xmlns:a="http://schemas.openxmlformats.org/drawingml/2006/main">
               <a:ext uri="{FF2B5EF4-FFF2-40B4-BE49-F238E27FC236}">
-                <a16:creationId xmlns:a16="http://schemas.microsoft.com/office/drawing/2014/main" id="{D222E0D9-D661-4469-9627-C8C6985B429F}"/>
+                <a16:creationId xmlns:a16="http://schemas.microsoft.com/office/drawing/2014/main" id="{16F046D4-A610-410F-8F96-1AE4C4786A41}"/>
               </a:ext>
             </a:extLst>
           </p:cNvPr>
@@ -5452,7 +5246,7 @@
                   <a:srgbClr val="0B2239"/>
                 </a:solidFill>
               </a:rPr>
-              <a:t>ATM：查詢、存款、提款與離開</a:t>
+              <a:t>程式停不下來時，先找更新與 break</a:t>
             </a:r>
           </a:p>
         </p:txBody>
@@ -5462,7 +5256,7 @@
           <p:cNvPr id="4" name="">
             <a:extLst xmlns:a="http://schemas.openxmlformats.org/drawingml/2006/main">
               <a:ext uri="{FF2B5EF4-FFF2-40B4-BE49-F238E27FC236}">
-                <a16:creationId xmlns:a16="http://schemas.microsoft.com/office/drawing/2014/main" id="{1E214BAF-B825-4761-B241-2C3115FA09F1}"/>
+                <a16:creationId xmlns:a16="http://schemas.microsoft.com/office/drawing/2014/main" id="{620FD9CC-5D88-4EAD-9A43-A056E3B220A3}"/>
               </a:ext>
             </a:extLst>
           </p:cNvPr>
@@ -5513,83 +5307,99 @@
           <p:cNvPr id="5" name="">
             <a:extLst xmlns:a="http://schemas.openxmlformats.org/drawingml/2006/main">
               <a:ext uri="{FF2B5EF4-FFF2-40B4-BE49-F238E27FC236}">
-                <a16:creationId xmlns:a16="http://schemas.microsoft.com/office/drawing/2014/main" id="{B7046AAA-3079-4B02-B281-1758AB3E68BC}"/>
-              </a:ext>
-            </a:extLst>
-          </p:cNvPr>
-          <p:cNvSpPr>
-            <a:spLocks xmlns:a="http://schemas.openxmlformats.org/drawingml/2006/main" noGrp="1"/>
-          </p:cNvSpPr>
-          <p:nvPr/>
-        </p:nvSpPr>
-        <p:spPr>
-          <a:xfrm xmlns:a="http://schemas.openxmlformats.org/drawingml/2006/main">
-            <a:off x="952500" y="2143125"/>
-            <a:ext cx="2667000" cy="2000250"/>
-          </a:xfrm>
-          <a:prstGeom xmlns:a="http://schemas.openxmlformats.org/drawingml/2006/main" prst="roundRect">
-            <a:avLst>
-              <a:gd name="adj" fmla="val 7619"/>
-            </a:avLst>
-          </a:prstGeom>
-          <a:solidFill xmlns:a="http://schemas.openxmlformats.org/drawingml/2006/main">
-            <a:srgbClr val="FFFFFF"/>
-          </a:solidFill>
-          <a:ln xmlns:a="http://schemas.openxmlformats.org/drawingml/2006/main" w="9525">
-            <a:solidFill>
-              <a:srgbClr val="D5DEE5"/>
-            </a:solidFill>
-            <a:prstDash val="solid"/>
-          </a:ln>
-        </p:spPr>
+                <a16:creationId xmlns:a16="http://schemas.microsoft.com/office/drawing/2014/main" id="{7DB9A262-A5DE-492A-A094-D9F37847D4E9}"/>
+              </a:ext>
+            </a:extLst>
+          </p:cNvPr>
+          <p:cNvSpPr>
+            <a:spLocks xmlns:a="http://schemas.openxmlformats.org/drawingml/2006/main" noGrp="1"/>
+          </p:cNvSpPr>
+          <p:nvPr/>
+        </p:nvSpPr>
+        <p:spPr>
+          <a:xfrm xmlns:a="http://schemas.openxmlformats.org/drawingml/2006/main">
+            <a:off x="742950" y="1762125"/>
+            <a:ext cx="266700" cy="381000"/>
+          </a:xfrm>
+          <a:prstGeom xmlns:a="http://schemas.openxmlformats.org/drawingml/2006/main" prst="rect">
+            <a:avLst/>
+          </a:prstGeom>
+          <a:noFill xmlns:a="http://schemas.openxmlformats.org/drawingml/2006/main"/>
+          <a:ln xmlns:a="http://schemas.openxmlformats.org/drawingml/2006/main" w="0">
+            <a:noFill/>
+            <a:prstDash val="solid"/>
+          </a:ln>
+        </p:spPr>
+        <p:txBody>
+          <a:bodyPr xmlns:a="http://schemas.openxmlformats.org/drawingml/2006/main"/>
+          <a:lstStyle xmlns:a="http://schemas.openxmlformats.org/drawingml/2006/main"/>
+          <a:p xmlns:a="http://schemas.openxmlformats.org/drawingml/2006/main">
+            <a:pPr algn="l">
+              <a:buNone/>
+              <a:defRPr sz="2175" b="1">
+                <a:solidFill>
+                  <a:srgbClr val="1F9AA5"/>
+                </a:solidFill>
+              </a:defRPr>
+            </a:pPr>
+            <a:r>
+              <a:rPr sz="2175" b="1">
+                <a:solidFill>
+                  <a:srgbClr val="1F9AA5"/>
+                </a:solidFill>
+              </a:rPr>
+              <a:t>•</a:t>
+            </a:r>
+          </a:p>
+        </p:txBody>
       </p:sp>
       <p:sp>
         <p:nvSpPr>
           <p:cNvPr id="6" name="">
             <a:extLst xmlns:a="http://schemas.openxmlformats.org/drawingml/2006/main">
               <a:ext uri="{FF2B5EF4-FFF2-40B4-BE49-F238E27FC236}">
-                <a16:creationId xmlns:a16="http://schemas.microsoft.com/office/drawing/2014/main" id="{A5758611-4227-4A38-8E90-BBB878487FD6}"/>
-              </a:ext>
-            </a:extLst>
-          </p:cNvPr>
-          <p:cNvSpPr>
-            <a:spLocks xmlns:a="http://schemas.openxmlformats.org/drawingml/2006/main" noGrp="1"/>
-          </p:cNvSpPr>
-          <p:nvPr/>
-        </p:nvSpPr>
-        <p:spPr>
-          <a:xfrm xmlns:a="http://schemas.openxmlformats.org/drawingml/2006/main">
-            <a:off x="1238250" y="2524125"/>
-            <a:ext cx="2095500" cy="476250"/>
-          </a:xfrm>
-          <a:prstGeom xmlns:a="http://schemas.openxmlformats.org/drawingml/2006/main" prst="rect">
-            <a:avLst/>
-          </a:prstGeom>
-          <a:noFill xmlns:a="http://schemas.openxmlformats.org/drawingml/2006/main"/>
-          <a:ln xmlns:a="http://schemas.openxmlformats.org/drawingml/2006/main" w="0">
-            <a:noFill/>
-            <a:prstDash val="solid"/>
-          </a:ln>
-        </p:spPr>
-        <p:txBody>
-          <a:bodyPr xmlns:a="http://schemas.openxmlformats.org/drawingml/2006/main"/>
-          <a:lstStyle xmlns:a="http://schemas.openxmlformats.org/drawingml/2006/main"/>
-          <a:p xmlns:a="http://schemas.openxmlformats.org/drawingml/2006/main">
-            <a:pPr algn="ctr">
-              <a:buNone/>
-              <a:defRPr sz="2700" b="1">
-                <a:solidFill>
-                  <a:srgbClr val="0B2239"/>
-                </a:solidFill>
-              </a:defRPr>
-            </a:pPr>
-            <a:r>
-              <a:rPr sz="2700" b="1">
-                <a:solidFill>
-                  <a:srgbClr val="0B2239"/>
-                </a:solidFill>
-              </a:rPr>
-              <a:t>餘額</a:t>
+                <a16:creationId xmlns:a16="http://schemas.microsoft.com/office/drawing/2014/main" id="{E8642703-14BC-4D15-A412-E0E3BC4A3287}"/>
+              </a:ext>
+            </a:extLst>
+          </p:cNvPr>
+          <p:cNvSpPr>
+            <a:spLocks xmlns:a="http://schemas.openxmlformats.org/drawingml/2006/main" noGrp="1"/>
+          </p:cNvSpPr>
+          <p:nvPr/>
+        </p:nvSpPr>
+        <p:spPr>
+          <a:xfrm xmlns:a="http://schemas.openxmlformats.org/drawingml/2006/main">
+            <a:off x="1123950" y="1762125"/>
+            <a:ext cx="10287000" cy="552450"/>
+          </a:xfrm>
+          <a:prstGeom xmlns:a="http://schemas.openxmlformats.org/drawingml/2006/main" prst="rect">
+            <a:avLst/>
+          </a:prstGeom>
+          <a:noFill xmlns:a="http://schemas.openxmlformats.org/drawingml/2006/main"/>
+          <a:ln xmlns:a="http://schemas.openxmlformats.org/drawingml/2006/main" w="0">
+            <a:noFill/>
+            <a:prstDash val="solid"/>
+          </a:ln>
+        </p:spPr>
+        <p:txBody>
+          <a:bodyPr xmlns:a="http://schemas.openxmlformats.org/drawingml/2006/main"/>
+          <a:lstStyle xmlns:a="http://schemas.openxmlformats.org/drawingml/2006/main"/>
+          <a:p xmlns:a="http://schemas.openxmlformats.org/drawingml/2006/main">
+            <a:pPr algn="l">
+              <a:buNone/>
+              <a:defRPr sz="1950" b="0">
+                <a:solidFill>
+                  <a:srgbClr val="15202B"/>
+                </a:solidFill>
+              </a:defRPr>
+            </a:pPr>
+            <a:r>
+              <a:rPr sz="1950" b="0">
+                <a:solidFill>
+                  <a:srgbClr val="15202B"/>
+                </a:solidFill>
+              </a:rPr>
+              <a:t>忘記 count += 1</a:t>
             </a:r>
           </a:p>
         </p:txBody>
@@ -5599,48 +5409,48 @@
           <p:cNvPr id="7" name="">
             <a:extLst xmlns:a="http://schemas.openxmlformats.org/drawingml/2006/main">
               <a:ext uri="{FF2B5EF4-FFF2-40B4-BE49-F238E27FC236}">
-                <a16:creationId xmlns:a16="http://schemas.microsoft.com/office/drawing/2014/main" id="{581C7938-2E5C-44A1-AE79-D6E1E2CD6FA4}"/>
-              </a:ext>
-            </a:extLst>
-          </p:cNvPr>
-          <p:cNvSpPr>
-            <a:spLocks xmlns:a="http://schemas.openxmlformats.org/drawingml/2006/main" noGrp="1"/>
-          </p:cNvSpPr>
-          <p:nvPr/>
-        </p:nvSpPr>
-        <p:spPr>
-          <a:xfrm xmlns:a="http://schemas.openxmlformats.org/drawingml/2006/main">
-            <a:off x="1238250" y="3286125"/>
-            <a:ext cx="2095500" cy="304800"/>
-          </a:xfrm>
-          <a:prstGeom xmlns:a="http://schemas.openxmlformats.org/drawingml/2006/main" prst="rect">
-            <a:avLst/>
-          </a:prstGeom>
-          <a:noFill xmlns:a="http://schemas.openxmlformats.org/drawingml/2006/main"/>
-          <a:ln xmlns:a="http://schemas.openxmlformats.org/drawingml/2006/main" w="0">
-            <a:noFill/>
-            <a:prstDash val="solid"/>
-          </a:ln>
-        </p:spPr>
-        <p:txBody>
-          <a:bodyPr xmlns:a="http://schemas.openxmlformats.org/drawingml/2006/main"/>
-          <a:lstStyle xmlns:a="http://schemas.openxmlformats.org/drawingml/2006/main"/>
-          <a:p xmlns:a="http://schemas.openxmlformats.org/drawingml/2006/main">
-            <a:pPr algn="ctr">
-              <a:buNone/>
-              <a:defRPr sz="1500" b="0">
-                <a:solidFill>
-                  <a:srgbClr val="536271"/>
-                </a:solidFill>
-              </a:defRPr>
-            </a:pPr>
-            <a:r>
-              <a:rPr sz="1500" b="0">
-                <a:solidFill>
-                  <a:srgbClr val="536271"/>
-                </a:solidFill>
-              </a:rPr>
-              <a:t>每次操作後更新</a:t>
+                <a16:creationId xmlns:a16="http://schemas.microsoft.com/office/drawing/2014/main" id="{7237EB9D-A6B0-4BEB-891A-EF273F980745}"/>
+              </a:ext>
+            </a:extLst>
+          </p:cNvPr>
+          <p:cNvSpPr>
+            <a:spLocks xmlns:a="http://schemas.openxmlformats.org/drawingml/2006/main" noGrp="1"/>
+          </p:cNvSpPr>
+          <p:nvPr/>
+        </p:nvSpPr>
+        <p:spPr>
+          <a:xfrm xmlns:a="http://schemas.openxmlformats.org/drawingml/2006/main">
+            <a:off x="742950" y="2600325"/>
+            <a:ext cx="266700" cy="381000"/>
+          </a:xfrm>
+          <a:prstGeom xmlns:a="http://schemas.openxmlformats.org/drawingml/2006/main" prst="rect">
+            <a:avLst/>
+          </a:prstGeom>
+          <a:noFill xmlns:a="http://schemas.openxmlformats.org/drawingml/2006/main"/>
+          <a:ln xmlns:a="http://schemas.openxmlformats.org/drawingml/2006/main" w="0">
+            <a:noFill/>
+            <a:prstDash val="solid"/>
+          </a:ln>
+        </p:spPr>
+        <p:txBody>
+          <a:bodyPr xmlns:a="http://schemas.openxmlformats.org/drawingml/2006/main"/>
+          <a:lstStyle xmlns:a="http://schemas.openxmlformats.org/drawingml/2006/main"/>
+          <a:p xmlns:a="http://schemas.openxmlformats.org/drawingml/2006/main">
+            <a:pPr algn="l">
+              <a:buNone/>
+              <a:defRPr sz="2175" b="1">
+                <a:solidFill>
+                  <a:srgbClr val="1F9AA5"/>
+                </a:solidFill>
+              </a:defRPr>
+            </a:pPr>
+            <a:r>
+              <a:rPr sz="2175" b="1">
+                <a:solidFill>
+                  <a:srgbClr val="1F9AA5"/>
+                </a:solidFill>
+              </a:rPr>
+              <a:t>•</a:t>
             </a:r>
           </a:p>
         </p:txBody>
@@ -5650,134 +5460,150 @@
           <p:cNvPr id="8" name="">
             <a:extLst xmlns:a="http://schemas.openxmlformats.org/drawingml/2006/main">
               <a:ext uri="{FF2B5EF4-FFF2-40B4-BE49-F238E27FC236}">
-                <a16:creationId xmlns:a16="http://schemas.microsoft.com/office/drawing/2014/main" id="{3BCD244E-6575-40A7-B5EE-DBC5E3852FFB}"/>
-              </a:ext>
-            </a:extLst>
-          </p:cNvPr>
-          <p:cNvSpPr>
-            <a:spLocks xmlns:a="http://schemas.openxmlformats.org/drawingml/2006/main" noGrp="1"/>
-          </p:cNvSpPr>
-          <p:nvPr/>
-        </p:nvSpPr>
-        <p:spPr>
-          <a:xfrm xmlns:a="http://schemas.openxmlformats.org/drawingml/2006/main">
-            <a:off x="3857625" y="2809875"/>
-            <a:ext cx="666750" cy="571500"/>
-          </a:xfrm>
-          <a:prstGeom xmlns:a="http://schemas.openxmlformats.org/drawingml/2006/main" prst="rect">
-            <a:avLst/>
-          </a:prstGeom>
-          <a:noFill xmlns:a="http://schemas.openxmlformats.org/drawingml/2006/main"/>
-          <a:ln xmlns:a="http://schemas.openxmlformats.org/drawingml/2006/main" w="0">
-            <a:noFill/>
-            <a:prstDash val="solid"/>
-          </a:ln>
-        </p:spPr>
-        <p:txBody>
-          <a:bodyPr xmlns:a="http://schemas.openxmlformats.org/drawingml/2006/main"/>
-          <a:lstStyle xmlns:a="http://schemas.openxmlformats.org/drawingml/2006/main"/>
-          <a:p xmlns:a="http://schemas.openxmlformats.org/drawingml/2006/main">
-            <a:pPr algn="ctr">
-              <a:buNone/>
-              <a:defRPr sz="3300" b="1">
+                <a16:creationId xmlns:a16="http://schemas.microsoft.com/office/drawing/2014/main" id="{88C10C2E-5820-43F2-8AB5-799F371322D0}"/>
+              </a:ext>
+            </a:extLst>
+          </p:cNvPr>
+          <p:cNvSpPr>
+            <a:spLocks xmlns:a="http://schemas.openxmlformats.org/drawingml/2006/main" noGrp="1"/>
+          </p:cNvSpPr>
+          <p:nvPr/>
+        </p:nvSpPr>
+        <p:spPr>
+          <a:xfrm xmlns:a="http://schemas.openxmlformats.org/drawingml/2006/main">
+            <a:off x="1123950" y="2600325"/>
+            <a:ext cx="10287000" cy="552450"/>
+          </a:xfrm>
+          <a:prstGeom xmlns:a="http://schemas.openxmlformats.org/drawingml/2006/main" prst="rect">
+            <a:avLst/>
+          </a:prstGeom>
+          <a:noFill xmlns:a="http://schemas.openxmlformats.org/drawingml/2006/main"/>
+          <a:ln xmlns:a="http://schemas.openxmlformats.org/drawingml/2006/main" w="0">
+            <a:noFill/>
+            <a:prstDash val="solid"/>
+          </a:ln>
+        </p:spPr>
+        <p:txBody>
+          <a:bodyPr xmlns:a="http://schemas.openxmlformats.org/drawingml/2006/main"/>
+          <a:lstStyle xmlns:a="http://schemas.openxmlformats.org/drawingml/2006/main"/>
+          <a:p xmlns:a="http://schemas.openxmlformats.org/drawingml/2006/main">
+            <a:pPr algn="l">
+              <a:buNone/>
+              <a:defRPr sz="1950" b="0">
+                <a:solidFill>
+                  <a:srgbClr val="15202B"/>
+                </a:solidFill>
+              </a:defRPr>
+            </a:pPr>
+            <a:r>
+              <a:rPr sz="1950" b="0">
+                <a:solidFill>
+                  <a:srgbClr val="15202B"/>
+                </a:solidFill>
+              </a:rPr>
+              <a:t>成功後忘記 break</a:t>
+            </a:r>
+          </a:p>
+        </p:txBody>
+      </p:sp>
+      <p:sp>
+        <p:nvSpPr>
+          <p:cNvPr id="9" name="">
+            <a:extLst xmlns:a="http://schemas.openxmlformats.org/drawingml/2006/main">
+              <a:ext uri="{FF2B5EF4-FFF2-40B4-BE49-F238E27FC236}">
+                <a16:creationId xmlns:a16="http://schemas.microsoft.com/office/drawing/2014/main" id="{74531E7A-28E8-41F6-A7FC-120BF2213FE4}"/>
+              </a:ext>
+            </a:extLst>
+          </p:cNvPr>
+          <p:cNvSpPr>
+            <a:spLocks xmlns:a="http://schemas.openxmlformats.org/drawingml/2006/main" noGrp="1"/>
+          </p:cNvSpPr>
+          <p:nvPr/>
+        </p:nvSpPr>
+        <p:spPr>
+          <a:xfrm xmlns:a="http://schemas.openxmlformats.org/drawingml/2006/main">
+            <a:off x="742950" y="3438525"/>
+            <a:ext cx="266700" cy="381000"/>
+          </a:xfrm>
+          <a:prstGeom xmlns:a="http://schemas.openxmlformats.org/drawingml/2006/main" prst="rect">
+            <a:avLst/>
+          </a:prstGeom>
+          <a:noFill xmlns:a="http://schemas.openxmlformats.org/drawingml/2006/main"/>
+          <a:ln xmlns:a="http://schemas.openxmlformats.org/drawingml/2006/main" w="0">
+            <a:noFill/>
+            <a:prstDash val="solid"/>
+          </a:ln>
+        </p:spPr>
+        <p:txBody>
+          <a:bodyPr xmlns:a="http://schemas.openxmlformats.org/drawingml/2006/main"/>
+          <a:lstStyle xmlns:a="http://schemas.openxmlformats.org/drawingml/2006/main"/>
+          <a:p xmlns:a="http://schemas.openxmlformats.org/drawingml/2006/main">
+            <a:pPr algn="l">
+              <a:buNone/>
+              <a:defRPr sz="2175" b="1">
                 <a:solidFill>
                   <a:srgbClr val="1F9AA5"/>
                 </a:solidFill>
               </a:defRPr>
             </a:pPr>
             <a:r>
-              <a:rPr sz="3300" b="1">
+              <a:rPr sz="2175" b="1">
                 <a:solidFill>
                   <a:srgbClr val="1F9AA5"/>
                 </a:solidFill>
               </a:rPr>
-              <a:t>+</a:t>
-            </a:r>
-          </a:p>
-        </p:txBody>
-      </p:sp>
-      <p:sp>
-        <p:nvSpPr>
-          <p:cNvPr id="9" name="">
-            <a:extLst xmlns:a="http://schemas.openxmlformats.org/drawingml/2006/main">
-              <a:ext uri="{FF2B5EF4-FFF2-40B4-BE49-F238E27FC236}">
-                <a16:creationId xmlns:a16="http://schemas.microsoft.com/office/drawing/2014/main" id="{44536D3C-2493-4D9A-9D05-D6265A351975}"/>
-              </a:ext>
-            </a:extLst>
-          </p:cNvPr>
-          <p:cNvSpPr>
-            <a:spLocks xmlns:a="http://schemas.openxmlformats.org/drawingml/2006/main" noGrp="1"/>
-          </p:cNvSpPr>
-          <p:nvPr/>
-        </p:nvSpPr>
-        <p:spPr>
-          <a:xfrm xmlns:a="http://schemas.openxmlformats.org/drawingml/2006/main">
-            <a:off x="4762500" y="2143125"/>
-            <a:ext cx="2667000" cy="2000250"/>
-          </a:xfrm>
-          <a:prstGeom xmlns:a="http://schemas.openxmlformats.org/drawingml/2006/main" prst="roundRect">
-            <a:avLst>
-              <a:gd name="adj" fmla="val 7619"/>
-            </a:avLst>
-          </a:prstGeom>
-          <a:solidFill xmlns:a="http://schemas.openxmlformats.org/drawingml/2006/main">
-            <a:srgbClr val="FFFFFF"/>
-          </a:solidFill>
-          <a:ln xmlns:a="http://schemas.openxmlformats.org/drawingml/2006/main" w="9525">
-            <a:solidFill>
-              <a:srgbClr val="D5DEE5"/>
-            </a:solidFill>
-            <a:prstDash val="solid"/>
-          </a:ln>
-        </p:spPr>
+              <a:t>•</a:t>
+            </a:r>
+          </a:p>
+        </p:txBody>
       </p:sp>
       <p:sp>
         <p:nvSpPr>
           <p:cNvPr id="10" name="">
             <a:extLst xmlns:a="http://schemas.openxmlformats.org/drawingml/2006/main">
               <a:ext uri="{FF2B5EF4-FFF2-40B4-BE49-F238E27FC236}">
-                <a16:creationId xmlns:a16="http://schemas.microsoft.com/office/drawing/2014/main" id="{18F6D736-0200-4904-9249-1832206F2D04}"/>
-              </a:ext>
-            </a:extLst>
-          </p:cNvPr>
-          <p:cNvSpPr>
-            <a:spLocks xmlns:a="http://schemas.openxmlformats.org/drawingml/2006/main" noGrp="1"/>
-          </p:cNvSpPr>
-          <p:nvPr/>
-        </p:nvSpPr>
-        <p:spPr>
-          <a:xfrm xmlns:a="http://schemas.openxmlformats.org/drawingml/2006/main">
-            <a:off x="5048250" y="2524125"/>
-            <a:ext cx="2095500" cy="476250"/>
-          </a:xfrm>
-          <a:prstGeom xmlns:a="http://schemas.openxmlformats.org/drawingml/2006/main" prst="rect">
-            <a:avLst/>
-          </a:prstGeom>
-          <a:noFill xmlns:a="http://schemas.openxmlformats.org/drawingml/2006/main"/>
-          <a:ln xmlns:a="http://schemas.openxmlformats.org/drawingml/2006/main" w="0">
-            <a:noFill/>
-            <a:prstDash val="solid"/>
-          </a:ln>
-        </p:spPr>
-        <p:txBody>
-          <a:bodyPr xmlns:a="http://schemas.openxmlformats.org/drawingml/2006/main"/>
-          <a:lstStyle xmlns:a="http://schemas.openxmlformats.org/drawingml/2006/main"/>
-          <a:p xmlns:a="http://schemas.openxmlformats.org/drawingml/2006/main">
-            <a:pPr algn="ctr">
-              <a:buNone/>
-              <a:defRPr sz="2550" b="1">
-                <a:solidFill>
-                  <a:srgbClr val="0B2239"/>
-                </a:solidFill>
-              </a:defRPr>
-            </a:pPr>
-            <a:r>
-              <a:rPr sz="2550" b="1">
-                <a:solidFill>
-                  <a:srgbClr val="0B2239"/>
-                </a:solidFill>
-              </a:rPr>
-              <a:t>驗證</a:t>
+                <a16:creationId xmlns:a16="http://schemas.microsoft.com/office/drawing/2014/main" id="{CDCE8F9B-A4C9-4778-94CF-94FDDA70CA31}"/>
+              </a:ext>
+            </a:extLst>
+          </p:cNvPr>
+          <p:cNvSpPr>
+            <a:spLocks xmlns:a="http://schemas.openxmlformats.org/drawingml/2006/main" noGrp="1"/>
+          </p:cNvSpPr>
+          <p:nvPr/>
+        </p:nvSpPr>
+        <p:spPr>
+          <a:xfrm xmlns:a="http://schemas.openxmlformats.org/drawingml/2006/main">
+            <a:off x="1123950" y="3438525"/>
+            <a:ext cx="10287000" cy="552450"/>
+          </a:xfrm>
+          <a:prstGeom xmlns:a="http://schemas.openxmlformats.org/drawingml/2006/main" prst="rect">
+            <a:avLst/>
+          </a:prstGeom>
+          <a:noFill xmlns:a="http://schemas.openxmlformats.org/drawingml/2006/main"/>
+          <a:ln xmlns:a="http://schemas.openxmlformats.org/drawingml/2006/main" w="0">
+            <a:noFill/>
+            <a:prstDash val="solid"/>
+          </a:ln>
+        </p:spPr>
+        <p:txBody>
+          <a:bodyPr xmlns:a="http://schemas.openxmlformats.org/drawingml/2006/main"/>
+          <a:lstStyle xmlns:a="http://schemas.openxmlformats.org/drawingml/2006/main"/>
+          <a:p xmlns:a="http://schemas.openxmlformats.org/drawingml/2006/main">
+            <a:pPr algn="l">
+              <a:buNone/>
+              <a:defRPr sz="1950" b="0">
+                <a:solidFill>
+                  <a:srgbClr val="15202B"/>
+                </a:solidFill>
+              </a:defRPr>
+            </a:pPr>
+            <a:r>
+              <a:rPr sz="1950" b="0">
+                <a:solidFill>
+                  <a:srgbClr val="15202B"/>
+                </a:solidFill>
+              </a:rPr>
+              <a:t>continue 前沒有更新控制變數</a:t>
             </a:r>
           </a:p>
         </p:txBody>
@@ -5787,48 +5613,48 @@
           <p:cNvPr id="11" name="">
             <a:extLst xmlns:a="http://schemas.openxmlformats.org/drawingml/2006/main">
               <a:ext uri="{FF2B5EF4-FFF2-40B4-BE49-F238E27FC236}">
-                <a16:creationId xmlns:a16="http://schemas.microsoft.com/office/drawing/2014/main" id="{A1A0854D-6428-40C1-8252-CF860CC6B2B3}"/>
-              </a:ext>
-            </a:extLst>
-          </p:cNvPr>
-          <p:cNvSpPr>
-            <a:spLocks xmlns:a="http://schemas.openxmlformats.org/drawingml/2006/main" noGrp="1"/>
-          </p:cNvSpPr>
-          <p:nvPr/>
-        </p:nvSpPr>
-        <p:spPr>
-          <a:xfrm xmlns:a="http://schemas.openxmlformats.org/drawingml/2006/main">
-            <a:off x="5048250" y="3286125"/>
-            <a:ext cx="2095500" cy="304800"/>
-          </a:xfrm>
-          <a:prstGeom xmlns:a="http://schemas.openxmlformats.org/drawingml/2006/main" prst="rect">
-            <a:avLst/>
-          </a:prstGeom>
-          <a:noFill xmlns:a="http://schemas.openxmlformats.org/drawingml/2006/main"/>
-          <a:ln xmlns:a="http://schemas.openxmlformats.org/drawingml/2006/main" w="0">
-            <a:noFill/>
-            <a:prstDash val="solid"/>
-          </a:ln>
-        </p:spPr>
-        <p:txBody>
-          <a:bodyPr xmlns:a="http://schemas.openxmlformats.org/drawingml/2006/main"/>
-          <a:lstStyle xmlns:a="http://schemas.openxmlformats.org/drawingml/2006/main"/>
-          <a:p xmlns:a="http://schemas.openxmlformats.org/drawingml/2006/main">
-            <a:pPr algn="ctr">
-              <a:buNone/>
-              <a:defRPr sz="1500" b="0">
-                <a:solidFill>
-                  <a:srgbClr val="536271"/>
-                </a:solidFill>
-              </a:defRPr>
-            </a:pPr>
-            <a:r>
-              <a:rPr sz="1500" b="0">
-                <a:solidFill>
-                  <a:srgbClr val="536271"/>
-                </a:solidFill>
-              </a:rPr>
-              <a:t>金額必須合理</a:t>
+                <a16:creationId xmlns:a16="http://schemas.microsoft.com/office/drawing/2014/main" id="{FA65B500-2B7C-4DD7-836E-09F6279AA4E4}"/>
+              </a:ext>
+            </a:extLst>
+          </p:cNvPr>
+          <p:cNvSpPr>
+            <a:spLocks xmlns:a="http://schemas.openxmlformats.org/drawingml/2006/main" noGrp="1"/>
+          </p:cNvSpPr>
+          <p:nvPr/>
+        </p:nvSpPr>
+        <p:spPr>
+          <a:xfrm xmlns:a="http://schemas.openxmlformats.org/drawingml/2006/main">
+            <a:off x="742950" y="4276725"/>
+            <a:ext cx="266700" cy="381000"/>
+          </a:xfrm>
+          <a:prstGeom xmlns:a="http://schemas.openxmlformats.org/drawingml/2006/main" prst="rect">
+            <a:avLst/>
+          </a:prstGeom>
+          <a:noFill xmlns:a="http://schemas.openxmlformats.org/drawingml/2006/main"/>
+          <a:ln xmlns:a="http://schemas.openxmlformats.org/drawingml/2006/main" w="0">
+            <a:noFill/>
+            <a:prstDash val="solid"/>
+          </a:ln>
+        </p:spPr>
+        <p:txBody>
+          <a:bodyPr xmlns:a="http://schemas.openxmlformats.org/drawingml/2006/main"/>
+          <a:lstStyle xmlns:a="http://schemas.openxmlformats.org/drawingml/2006/main"/>
+          <a:p xmlns:a="http://schemas.openxmlformats.org/drawingml/2006/main">
+            <a:pPr algn="l">
+              <a:buNone/>
+              <a:defRPr sz="2175" b="1">
+                <a:solidFill>
+                  <a:srgbClr val="1F9AA5"/>
+                </a:solidFill>
+              </a:defRPr>
+            </a:pPr>
+            <a:r>
+              <a:rPr sz="2175" b="1">
+                <a:solidFill>
+                  <a:srgbClr val="1F9AA5"/>
+                </a:solidFill>
+              </a:rPr>
+              <a:t>•</a:t>
             </a:r>
           </a:p>
         </p:txBody>
@@ -5838,183 +5664,48 @@
           <p:cNvPr id="12" name="">
             <a:extLst xmlns:a="http://schemas.openxmlformats.org/drawingml/2006/main">
               <a:ext uri="{FF2B5EF4-FFF2-40B4-BE49-F238E27FC236}">
-                <a16:creationId xmlns:a16="http://schemas.microsoft.com/office/drawing/2014/main" id="{065BB7C4-C169-40C9-ACFD-C5D406D2241C}"/>
-              </a:ext>
-            </a:extLst>
-          </p:cNvPr>
-          <p:cNvSpPr>
-            <a:spLocks xmlns:a="http://schemas.openxmlformats.org/drawingml/2006/main" noGrp="1"/>
-          </p:cNvSpPr>
-          <p:nvPr/>
-        </p:nvSpPr>
-        <p:spPr>
-          <a:xfrm xmlns:a="http://schemas.openxmlformats.org/drawingml/2006/main">
-            <a:off x="7667625" y="2809875"/>
-            <a:ext cx="666750" cy="571500"/>
-          </a:xfrm>
-          <a:prstGeom xmlns:a="http://schemas.openxmlformats.org/drawingml/2006/main" prst="rect">
-            <a:avLst/>
-          </a:prstGeom>
-          <a:noFill xmlns:a="http://schemas.openxmlformats.org/drawingml/2006/main"/>
-          <a:ln xmlns:a="http://schemas.openxmlformats.org/drawingml/2006/main" w="0">
-            <a:noFill/>
-            <a:prstDash val="solid"/>
-          </a:ln>
-        </p:spPr>
-        <p:txBody>
-          <a:bodyPr xmlns:a="http://schemas.openxmlformats.org/drawingml/2006/main"/>
-          <a:lstStyle xmlns:a="http://schemas.openxmlformats.org/drawingml/2006/main"/>
-          <a:p xmlns:a="http://schemas.openxmlformats.org/drawingml/2006/main">
-            <a:pPr algn="ctr">
-              <a:buNone/>
-              <a:defRPr sz="3300" b="1">
-                <a:solidFill>
-                  <a:srgbClr val="1F9AA5"/>
-                </a:solidFill>
-              </a:defRPr>
-            </a:pPr>
-            <a:r>
-              <a:rPr sz="3300" b="1">
-                <a:solidFill>
-                  <a:srgbClr val="1F9AA5"/>
-                </a:solidFill>
-              </a:rPr>
-              <a:t>→</a:t>
-            </a:r>
-          </a:p>
-        </p:txBody>
-      </p:sp>
-      <p:sp>
-        <p:nvSpPr>
-          <p:cNvPr id="13" name="">
-            <a:extLst xmlns:a="http://schemas.openxmlformats.org/drawingml/2006/main">
-              <a:ext uri="{FF2B5EF4-FFF2-40B4-BE49-F238E27FC236}">
-                <a16:creationId xmlns:a16="http://schemas.microsoft.com/office/drawing/2014/main" id="{A01B800B-2D00-47E3-AA5A-F5DD7D34EC4B}"/>
-              </a:ext>
-            </a:extLst>
-          </p:cNvPr>
-          <p:cNvSpPr>
-            <a:spLocks xmlns:a="http://schemas.openxmlformats.org/drawingml/2006/main" noGrp="1"/>
-          </p:cNvSpPr>
-          <p:nvPr/>
-        </p:nvSpPr>
-        <p:spPr>
-          <a:xfrm xmlns:a="http://schemas.openxmlformats.org/drawingml/2006/main">
-            <a:off x="8572500" y="2143125"/>
-            <a:ext cx="2667000" cy="2000250"/>
-          </a:xfrm>
-          <a:prstGeom xmlns:a="http://schemas.openxmlformats.org/drawingml/2006/main" prst="roundRect">
-            <a:avLst>
-              <a:gd name="adj" fmla="val 7619"/>
-            </a:avLst>
-          </a:prstGeom>
-          <a:solidFill xmlns:a="http://schemas.openxmlformats.org/drawingml/2006/main">
-            <a:srgbClr val="1F9AA5"/>
-          </a:solidFill>
-          <a:ln xmlns:a="http://schemas.openxmlformats.org/drawingml/2006/main" w="0">
-            <a:noFill/>
-            <a:prstDash val="solid"/>
-          </a:ln>
-        </p:spPr>
-      </p:sp>
-      <p:sp>
-        <p:nvSpPr>
-          <p:cNvPr id="14" name="">
-            <a:extLst xmlns:a="http://schemas.openxmlformats.org/drawingml/2006/main">
-              <a:ext uri="{FF2B5EF4-FFF2-40B4-BE49-F238E27FC236}">
-                <a16:creationId xmlns:a16="http://schemas.microsoft.com/office/drawing/2014/main" id="{9B5B932D-54B2-4945-B9F3-C155C927B64B}"/>
-              </a:ext>
-            </a:extLst>
-          </p:cNvPr>
-          <p:cNvSpPr>
-            <a:spLocks xmlns:a="http://schemas.openxmlformats.org/drawingml/2006/main" noGrp="1"/>
-          </p:cNvSpPr>
-          <p:nvPr/>
-        </p:nvSpPr>
-        <p:spPr>
-          <a:xfrm xmlns:a="http://schemas.openxmlformats.org/drawingml/2006/main">
-            <a:off x="8858250" y="2524125"/>
-            <a:ext cx="2095500" cy="476250"/>
-          </a:xfrm>
-          <a:prstGeom xmlns:a="http://schemas.openxmlformats.org/drawingml/2006/main" prst="rect">
-            <a:avLst/>
-          </a:prstGeom>
-          <a:noFill xmlns:a="http://schemas.openxmlformats.org/drawingml/2006/main"/>
-          <a:ln xmlns:a="http://schemas.openxmlformats.org/drawingml/2006/main" w="0">
-            <a:noFill/>
-            <a:prstDash val="solid"/>
-          </a:ln>
-        </p:spPr>
-        <p:txBody>
-          <a:bodyPr xmlns:a="http://schemas.openxmlformats.org/drawingml/2006/main"/>
-          <a:lstStyle xmlns:a="http://schemas.openxmlformats.org/drawingml/2006/main"/>
-          <a:p xmlns:a="http://schemas.openxmlformats.org/drawingml/2006/main">
-            <a:pPr algn="ctr">
-              <a:buNone/>
-              <a:defRPr sz="2550" b="1">
-                <a:solidFill>
-                  <a:srgbClr val="FFFFFF"/>
-                </a:solidFill>
-              </a:defRPr>
-            </a:pPr>
-            <a:r>
-              <a:rPr sz="2550" b="1">
-                <a:solidFill>
-                  <a:srgbClr val="FFFFFF"/>
-                </a:solidFill>
-              </a:rPr>
-              <a:t>選單</a:t>
-            </a:r>
-          </a:p>
-        </p:txBody>
-      </p:sp>
-      <p:sp>
-        <p:nvSpPr>
-          <p:cNvPr id="15" name="">
-            <a:extLst xmlns:a="http://schemas.openxmlformats.org/drawingml/2006/main">
-              <a:ext uri="{FF2B5EF4-FFF2-40B4-BE49-F238E27FC236}">
-                <a16:creationId xmlns:a16="http://schemas.microsoft.com/office/drawing/2014/main" id="{ADEE76B3-E66C-4374-B24B-91C18AC8028F}"/>
-              </a:ext>
-            </a:extLst>
-          </p:cNvPr>
-          <p:cNvSpPr>
-            <a:spLocks xmlns:a="http://schemas.openxmlformats.org/drawingml/2006/main" noGrp="1"/>
-          </p:cNvSpPr>
-          <p:nvPr/>
-        </p:nvSpPr>
-        <p:spPr>
-          <a:xfrm xmlns:a="http://schemas.openxmlformats.org/drawingml/2006/main">
-            <a:off x="8858250" y="3286125"/>
-            <a:ext cx="2095500" cy="304800"/>
-          </a:xfrm>
-          <a:prstGeom xmlns:a="http://schemas.openxmlformats.org/drawingml/2006/main" prst="rect">
-            <a:avLst/>
-          </a:prstGeom>
-          <a:noFill xmlns:a="http://schemas.openxmlformats.org/drawingml/2006/main"/>
-          <a:ln xmlns:a="http://schemas.openxmlformats.org/drawingml/2006/main" w="0">
-            <a:noFill/>
-            <a:prstDash val="solid"/>
-          </a:ln>
-        </p:spPr>
-        <p:txBody>
-          <a:bodyPr xmlns:a="http://schemas.openxmlformats.org/drawingml/2006/main"/>
-          <a:lstStyle xmlns:a="http://schemas.openxmlformats.org/drawingml/2006/main"/>
-          <a:p xmlns:a="http://schemas.openxmlformats.org/drawingml/2006/main">
-            <a:pPr algn="ctr">
-              <a:buNone/>
-              <a:defRPr sz="1500" b="0">
-                <a:solidFill>
-                  <a:srgbClr val="E8F4F5"/>
-                </a:solidFill>
-              </a:defRPr>
-            </a:pPr>
-            <a:r>
-              <a:rPr sz="1500" b="0">
-                <a:solidFill>
-                  <a:srgbClr val="E8F4F5"/>
-                </a:solidFill>
-              </a:rPr>
-              <a:t>輸入 0 才離開</a:t>
+                <a16:creationId xmlns:a16="http://schemas.microsoft.com/office/drawing/2014/main" id="{0AA0C2CA-8000-43F1-8A81-A29D5928BEFB}"/>
+              </a:ext>
+            </a:extLst>
+          </p:cNvPr>
+          <p:cNvSpPr>
+            <a:spLocks xmlns:a="http://schemas.openxmlformats.org/drawingml/2006/main" noGrp="1"/>
+          </p:cNvSpPr>
+          <p:nvPr/>
+        </p:nvSpPr>
+        <p:spPr>
+          <a:xfrm xmlns:a="http://schemas.openxmlformats.org/drawingml/2006/main">
+            <a:off x="1123950" y="4276725"/>
+            <a:ext cx="10287000" cy="552450"/>
+          </a:xfrm>
+          <a:prstGeom xmlns:a="http://schemas.openxmlformats.org/drawingml/2006/main" prst="rect">
+            <a:avLst/>
+          </a:prstGeom>
+          <a:noFill xmlns:a="http://schemas.openxmlformats.org/drawingml/2006/main"/>
+          <a:ln xmlns:a="http://schemas.openxmlformats.org/drawingml/2006/main" w="0">
+            <a:noFill/>
+            <a:prstDash val="solid"/>
+          </a:ln>
+        </p:spPr>
+        <p:txBody>
+          <a:bodyPr xmlns:a="http://schemas.openxmlformats.org/drawingml/2006/main"/>
+          <a:lstStyle xmlns:a="http://schemas.openxmlformats.org/drawingml/2006/main"/>
+          <a:p xmlns:a="http://schemas.openxmlformats.org/drawingml/2006/main">
+            <a:pPr algn="l">
+              <a:buNone/>
+              <a:defRPr sz="1950" b="0">
+                <a:solidFill>
+                  <a:srgbClr val="15202B"/>
+                </a:solidFill>
+              </a:defRPr>
+            </a:pPr>
+            <a:r>
+              <a:rPr sz="1950" b="0">
+                <a:solidFill>
+                  <a:srgbClr val="15202B"/>
+                </a:solidFill>
+              </a:rPr>
+              <a:t>把 input 當成數字直接比較</a:t>
             </a:r>
           </a:p>
         </p:txBody>
@@ -6022,7 +5713,7 @@
     </p:spTree>
     <p:extLst>
       <p:ext uri="{BB962C8B-B14F-4D97-AF65-F5344CB8AC3E}">
-        <p14:creationId xmlns:p14="http://schemas.microsoft.com/office/powerpoint/2010/main" val="778389022"/>
+        <p14:creationId xmlns:p14="http://schemas.microsoft.com/office/powerpoint/2010/main" val="1940456672"/>
       </p:ext>
     </p:extLst>
   </p:cSld>
@@ -6050,10 +5741,10 @@
       </p:grpSpPr>
       <p:sp>
         <p:nvSpPr>
-          <p:cNvPr id="11" name="">
-            <a:extLst xmlns:a="http://schemas.openxmlformats.org/drawingml/2006/main">
-              <a:ext uri="{FF2B5EF4-FFF2-40B4-BE49-F238E27FC236}">
-                <a16:creationId xmlns:a16="http://schemas.microsoft.com/office/drawing/2014/main" id="{4BB93321-73C1-425A-ACD3-1D738C945B00}"/>
+          <p:cNvPr id="16" name="">
+            <a:extLst xmlns:a="http://schemas.openxmlformats.org/drawingml/2006/main">
+              <a:ext uri="{FF2B5EF4-FFF2-40B4-BE49-F238E27FC236}">
+                <a16:creationId xmlns:a16="http://schemas.microsoft.com/office/drawing/2014/main" id="{D2F1CAE4-187A-4F0A-9022-7437844E17DF}"/>
               </a:ext>
             </a:extLst>
           </p:cNvPr>
@@ -6084,7 +5775,7 @@
           <p:cNvPr id="2" name="">
             <a:extLst xmlns:a="http://schemas.openxmlformats.org/drawingml/2006/main">
               <a:ext uri="{FF2B5EF4-FFF2-40B4-BE49-F238E27FC236}">
-                <a16:creationId xmlns:a16="http://schemas.microsoft.com/office/drawing/2014/main" id="{13EF444B-01BF-4A4B-8944-EE903C160C92}"/>
+                <a16:creationId xmlns:a16="http://schemas.microsoft.com/office/drawing/2014/main" id="{2715A867-3276-404D-8C24-77366B37ED2B}"/>
               </a:ext>
             </a:extLst>
           </p:cNvPr>
@@ -6125,7 +5816,7 @@
                   <a:srgbClr val="1F9AA5"/>
                 </a:solidFill>
               </a:rPr>
-              <a:t>驗收題</a:t>
+              <a:t>小作品</a:t>
             </a:r>
           </a:p>
         </p:txBody>
@@ -6135,7 +5826,7 @@
           <p:cNvPr id="3" name="">
             <a:extLst xmlns:a="http://schemas.openxmlformats.org/drawingml/2006/main">
               <a:ext uri="{FF2B5EF4-FFF2-40B4-BE49-F238E27FC236}">
-                <a16:creationId xmlns:a16="http://schemas.microsoft.com/office/drawing/2014/main" id="{23B36091-3DEF-464B-8B37-A611337BFE52}"/>
+                <a16:creationId xmlns:a16="http://schemas.microsoft.com/office/drawing/2014/main" id="{D222E0D9-D661-4469-9627-C8C6985B429F}"/>
               </a:ext>
             </a:extLst>
           </p:cNvPr>
@@ -6176,7 +5867,7 @@
                   <a:srgbClr val="0B2239"/>
                 </a:solidFill>
               </a:rPr>
-              <a:t>提款成功前要通過三個檢查</a:t>
+              <a:t>ATM：查詢、存款、提款與離開</a:t>
             </a:r>
           </a:p>
         </p:txBody>
@@ -6186,7 +5877,7 @@
           <p:cNvPr id="4" name="">
             <a:extLst xmlns:a="http://schemas.openxmlformats.org/drawingml/2006/main">
               <a:ext uri="{FF2B5EF4-FFF2-40B4-BE49-F238E27FC236}">
-                <a16:creationId xmlns:a16="http://schemas.microsoft.com/office/drawing/2014/main" id="{F58E7EE8-AD53-4B72-BA9D-410A3502F197}"/>
+                <a16:creationId xmlns:a16="http://schemas.microsoft.com/office/drawing/2014/main" id="{1E214BAF-B825-4761-B241-2C3115FA09F1}"/>
               </a:ext>
             </a:extLst>
           </p:cNvPr>
@@ -6237,23 +5928,23 @@
           <p:cNvPr id="5" name="">
             <a:extLst xmlns:a="http://schemas.openxmlformats.org/drawingml/2006/main">
               <a:ext uri="{FF2B5EF4-FFF2-40B4-BE49-F238E27FC236}">
-                <a16:creationId xmlns:a16="http://schemas.microsoft.com/office/drawing/2014/main" id="{1839F911-D622-4FA5-A6AA-267AE7BCDCDA}"/>
-              </a:ext>
-            </a:extLst>
-          </p:cNvPr>
-          <p:cNvSpPr>
-            <a:spLocks xmlns:a="http://schemas.openxmlformats.org/drawingml/2006/main" noGrp="1"/>
-          </p:cNvSpPr>
-          <p:nvPr/>
-        </p:nvSpPr>
-        <p:spPr>
-          <a:xfrm xmlns:a="http://schemas.openxmlformats.org/drawingml/2006/main">
-            <a:off x="762000" y="1857375"/>
-            <a:ext cx="5095875" cy="3143250"/>
+                <a16:creationId xmlns:a16="http://schemas.microsoft.com/office/drawing/2014/main" id="{B7046AAA-3079-4B02-B281-1758AB3E68BC}"/>
+              </a:ext>
+            </a:extLst>
+          </p:cNvPr>
+          <p:cNvSpPr>
+            <a:spLocks xmlns:a="http://schemas.openxmlformats.org/drawingml/2006/main" noGrp="1"/>
+          </p:cNvSpPr>
+          <p:nvPr/>
+        </p:nvSpPr>
+        <p:spPr>
+          <a:xfrm xmlns:a="http://schemas.openxmlformats.org/drawingml/2006/main">
+            <a:off x="952500" y="2143125"/>
+            <a:ext cx="2667000" cy="2000250"/>
           </a:xfrm>
           <a:prstGeom xmlns:a="http://schemas.openxmlformats.org/drawingml/2006/main" prst="roundRect">
             <a:avLst>
-              <a:gd name="adj" fmla="val 4848"/>
+              <a:gd name="adj" fmla="val 7619"/>
             </a:avLst>
           </a:prstGeom>
           <a:solidFill xmlns:a="http://schemas.openxmlformats.org/drawingml/2006/main">
@@ -6272,48 +5963,48 @@
           <p:cNvPr id="6" name="">
             <a:extLst xmlns:a="http://schemas.openxmlformats.org/drawingml/2006/main">
               <a:ext uri="{FF2B5EF4-FFF2-40B4-BE49-F238E27FC236}">
-                <a16:creationId xmlns:a16="http://schemas.microsoft.com/office/drawing/2014/main" id="{73EB0691-40AC-4384-8469-D33BE5A5DDF7}"/>
-              </a:ext>
-            </a:extLst>
-          </p:cNvPr>
-          <p:cNvSpPr>
-            <a:spLocks xmlns:a="http://schemas.openxmlformats.org/drawingml/2006/main" noGrp="1"/>
-          </p:cNvSpPr>
-          <p:nvPr/>
-        </p:nvSpPr>
-        <p:spPr>
-          <a:xfrm xmlns:a="http://schemas.openxmlformats.org/drawingml/2006/main">
-            <a:off x="1047750" y="2143125"/>
-            <a:ext cx="4524375" cy="438150"/>
-          </a:xfrm>
-          <a:prstGeom xmlns:a="http://schemas.openxmlformats.org/drawingml/2006/main" prst="rect">
-            <a:avLst/>
-          </a:prstGeom>
-          <a:noFill xmlns:a="http://schemas.openxmlformats.org/drawingml/2006/main"/>
-          <a:ln xmlns:a="http://schemas.openxmlformats.org/drawingml/2006/main" w="0">
-            <a:noFill/>
-            <a:prstDash val="solid"/>
-          </a:ln>
-        </p:spPr>
-        <p:txBody>
-          <a:bodyPr xmlns:a="http://schemas.openxmlformats.org/drawingml/2006/main"/>
-          <a:lstStyle xmlns:a="http://schemas.openxmlformats.org/drawingml/2006/main"/>
-          <a:p xmlns:a="http://schemas.openxmlformats.org/drawingml/2006/main">
-            <a:pPr algn="l">
-              <a:buNone/>
-              <a:defRPr sz="2250" b="1">
+                <a16:creationId xmlns:a16="http://schemas.microsoft.com/office/drawing/2014/main" id="{A5758611-4227-4A38-8E90-BBB878487FD6}"/>
+              </a:ext>
+            </a:extLst>
+          </p:cNvPr>
+          <p:cNvSpPr>
+            <a:spLocks xmlns:a="http://schemas.openxmlformats.org/drawingml/2006/main" noGrp="1"/>
+          </p:cNvSpPr>
+          <p:nvPr/>
+        </p:nvSpPr>
+        <p:spPr>
+          <a:xfrm xmlns:a="http://schemas.openxmlformats.org/drawingml/2006/main">
+            <a:off x="1238250" y="2524125"/>
+            <a:ext cx="2095500" cy="476250"/>
+          </a:xfrm>
+          <a:prstGeom xmlns:a="http://schemas.openxmlformats.org/drawingml/2006/main" prst="rect">
+            <a:avLst/>
+          </a:prstGeom>
+          <a:noFill xmlns:a="http://schemas.openxmlformats.org/drawingml/2006/main"/>
+          <a:ln xmlns:a="http://schemas.openxmlformats.org/drawingml/2006/main" w="0">
+            <a:noFill/>
+            <a:prstDash val="solid"/>
+          </a:ln>
+        </p:spPr>
+        <p:txBody>
+          <a:bodyPr xmlns:a="http://schemas.openxmlformats.org/drawingml/2006/main"/>
+          <a:lstStyle xmlns:a="http://schemas.openxmlformats.org/drawingml/2006/main"/>
+          <a:p xmlns:a="http://schemas.openxmlformats.org/drawingml/2006/main">
+            <a:pPr algn="ctr">
+              <a:buNone/>
+              <a:defRPr sz="2700" b="1">
                 <a:solidFill>
                   <a:srgbClr val="0B2239"/>
                 </a:solidFill>
               </a:defRPr>
             </a:pPr>
             <a:r>
-              <a:rPr sz="2250" b="1">
+              <a:rPr sz="2700" b="1">
                 <a:solidFill>
                   <a:srgbClr val="0B2239"/>
                 </a:solidFill>
               </a:rPr>
-              <a:t>格式</a:t>
+              <a:t>餘額</a:t>
             </a:r>
           </a:p>
         </p:txBody>
@@ -6323,48 +6014,48 @@
           <p:cNvPr id="7" name="">
             <a:extLst xmlns:a="http://schemas.openxmlformats.org/drawingml/2006/main">
               <a:ext uri="{FF2B5EF4-FFF2-40B4-BE49-F238E27FC236}">
-                <a16:creationId xmlns:a16="http://schemas.microsoft.com/office/drawing/2014/main" id="{6FFFA900-3FA5-466B-BEEC-8512E30E9041}"/>
-              </a:ext>
-            </a:extLst>
-          </p:cNvPr>
-          <p:cNvSpPr>
-            <a:spLocks xmlns:a="http://schemas.openxmlformats.org/drawingml/2006/main" noGrp="1"/>
-          </p:cNvSpPr>
-          <p:nvPr/>
-        </p:nvSpPr>
-        <p:spPr>
-          <a:xfrm xmlns:a="http://schemas.openxmlformats.org/drawingml/2006/main">
-            <a:off x="1047750" y="2857500"/>
-            <a:ext cx="4333875" cy="1809750"/>
-          </a:xfrm>
-          <a:prstGeom xmlns:a="http://schemas.openxmlformats.org/drawingml/2006/main" prst="rect">
-            <a:avLst/>
-          </a:prstGeom>
-          <a:noFill xmlns:a="http://schemas.openxmlformats.org/drawingml/2006/main"/>
-          <a:ln xmlns:a="http://schemas.openxmlformats.org/drawingml/2006/main" w="0">
-            <a:noFill/>
-            <a:prstDash val="solid"/>
-          </a:ln>
-        </p:spPr>
-        <p:txBody>
-          <a:bodyPr xmlns:a="http://schemas.openxmlformats.org/drawingml/2006/main"/>
-          <a:lstStyle xmlns:a="http://schemas.openxmlformats.org/drawingml/2006/main"/>
-          <a:p xmlns:a="http://schemas.openxmlformats.org/drawingml/2006/main">
-            <a:pPr algn="l">
-              <a:buNone/>
-              <a:defRPr sz="1800" b="0">
-                <a:solidFill>
-                  <a:srgbClr val="15202B"/>
-                </a:solidFill>
-              </a:defRPr>
-            </a:pPr>
-            <a:r>
-              <a:rPr sz="1800" b="0">
-                <a:solidFill>
-                  <a:srgbClr val="15202B"/>
-                </a:solidFill>
-              </a:rPr>
-              <a:t>金額必須是整數</a:t>
+                <a16:creationId xmlns:a16="http://schemas.microsoft.com/office/drawing/2014/main" id="{581C7938-2E5C-44A1-AE79-D6E1E2CD6FA4}"/>
+              </a:ext>
+            </a:extLst>
+          </p:cNvPr>
+          <p:cNvSpPr>
+            <a:spLocks xmlns:a="http://schemas.openxmlformats.org/drawingml/2006/main" noGrp="1"/>
+          </p:cNvSpPr>
+          <p:nvPr/>
+        </p:nvSpPr>
+        <p:spPr>
+          <a:xfrm xmlns:a="http://schemas.openxmlformats.org/drawingml/2006/main">
+            <a:off x="1238250" y="3286125"/>
+            <a:ext cx="2095500" cy="304800"/>
+          </a:xfrm>
+          <a:prstGeom xmlns:a="http://schemas.openxmlformats.org/drawingml/2006/main" prst="rect">
+            <a:avLst/>
+          </a:prstGeom>
+          <a:noFill xmlns:a="http://schemas.openxmlformats.org/drawingml/2006/main"/>
+          <a:ln xmlns:a="http://schemas.openxmlformats.org/drawingml/2006/main" w="0">
+            <a:noFill/>
+            <a:prstDash val="solid"/>
+          </a:ln>
+        </p:spPr>
+        <p:txBody>
+          <a:bodyPr xmlns:a="http://schemas.openxmlformats.org/drawingml/2006/main"/>
+          <a:lstStyle xmlns:a="http://schemas.openxmlformats.org/drawingml/2006/main"/>
+          <a:p xmlns:a="http://schemas.openxmlformats.org/drawingml/2006/main">
+            <a:pPr algn="ctr">
+              <a:buNone/>
+              <a:defRPr sz="1500" b="0">
+                <a:solidFill>
+                  <a:srgbClr val="536271"/>
+                </a:solidFill>
+              </a:defRPr>
+            </a:pPr>
+            <a:r>
+              <a:rPr sz="1500" b="0">
+                <a:solidFill>
+                  <a:srgbClr val="536271"/>
+                </a:solidFill>
+              </a:rPr>
+              <a:t>每次操作後更新</a:t>
             </a:r>
           </a:p>
         </p:txBody>
@@ -6374,23 +6065,74 @@
           <p:cNvPr id="8" name="">
             <a:extLst xmlns:a="http://schemas.openxmlformats.org/drawingml/2006/main">
               <a:ext uri="{FF2B5EF4-FFF2-40B4-BE49-F238E27FC236}">
-                <a16:creationId xmlns:a16="http://schemas.microsoft.com/office/drawing/2014/main" id="{49ACFB57-94D3-417E-B292-7095704B3B8D}"/>
-              </a:ext>
-            </a:extLst>
-          </p:cNvPr>
-          <p:cNvSpPr>
-            <a:spLocks xmlns:a="http://schemas.openxmlformats.org/drawingml/2006/main" noGrp="1"/>
-          </p:cNvSpPr>
-          <p:nvPr/>
-        </p:nvSpPr>
-        <p:spPr>
-          <a:xfrm xmlns:a="http://schemas.openxmlformats.org/drawingml/2006/main">
-            <a:off x="6334125" y="1857375"/>
-            <a:ext cx="5095875" cy="3143250"/>
+                <a16:creationId xmlns:a16="http://schemas.microsoft.com/office/drawing/2014/main" id="{3BCD244E-6575-40A7-B5EE-DBC5E3852FFB}"/>
+              </a:ext>
+            </a:extLst>
+          </p:cNvPr>
+          <p:cNvSpPr>
+            <a:spLocks xmlns:a="http://schemas.openxmlformats.org/drawingml/2006/main" noGrp="1"/>
+          </p:cNvSpPr>
+          <p:nvPr/>
+        </p:nvSpPr>
+        <p:spPr>
+          <a:xfrm xmlns:a="http://schemas.openxmlformats.org/drawingml/2006/main">
+            <a:off x="3857625" y="2809875"/>
+            <a:ext cx="666750" cy="571500"/>
+          </a:xfrm>
+          <a:prstGeom xmlns:a="http://schemas.openxmlformats.org/drawingml/2006/main" prst="rect">
+            <a:avLst/>
+          </a:prstGeom>
+          <a:noFill xmlns:a="http://schemas.openxmlformats.org/drawingml/2006/main"/>
+          <a:ln xmlns:a="http://schemas.openxmlformats.org/drawingml/2006/main" w="0">
+            <a:noFill/>
+            <a:prstDash val="solid"/>
+          </a:ln>
+        </p:spPr>
+        <p:txBody>
+          <a:bodyPr xmlns:a="http://schemas.openxmlformats.org/drawingml/2006/main"/>
+          <a:lstStyle xmlns:a="http://schemas.openxmlformats.org/drawingml/2006/main"/>
+          <a:p xmlns:a="http://schemas.openxmlformats.org/drawingml/2006/main">
+            <a:pPr algn="ctr">
+              <a:buNone/>
+              <a:defRPr sz="3300" b="1">
+                <a:solidFill>
+                  <a:srgbClr val="1F9AA5"/>
+                </a:solidFill>
+              </a:defRPr>
+            </a:pPr>
+            <a:r>
+              <a:rPr sz="3300" b="1">
+                <a:solidFill>
+                  <a:srgbClr val="1F9AA5"/>
+                </a:solidFill>
+              </a:rPr>
+              <a:t>+</a:t>
+            </a:r>
+          </a:p>
+        </p:txBody>
+      </p:sp>
+      <p:sp>
+        <p:nvSpPr>
+          <p:cNvPr id="9" name="">
+            <a:extLst xmlns:a="http://schemas.openxmlformats.org/drawingml/2006/main">
+              <a:ext uri="{FF2B5EF4-FFF2-40B4-BE49-F238E27FC236}">
+                <a16:creationId xmlns:a16="http://schemas.microsoft.com/office/drawing/2014/main" id="{44536D3C-2493-4D9A-9D05-D6265A351975}"/>
+              </a:ext>
+            </a:extLst>
+          </p:cNvPr>
+          <p:cNvSpPr>
+            <a:spLocks xmlns:a="http://schemas.openxmlformats.org/drawingml/2006/main" noGrp="1"/>
+          </p:cNvSpPr>
+          <p:nvPr/>
+        </p:nvSpPr>
+        <p:spPr>
+          <a:xfrm xmlns:a="http://schemas.openxmlformats.org/drawingml/2006/main">
+            <a:off x="4762500" y="2143125"/>
+            <a:ext cx="2667000" cy="2000250"/>
           </a:xfrm>
           <a:prstGeom xmlns:a="http://schemas.openxmlformats.org/drawingml/2006/main" prst="roundRect">
             <a:avLst>
-              <a:gd name="adj" fmla="val 4848"/>
+              <a:gd name="adj" fmla="val 7619"/>
             </a:avLst>
           </a:prstGeom>
           <a:solidFill xmlns:a="http://schemas.openxmlformats.org/drawingml/2006/main">
@@ -6406,138 +6148,288 @@
       </p:sp>
       <p:sp>
         <p:nvSpPr>
-          <p:cNvPr id="9" name="">
-            <a:extLst xmlns:a="http://schemas.openxmlformats.org/drawingml/2006/main">
-              <a:ext uri="{FF2B5EF4-FFF2-40B4-BE49-F238E27FC236}">
-                <a16:creationId xmlns:a16="http://schemas.microsoft.com/office/drawing/2014/main" id="{F8564DC8-4BC7-439B-9302-C372EAE8C628}"/>
-              </a:ext>
-            </a:extLst>
-          </p:cNvPr>
-          <p:cNvSpPr>
-            <a:spLocks xmlns:a="http://schemas.openxmlformats.org/drawingml/2006/main" noGrp="1"/>
-          </p:cNvSpPr>
-          <p:nvPr/>
-        </p:nvSpPr>
-        <p:spPr>
-          <a:xfrm xmlns:a="http://schemas.openxmlformats.org/drawingml/2006/main">
-            <a:off x="6619875" y="2143125"/>
-            <a:ext cx="4524375" cy="438150"/>
-          </a:xfrm>
-          <a:prstGeom xmlns:a="http://schemas.openxmlformats.org/drawingml/2006/main" prst="rect">
-            <a:avLst/>
-          </a:prstGeom>
-          <a:noFill xmlns:a="http://schemas.openxmlformats.org/drawingml/2006/main"/>
-          <a:ln xmlns:a="http://schemas.openxmlformats.org/drawingml/2006/main" w="0">
-            <a:noFill/>
-            <a:prstDash val="solid"/>
-          </a:ln>
-        </p:spPr>
-        <p:txBody>
-          <a:bodyPr xmlns:a="http://schemas.openxmlformats.org/drawingml/2006/main"/>
-          <a:lstStyle xmlns:a="http://schemas.openxmlformats.org/drawingml/2006/main"/>
-          <a:p xmlns:a="http://schemas.openxmlformats.org/drawingml/2006/main">
-            <a:pPr algn="l">
-              <a:buNone/>
-              <a:defRPr sz="2250" b="1">
+          <p:cNvPr id="10" name="">
+            <a:extLst xmlns:a="http://schemas.openxmlformats.org/drawingml/2006/main">
+              <a:ext uri="{FF2B5EF4-FFF2-40B4-BE49-F238E27FC236}">
+                <a16:creationId xmlns:a16="http://schemas.microsoft.com/office/drawing/2014/main" id="{18F6D736-0200-4904-9249-1832206F2D04}"/>
+              </a:ext>
+            </a:extLst>
+          </p:cNvPr>
+          <p:cNvSpPr>
+            <a:spLocks xmlns:a="http://schemas.openxmlformats.org/drawingml/2006/main" noGrp="1"/>
+          </p:cNvSpPr>
+          <p:nvPr/>
+        </p:nvSpPr>
+        <p:spPr>
+          <a:xfrm xmlns:a="http://schemas.openxmlformats.org/drawingml/2006/main">
+            <a:off x="5048250" y="2524125"/>
+            <a:ext cx="2095500" cy="476250"/>
+          </a:xfrm>
+          <a:prstGeom xmlns:a="http://schemas.openxmlformats.org/drawingml/2006/main" prst="rect">
+            <a:avLst/>
+          </a:prstGeom>
+          <a:noFill xmlns:a="http://schemas.openxmlformats.org/drawingml/2006/main"/>
+          <a:ln xmlns:a="http://schemas.openxmlformats.org/drawingml/2006/main" w="0">
+            <a:noFill/>
+            <a:prstDash val="solid"/>
+          </a:ln>
+        </p:spPr>
+        <p:txBody>
+          <a:bodyPr xmlns:a="http://schemas.openxmlformats.org/drawingml/2006/main"/>
+          <a:lstStyle xmlns:a="http://schemas.openxmlformats.org/drawingml/2006/main"/>
+          <a:p xmlns:a="http://schemas.openxmlformats.org/drawingml/2006/main">
+            <a:pPr algn="ctr">
+              <a:buNone/>
+              <a:defRPr sz="2550" b="1">
                 <a:solidFill>
                   <a:srgbClr val="0B2239"/>
                 </a:solidFill>
               </a:defRPr>
             </a:pPr>
             <a:r>
-              <a:rPr sz="2250" b="1">
+              <a:rPr sz="2550" b="1">
                 <a:solidFill>
                   <a:srgbClr val="0B2239"/>
                 </a:solidFill>
               </a:rPr>
-              <a:t>範圍</a:t>
-            </a:r>
-          </a:p>
-        </p:txBody>
-      </p:sp>
-      <p:sp>
-        <p:nvSpPr>
-          <p:cNvPr id="10" name="">
-            <a:extLst xmlns:a="http://schemas.openxmlformats.org/drawingml/2006/main">
-              <a:ext uri="{FF2B5EF4-FFF2-40B4-BE49-F238E27FC236}">
-                <a16:creationId xmlns:a16="http://schemas.microsoft.com/office/drawing/2014/main" id="{90C622B6-8526-4A06-96D7-A1390F1E6826}"/>
-              </a:ext>
-            </a:extLst>
-          </p:cNvPr>
-          <p:cNvSpPr>
-            <a:spLocks xmlns:a="http://schemas.openxmlformats.org/drawingml/2006/main" noGrp="1"/>
-          </p:cNvSpPr>
-          <p:nvPr/>
-        </p:nvSpPr>
-        <p:spPr>
-          <a:xfrm xmlns:a="http://schemas.openxmlformats.org/drawingml/2006/main">
-            <a:off x="6619875" y="2857500"/>
-            <a:ext cx="4333875" cy="1809750"/>
-          </a:xfrm>
-          <a:prstGeom xmlns:a="http://schemas.openxmlformats.org/drawingml/2006/main" prst="rect">
-            <a:avLst/>
-          </a:prstGeom>
-          <a:noFill xmlns:a="http://schemas.openxmlformats.org/drawingml/2006/main"/>
-          <a:ln xmlns:a="http://schemas.openxmlformats.org/drawingml/2006/main" w="0">
-            <a:noFill/>
-            <a:prstDash val="solid"/>
-          </a:ln>
-        </p:spPr>
-        <p:txBody>
-          <a:bodyPr xmlns:a="http://schemas.openxmlformats.org/drawingml/2006/main"/>
-          <a:lstStyle xmlns:a="http://schemas.openxmlformats.org/drawingml/2006/main"/>
-          <a:p xmlns:a="http://schemas.openxmlformats.org/drawingml/2006/main">
-            <a:pPr algn="l">
-              <a:buNone/>
-              <a:defRPr sz="1800" b="0">
-                <a:solidFill>
-                  <a:srgbClr val="15202B"/>
-                </a:solidFill>
-              </a:defRPr>
-            </a:pPr>
-            <a:r>
-              <a:rPr sz="1800" b="0">
-                <a:solidFill>
-                  <a:srgbClr val="15202B"/>
-                </a:solidFill>
-              </a:rPr>
-              <a:t>金額 &gt; 0</a:t>
-            </a:r>
-          </a:p>
-          <a:p xmlns:a="http://schemas.openxmlformats.org/drawingml/2006/main">
-            <a:pPr algn="l">
-              <a:buNone/>
-              <a:defRPr sz="1800" b="0">
-                <a:solidFill>
-                  <a:srgbClr val="15202B"/>
-                </a:solidFill>
-              </a:defRPr>
-            </a:pPr>
-            <a:r>
-              <a:rPr sz="1800" b="0">
-                <a:solidFill>
-                  <a:srgbClr val="15202B"/>
-                </a:solidFill>
-              </a:rPr>
-              <a:t>金額 &lt;= 餘額</a:t>
-            </a:r>
-          </a:p>
-          <a:p xmlns:a="http://schemas.openxmlformats.org/drawingml/2006/main">
-            <a:pPr algn="l">
-              <a:buNone/>
-              <a:defRPr sz="1800" b="0">
-                <a:solidFill>
-                  <a:srgbClr val="15202B"/>
-                </a:solidFill>
-              </a:defRPr>
-            </a:pPr>
-            <a:r>
-              <a:rPr sz="1800" b="0">
-                <a:solidFill>
-                  <a:srgbClr val="15202B"/>
-                </a:solidFill>
-              </a:rPr>
-              <a:t>錯誤時重新輸入</a:t>
+              <a:t>驗證</a:t>
+            </a:r>
+          </a:p>
+        </p:txBody>
+      </p:sp>
+      <p:sp>
+        <p:nvSpPr>
+          <p:cNvPr id="11" name="">
+            <a:extLst xmlns:a="http://schemas.openxmlformats.org/drawingml/2006/main">
+              <a:ext uri="{FF2B5EF4-FFF2-40B4-BE49-F238E27FC236}">
+                <a16:creationId xmlns:a16="http://schemas.microsoft.com/office/drawing/2014/main" id="{A1A0854D-6428-40C1-8252-CF860CC6B2B3}"/>
+              </a:ext>
+            </a:extLst>
+          </p:cNvPr>
+          <p:cNvSpPr>
+            <a:spLocks xmlns:a="http://schemas.openxmlformats.org/drawingml/2006/main" noGrp="1"/>
+          </p:cNvSpPr>
+          <p:nvPr/>
+        </p:nvSpPr>
+        <p:spPr>
+          <a:xfrm xmlns:a="http://schemas.openxmlformats.org/drawingml/2006/main">
+            <a:off x="5048250" y="3286125"/>
+            <a:ext cx="2095500" cy="304800"/>
+          </a:xfrm>
+          <a:prstGeom xmlns:a="http://schemas.openxmlformats.org/drawingml/2006/main" prst="rect">
+            <a:avLst/>
+          </a:prstGeom>
+          <a:noFill xmlns:a="http://schemas.openxmlformats.org/drawingml/2006/main"/>
+          <a:ln xmlns:a="http://schemas.openxmlformats.org/drawingml/2006/main" w="0">
+            <a:noFill/>
+            <a:prstDash val="solid"/>
+          </a:ln>
+        </p:spPr>
+        <p:txBody>
+          <a:bodyPr xmlns:a="http://schemas.openxmlformats.org/drawingml/2006/main"/>
+          <a:lstStyle xmlns:a="http://schemas.openxmlformats.org/drawingml/2006/main"/>
+          <a:p xmlns:a="http://schemas.openxmlformats.org/drawingml/2006/main">
+            <a:pPr algn="ctr">
+              <a:buNone/>
+              <a:defRPr sz="1500" b="0">
+                <a:solidFill>
+                  <a:srgbClr val="536271"/>
+                </a:solidFill>
+              </a:defRPr>
+            </a:pPr>
+            <a:r>
+              <a:rPr sz="1500" b="0">
+                <a:solidFill>
+                  <a:srgbClr val="536271"/>
+                </a:solidFill>
+              </a:rPr>
+              <a:t>金額必須合理</a:t>
+            </a:r>
+          </a:p>
+        </p:txBody>
+      </p:sp>
+      <p:sp>
+        <p:nvSpPr>
+          <p:cNvPr id="12" name="">
+            <a:extLst xmlns:a="http://schemas.openxmlformats.org/drawingml/2006/main">
+              <a:ext uri="{FF2B5EF4-FFF2-40B4-BE49-F238E27FC236}">
+                <a16:creationId xmlns:a16="http://schemas.microsoft.com/office/drawing/2014/main" id="{065BB7C4-C169-40C9-ACFD-C5D406D2241C}"/>
+              </a:ext>
+            </a:extLst>
+          </p:cNvPr>
+          <p:cNvSpPr>
+            <a:spLocks xmlns:a="http://schemas.openxmlformats.org/drawingml/2006/main" noGrp="1"/>
+          </p:cNvSpPr>
+          <p:nvPr/>
+        </p:nvSpPr>
+        <p:spPr>
+          <a:xfrm xmlns:a="http://schemas.openxmlformats.org/drawingml/2006/main">
+            <a:off x="7667625" y="2809875"/>
+            <a:ext cx="666750" cy="571500"/>
+          </a:xfrm>
+          <a:prstGeom xmlns:a="http://schemas.openxmlformats.org/drawingml/2006/main" prst="rect">
+            <a:avLst/>
+          </a:prstGeom>
+          <a:noFill xmlns:a="http://schemas.openxmlformats.org/drawingml/2006/main"/>
+          <a:ln xmlns:a="http://schemas.openxmlformats.org/drawingml/2006/main" w="0">
+            <a:noFill/>
+            <a:prstDash val="solid"/>
+          </a:ln>
+        </p:spPr>
+        <p:txBody>
+          <a:bodyPr xmlns:a="http://schemas.openxmlformats.org/drawingml/2006/main"/>
+          <a:lstStyle xmlns:a="http://schemas.openxmlformats.org/drawingml/2006/main"/>
+          <a:p xmlns:a="http://schemas.openxmlformats.org/drawingml/2006/main">
+            <a:pPr algn="ctr">
+              <a:buNone/>
+              <a:defRPr sz="3300" b="1">
+                <a:solidFill>
+                  <a:srgbClr val="1F9AA5"/>
+                </a:solidFill>
+              </a:defRPr>
+            </a:pPr>
+            <a:r>
+              <a:rPr sz="3300" b="1">
+                <a:solidFill>
+                  <a:srgbClr val="1F9AA5"/>
+                </a:solidFill>
+              </a:rPr>
+              <a:t>→</a:t>
+            </a:r>
+          </a:p>
+        </p:txBody>
+      </p:sp>
+      <p:sp>
+        <p:nvSpPr>
+          <p:cNvPr id="13" name="">
+            <a:extLst xmlns:a="http://schemas.openxmlformats.org/drawingml/2006/main">
+              <a:ext uri="{FF2B5EF4-FFF2-40B4-BE49-F238E27FC236}">
+                <a16:creationId xmlns:a16="http://schemas.microsoft.com/office/drawing/2014/main" id="{A01B800B-2D00-47E3-AA5A-F5DD7D34EC4B}"/>
+              </a:ext>
+            </a:extLst>
+          </p:cNvPr>
+          <p:cNvSpPr>
+            <a:spLocks xmlns:a="http://schemas.openxmlformats.org/drawingml/2006/main" noGrp="1"/>
+          </p:cNvSpPr>
+          <p:nvPr/>
+        </p:nvSpPr>
+        <p:spPr>
+          <a:xfrm xmlns:a="http://schemas.openxmlformats.org/drawingml/2006/main">
+            <a:off x="8572500" y="2143125"/>
+            <a:ext cx="2667000" cy="2000250"/>
+          </a:xfrm>
+          <a:prstGeom xmlns:a="http://schemas.openxmlformats.org/drawingml/2006/main" prst="roundRect">
+            <a:avLst>
+              <a:gd name="adj" fmla="val 7619"/>
+            </a:avLst>
+          </a:prstGeom>
+          <a:solidFill xmlns:a="http://schemas.openxmlformats.org/drawingml/2006/main">
+            <a:srgbClr val="1F9AA5"/>
+          </a:solidFill>
+          <a:ln xmlns:a="http://schemas.openxmlformats.org/drawingml/2006/main" w="0">
+            <a:noFill/>
+            <a:prstDash val="solid"/>
+          </a:ln>
+        </p:spPr>
+      </p:sp>
+      <p:sp>
+        <p:nvSpPr>
+          <p:cNvPr id="14" name="">
+            <a:extLst xmlns:a="http://schemas.openxmlformats.org/drawingml/2006/main">
+              <a:ext uri="{FF2B5EF4-FFF2-40B4-BE49-F238E27FC236}">
+                <a16:creationId xmlns:a16="http://schemas.microsoft.com/office/drawing/2014/main" id="{9B5B932D-54B2-4945-B9F3-C155C927B64B}"/>
+              </a:ext>
+            </a:extLst>
+          </p:cNvPr>
+          <p:cNvSpPr>
+            <a:spLocks xmlns:a="http://schemas.openxmlformats.org/drawingml/2006/main" noGrp="1"/>
+          </p:cNvSpPr>
+          <p:nvPr/>
+        </p:nvSpPr>
+        <p:spPr>
+          <a:xfrm xmlns:a="http://schemas.openxmlformats.org/drawingml/2006/main">
+            <a:off x="8858250" y="2524125"/>
+            <a:ext cx="2095500" cy="476250"/>
+          </a:xfrm>
+          <a:prstGeom xmlns:a="http://schemas.openxmlformats.org/drawingml/2006/main" prst="rect">
+            <a:avLst/>
+          </a:prstGeom>
+          <a:noFill xmlns:a="http://schemas.openxmlformats.org/drawingml/2006/main"/>
+          <a:ln xmlns:a="http://schemas.openxmlformats.org/drawingml/2006/main" w="0">
+            <a:noFill/>
+            <a:prstDash val="solid"/>
+          </a:ln>
+        </p:spPr>
+        <p:txBody>
+          <a:bodyPr xmlns:a="http://schemas.openxmlformats.org/drawingml/2006/main"/>
+          <a:lstStyle xmlns:a="http://schemas.openxmlformats.org/drawingml/2006/main"/>
+          <a:p xmlns:a="http://schemas.openxmlformats.org/drawingml/2006/main">
+            <a:pPr algn="ctr">
+              <a:buNone/>
+              <a:defRPr sz="2550" b="1">
+                <a:solidFill>
+                  <a:srgbClr val="FFFFFF"/>
+                </a:solidFill>
+              </a:defRPr>
+            </a:pPr>
+            <a:r>
+              <a:rPr sz="2550" b="1">
+                <a:solidFill>
+                  <a:srgbClr val="FFFFFF"/>
+                </a:solidFill>
+              </a:rPr>
+              <a:t>選單</a:t>
+            </a:r>
+          </a:p>
+        </p:txBody>
+      </p:sp>
+      <p:sp>
+        <p:nvSpPr>
+          <p:cNvPr id="15" name="">
+            <a:extLst xmlns:a="http://schemas.openxmlformats.org/drawingml/2006/main">
+              <a:ext uri="{FF2B5EF4-FFF2-40B4-BE49-F238E27FC236}">
+                <a16:creationId xmlns:a16="http://schemas.microsoft.com/office/drawing/2014/main" id="{ADEE76B3-E66C-4374-B24B-91C18AC8028F}"/>
+              </a:ext>
+            </a:extLst>
+          </p:cNvPr>
+          <p:cNvSpPr>
+            <a:spLocks xmlns:a="http://schemas.openxmlformats.org/drawingml/2006/main" noGrp="1"/>
+          </p:cNvSpPr>
+          <p:nvPr/>
+        </p:nvSpPr>
+        <p:spPr>
+          <a:xfrm xmlns:a="http://schemas.openxmlformats.org/drawingml/2006/main">
+            <a:off x="8858250" y="3286125"/>
+            <a:ext cx="2095500" cy="304800"/>
+          </a:xfrm>
+          <a:prstGeom xmlns:a="http://schemas.openxmlformats.org/drawingml/2006/main" prst="rect">
+            <a:avLst/>
+          </a:prstGeom>
+          <a:noFill xmlns:a="http://schemas.openxmlformats.org/drawingml/2006/main"/>
+          <a:ln xmlns:a="http://schemas.openxmlformats.org/drawingml/2006/main" w="0">
+            <a:noFill/>
+            <a:prstDash val="solid"/>
+          </a:ln>
+        </p:spPr>
+        <p:txBody>
+          <a:bodyPr xmlns:a="http://schemas.openxmlformats.org/drawingml/2006/main"/>
+          <a:lstStyle xmlns:a="http://schemas.openxmlformats.org/drawingml/2006/main"/>
+          <a:p xmlns:a="http://schemas.openxmlformats.org/drawingml/2006/main">
+            <a:pPr algn="ctr">
+              <a:buNone/>
+              <a:defRPr sz="1500" b="0">
+                <a:solidFill>
+                  <a:srgbClr val="E8F4F5"/>
+                </a:solidFill>
+              </a:defRPr>
+            </a:pPr>
+            <a:r>
+              <a:rPr sz="1500" b="0">
+                <a:solidFill>
+                  <a:srgbClr val="E8F4F5"/>
+                </a:solidFill>
+              </a:rPr>
+              <a:t>輸入 0 才離開</a:t>
             </a:r>
           </a:p>
         </p:txBody>
@@ -6545,7 +6437,7 @@
     </p:spTree>
     <p:extLst>
       <p:ext uri="{BB962C8B-B14F-4D97-AF65-F5344CB8AC3E}">
-        <p14:creationId xmlns:p14="http://schemas.microsoft.com/office/powerpoint/2010/main" val="1068828119"/>
+        <p14:creationId xmlns:p14="http://schemas.microsoft.com/office/powerpoint/2010/main" val="778389022"/>
       </p:ext>
     </p:extLst>
   </p:cSld>
@@ -6573,10 +6465,10 @@
       </p:grpSpPr>
       <p:sp>
         <p:nvSpPr>
-          <p:cNvPr id="13" name="">
-            <a:extLst xmlns:a="http://schemas.openxmlformats.org/drawingml/2006/main">
-              <a:ext uri="{FF2B5EF4-FFF2-40B4-BE49-F238E27FC236}">
-                <a16:creationId xmlns:a16="http://schemas.microsoft.com/office/drawing/2014/main" id="{0FBC4F33-1979-4E14-9397-6CB7EBE03FE6}"/>
+          <p:cNvPr id="11" name="">
+            <a:extLst xmlns:a="http://schemas.openxmlformats.org/drawingml/2006/main">
+              <a:ext uri="{FF2B5EF4-FFF2-40B4-BE49-F238E27FC236}">
+                <a16:creationId xmlns:a16="http://schemas.microsoft.com/office/drawing/2014/main" id="{4BB93321-73C1-425A-ACD3-1D738C945B00}"/>
               </a:ext>
             </a:extLst>
           </p:cNvPr>
@@ -6607,7 +6499,7 @@
           <p:cNvPr id="2" name="">
             <a:extLst xmlns:a="http://schemas.openxmlformats.org/drawingml/2006/main">
               <a:ext uri="{FF2B5EF4-FFF2-40B4-BE49-F238E27FC236}">
-                <a16:creationId xmlns:a16="http://schemas.microsoft.com/office/drawing/2014/main" id="{7F8189A1-0089-40AA-8A28-AD24AF900216}"/>
+                <a16:creationId xmlns:a16="http://schemas.microsoft.com/office/drawing/2014/main" id="{13EF444B-01BF-4A4B-8944-EE903C160C92}"/>
               </a:ext>
             </a:extLst>
           </p:cNvPr>
@@ -6648,7 +6540,7 @@
                   <a:srgbClr val="1F9AA5"/>
                 </a:solidFill>
               </a:rPr>
-              <a:t>完成檢查</a:t>
+              <a:t>驗收題</a:t>
             </a:r>
           </a:p>
         </p:txBody>
@@ -6658,7 +6550,7 @@
           <p:cNvPr id="3" name="">
             <a:extLst xmlns:a="http://schemas.openxmlformats.org/drawingml/2006/main">
               <a:ext uri="{FF2B5EF4-FFF2-40B4-BE49-F238E27FC236}">
-                <a16:creationId xmlns:a16="http://schemas.microsoft.com/office/drawing/2014/main" id="{75C5B2DF-125B-4567-95E6-B3C368BEBBDE}"/>
+                <a16:creationId xmlns:a16="http://schemas.microsoft.com/office/drawing/2014/main" id="{23B36091-3DEF-464B-8B37-A611337BFE52}"/>
               </a:ext>
             </a:extLst>
           </p:cNvPr>
@@ -6699,7 +6591,7 @@
                   <a:srgbClr val="0B2239"/>
                 </a:solidFill>
               </a:rPr>
-              <a:t>下課前確認你能做到</a:t>
+              <a:t>提款成功前要通過三個檢查</a:t>
             </a:r>
           </a:p>
         </p:txBody>
@@ -6709,7 +6601,7 @@
           <p:cNvPr id="4" name="">
             <a:extLst xmlns:a="http://schemas.openxmlformats.org/drawingml/2006/main">
               <a:ext uri="{FF2B5EF4-FFF2-40B4-BE49-F238E27FC236}">
-                <a16:creationId xmlns:a16="http://schemas.microsoft.com/office/drawing/2014/main" id="{550BBFF0-5A73-4490-B440-893FC59CD4ED}"/>
+                <a16:creationId xmlns:a16="http://schemas.microsoft.com/office/drawing/2014/main" id="{F58E7EE8-AD53-4B72-BA9D-410A3502F197}"/>
               </a:ext>
             </a:extLst>
           </p:cNvPr>
@@ -6751,6 +6643,529 @@
                 </a:solidFill>
               </a:rPr>
               <a:t>17</a:t>
+            </a:r>
+          </a:p>
+        </p:txBody>
+      </p:sp>
+      <p:sp>
+        <p:nvSpPr>
+          <p:cNvPr id="5" name="">
+            <a:extLst xmlns:a="http://schemas.openxmlformats.org/drawingml/2006/main">
+              <a:ext uri="{FF2B5EF4-FFF2-40B4-BE49-F238E27FC236}">
+                <a16:creationId xmlns:a16="http://schemas.microsoft.com/office/drawing/2014/main" id="{1839F911-D622-4FA5-A6AA-267AE7BCDCDA}"/>
+              </a:ext>
+            </a:extLst>
+          </p:cNvPr>
+          <p:cNvSpPr>
+            <a:spLocks xmlns:a="http://schemas.openxmlformats.org/drawingml/2006/main" noGrp="1"/>
+          </p:cNvSpPr>
+          <p:nvPr/>
+        </p:nvSpPr>
+        <p:spPr>
+          <a:xfrm xmlns:a="http://schemas.openxmlformats.org/drawingml/2006/main">
+            <a:off x="762000" y="1857375"/>
+            <a:ext cx="5095875" cy="3143250"/>
+          </a:xfrm>
+          <a:prstGeom xmlns:a="http://schemas.openxmlformats.org/drawingml/2006/main" prst="roundRect">
+            <a:avLst>
+              <a:gd name="adj" fmla="val 4848"/>
+            </a:avLst>
+          </a:prstGeom>
+          <a:solidFill xmlns:a="http://schemas.openxmlformats.org/drawingml/2006/main">
+            <a:srgbClr val="FFFFFF"/>
+          </a:solidFill>
+          <a:ln xmlns:a="http://schemas.openxmlformats.org/drawingml/2006/main" w="9525">
+            <a:solidFill>
+              <a:srgbClr val="D5DEE5"/>
+            </a:solidFill>
+            <a:prstDash val="solid"/>
+          </a:ln>
+        </p:spPr>
+      </p:sp>
+      <p:sp>
+        <p:nvSpPr>
+          <p:cNvPr id="6" name="">
+            <a:extLst xmlns:a="http://schemas.openxmlformats.org/drawingml/2006/main">
+              <a:ext uri="{FF2B5EF4-FFF2-40B4-BE49-F238E27FC236}">
+                <a16:creationId xmlns:a16="http://schemas.microsoft.com/office/drawing/2014/main" id="{73EB0691-40AC-4384-8469-D33BE5A5DDF7}"/>
+              </a:ext>
+            </a:extLst>
+          </p:cNvPr>
+          <p:cNvSpPr>
+            <a:spLocks xmlns:a="http://schemas.openxmlformats.org/drawingml/2006/main" noGrp="1"/>
+          </p:cNvSpPr>
+          <p:nvPr/>
+        </p:nvSpPr>
+        <p:spPr>
+          <a:xfrm xmlns:a="http://schemas.openxmlformats.org/drawingml/2006/main">
+            <a:off x="1047750" y="2143125"/>
+            <a:ext cx="4524375" cy="438150"/>
+          </a:xfrm>
+          <a:prstGeom xmlns:a="http://schemas.openxmlformats.org/drawingml/2006/main" prst="rect">
+            <a:avLst/>
+          </a:prstGeom>
+          <a:noFill xmlns:a="http://schemas.openxmlformats.org/drawingml/2006/main"/>
+          <a:ln xmlns:a="http://schemas.openxmlformats.org/drawingml/2006/main" w="0">
+            <a:noFill/>
+            <a:prstDash val="solid"/>
+          </a:ln>
+        </p:spPr>
+        <p:txBody>
+          <a:bodyPr xmlns:a="http://schemas.openxmlformats.org/drawingml/2006/main"/>
+          <a:lstStyle xmlns:a="http://schemas.openxmlformats.org/drawingml/2006/main"/>
+          <a:p xmlns:a="http://schemas.openxmlformats.org/drawingml/2006/main">
+            <a:pPr algn="l">
+              <a:buNone/>
+              <a:defRPr sz="2250" b="1">
+                <a:solidFill>
+                  <a:srgbClr val="0B2239"/>
+                </a:solidFill>
+              </a:defRPr>
+            </a:pPr>
+            <a:r>
+              <a:rPr sz="2250" b="1">
+                <a:solidFill>
+                  <a:srgbClr val="0B2239"/>
+                </a:solidFill>
+              </a:rPr>
+              <a:t>格式</a:t>
+            </a:r>
+          </a:p>
+        </p:txBody>
+      </p:sp>
+      <p:sp>
+        <p:nvSpPr>
+          <p:cNvPr id="7" name="">
+            <a:extLst xmlns:a="http://schemas.openxmlformats.org/drawingml/2006/main">
+              <a:ext uri="{FF2B5EF4-FFF2-40B4-BE49-F238E27FC236}">
+                <a16:creationId xmlns:a16="http://schemas.microsoft.com/office/drawing/2014/main" id="{6FFFA900-3FA5-466B-BEEC-8512E30E9041}"/>
+              </a:ext>
+            </a:extLst>
+          </p:cNvPr>
+          <p:cNvSpPr>
+            <a:spLocks xmlns:a="http://schemas.openxmlformats.org/drawingml/2006/main" noGrp="1"/>
+          </p:cNvSpPr>
+          <p:nvPr/>
+        </p:nvSpPr>
+        <p:spPr>
+          <a:xfrm xmlns:a="http://schemas.openxmlformats.org/drawingml/2006/main">
+            <a:off x="1047750" y="2857500"/>
+            <a:ext cx="4333875" cy="1809750"/>
+          </a:xfrm>
+          <a:prstGeom xmlns:a="http://schemas.openxmlformats.org/drawingml/2006/main" prst="rect">
+            <a:avLst/>
+          </a:prstGeom>
+          <a:noFill xmlns:a="http://schemas.openxmlformats.org/drawingml/2006/main"/>
+          <a:ln xmlns:a="http://schemas.openxmlformats.org/drawingml/2006/main" w="0">
+            <a:noFill/>
+            <a:prstDash val="solid"/>
+          </a:ln>
+        </p:spPr>
+        <p:txBody>
+          <a:bodyPr xmlns:a="http://schemas.openxmlformats.org/drawingml/2006/main"/>
+          <a:lstStyle xmlns:a="http://schemas.openxmlformats.org/drawingml/2006/main"/>
+          <a:p xmlns:a="http://schemas.openxmlformats.org/drawingml/2006/main">
+            <a:pPr algn="l">
+              <a:buNone/>
+              <a:defRPr sz="1800" b="0">
+                <a:solidFill>
+                  <a:srgbClr val="15202B"/>
+                </a:solidFill>
+              </a:defRPr>
+            </a:pPr>
+            <a:r>
+              <a:rPr sz="1800" b="0">
+                <a:solidFill>
+                  <a:srgbClr val="15202B"/>
+                </a:solidFill>
+              </a:rPr>
+              <a:t>金額必須是整數</a:t>
+            </a:r>
+          </a:p>
+        </p:txBody>
+      </p:sp>
+      <p:sp>
+        <p:nvSpPr>
+          <p:cNvPr id="8" name="">
+            <a:extLst xmlns:a="http://schemas.openxmlformats.org/drawingml/2006/main">
+              <a:ext uri="{FF2B5EF4-FFF2-40B4-BE49-F238E27FC236}">
+                <a16:creationId xmlns:a16="http://schemas.microsoft.com/office/drawing/2014/main" id="{49ACFB57-94D3-417E-B292-7095704B3B8D}"/>
+              </a:ext>
+            </a:extLst>
+          </p:cNvPr>
+          <p:cNvSpPr>
+            <a:spLocks xmlns:a="http://schemas.openxmlformats.org/drawingml/2006/main" noGrp="1"/>
+          </p:cNvSpPr>
+          <p:nvPr/>
+        </p:nvSpPr>
+        <p:spPr>
+          <a:xfrm xmlns:a="http://schemas.openxmlformats.org/drawingml/2006/main">
+            <a:off x="6334125" y="1857375"/>
+            <a:ext cx="5095875" cy="3143250"/>
+          </a:xfrm>
+          <a:prstGeom xmlns:a="http://schemas.openxmlformats.org/drawingml/2006/main" prst="roundRect">
+            <a:avLst>
+              <a:gd name="adj" fmla="val 4848"/>
+            </a:avLst>
+          </a:prstGeom>
+          <a:solidFill xmlns:a="http://schemas.openxmlformats.org/drawingml/2006/main">
+            <a:srgbClr val="FFFFFF"/>
+          </a:solidFill>
+          <a:ln xmlns:a="http://schemas.openxmlformats.org/drawingml/2006/main" w="9525">
+            <a:solidFill>
+              <a:srgbClr val="D5DEE5"/>
+            </a:solidFill>
+            <a:prstDash val="solid"/>
+          </a:ln>
+        </p:spPr>
+      </p:sp>
+      <p:sp>
+        <p:nvSpPr>
+          <p:cNvPr id="9" name="">
+            <a:extLst xmlns:a="http://schemas.openxmlformats.org/drawingml/2006/main">
+              <a:ext uri="{FF2B5EF4-FFF2-40B4-BE49-F238E27FC236}">
+                <a16:creationId xmlns:a16="http://schemas.microsoft.com/office/drawing/2014/main" id="{F8564DC8-4BC7-439B-9302-C372EAE8C628}"/>
+              </a:ext>
+            </a:extLst>
+          </p:cNvPr>
+          <p:cNvSpPr>
+            <a:spLocks xmlns:a="http://schemas.openxmlformats.org/drawingml/2006/main" noGrp="1"/>
+          </p:cNvSpPr>
+          <p:nvPr/>
+        </p:nvSpPr>
+        <p:spPr>
+          <a:xfrm xmlns:a="http://schemas.openxmlformats.org/drawingml/2006/main">
+            <a:off x="6619875" y="2143125"/>
+            <a:ext cx="4524375" cy="438150"/>
+          </a:xfrm>
+          <a:prstGeom xmlns:a="http://schemas.openxmlformats.org/drawingml/2006/main" prst="rect">
+            <a:avLst/>
+          </a:prstGeom>
+          <a:noFill xmlns:a="http://schemas.openxmlformats.org/drawingml/2006/main"/>
+          <a:ln xmlns:a="http://schemas.openxmlformats.org/drawingml/2006/main" w="0">
+            <a:noFill/>
+            <a:prstDash val="solid"/>
+          </a:ln>
+        </p:spPr>
+        <p:txBody>
+          <a:bodyPr xmlns:a="http://schemas.openxmlformats.org/drawingml/2006/main"/>
+          <a:lstStyle xmlns:a="http://schemas.openxmlformats.org/drawingml/2006/main"/>
+          <a:p xmlns:a="http://schemas.openxmlformats.org/drawingml/2006/main">
+            <a:pPr algn="l">
+              <a:buNone/>
+              <a:defRPr sz="2250" b="1">
+                <a:solidFill>
+                  <a:srgbClr val="0B2239"/>
+                </a:solidFill>
+              </a:defRPr>
+            </a:pPr>
+            <a:r>
+              <a:rPr sz="2250" b="1">
+                <a:solidFill>
+                  <a:srgbClr val="0B2239"/>
+                </a:solidFill>
+              </a:rPr>
+              <a:t>範圍</a:t>
+            </a:r>
+          </a:p>
+        </p:txBody>
+      </p:sp>
+      <p:sp>
+        <p:nvSpPr>
+          <p:cNvPr id="10" name="">
+            <a:extLst xmlns:a="http://schemas.openxmlformats.org/drawingml/2006/main">
+              <a:ext uri="{FF2B5EF4-FFF2-40B4-BE49-F238E27FC236}">
+                <a16:creationId xmlns:a16="http://schemas.microsoft.com/office/drawing/2014/main" id="{90C622B6-8526-4A06-96D7-A1390F1E6826}"/>
+              </a:ext>
+            </a:extLst>
+          </p:cNvPr>
+          <p:cNvSpPr>
+            <a:spLocks xmlns:a="http://schemas.openxmlformats.org/drawingml/2006/main" noGrp="1"/>
+          </p:cNvSpPr>
+          <p:nvPr/>
+        </p:nvSpPr>
+        <p:spPr>
+          <a:xfrm xmlns:a="http://schemas.openxmlformats.org/drawingml/2006/main">
+            <a:off x="6619875" y="2857500"/>
+            <a:ext cx="4333875" cy="1809750"/>
+          </a:xfrm>
+          <a:prstGeom xmlns:a="http://schemas.openxmlformats.org/drawingml/2006/main" prst="rect">
+            <a:avLst/>
+          </a:prstGeom>
+          <a:noFill xmlns:a="http://schemas.openxmlformats.org/drawingml/2006/main"/>
+          <a:ln xmlns:a="http://schemas.openxmlformats.org/drawingml/2006/main" w="0">
+            <a:noFill/>
+            <a:prstDash val="solid"/>
+          </a:ln>
+        </p:spPr>
+        <p:txBody>
+          <a:bodyPr xmlns:a="http://schemas.openxmlformats.org/drawingml/2006/main"/>
+          <a:lstStyle xmlns:a="http://schemas.openxmlformats.org/drawingml/2006/main"/>
+          <a:p xmlns:a="http://schemas.openxmlformats.org/drawingml/2006/main">
+            <a:pPr algn="l">
+              <a:buNone/>
+              <a:defRPr sz="1800" b="0">
+                <a:solidFill>
+                  <a:srgbClr val="15202B"/>
+                </a:solidFill>
+              </a:defRPr>
+            </a:pPr>
+            <a:r>
+              <a:rPr sz="1800" b="0">
+                <a:solidFill>
+                  <a:srgbClr val="15202B"/>
+                </a:solidFill>
+              </a:rPr>
+              <a:t>金額 &gt; 0</a:t>
+            </a:r>
+          </a:p>
+          <a:p xmlns:a="http://schemas.openxmlformats.org/drawingml/2006/main">
+            <a:pPr algn="l">
+              <a:buNone/>
+              <a:defRPr sz="1800" b="0">
+                <a:solidFill>
+                  <a:srgbClr val="15202B"/>
+                </a:solidFill>
+              </a:defRPr>
+            </a:pPr>
+            <a:r>
+              <a:rPr sz="1800" b="0">
+                <a:solidFill>
+                  <a:srgbClr val="15202B"/>
+                </a:solidFill>
+              </a:rPr>
+              <a:t>金額 &lt;= 餘額</a:t>
+            </a:r>
+          </a:p>
+          <a:p xmlns:a="http://schemas.openxmlformats.org/drawingml/2006/main">
+            <a:pPr algn="l">
+              <a:buNone/>
+              <a:defRPr sz="1800" b="0">
+                <a:solidFill>
+                  <a:srgbClr val="15202B"/>
+                </a:solidFill>
+              </a:defRPr>
+            </a:pPr>
+            <a:r>
+              <a:rPr sz="1800" b="0">
+                <a:solidFill>
+                  <a:srgbClr val="15202B"/>
+                </a:solidFill>
+              </a:rPr>
+              <a:t>錯誤時重新輸入</a:t>
+            </a:r>
+          </a:p>
+        </p:txBody>
+      </p:sp>
+    </p:spTree>
+    <p:extLst>
+      <p:ext uri="{BB962C8B-B14F-4D97-AF65-F5344CB8AC3E}">
+        <p14:creationId xmlns:p14="http://schemas.microsoft.com/office/powerpoint/2010/main" val="1068828119"/>
+      </p:ext>
+    </p:extLst>
+  </p:cSld>
+</p:sld>
+</file>
+
+<file path=ppt/slides/slide18.xml><?xml version="1.0" encoding="utf-8"?>
+<p:sld xmlns:p="http://schemas.openxmlformats.org/presentationml/2006/main">
+  <p:cSld>
+    <p:bg>
+      <p:bgPr>
+        <a:solidFill xmlns:a="http://schemas.openxmlformats.org/drawingml/2006/main">
+          <a:srgbClr val="F6F2E8"/>
+        </a:solidFill>
+      </p:bgPr>
+    </p:bg>
+    <p:spTree>
+      <p:nvGrpSpPr>
+        <p:cNvPr id="1" name=""/>
+        <p:cNvGrpSpPr/>
+        <p:nvPr/>
+      </p:nvGrpSpPr>
+      <p:grpSpPr>
+        <a:xfrm xmlns:a="http://schemas.openxmlformats.org/drawingml/2006/main"/>
+      </p:grpSpPr>
+      <p:sp>
+        <p:nvSpPr>
+          <p:cNvPr id="13" name="">
+            <a:extLst xmlns:a="http://schemas.openxmlformats.org/drawingml/2006/main">
+              <a:ext uri="{FF2B5EF4-FFF2-40B4-BE49-F238E27FC236}">
+                <a16:creationId xmlns:a16="http://schemas.microsoft.com/office/drawing/2014/main" id="{0FBC4F33-1979-4E14-9397-6CB7EBE03FE6}"/>
+              </a:ext>
+            </a:extLst>
+          </p:cNvPr>
+          <p:cNvSpPr>
+            <a:spLocks xmlns:a="http://schemas.openxmlformats.org/drawingml/2006/main" noGrp="1"/>
+          </p:cNvSpPr>
+          <p:nvPr/>
+        </p:nvSpPr>
+        <p:spPr>
+          <a:xfrm xmlns:a="http://schemas.openxmlformats.org/drawingml/2006/main">
+            <a:off x="0" y="0"/>
+            <a:ext cx="171450" cy="6858000"/>
+          </a:xfrm>
+          <a:prstGeom xmlns:a="http://schemas.openxmlformats.org/drawingml/2006/main" prst="rect">
+            <a:avLst/>
+          </a:prstGeom>
+          <a:solidFill xmlns:a="http://schemas.openxmlformats.org/drawingml/2006/main">
+            <a:srgbClr val="1F9AA5"/>
+          </a:solidFill>
+          <a:ln xmlns:a="http://schemas.openxmlformats.org/drawingml/2006/main" w="0">
+            <a:noFill/>
+            <a:prstDash val="solid"/>
+          </a:ln>
+        </p:spPr>
+      </p:sp>
+      <p:sp>
+        <p:nvSpPr>
+          <p:cNvPr id="2" name="">
+            <a:extLst xmlns:a="http://schemas.openxmlformats.org/drawingml/2006/main">
+              <a:ext uri="{FF2B5EF4-FFF2-40B4-BE49-F238E27FC236}">
+                <a16:creationId xmlns:a16="http://schemas.microsoft.com/office/drawing/2014/main" id="{7F8189A1-0089-40AA-8A28-AD24AF900216}"/>
+              </a:ext>
+            </a:extLst>
+          </p:cNvPr>
+          <p:cNvSpPr>
+            <a:spLocks xmlns:a="http://schemas.openxmlformats.org/drawingml/2006/main" noGrp="1"/>
+          </p:cNvSpPr>
+          <p:nvPr/>
+        </p:nvSpPr>
+        <p:spPr>
+          <a:xfrm xmlns:a="http://schemas.openxmlformats.org/drawingml/2006/main">
+            <a:off x="552450" y="323850"/>
+            <a:ext cx="1905000" cy="266700"/>
+          </a:xfrm>
+          <a:prstGeom xmlns:a="http://schemas.openxmlformats.org/drawingml/2006/main" prst="rect">
+            <a:avLst/>
+          </a:prstGeom>
+          <a:noFill xmlns:a="http://schemas.openxmlformats.org/drawingml/2006/main"/>
+          <a:ln xmlns:a="http://schemas.openxmlformats.org/drawingml/2006/main" w="0">
+            <a:noFill/>
+            <a:prstDash val="solid"/>
+          </a:ln>
+        </p:spPr>
+        <p:txBody>
+          <a:bodyPr xmlns:a="http://schemas.openxmlformats.org/drawingml/2006/main"/>
+          <a:lstStyle xmlns:a="http://schemas.openxmlformats.org/drawingml/2006/main"/>
+          <a:p xmlns:a="http://schemas.openxmlformats.org/drawingml/2006/main">
+            <a:pPr algn="l">
+              <a:buNone/>
+              <a:defRPr sz="1050" b="1">
+                <a:solidFill>
+                  <a:srgbClr val="1F9AA5"/>
+                </a:solidFill>
+              </a:defRPr>
+            </a:pPr>
+            <a:r>
+              <a:rPr sz="1050" b="1">
+                <a:solidFill>
+                  <a:srgbClr val="1F9AA5"/>
+                </a:solidFill>
+              </a:rPr>
+              <a:t>完成檢查</a:t>
+            </a:r>
+          </a:p>
+        </p:txBody>
+      </p:sp>
+      <p:sp>
+        <p:nvSpPr>
+          <p:cNvPr id="3" name="">
+            <a:extLst xmlns:a="http://schemas.openxmlformats.org/drawingml/2006/main">
+              <a:ext uri="{FF2B5EF4-FFF2-40B4-BE49-F238E27FC236}">
+                <a16:creationId xmlns:a16="http://schemas.microsoft.com/office/drawing/2014/main" id="{75C5B2DF-125B-4567-95E6-B3C368BEBBDE}"/>
+              </a:ext>
+            </a:extLst>
+          </p:cNvPr>
+          <p:cNvSpPr>
+            <a:spLocks xmlns:a="http://schemas.openxmlformats.org/drawingml/2006/main" noGrp="1"/>
+          </p:cNvSpPr>
+          <p:nvPr/>
+        </p:nvSpPr>
+        <p:spPr>
+          <a:xfrm xmlns:a="http://schemas.openxmlformats.org/drawingml/2006/main">
+            <a:off x="552450" y="666750"/>
+            <a:ext cx="11049000" cy="685800"/>
+          </a:xfrm>
+          <a:prstGeom xmlns:a="http://schemas.openxmlformats.org/drawingml/2006/main" prst="rect">
+            <a:avLst/>
+          </a:prstGeom>
+          <a:noFill xmlns:a="http://schemas.openxmlformats.org/drawingml/2006/main"/>
+          <a:ln xmlns:a="http://schemas.openxmlformats.org/drawingml/2006/main" w="0">
+            <a:noFill/>
+            <a:prstDash val="solid"/>
+          </a:ln>
+        </p:spPr>
+        <p:txBody>
+          <a:bodyPr xmlns:a="http://schemas.openxmlformats.org/drawingml/2006/main"/>
+          <a:lstStyle xmlns:a="http://schemas.openxmlformats.org/drawingml/2006/main"/>
+          <a:p xmlns:a="http://schemas.openxmlformats.org/drawingml/2006/main">
+            <a:pPr algn="l">
+              <a:buNone/>
+              <a:defRPr sz="2850" b="1">
+                <a:solidFill>
+                  <a:srgbClr val="0B2239"/>
+                </a:solidFill>
+              </a:defRPr>
+            </a:pPr>
+            <a:r>
+              <a:rPr sz="2850" b="1">
+                <a:solidFill>
+                  <a:srgbClr val="0B2239"/>
+                </a:solidFill>
+              </a:rPr>
+              <a:t>下課前確認你能做到</a:t>
+            </a:r>
+          </a:p>
+        </p:txBody>
+      </p:sp>
+      <p:sp>
+        <p:nvSpPr>
+          <p:cNvPr id="4" name="">
+            <a:extLst xmlns:a="http://schemas.openxmlformats.org/drawingml/2006/main">
+              <a:ext uri="{FF2B5EF4-FFF2-40B4-BE49-F238E27FC236}">
+                <a16:creationId xmlns:a16="http://schemas.microsoft.com/office/drawing/2014/main" id="{550BBFF0-5A73-4490-B440-893FC59CD4ED}"/>
+              </a:ext>
+            </a:extLst>
+          </p:cNvPr>
+          <p:cNvSpPr>
+            <a:spLocks xmlns:a="http://schemas.openxmlformats.org/drawingml/2006/main" noGrp="1"/>
+          </p:cNvSpPr>
+          <p:nvPr/>
+        </p:nvSpPr>
+        <p:spPr>
+          <a:xfrm xmlns:a="http://schemas.openxmlformats.org/drawingml/2006/main">
+            <a:off x="11144250" y="6381750"/>
+            <a:ext cx="476250" cy="228600"/>
+          </a:xfrm>
+          <a:prstGeom xmlns:a="http://schemas.openxmlformats.org/drawingml/2006/main" prst="rect">
+            <a:avLst/>
+          </a:prstGeom>
+          <a:noFill xmlns:a="http://schemas.openxmlformats.org/drawingml/2006/main"/>
+          <a:ln xmlns:a="http://schemas.openxmlformats.org/drawingml/2006/main" w="0">
+            <a:noFill/>
+            <a:prstDash val="solid"/>
+          </a:ln>
+        </p:spPr>
+        <p:txBody>
+          <a:bodyPr xmlns:a="http://schemas.openxmlformats.org/drawingml/2006/main"/>
+          <a:lstStyle xmlns:a="http://schemas.openxmlformats.org/drawingml/2006/main"/>
+          <a:p xmlns:a="http://schemas.openxmlformats.org/drawingml/2006/main">
+            <a:pPr algn="r">
+              <a:buNone/>
+              <a:defRPr sz="900" b="0">
+                <a:solidFill>
+                  <a:srgbClr val="536271"/>
+                </a:solidFill>
+              </a:defRPr>
+            </a:pPr>
+            <a:r>
+              <a:rPr sz="900" b="0">
+                <a:solidFill>
+                  <a:srgbClr val="536271"/>
+                </a:solidFill>
+              </a:rPr>
+              <a:t>18</a:t>
             </a:r>
           </a:p>
         </p:txBody>
@@ -7173,7 +7588,7 @@
 </p:sld>
 </file>
 
-<file path=ppt/slides/slide18.xml><?xml version="1.0" encoding="utf-8"?>
+<file path=ppt/slides/slide19.xml><?xml version="1.0" encoding="utf-8"?>
 <p:sld xmlns:p="http://schemas.openxmlformats.org/presentationml/2006/main">
   <p:cSld>
     <p:bg>
@@ -9371,10 +9786,10 @@
       </p:grpSpPr>
       <p:sp>
         <p:nvSpPr>
-          <p:cNvPr id="16" name="">
-            <a:extLst xmlns:a="http://schemas.openxmlformats.org/drawingml/2006/main">
-              <a:ext uri="{FF2B5EF4-FFF2-40B4-BE49-F238E27FC236}">
-                <a16:creationId xmlns:a16="http://schemas.microsoft.com/office/drawing/2014/main" id="{D2F1CAE4-187A-4F0A-9022-7437844E17DF}"/>
+          <p:cNvPr id="8" name="">
+            <a:extLst xmlns:a="http://schemas.openxmlformats.org/drawingml/2006/main">
+              <a:ext uri="{FF2B5EF4-FFF2-40B4-BE49-F238E27FC236}">
+                <a16:creationId xmlns:a16="http://schemas.microsoft.com/office/drawing/2014/main" id="{5F116DC5-4F1D-4CF5-9D76-1B9BDD10AFB6}"/>
               </a:ext>
             </a:extLst>
           </p:cNvPr>
@@ -9405,7 +9820,7 @@
           <p:cNvPr id="2" name="">
             <a:extLst xmlns:a="http://schemas.openxmlformats.org/drawingml/2006/main">
               <a:ext uri="{FF2B5EF4-FFF2-40B4-BE49-F238E27FC236}">
-                <a16:creationId xmlns:a16="http://schemas.microsoft.com/office/drawing/2014/main" id="{2715A867-3276-404D-8C24-77366B37ED2B}"/>
+                <a16:creationId xmlns:a16="http://schemas.microsoft.com/office/drawing/2014/main" id="{874FE8DB-E3E1-4584-BB1C-5F37F925AC76}"/>
               </a:ext>
             </a:extLst>
           </p:cNvPr>
@@ -9446,7 +9861,7 @@
                   <a:srgbClr val="1F9AA5"/>
                 </a:solidFill>
               </a:rPr>
-              <a:t>基本結構</a:t>
+              <a:t>while 的意思</a:t>
             </a:r>
           </a:p>
         </p:txBody>
@@ -9456,7 +9871,7 @@
           <p:cNvPr id="3" name="">
             <a:extLst xmlns:a="http://schemas.openxmlformats.org/drawingml/2006/main">
               <a:ext uri="{FF2B5EF4-FFF2-40B4-BE49-F238E27FC236}">
-                <a16:creationId xmlns:a16="http://schemas.microsoft.com/office/drawing/2014/main" id="{D222E0D9-D661-4469-9627-C8C6985B429F}"/>
+                <a16:creationId xmlns:a16="http://schemas.microsoft.com/office/drawing/2014/main" id="{A5E6831C-8781-4E70-94C4-EFA164EEDB11}"/>
               </a:ext>
             </a:extLst>
           </p:cNvPr>
@@ -9497,7 +9912,7 @@
                   <a:srgbClr val="0B2239"/>
                 </a:solidFill>
               </a:rPr>
-              <a:t>先設定變數，再檢查條件與更新</a:t>
+              <a:t>while 就是「當……時」</a:t>
             </a:r>
           </a:p>
         </p:txBody>
@@ -9507,7 +9922,7 @@
           <p:cNvPr id="4" name="">
             <a:extLst xmlns:a="http://schemas.openxmlformats.org/drawingml/2006/main">
               <a:ext uri="{FF2B5EF4-FFF2-40B4-BE49-F238E27FC236}">
-                <a16:creationId xmlns:a16="http://schemas.microsoft.com/office/drawing/2014/main" id="{1E214BAF-B825-4761-B241-2C3115FA09F1}"/>
+                <a16:creationId xmlns:a16="http://schemas.microsoft.com/office/drawing/2014/main" id="{F0CDCEA7-2959-4491-B486-CCBCF922EC93}"/>
               </a:ext>
             </a:extLst>
           </p:cNvPr>
@@ -9558,32 +9973,30 @@
           <p:cNvPr id="5" name="">
             <a:extLst xmlns:a="http://schemas.openxmlformats.org/drawingml/2006/main">
               <a:ext uri="{FF2B5EF4-FFF2-40B4-BE49-F238E27FC236}">
-                <a16:creationId xmlns:a16="http://schemas.microsoft.com/office/drawing/2014/main" id="{B7046AAA-3079-4B02-B281-1758AB3E68BC}"/>
-              </a:ext>
-            </a:extLst>
-          </p:cNvPr>
-          <p:cNvSpPr>
-            <a:spLocks xmlns:a="http://schemas.openxmlformats.org/drawingml/2006/main" noGrp="1"/>
-          </p:cNvSpPr>
-          <p:nvPr/>
-        </p:nvSpPr>
-        <p:spPr>
-          <a:xfrm xmlns:a="http://schemas.openxmlformats.org/drawingml/2006/main">
-            <a:off x="952500" y="2143125"/>
-            <a:ext cx="2667000" cy="2000250"/>
+                <a16:creationId xmlns:a16="http://schemas.microsoft.com/office/drawing/2014/main" id="{55CA46A3-90E1-43AF-879E-0755E3C26768}"/>
+              </a:ext>
+            </a:extLst>
+          </p:cNvPr>
+          <p:cNvSpPr>
+            <a:spLocks xmlns:a="http://schemas.openxmlformats.org/drawingml/2006/main" noGrp="1"/>
+          </p:cNvSpPr>
+          <p:nvPr/>
+        </p:nvSpPr>
+        <p:spPr>
+          <a:xfrm xmlns:a="http://schemas.openxmlformats.org/drawingml/2006/main">
+            <a:off x="1714500" y="2095500"/>
+            <a:ext cx="8763000" cy="2333625"/>
           </a:xfrm>
           <a:prstGeom xmlns:a="http://schemas.openxmlformats.org/drawingml/2006/main" prst="roundRect">
             <a:avLst>
-              <a:gd name="adj" fmla="val 7619"/>
+              <a:gd name="adj" fmla="val 6531"/>
             </a:avLst>
           </a:prstGeom>
           <a:solidFill xmlns:a="http://schemas.openxmlformats.org/drawingml/2006/main">
-            <a:srgbClr val="FFFFFF"/>
+            <a:srgbClr val="0B2239"/>
           </a:solidFill>
-          <a:ln xmlns:a="http://schemas.openxmlformats.org/drawingml/2006/main" w="9525">
-            <a:solidFill>
-              <a:srgbClr val="D5DEE5"/>
-            </a:solidFill>
+          <a:ln xmlns:a="http://schemas.openxmlformats.org/drawingml/2006/main" w="0">
+            <a:noFill/>
             <a:prstDash val="solid"/>
           </a:ln>
         </p:spPr>
@@ -9593,19 +10006,19 @@
           <p:cNvPr id="6" name="">
             <a:extLst xmlns:a="http://schemas.openxmlformats.org/drawingml/2006/main">
               <a:ext uri="{FF2B5EF4-FFF2-40B4-BE49-F238E27FC236}">
-                <a16:creationId xmlns:a16="http://schemas.microsoft.com/office/drawing/2014/main" id="{A5758611-4227-4A38-8E90-BBB878487FD6}"/>
-              </a:ext>
-            </a:extLst>
-          </p:cNvPr>
-          <p:cNvSpPr>
-            <a:spLocks xmlns:a="http://schemas.openxmlformats.org/drawingml/2006/main" noGrp="1"/>
-          </p:cNvSpPr>
-          <p:nvPr/>
-        </p:nvSpPr>
-        <p:spPr>
-          <a:xfrm xmlns:a="http://schemas.openxmlformats.org/drawingml/2006/main">
-            <a:off x="1238250" y="2524125"/>
-            <a:ext cx="2095500" cy="476250"/>
+                <a16:creationId xmlns:a16="http://schemas.microsoft.com/office/drawing/2014/main" id="{23613AEB-12AD-435B-AE84-7E9D42CB0268}"/>
+              </a:ext>
+            </a:extLst>
+          </p:cNvPr>
+          <p:cNvSpPr>
+            <a:spLocks xmlns:a="http://schemas.openxmlformats.org/drawingml/2006/main" noGrp="1"/>
+          </p:cNvSpPr>
+          <p:nvPr/>
+        </p:nvSpPr>
+        <p:spPr>
+          <a:xfrm xmlns:a="http://schemas.openxmlformats.org/drawingml/2006/main">
+            <a:off x="2190750" y="2714625"/>
+            <a:ext cx="7810500" cy="590550"/>
           </a:xfrm>
           <a:prstGeom xmlns:a="http://schemas.openxmlformats.org/drawingml/2006/main" prst="rect">
             <a:avLst/>
@@ -9622,19 +10035,19 @@
           <a:p xmlns:a="http://schemas.openxmlformats.org/drawingml/2006/main">
             <a:pPr algn="ctr">
               <a:buNone/>
-              <a:defRPr sz="2700" b="1">
-                <a:solidFill>
-                  <a:srgbClr val="0B2239"/>
-                </a:solidFill>
-              </a:defRPr>
-            </a:pPr>
-            <a:r>
-              <a:rPr sz="2700" b="1">
-                <a:solidFill>
-                  <a:srgbClr val="0B2239"/>
-                </a:solidFill>
-              </a:rPr>
-              <a:t>1</a:t>
+              <a:defRPr sz="2850" b="1">
+                <a:solidFill>
+                  <a:srgbClr val="FFFFFF"/>
+                </a:solidFill>
+              </a:defRPr>
+            </a:pPr>
+            <a:r>
+              <a:rPr sz="2850" b="1">
+                <a:solidFill>
+                  <a:srgbClr val="FFFFFF"/>
+                </a:solidFill>
+              </a:rPr>
+              <a:t>While this is true, keep doing this.</a:t>
             </a:r>
           </a:p>
         </p:txBody>
@@ -9644,19 +10057,19 @@
           <p:cNvPr id="7" name="">
             <a:extLst xmlns:a="http://schemas.openxmlformats.org/drawingml/2006/main">
               <a:ext uri="{FF2B5EF4-FFF2-40B4-BE49-F238E27FC236}">
-                <a16:creationId xmlns:a16="http://schemas.microsoft.com/office/drawing/2014/main" id="{581C7938-2E5C-44A1-AE79-D6E1E2CD6FA4}"/>
-              </a:ext>
-            </a:extLst>
-          </p:cNvPr>
-          <p:cNvSpPr>
-            <a:spLocks xmlns:a="http://schemas.openxmlformats.org/drawingml/2006/main" noGrp="1"/>
-          </p:cNvSpPr>
-          <p:nvPr/>
-        </p:nvSpPr>
-        <p:spPr>
-          <a:xfrm xmlns:a="http://schemas.openxmlformats.org/drawingml/2006/main">
-            <a:off x="1238250" y="3286125"/>
-            <a:ext cx="2095500" cy="304800"/>
+                <a16:creationId xmlns:a16="http://schemas.microsoft.com/office/drawing/2014/main" id="{C73AD7C5-BA28-4AA0-8662-E48330CEBD0C}"/>
+              </a:ext>
+            </a:extLst>
+          </p:cNvPr>
+          <p:cNvSpPr>
+            <a:spLocks xmlns:a="http://schemas.openxmlformats.org/drawingml/2006/main" noGrp="1"/>
+          </p:cNvSpPr>
+          <p:nvPr/>
+        </p:nvSpPr>
+        <p:spPr>
+          <a:xfrm xmlns:a="http://schemas.openxmlformats.org/drawingml/2006/main">
+            <a:off x="2190750" y="3571875"/>
+            <a:ext cx="7810500" cy="342900"/>
           </a:xfrm>
           <a:prstGeom xmlns:a="http://schemas.openxmlformats.org/drawingml/2006/main" prst="rect">
             <a:avLst/>
@@ -9673,393 +10086,19 @@
           <a:p xmlns:a="http://schemas.openxmlformats.org/drawingml/2006/main">
             <a:pPr algn="ctr">
               <a:buNone/>
-              <a:defRPr sz="1500" b="0">
-                <a:solidFill>
-                  <a:srgbClr val="536271"/>
-                </a:solidFill>
-              </a:defRPr>
-            </a:pPr>
-            <a:r>
-              <a:rPr sz="1500" b="0">
-                <a:solidFill>
-                  <a:srgbClr val="536271"/>
-                </a:solidFill>
-              </a:rPr>
-              <a:t>count = 1</a:t>
-            </a:r>
-          </a:p>
-        </p:txBody>
-      </p:sp>
-      <p:sp>
-        <p:nvSpPr>
-          <p:cNvPr id="8" name="">
-            <a:extLst xmlns:a="http://schemas.openxmlformats.org/drawingml/2006/main">
-              <a:ext uri="{FF2B5EF4-FFF2-40B4-BE49-F238E27FC236}">
-                <a16:creationId xmlns:a16="http://schemas.microsoft.com/office/drawing/2014/main" id="{3BCD244E-6575-40A7-B5EE-DBC5E3852FFB}"/>
-              </a:ext>
-            </a:extLst>
-          </p:cNvPr>
-          <p:cNvSpPr>
-            <a:spLocks xmlns:a="http://schemas.openxmlformats.org/drawingml/2006/main" noGrp="1"/>
-          </p:cNvSpPr>
-          <p:nvPr/>
-        </p:nvSpPr>
-        <p:spPr>
-          <a:xfrm xmlns:a="http://schemas.openxmlformats.org/drawingml/2006/main">
-            <a:off x="3857625" y="2809875"/>
-            <a:ext cx="666750" cy="571500"/>
-          </a:xfrm>
-          <a:prstGeom xmlns:a="http://schemas.openxmlformats.org/drawingml/2006/main" prst="rect">
-            <a:avLst/>
-          </a:prstGeom>
-          <a:noFill xmlns:a="http://schemas.openxmlformats.org/drawingml/2006/main"/>
-          <a:ln xmlns:a="http://schemas.openxmlformats.org/drawingml/2006/main" w="0">
-            <a:noFill/>
-            <a:prstDash val="solid"/>
-          </a:ln>
-        </p:spPr>
-        <p:txBody>
-          <a:bodyPr xmlns:a="http://schemas.openxmlformats.org/drawingml/2006/main"/>
-          <a:lstStyle xmlns:a="http://schemas.openxmlformats.org/drawingml/2006/main"/>
-          <a:p xmlns:a="http://schemas.openxmlformats.org/drawingml/2006/main">
-            <a:pPr algn="ctr">
-              <a:buNone/>
-              <a:defRPr sz="3300" b="1">
-                <a:solidFill>
-                  <a:srgbClr val="1F9AA5"/>
-                </a:solidFill>
-              </a:defRPr>
-            </a:pPr>
-            <a:r>
-              <a:rPr sz="3300" b="1">
-                <a:solidFill>
-                  <a:srgbClr val="1F9AA5"/>
-                </a:solidFill>
-              </a:rPr>
-              <a:t>+</a:t>
-            </a:r>
-          </a:p>
-        </p:txBody>
-      </p:sp>
-      <p:sp>
-        <p:nvSpPr>
-          <p:cNvPr id="9" name="">
-            <a:extLst xmlns:a="http://schemas.openxmlformats.org/drawingml/2006/main">
-              <a:ext uri="{FF2B5EF4-FFF2-40B4-BE49-F238E27FC236}">
-                <a16:creationId xmlns:a16="http://schemas.microsoft.com/office/drawing/2014/main" id="{44536D3C-2493-4D9A-9D05-D6265A351975}"/>
-              </a:ext>
-            </a:extLst>
-          </p:cNvPr>
-          <p:cNvSpPr>
-            <a:spLocks xmlns:a="http://schemas.openxmlformats.org/drawingml/2006/main" noGrp="1"/>
-          </p:cNvSpPr>
-          <p:nvPr/>
-        </p:nvSpPr>
-        <p:spPr>
-          <a:xfrm xmlns:a="http://schemas.openxmlformats.org/drawingml/2006/main">
-            <a:off x="4762500" y="2143125"/>
-            <a:ext cx="2667000" cy="2000250"/>
-          </a:xfrm>
-          <a:prstGeom xmlns:a="http://schemas.openxmlformats.org/drawingml/2006/main" prst="roundRect">
-            <a:avLst>
-              <a:gd name="adj" fmla="val 7619"/>
-            </a:avLst>
-          </a:prstGeom>
-          <a:solidFill xmlns:a="http://schemas.openxmlformats.org/drawingml/2006/main">
-            <a:srgbClr val="FFFFFF"/>
-          </a:solidFill>
-          <a:ln xmlns:a="http://schemas.openxmlformats.org/drawingml/2006/main" w="9525">
-            <a:solidFill>
-              <a:srgbClr val="D5DEE5"/>
-            </a:solidFill>
-            <a:prstDash val="solid"/>
-          </a:ln>
-        </p:spPr>
-      </p:sp>
-      <p:sp>
-        <p:nvSpPr>
-          <p:cNvPr id="10" name="">
-            <a:extLst xmlns:a="http://schemas.openxmlformats.org/drawingml/2006/main">
-              <a:ext uri="{FF2B5EF4-FFF2-40B4-BE49-F238E27FC236}">
-                <a16:creationId xmlns:a16="http://schemas.microsoft.com/office/drawing/2014/main" id="{18F6D736-0200-4904-9249-1832206F2D04}"/>
-              </a:ext>
-            </a:extLst>
-          </p:cNvPr>
-          <p:cNvSpPr>
-            <a:spLocks xmlns:a="http://schemas.openxmlformats.org/drawingml/2006/main" noGrp="1"/>
-          </p:cNvSpPr>
-          <p:nvPr/>
-        </p:nvSpPr>
-        <p:spPr>
-          <a:xfrm xmlns:a="http://schemas.openxmlformats.org/drawingml/2006/main">
-            <a:off x="5048250" y="2524125"/>
-            <a:ext cx="2095500" cy="476250"/>
-          </a:xfrm>
-          <a:prstGeom xmlns:a="http://schemas.openxmlformats.org/drawingml/2006/main" prst="rect">
-            <a:avLst/>
-          </a:prstGeom>
-          <a:noFill xmlns:a="http://schemas.openxmlformats.org/drawingml/2006/main"/>
-          <a:ln xmlns:a="http://schemas.openxmlformats.org/drawingml/2006/main" w="0">
-            <a:noFill/>
-            <a:prstDash val="solid"/>
-          </a:ln>
-        </p:spPr>
-        <p:txBody>
-          <a:bodyPr xmlns:a="http://schemas.openxmlformats.org/drawingml/2006/main"/>
-          <a:lstStyle xmlns:a="http://schemas.openxmlformats.org/drawingml/2006/main"/>
-          <a:p xmlns:a="http://schemas.openxmlformats.org/drawingml/2006/main">
-            <a:pPr algn="ctr">
-              <a:buNone/>
-              <a:defRPr sz="2550" b="1">
-                <a:solidFill>
-                  <a:srgbClr val="0B2239"/>
-                </a:solidFill>
-              </a:defRPr>
-            </a:pPr>
-            <a:r>
-              <a:rPr sz="2550" b="1">
-                <a:solidFill>
-                  <a:srgbClr val="0B2239"/>
-                </a:solidFill>
-              </a:rPr>
-              <a:t>2</a:t>
-            </a:r>
-          </a:p>
-        </p:txBody>
-      </p:sp>
-      <p:sp>
-        <p:nvSpPr>
-          <p:cNvPr id="11" name="">
-            <a:extLst xmlns:a="http://schemas.openxmlformats.org/drawingml/2006/main">
-              <a:ext uri="{FF2B5EF4-FFF2-40B4-BE49-F238E27FC236}">
-                <a16:creationId xmlns:a16="http://schemas.microsoft.com/office/drawing/2014/main" id="{A1A0854D-6428-40C1-8252-CF860CC6B2B3}"/>
-              </a:ext>
-            </a:extLst>
-          </p:cNvPr>
-          <p:cNvSpPr>
-            <a:spLocks xmlns:a="http://schemas.openxmlformats.org/drawingml/2006/main" noGrp="1"/>
-          </p:cNvSpPr>
-          <p:nvPr/>
-        </p:nvSpPr>
-        <p:spPr>
-          <a:xfrm xmlns:a="http://schemas.openxmlformats.org/drawingml/2006/main">
-            <a:off x="5048250" y="3286125"/>
-            <a:ext cx="2095500" cy="304800"/>
-          </a:xfrm>
-          <a:prstGeom xmlns:a="http://schemas.openxmlformats.org/drawingml/2006/main" prst="rect">
-            <a:avLst/>
-          </a:prstGeom>
-          <a:noFill xmlns:a="http://schemas.openxmlformats.org/drawingml/2006/main"/>
-          <a:ln xmlns:a="http://schemas.openxmlformats.org/drawingml/2006/main" w="0">
-            <a:noFill/>
-            <a:prstDash val="solid"/>
-          </a:ln>
-        </p:spPr>
-        <p:txBody>
-          <a:bodyPr xmlns:a="http://schemas.openxmlformats.org/drawingml/2006/main"/>
-          <a:lstStyle xmlns:a="http://schemas.openxmlformats.org/drawingml/2006/main"/>
-          <a:p xmlns:a="http://schemas.openxmlformats.org/drawingml/2006/main">
-            <a:pPr algn="ctr">
-              <a:buNone/>
-              <a:defRPr sz="1500" b="0">
-                <a:solidFill>
-                  <a:srgbClr val="536271"/>
-                </a:solidFill>
-              </a:defRPr>
-            </a:pPr>
-            <a:r>
-              <a:rPr sz="1500" b="0">
-                <a:solidFill>
-                  <a:srgbClr val="536271"/>
-                </a:solidFill>
-              </a:rPr>
-              <a:t>while count &lt;= 3</a:t>
-            </a:r>
-          </a:p>
-        </p:txBody>
-      </p:sp>
-      <p:sp>
-        <p:nvSpPr>
-          <p:cNvPr id="12" name="">
-            <a:extLst xmlns:a="http://schemas.openxmlformats.org/drawingml/2006/main">
-              <a:ext uri="{FF2B5EF4-FFF2-40B4-BE49-F238E27FC236}">
-                <a16:creationId xmlns:a16="http://schemas.microsoft.com/office/drawing/2014/main" id="{065BB7C4-C169-40C9-ACFD-C5D406D2241C}"/>
-              </a:ext>
-            </a:extLst>
-          </p:cNvPr>
-          <p:cNvSpPr>
-            <a:spLocks xmlns:a="http://schemas.openxmlformats.org/drawingml/2006/main" noGrp="1"/>
-          </p:cNvSpPr>
-          <p:nvPr/>
-        </p:nvSpPr>
-        <p:spPr>
-          <a:xfrm xmlns:a="http://schemas.openxmlformats.org/drawingml/2006/main">
-            <a:off x="7667625" y="2809875"/>
-            <a:ext cx="666750" cy="571500"/>
-          </a:xfrm>
-          <a:prstGeom xmlns:a="http://schemas.openxmlformats.org/drawingml/2006/main" prst="rect">
-            <a:avLst/>
-          </a:prstGeom>
-          <a:noFill xmlns:a="http://schemas.openxmlformats.org/drawingml/2006/main"/>
-          <a:ln xmlns:a="http://schemas.openxmlformats.org/drawingml/2006/main" w="0">
-            <a:noFill/>
-            <a:prstDash val="solid"/>
-          </a:ln>
-        </p:spPr>
-        <p:txBody>
-          <a:bodyPr xmlns:a="http://schemas.openxmlformats.org/drawingml/2006/main"/>
-          <a:lstStyle xmlns:a="http://schemas.openxmlformats.org/drawingml/2006/main"/>
-          <a:p xmlns:a="http://schemas.openxmlformats.org/drawingml/2006/main">
-            <a:pPr algn="ctr">
-              <a:buNone/>
-              <a:defRPr sz="3300" b="1">
-                <a:solidFill>
-                  <a:srgbClr val="1F9AA5"/>
-                </a:solidFill>
-              </a:defRPr>
-            </a:pPr>
-            <a:r>
-              <a:rPr sz="3300" b="1">
-                <a:solidFill>
-                  <a:srgbClr val="1F9AA5"/>
-                </a:solidFill>
-              </a:rPr>
-              <a:t>→</a:t>
-            </a:r>
-          </a:p>
-        </p:txBody>
-      </p:sp>
-      <p:sp>
-        <p:nvSpPr>
-          <p:cNvPr id="13" name="">
-            <a:extLst xmlns:a="http://schemas.openxmlformats.org/drawingml/2006/main">
-              <a:ext uri="{FF2B5EF4-FFF2-40B4-BE49-F238E27FC236}">
-                <a16:creationId xmlns:a16="http://schemas.microsoft.com/office/drawing/2014/main" id="{A01B800B-2D00-47E3-AA5A-F5DD7D34EC4B}"/>
-              </a:ext>
-            </a:extLst>
-          </p:cNvPr>
-          <p:cNvSpPr>
-            <a:spLocks xmlns:a="http://schemas.openxmlformats.org/drawingml/2006/main" noGrp="1"/>
-          </p:cNvSpPr>
-          <p:nvPr/>
-        </p:nvSpPr>
-        <p:spPr>
-          <a:xfrm xmlns:a="http://schemas.openxmlformats.org/drawingml/2006/main">
-            <a:off x="8572500" y="2143125"/>
-            <a:ext cx="2667000" cy="2000250"/>
-          </a:xfrm>
-          <a:prstGeom xmlns:a="http://schemas.openxmlformats.org/drawingml/2006/main" prst="roundRect">
-            <a:avLst>
-              <a:gd name="adj" fmla="val 7619"/>
-            </a:avLst>
-          </a:prstGeom>
-          <a:solidFill xmlns:a="http://schemas.openxmlformats.org/drawingml/2006/main">
-            <a:srgbClr val="1F9AA5"/>
-          </a:solidFill>
-          <a:ln xmlns:a="http://schemas.openxmlformats.org/drawingml/2006/main" w="0">
-            <a:noFill/>
-            <a:prstDash val="solid"/>
-          </a:ln>
-        </p:spPr>
-      </p:sp>
-      <p:sp>
-        <p:nvSpPr>
-          <p:cNvPr id="14" name="">
-            <a:extLst xmlns:a="http://schemas.openxmlformats.org/drawingml/2006/main">
-              <a:ext uri="{FF2B5EF4-FFF2-40B4-BE49-F238E27FC236}">
-                <a16:creationId xmlns:a16="http://schemas.microsoft.com/office/drawing/2014/main" id="{9B5B932D-54B2-4945-B9F3-C155C927B64B}"/>
-              </a:ext>
-            </a:extLst>
-          </p:cNvPr>
-          <p:cNvSpPr>
-            <a:spLocks xmlns:a="http://schemas.openxmlformats.org/drawingml/2006/main" noGrp="1"/>
-          </p:cNvSpPr>
-          <p:nvPr/>
-        </p:nvSpPr>
-        <p:spPr>
-          <a:xfrm xmlns:a="http://schemas.openxmlformats.org/drawingml/2006/main">
-            <a:off x="8858250" y="2524125"/>
-            <a:ext cx="2095500" cy="476250"/>
-          </a:xfrm>
-          <a:prstGeom xmlns:a="http://schemas.openxmlformats.org/drawingml/2006/main" prst="rect">
-            <a:avLst/>
-          </a:prstGeom>
-          <a:noFill xmlns:a="http://schemas.openxmlformats.org/drawingml/2006/main"/>
-          <a:ln xmlns:a="http://schemas.openxmlformats.org/drawingml/2006/main" w="0">
-            <a:noFill/>
-            <a:prstDash val="solid"/>
-          </a:ln>
-        </p:spPr>
-        <p:txBody>
-          <a:bodyPr xmlns:a="http://schemas.openxmlformats.org/drawingml/2006/main"/>
-          <a:lstStyle xmlns:a="http://schemas.openxmlformats.org/drawingml/2006/main"/>
-          <a:p xmlns:a="http://schemas.openxmlformats.org/drawingml/2006/main">
-            <a:pPr algn="ctr">
-              <a:buNone/>
-              <a:defRPr sz="2550" b="1">
-                <a:solidFill>
-                  <a:srgbClr val="FFFFFF"/>
-                </a:solidFill>
-              </a:defRPr>
-            </a:pPr>
-            <a:r>
-              <a:rPr sz="2550" b="1">
-                <a:solidFill>
-                  <a:srgbClr val="FFFFFF"/>
-                </a:solidFill>
-              </a:rPr>
-              <a:t>3</a:t>
-            </a:r>
-          </a:p>
-        </p:txBody>
-      </p:sp>
-      <p:sp>
-        <p:nvSpPr>
-          <p:cNvPr id="15" name="">
-            <a:extLst xmlns:a="http://schemas.openxmlformats.org/drawingml/2006/main">
-              <a:ext uri="{FF2B5EF4-FFF2-40B4-BE49-F238E27FC236}">
-                <a16:creationId xmlns:a16="http://schemas.microsoft.com/office/drawing/2014/main" id="{ADEE76B3-E66C-4374-B24B-91C18AC8028F}"/>
-              </a:ext>
-            </a:extLst>
-          </p:cNvPr>
-          <p:cNvSpPr>
-            <a:spLocks xmlns:a="http://schemas.openxmlformats.org/drawingml/2006/main" noGrp="1"/>
-          </p:cNvSpPr>
-          <p:nvPr/>
-        </p:nvSpPr>
-        <p:spPr>
-          <a:xfrm xmlns:a="http://schemas.openxmlformats.org/drawingml/2006/main">
-            <a:off x="8858250" y="3286125"/>
-            <a:ext cx="2095500" cy="304800"/>
-          </a:xfrm>
-          <a:prstGeom xmlns:a="http://schemas.openxmlformats.org/drawingml/2006/main" prst="rect">
-            <a:avLst/>
-          </a:prstGeom>
-          <a:noFill xmlns:a="http://schemas.openxmlformats.org/drawingml/2006/main"/>
-          <a:ln xmlns:a="http://schemas.openxmlformats.org/drawingml/2006/main" w="0">
-            <a:noFill/>
-            <a:prstDash val="solid"/>
-          </a:ln>
-        </p:spPr>
-        <p:txBody>
-          <a:bodyPr xmlns:a="http://schemas.openxmlformats.org/drawingml/2006/main"/>
-          <a:lstStyle xmlns:a="http://schemas.openxmlformats.org/drawingml/2006/main"/>
-          <a:p xmlns:a="http://schemas.openxmlformats.org/drawingml/2006/main">
-            <a:pPr algn="ctr">
-              <a:buNone/>
-              <a:defRPr sz="1500" b="0">
-                <a:solidFill>
-                  <a:srgbClr val="E8F4F5"/>
-                </a:solidFill>
-              </a:defRPr>
-            </a:pPr>
-            <a:r>
-              <a:rPr sz="1500" b="0">
-                <a:solidFill>
-                  <a:srgbClr val="E8F4F5"/>
-                </a:solidFill>
-              </a:rPr>
-              <a:t>count += 1</a:t>
+              <a:defRPr sz="1650" b="0">
+                <a:solidFill>
+                  <a:srgbClr val="84D6D9"/>
+                </a:solidFill>
+              </a:defRPr>
+            </a:pPr>
+            <a:r>
+              <a:rPr sz="1650" b="0">
+                <a:solidFill>
+                  <a:srgbClr val="84D6D9"/>
+                </a:solidFill>
+              </a:rPr>
+              <a:t>while True：條件一直成立，直到遇到 break 才停止</a:t>
             </a:r>
           </a:p>
         </p:txBody>
@@ -10067,7 +10106,7 @@
     </p:spTree>
     <p:extLst>
       <p:ext uri="{BB962C8B-B14F-4D97-AF65-F5344CB8AC3E}">
-        <p14:creationId xmlns:p14="http://schemas.microsoft.com/office/powerpoint/2010/main" val="778389022"/>
+        <p14:creationId xmlns:p14="http://schemas.microsoft.com/office/powerpoint/2010/main" val="1667864155"/>
       </p:ext>
     </p:extLst>
   </p:cSld>
@@ -10095,10 +10134,10 @@
       </p:grpSpPr>
       <p:sp>
         <p:nvSpPr>
-          <p:cNvPr id="13" name="">
-            <a:extLst xmlns:a="http://schemas.openxmlformats.org/drawingml/2006/main">
-              <a:ext uri="{FF2B5EF4-FFF2-40B4-BE49-F238E27FC236}">
-                <a16:creationId xmlns:a16="http://schemas.microsoft.com/office/drawing/2014/main" id="{4B8E990D-1874-4524-A96F-1EFA3A69B4C7}"/>
+          <p:cNvPr id="16" name="">
+            <a:extLst xmlns:a="http://schemas.openxmlformats.org/drawingml/2006/main">
+              <a:ext uri="{FF2B5EF4-FFF2-40B4-BE49-F238E27FC236}">
+                <a16:creationId xmlns:a16="http://schemas.microsoft.com/office/drawing/2014/main" id="{D2F1CAE4-187A-4F0A-9022-7437844E17DF}"/>
               </a:ext>
             </a:extLst>
           </p:cNvPr>
@@ -10129,7 +10168,7 @@
           <p:cNvPr id="2" name="">
             <a:extLst xmlns:a="http://schemas.openxmlformats.org/drawingml/2006/main">
               <a:ext uri="{FF2B5EF4-FFF2-40B4-BE49-F238E27FC236}">
-                <a16:creationId xmlns:a16="http://schemas.microsoft.com/office/drawing/2014/main" id="{55D4A92E-2E51-4606-9EDA-112FA6EC61EA}"/>
+                <a16:creationId xmlns:a16="http://schemas.microsoft.com/office/drawing/2014/main" id="{2715A867-3276-404D-8C24-77366B37ED2B}"/>
               </a:ext>
             </a:extLst>
           </p:cNvPr>
@@ -10170,7 +10209,7 @@
                   <a:srgbClr val="1F9AA5"/>
                 </a:solidFill>
               </a:rPr>
-              <a:t>安全檢查</a:t>
+              <a:t>基本結構</a:t>
             </a:r>
           </a:p>
         </p:txBody>
@@ -10180,7 +10219,7 @@
           <p:cNvPr id="3" name="">
             <a:extLst xmlns:a="http://schemas.openxmlformats.org/drawingml/2006/main">
               <a:ext uri="{FF2B5EF4-FFF2-40B4-BE49-F238E27FC236}">
-                <a16:creationId xmlns:a16="http://schemas.microsoft.com/office/drawing/2014/main" id="{83F7DE7F-D087-4B2A-8633-BC508E0AD1CD}"/>
+                <a16:creationId xmlns:a16="http://schemas.microsoft.com/office/drawing/2014/main" id="{D222E0D9-D661-4469-9627-C8C6985B429F}"/>
               </a:ext>
             </a:extLst>
           </p:cNvPr>
@@ -10221,7 +10260,7 @@
                   <a:srgbClr val="0B2239"/>
                 </a:solidFill>
               </a:rPr>
-              <a:t>沒有更新變數，可能形成無限迴圈</a:t>
+              <a:t>先設定變數，再檢查條件與更新</a:t>
             </a:r>
           </a:p>
         </p:txBody>
@@ -10231,7 +10270,7 @@
           <p:cNvPr id="4" name="">
             <a:extLst xmlns:a="http://schemas.openxmlformats.org/drawingml/2006/main">
               <a:ext uri="{FF2B5EF4-FFF2-40B4-BE49-F238E27FC236}">
-                <a16:creationId xmlns:a16="http://schemas.microsoft.com/office/drawing/2014/main" id="{A0CB12E9-F2CB-49EB-AF10-BB4A5E509494}"/>
+                <a16:creationId xmlns:a16="http://schemas.microsoft.com/office/drawing/2014/main" id="{1E214BAF-B825-4761-B241-2C3115FA09F1}"/>
               </a:ext>
             </a:extLst>
           </p:cNvPr>
@@ -10282,358 +10321,344 @@
           <p:cNvPr id="5" name="">
             <a:extLst xmlns:a="http://schemas.openxmlformats.org/drawingml/2006/main">
               <a:ext uri="{FF2B5EF4-FFF2-40B4-BE49-F238E27FC236}">
-                <a16:creationId xmlns:a16="http://schemas.microsoft.com/office/drawing/2014/main" id="{2030CC05-7172-4642-9F5B-30B1DBA40C0F}"/>
-              </a:ext>
-            </a:extLst>
-          </p:cNvPr>
-          <p:cNvSpPr>
-            <a:spLocks xmlns:a="http://schemas.openxmlformats.org/drawingml/2006/main" noGrp="1"/>
-          </p:cNvSpPr>
-          <p:nvPr/>
-        </p:nvSpPr>
-        <p:spPr>
-          <a:xfrm xmlns:a="http://schemas.openxmlformats.org/drawingml/2006/main">
-            <a:off x="1047750" y="2095500"/>
-            <a:ext cx="266700" cy="381000"/>
-          </a:xfrm>
-          <a:prstGeom xmlns:a="http://schemas.openxmlformats.org/drawingml/2006/main" prst="rect">
-            <a:avLst/>
-          </a:prstGeom>
-          <a:noFill xmlns:a="http://schemas.openxmlformats.org/drawingml/2006/main"/>
-          <a:ln xmlns:a="http://schemas.openxmlformats.org/drawingml/2006/main" w="0">
-            <a:noFill/>
-            <a:prstDash val="solid"/>
-          </a:ln>
-        </p:spPr>
-        <p:txBody>
-          <a:bodyPr xmlns:a="http://schemas.openxmlformats.org/drawingml/2006/main"/>
-          <a:lstStyle xmlns:a="http://schemas.openxmlformats.org/drawingml/2006/main"/>
-          <a:p xmlns:a="http://schemas.openxmlformats.org/drawingml/2006/main">
-            <a:pPr algn="l">
-              <a:buNone/>
-              <a:defRPr sz="2325" b="1">
-                <a:solidFill>
-                  <a:srgbClr val="1F9AA5"/>
-                </a:solidFill>
-              </a:defRPr>
-            </a:pPr>
-            <a:r>
-              <a:rPr sz="2325" b="1">
-                <a:solidFill>
-                  <a:srgbClr val="1F9AA5"/>
-                </a:solidFill>
-              </a:rPr>
-              <a:t>•</a:t>
-            </a:r>
-          </a:p>
-        </p:txBody>
-      </p:sp>
-      <p:sp>
-        <p:nvSpPr>
-          <p:cNvPr id="6" name="">
-            <a:extLst xmlns:a="http://schemas.openxmlformats.org/drawingml/2006/main">
-              <a:ext uri="{FF2B5EF4-FFF2-40B4-BE49-F238E27FC236}">
-                <a16:creationId xmlns:a16="http://schemas.microsoft.com/office/drawing/2014/main" id="{24F5F332-7B3B-40C5-AF91-1940670C9831}"/>
-              </a:ext>
-            </a:extLst>
-          </p:cNvPr>
-          <p:cNvSpPr>
-            <a:spLocks xmlns:a="http://schemas.openxmlformats.org/drawingml/2006/main" noGrp="1"/>
-          </p:cNvSpPr>
-          <p:nvPr/>
-        </p:nvSpPr>
-        <p:spPr>
-          <a:xfrm xmlns:a="http://schemas.openxmlformats.org/drawingml/2006/main">
-            <a:off x="1428750" y="2095500"/>
-            <a:ext cx="9525000" cy="552450"/>
-          </a:xfrm>
-          <a:prstGeom xmlns:a="http://schemas.openxmlformats.org/drawingml/2006/main" prst="rect">
-            <a:avLst/>
-          </a:prstGeom>
-          <a:noFill xmlns:a="http://schemas.openxmlformats.org/drawingml/2006/main"/>
-          <a:ln xmlns:a="http://schemas.openxmlformats.org/drawingml/2006/main" w="0">
-            <a:noFill/>
-            <a:prstDash val="solid"/>
-          </a:ln>
-        </p:spPr>
-        <p:txBody>
-          <a:bodyPr xmlns:a="http://schemas.openxmlformats.org/drawingml/2006/main"/>
-          <a:lstStyle xmlns:a="http://schemas.openxmlformats.org/drawingml/2006/main"/>
-          <a:p xmlns:a="http://schemas.openxmlformats.org/drawingml/2006/main">
-            <a:pPr algn="l">
-              <a:buNone/>
-              <a:defRPr sz="2100" b="0">
-                <a:solidFill>
-                  <a:srgbClr val="15202B"/>
-                </a:solidFill>
-              </a:defRPr>
-            </a:pPr>
-            <a:r>
-              <a:rPr sz="2100" b="0">
-                <a:solidFill>
-                  <a:srgbClr val="15202B"/>
-                </a:solidFill>
-              </a:rPr>
-              <a:t>成功後會停止嗎？</a:t>
-            </a:r>
-          </a:p>
-        </p:txBody>
-      </p:sp>
-      <p:sp>
-        <p:nvSpPr>
-          <p:cNvPr id="7" name="">
-            <a:extLst xmlns:a="http://schemas.openxmlformats.org/drawingml/2006/main">
-              <a:ext uri="{FF2B5EF4-FFF2-40B4-BE49-F238E27FC236}">
-                <a16:creationId xmlns:a16="http://schemas.microsoft.com/office/drawing/2014/main" id="{C1D5870B-7881-4637-8631-F3BA9A3A7445}"/>
-              </a:ext>
-            </a:extLst>
-          </p:cNvPr>
-          <p:cNvSpPr>
-            <a:spLocks xmlns:a="http://schemas.openxmlformats.org/drawingml/2006/main" noGrp="1"/>
-          </p:cNvSpPr>
-          <p:nvPr/>
-        </p:nvSpPr>
-        <p:spPr>
-          <a:xfrm xmlns:a="http://schemas.openxmlformats.org/drawingml/2006/main">
-            <a:off x="1047750" y="3095625"/>
-            <a:ext cx="266700" cy="381000"/>
-          </a:xfrm>
-          <a:prstGeom xmlns:a="http://schemas.openxmlformats.org/drawingml/2006/main" prst="rect">
-            <a:avLst/>
-          </a:prstGeom>
-          <a:noFill xmlns:a="http://schemas.openxmlformats.org/drawingml/2006/main"/>
-          <a:ln xmlns:a="http://schemas.openxmlformats.org/drawingml/2006/main" w="0">
-            <a:noFill/>
-            <a:prstDash val="solid"/>
-          </a:ln>
-        </p:spPr>
-        <p:txBody>
-          <a:bodyPr xmlns:a="http://schemas.openxmlformats.org/drawingml/2006/main"/>
-          <a:lstStyle xmlns:a="http://schemas.openxmlformats.org/drawingml/2006/main"/>
-          <a:p xmlns:a="http://schemas.openxmlformats.org/drawingml/2006/main">
-            <a:pPr algn="l">
-              <a:buNone/>
-              <a:defRPr sz="2325" b="1">
-                <a:solidFill>
-                  <a:srgbClr val="1F9AA5"/>
-                </a:solidFill>
-              </a:defRPr>
-            </a:pPr>
-            <a:r>
-              <a:rPr sz="2325" b="1">
-                <a:solidFill>
-                  <a:srgbClr val="1F9AA5"/>
-                </a:solidFill>
-              </a:rPr>
-              <a:t>•</a:t>
-            </a:r>
-          </a:p>
-        </p:txBody>
-      </p:sp>
-      <p:sp>
-        <p:nvSpPr>
-          <p:cNvPr id="8" name="">
-            <a:extLst xmlns:a="http://schemas.openxmlformats.org/drawingml/2006/main">
-              <a:ext uri="{FF2B5EF4-FFF2-40B4-BE49-F238E27FC236}">
-                <a16:creationId xmlns:a16="http://schemas.microsoft.com/office/drawing/2014/main" id="{9D628709-2125-4DFB-82DD-768184E11539}"/>
-              </a:ext>
-            </a:extLst>
-          </p:cNvPr>
-          <p:cNvSpPr>
-            <a:spLocks xmlns:a="http://schemas.openxmlformats.org/drawingml/2006/main" noGrp="1"/>
-          </p:cNvSpPr>
-          <p:nvPr/>
-        </p:nvSpPr>
-        <p:spPr>
-          <a:xfrm xmlns:a="http://schemas.openxmlformats.org/drawingml/2006/main">
-            <a:off x="1428750" y="3095625"/>
-            <a:ext cx="9525000" cy="552450"/>
-          </a:xfrm>
-          <a:prstGeom xmlns:a="http://schemas.openxmlformats.org/drawingml/2006/main" prst="rect">
-            <a:avLst/>
-          </a:prstGeom>
-          <a:noFill xmlns:a="http://schemas.openxmlformats.org/drawingml/2006/main"/>
-          <a:ln xmlns:a="http://schemas.openxmlformats.org/drawingml/2006/main" w="0">
-            <a:noFill/>
-            <a:prstDash val="solid"/>
-          </a:ln>
-        </p:spPr>
-        <p:txBody>
-          <a:bodyPr xmlns:a="http://schemas.openxmlformats.org/drawingml/2006/main"/>
-          <a:lstStyle xmlns:a="http://schemas.openxmlformats.org/drawingml/2006/main"/>
-          <a:p xmlns:a="http://schemas.openxmlformats.org/drawingml/2006/main">
-            <a:pPr algn="l">
-              <a:buNone/>
-              <a:defRPr sz="2100" b="0">
-                <a:solidFill>
-                  <a:srgbClr val="15202B"/>
-                </a:solidFill>
-              </a:defRPr>
-            </a:pPr>
-            <a:r>
-              <a:rPr sz="2100" b="0">
-                <a:solidFill>
-                  <a:srgbClr val="15202B"/>
-                </a:solidFill>
-              </a:rPr>
-              <a:t>每一輪都更新控制變數</a:t>
-            </a:r>
-          </a:p>
-        </p:txBody>
-      </p:sp>
-      <p:sp>
-        <p:nvSpPr>
-          <p:cNvPr id="9" name="">
-            <a:extLst xmlns:a="http://schemas.openxmlformats.org/drawingml/2006/main">
-              <a:ext uri="{FF2B5EF4-FFF2-40B4-BE49-F238E27FC236}">
-                <a16:creationId xmlns:a16="http://schemas.microsoft.com/office/drawing/2014/main" id="{1B05DE22-6308-4D9E-AA28-AAD8FBB95A4A}"/>
-              </a:ext>
-            </a:extLst>
-          </p:cNvPr>
-          <p:cNvSpPr>
-            <a:spLocks xmlns:a="http://schemas.openxmlformats.org/drawingml/2006/main" noGrp="1"/>
-          </p:cNvSpPr>
-          <p:nvPr/>
-        </p:nvSpPr>
-        <p:spPr>
-          <a:xfrm xmlns:a="http://schemas.openxmlformats.org/drawingml/2006/main">
-            <a:off x="1047750" y="4095750"/>
-            <a:ext cx="266700" cy="381000"/>
-          </a:xfrm>
-          <a:prstGeom xmlns:a="http://schemas.openxmlformats.org/drawingml/2006/main" prst="rect">
-            <a:avLst/>
-          </a:prstGeom>
-          <a:noFill xmlns:a="http://schemas.openxmlformats.org/drawingml/2006/main"/>
-          <a:ln xmlns:a="http://schemas.openxmlformats.org/drawingml/2006/main" w="0">
-            <a:noFill/>
-            <a:prstDash val="solid"/>
-          </a:ln>
-        </p:spPr>
-        <p:txBody>
-          <a:bodyPr xmlns:a="http://schemas.openxmlformats.org/drawingml/2006/main"/>
-          <a:lstStyle xmlns:a="http://schemas.openxmlformats.org/drawingml/2006/main"/>
-          <a:p xmlns:a="http://schemas.openxmlformats.org/drawingml/2006/main">
-            <a:pPr algn="l">
-              <a:buNone/>
-              <a:defRPr sz="2325" b="1">
-                <a:solidFill>
-                  <a:srgbClr val="1F9AA5"/>
-                </a:solidFill>
-              </a:defRPr>
-            </a:pPr>
-            <a:r>
-              <a:rPr sz="2325" b="1">
-                <a:solidFill>
-                  <a:srgbClr val="1F9AA5"/>
-                </a:solidFill>
-              </a:rPr>
-              <a:t>•</a:t>
-            </a:r>
-          </a:p>
-        </p:txBody>
-      </p:sp>
-      <p:sp>
-        <p:nvSpPr>
-          <p:cNvPr id="10" name="">
-            <a:extLst xmlns:a="http://schemas.openxmlformats.org/drawingml/2006/main">
-              <a:ext uri="{FF2B5EF4-FFF2-40B4-BE49-F238E27FC236}">
-                <a16:creationId xmlns:a16="http://schemas.microsoft.com/office/drawing/2014/main" id="{ECF2DE03-7068-41CB-81FF-0153E56FF909}"/>
-              </a:ext>
-            </a:extLst>
-          </p:cNvPr>
-          <p:cNvSpPr>
-            <a:spLocks xmlns:a="http://schemas.openxmlformats.org/drawingml/2006/main" noGrp="1"/>
-          </p:cNvSpPr>
-          <p:nvPr/>
-        </p:nvSpPr>
-        <p:spPr>
-          <a:xfrm xmlns:a="http://schemas.openxmlformats.org/drawingml/2006/main">
-            <a:off x="1428750" y="4095750"/>
-            <a:ext cx="9525000" cy="552450"/>
-          </a:xfrm>
-          <a:prstGeom xmlns:a="http://schemas.openxmlformats.org/drawingml/2006/main" prst="rect">
-            <a:avLst/>
-          </a:prstGeom>
-          <a:noFill xmlns:a="http://schemas.openxmlformats.org/drawingml/2006/main"/>
-          <a:ln xmlns:a="http://schemas.openxmlformats.org/drawingml/2006/main" w="0">
-            <a:noFill/>
-            <a:prstDash val="solid"/>
-          </a:ln>
-        </p:spPr>
-        <p:txBody>
-          <a:bodyPr xmlns:a="http://schemas.openxmlformats.org/drawingml/2006/main"/>
-          <a:lstStyle xmlns:a="http://schemas.openxmlformats.org/drawingml/2006/main"/>
-          <a:p xmlns:a="http://schemas.openxmlformats.org/drawingml/2006/main">
-            <a:pPr algn="l">
-              <a:buNone/>
-              <a:defRPr sz="2100" b="0">
-                <a:solidFill>
-                  <a:srgbClr val="15202B"/>
-                </a:solidFill>
-              </a:defRPr>
-            </a:pPr>
-            <a:r>
-              <a:rPr sz="2100" b="0">
-                <a:solidFill>
-                  <a:srgbClr val="15202B"/>
-                </a:solidFill>
-              </a:rPr>
-              <a:t>錯誤輸入能被處理嗎？</a:t>
-            </a:r>
-          </a:p>
-        </p:txBody>
-      </p:sp>
-      <p:sp>
-        <p:nvSpPr>
-          <p:cNvPr id="11" name="">
-            <a:extLst xmlns:a="http://schemas.openxmlformats.org/drawingml/2006/main">
-              <a:ext uri="{FF2B5EF4-FFF2-40B4-BE49-F238E27FC236}">
-                <a16:creationId xmlns:a16="http://schemas.microsoft.com/office/drawing/2014/main" id="{CC752829-D13C-4A89-A84E-8DAC62578409}"/>
-              </a:ext>
-            </a:extLst>
-          </p:cNvPr>
-          <p:cNvSpPr>
-            <a:spLocks xmlns:a="http://schemas.openxmlformats.org/drawingml/2006/main" noGrp="1"/>
-          </p:cNvSpPr>
-          <p:nvPr/>
-        </p:nvSpPr>
-        <p:spPr>
-          <a:xfrm xmlns:a="http://schemas.openxmlformats.org/drawingml/2006/main">
-            <a:off x="952500" y="5219700"/>
-            <a:ext cx="10287000" cy="552450"/>
+                <a16:creationId xmlns:a16="http://schemas.microsoft.com/office/drawing/2014/main" id="{B7046AAA-3079-4B02-B281-1758AB3E68BC}"/>
+              </a:ext>
+            </a:extLst>
+          </p:cNvPr>
+          <p:cNvSpPr>
+            <a:spLocks xmlns:a="http://schemas.openxmlformats.org/drawingml/2006/main" noGrp="1"/>
+          </p:cNvSpPr>
+          <p:nvPr/>
+        </p:nvSpPr>
+        <p:spPr>
+          <a:xfrm xmlns:a="http://schemas.openxmlformats.org/drawingml/2006/main">
+            <a:off x="952500" y="2143125"/>
+            <a:ext cx="2667000" cy="2000250"/>
           </a:xfrm>
           <a:prstGeom xmlns:a="http://schemas.openxmlformats.org/drawingml/2006/main" prst="roundRect">
             <a:avLst>
-              <a:gd name="adj" fmla="val 20690"/>
+              <a:gd name="adj" fmla="val 7619"/>
             </a:avLst>
           </a:prstGeom>
           <a:solidFill xmlns:a="http://schemas.openxmlformats.org/drawingml/2006/main">
-            <a:srgbClr val="F7C948"/>
+            <a:srgbClr val="FFFFFF"/>
           </a:solidFill>
-          <a:ln xmlns:a="http://schemas.openxmlformats.org/drawingml/2006/main" w="0">
-            <a:noFill/>
-            <a:prstDash val="solid"/>
-          </a:ln>
-        </p:spPr>
+          <a:ln xmlns:a="http://schemas.openxmlformats.org/drawingml/2006/main" w="9525">
+            <a:solidFill>
+              <a:srgbClr val="D5DEE5"/>
+            </a:solidFill>
+            <a:prstDash val="solid"/>
+          </a:ln>
+        </p:spPr>
+      </p:sp>
+      <p:sp>
+        <p:nvSpPr>
+          <p:cNvPr id="6" name="">
+            <a:extLst xmlns:a="http://schemas.openxmlformats.org/drawingml/2006/main">
+              <a:ext uri="{FF2B5EF4-FFF2-40B4-BE49-F238E27FC236}">
+                <a16:creationId xmlns:a16="http://schemas.microsoft.com/office/drawing/2014/main" id="{A5758611-4227-4A38-8E90-BBB878487FD6}"/>
+              </a:ext>
+            </a:extLst>
+          </p:cNvPr>
+          <p:cNvSpPr>
+            <a:spLocks xmlns:a="http://schemas.openxmlformats.org/drawingml/2006/main" noGrp="1"/>
+          </p:cNvSpPr>
+          <p:nvPr/>
+        </p:nvSpPr>
+        <p:spPr>
+          <a:xfrm xmlns:a="http://schemas.openxmlformats.org/drawingml/2006/main">
+            <a:off x="1238250" y="2524125"/>
+            <a:ext cx="2095500" cy="476250"/>
+          </a:xfrm>
+          <a:prstGeom xmlns:a="http://schemas.openxmlformats.org/drawingml/2006/main" prst="rect">
+            <a:avLst/>
+          </a:prstGeom>
+          <a:noFill xmlns:a="http://schemas.openxmlformats.org/drawingml/2006/main"/>
+          <a:ln xmlns:a="http://schemas.openxmlformats.org/drawingml/2006/main" w="0">
+            <a:noFill/>
+            <a:prstDash val="solid"/>
+          </a:ln>
+        </p:spPr>
+        <p:txBody>
+          <a:bodyPr xmlns:a="http://schemas.openxmlformats.org/drawingml/2006/main"/>
+          <a:lstStyle xmlns:a="http://schemas.openxmlformats.org/drawingml/2006/main"/>
+          <a:p xmlns:a="http://schemas.openxmlformats.org/drawingml/2006/main">
+            <a:pPr algn="ctr">
+              <a:buNone/>
+              <a:defRPr sz="2700" b="1">
+                <a:solidFill>
+                  <a:srgbClr val="0B2239"/>
+                </a:solidFill>
+              </a:defRPr>
+            </a:pPr>
+            <a:r>
+              <a:rPr sz="2700" b="1">
+                <a:solidFill>
+                  <a:srgbClr val="0B2239"/>
+                </a:solidFill>
+              </a:rPr>
+              <a:t>1</a:t>
+            </a:r>
+          </a:p>
+        </p:txBody>
+      </p:sp>
+      <p:sp>
+        <p:nvSpPr>
+          <p:cNvPr id="7" name="">
+            <a:extLst xmlns:a="http://schemas.openxmlformats.org/drawingml/2006/main">
+              <a:ext uri="{FF2B5EF4-FFF2-40B4-BE49-F238E27FC236}">
+                <a16:creationId xmlns:a16="http://schemas.microsoft.com/office/drawing/2014/main" id="{581C7938-2E5C-44A1-AE79-D6E1E2CD6FA4}"/>
+              </a:ext>
+            </a:extLst>
+          </p:cNvPr>
+          <p:cNvSpPr>
+            <a:spLocks xmlns:a="http://schemas.openxmlformats.org/drawingml/2006/main" noGrp="1"/>
+          </p:cNvSpPr>
+          <p:nvPr/>
+        </p:nvSpPr>
+        <p:spPr>
+          <a:xfrm xmlns:a="http://schemas.openxmlformats.org/drawingml/2006/main">
+            <a:off x="1238250" y="3286125"/>
+            <a:ext cx="2095500" cy="304800"/>
+          </a:xfrm>
+          <a:prstGeom xmlns:a="http://schemas.openxmlformats.org/drawingml/2006/main" prst="rect">
+            <a:avLst/>
+          </a:prstGeom>
+          <a:noFill xmlns:a="http://schemas.openxmlformats.org/drawingml/2006/main"/>
+          <a:ln xmlns:a="http://schemas.openxmlformats.org/drawingml/2006/main" w="0">
+            <a:noFill/>
+            <a:prstDash val="solid"/>
+          </a:ln>
+        </p:spPr>
+        <p:txBody>
+          <a:bodyPr xmlns:a="http://schemas.openxmlformats.org/drawingml/2006/main"/>
+          <a:lstStyle xmlns:a="http://schemas.openxmlformats.org/drawingml/2006/main"/>
+          <a:p xmlns:a="http://schemas.openxmlformats.org/drawingml/2006/main">
+            <a:pPr algn="ctr">
+              <a:buNone/>
+              <a:defRPr sz="1500" b="0">
+                <a:solidFill>
+                  <a:srgbClr val="536271"/>
+                </a:solidFill>
+              </a:defRPr>
+            </a:pPr>
+            <a:r>
+              <a:rPr sz="1500" b="0">
+                <a:solidFill>
+                  <a:srgbClr val="536271"/>
+                </a:solidFill>
+              </a:rPr>
+              <a:t>count = 1</a:t>
+            </a:r>
+          </a:p>
+        </p:txBody>
+      </p:sp>
+      <p:sp>
+        <p:nvSpPr>
+          <p:cNvPr id="8" name="">
+            <a:extLst xmlns:a="http://schemas.openxmlformats.org/drawingml/2006/main">
+              <a:ext uri="{FF2B5EF4-FFF2-40B4-BE49-F238E27FC236}">
+                <a16:creationId xmlns:a16="http://schemas.microsoft.com/office/drawing/2014/main" id="{3BCD244E-6575-40A7-B5EE-DBC5E3852FFB}"/>
+              </a:ext>
+            </a:extLst>
+          </p:cNvPr>
+          <p:cNvSpPr>
+            <a:spLocks xmlns:a="http://schemas.openxmlformats.org/drawingml/2006/main" noGrp="1"/>
+          </p:cNvSpPr>
+          <p:nvPr/>
+        </p:nvSpPr>
+        <p:spPr>
+          <a:xfrm xmlns:a="http://schemas.openxmlformats.org/drawingml/2006/main">
+            <a:off x="3857625" y="2809875"/>
+            <a:ext cx="666750" cy="571500"/>
+          </a:xfrm>
+          <a:prstGeom xmlns:a="http://schemas.openxmlformats.org/drawingml/2006/main" prst="rect">
+            <a:avLst/>
+          </a:prstGeom>
+          <a:noFill xmlns:a="http://schemas.openxmlformats.org/drawingml/2006/main"/>
+          <a:ln xmlns:a="http://schemas.openxmlformats.org/drawingml/2006/main" w="0">
+            <a:noFill/>
+            <a:prstDash val="solid"/>
+          </a:ln>
+        </p:spPr>
+        <p:txBody>
+          <a:bodyPr xmlns:a="http://schemas.openxmlformats.org/drawingml/2006/main"/>
+          <a:lstStyle xmlns:a="http://schemas.openxmlformats.org/drawingml/2006/main"/>
+          <a:p xmlns:a="http://schemas.openxmlformats.org/drawingml/2006/main">
+            <a:pPr algn="ctr">
+              <a:buNone/>
+              <a:defRPr sz="3300" b="1">
+                <a:solidFill>
+                  <a:srgbClr val="1F9AA5"/>
+                </a:solidFill>
+              </a:defRPr>
+            </a:pPr>
+            <a:r>
+              <a:rPr sz="3300" b="1">
+                <a:solidFill>
+                  <a:srgbClr val="1F9AA5"/>
+                </a:solidFill>
+              </a:rPr>
+              <a:t>+</a:t>
+            </a:r>
+          </a:p>
+        </p:txBody>
+      </p:sp>
+      <p:sp>
+        <p:nvSpPr>
+          <p:cNvPr id="9" name="">
+            <a:extLst xmlns:a="http://schemas.openxmlformats.org/drawingml/2006/main">
+              <a:ext uri="{FF2B5EF4-FFF2-40B4-BE49-F238E27FC236}">
+                <a16:creationId xmlns:a16="http://schemas.microsoft.com/office/drawing/2014/main" id="{44536D3C-2493-4D9A-9D05-D6265A351975}"/>
+              </a:ext>
+            </a:extLst>
+          </p:cNvPr>
+          <p:cNvSpPr>
+            <a:spLocks xmlns:a="http://schemas.openxmlformats.org/drawingml/2006/main" noGrp="1"/>
+          </p:cNvSpPr>
+          <p:nvPr/>
+        </p:nvSpPr>
+        <p:spPr>
+          <a:xfrm xmlns:a="http://schemas.openxmlformats.org/drawingml/2006/main">
+            <a:off x="4762500" y="2143125"/>
+            <a:ext cx="2667000" cy="2000250"/>
+          </a:xfrm>
+          <a:prstGeom xmlns:a="http://schemas.openxmlformats.org/drawingml/2006/main" prst="roundRect">
+            <a:avLst>
+              <a:gd name="adj" fmla="val 7619"/>
+            </a:avLst>
+          </a:prstGeom>
+          <a:solidFill xmlns:a="http://schemas.openxmlformats.org/drawingml/2006/main">
+            <a:srgbClr val="FFFFFF"/>
+          </a:solidFill>
+          <a:ln xmlns:a="http://schemas.openxmlformats.org/drawingml/2006/main" w="9525">
+            <a:solidFill>
+              <a:srgbClr val="D5DEE5"/>
+            </a:solidFill>
+            <a:prstDash val="solid"/>
+          </a:ln>
+        </p:spPr>
+      </p:sp>
+      <p:sp>
+        <p:nvSpPr>
+          <p:cNvPr id="10" name="">
+            <a:extLst xmlns:a="http://schemas.openxmlformats.org/drawingml/2006/main">
+              <a:ext uri="{FF2B5EF4-FFF2-40B4-BE49-F238E27FC236}">
+                <a16:creationId xmlns:a16="http://schemas.microsoft.com/office/drawing/2014/main" id="{18F6D736-0200-4904-9249-1832206F2D04}"/>
+              </a:ext>
+            </a:extLst>
+          </p:cNvPr>
+          <p:cNvSpPr>
+            <a:spLocks xmlns:a="http://schemas.openxmlformats.org/drawingml/2006/main" noGrp="1"/>
+          </p:cNvSpPr>
+          <p:nvPr/>
+        </p:nvSpPr>
+        <p:spPr>
+          <a:xfrm xmlns:a="http://schemas.openxmlformats.org/drawingml/2006/main">
+            <a:off x="5048250" y="2524125"/>
+            <a:ext cx="2095500" cy="476250"/>
+          </a:xfrm>
+          <a:prstGeom xmlns:a="http://schemas.openxmlformats.org/drawingml/2006/main" prst="rect">
+            <a:avLst/>
+          </a:prstGeom>
+          <a:noFill xmlns:a="http://schemas.openxmlformats.org/drawingml/2006/main"/>
+          <a:ln xmlns:a="http://schemas.openxmlformats.org/drawingml/2006/main" w="0">
+            <a:noFill/>
+            <a:prstDash val="solid"/>
+          </a:ln>
+        </p:spPr>
+        <p:txBody>
+          <a:bodyPr xmlns:a="http://schemas.openxmlformats.org/drawingml/2006/main"/>
+          <a:lstStyle xmlns:a="http://schemas.openxmlformats.org/drawingml/2006/main"/>
+          <a:p xmlns:a="http://schemas.openxmlformats.org/drawingml/2006/main">
+            <a:pPr algn="ctr">
+              <a:buNone/>
+              <a:defRPr sz="2550" b="1">
+                <a:solidFill>
+                  <a:srgbClr val="0B2239"/>
+                </a:solidFill>
+              </a:defRPr>
+            </a:pPr>
+            <a:r>
+              <a:rPr sz="2550" b="1">
+                <a:solidFill>
+                  <a:srgbClr val="0B2239"/>
+                </a:solidFill>
+              </a:rPr>
+              <a:t>2</a:t>
+            </a:r>
+          </a:p>
+        </p:txBody>
+      </p:sp>
+      <p:sp>
+        <p:nvSpPr>
+          <p:cNvPr id="11" name="">
+            <a:extLst xmlns:a="http://schemas.openxmlformats.org/drawingml/2006/main">
+              <a:ext uri="{FF2B5EF4-FFF2-40B4-BE49-F238E27FC236}">
+                <a16:creationId xmlns:a16="http://schemas.microsoft.com/office/drawing/2014/main" id="{A1A0854D-6428-40C1-8252-CF860CC6B2B3}"/>
+              </a:ext>
+            </a:extLst>
+          </p:cNvPr>
+          <p:cNvSpPr>
+            <a:spLocks xmlns:a="http://schemas.openxmlformats.org/drawingml/2006/main" noGrp="1"/>
+          </p:cNvSpPr>
+          <p:nvPr/>
+        </p:nvSpPr>
+        <p:spPr>
+          <a:xfrm xmlns:a="http://schemas.openxmlformats.org/drawingml/2006/main">
+            <a:off x="5048250" y="3286125"/>
+            <a:ext cx="2095500" cy="304800"/>
+          </a:xfrm>
+          <a:prstGeom xmlns:a="http://schemas.openxmlformats.org/drawingml/2006/main" prst="rect">
+            <a:avLst/>
+          </a:prstGeom>
+          <a:noFill xmlns:a="http://schemas.openxmlformats.org/drawingml/2006/main"/>
+          <a:ln xmlns:a="http://schemas.openxmlformats.org/drawingml/2006/main" w="0">
+            <a:noFill/>
+            <a:prstDash val="solid"/>
+          </a:ln>
+        </p:spPr>
+        <p:txBody>
+          <a:bodyPr xmlns:a="http://schemas.openxmlformats.org/drawingml/2006/main"/>
+          <a:lstStyle xmlns:a="http://schemas.openxmlformats.org/drawingml/2006/main"/>
+          <a:p xmlns:a="http://schemas.openxmlformats.org/drawingml/2006/main">
+            <a:pPr algn="ctr">
+              <a:buNone/>
+              <a:defRPr sz="1500" b="0">
+                <a:solidFill>
+                  <a:srgbClr val="536271"/>
+                </a:solidFill>
+              </a:defRPr>
+            </a:pPr>
+            <a:r>
+              <a:rPr sz="1500" b="0">
+                <a:solidFill>
+                  <a:srgbClr val="536271"/>
+                </a:solidFill>
+              </a:rPr>
+              <a:t>while count &lt;= 3</a:t>
+            </a:r>
+          </a:p>
+        </p:txBody>
       </p:sp>
       <p:sp>
         <p:nvSpPr>
           <p:cNvPr id="12" name="">
             <a:extLst xmlns:a="http://schemas.openxmlformats.org/drawingml/2006/main">
               <a:ext uri="{FF2B5EF4-FFF2-40B4-BE49-F238E27FC236}">
-                <a16:creationId xmlns:a16="http://schemas.microsoft.com/office/drawing/2014/main" id="{FB578D74-C19C-44E2-833C-AAFFA93CCBE7}"/>
-              </a:ext>
-            </a:extLst>
-          </p:cNvPr>
-          <p:cNvSpPr>
-            <a:spLocks xmlns:a="http://schemas.openxmlformats.org/drawingml/2006/main" noGrp="1"/>
-          </p:cNvSpPr>
-          <p:nvPr/>
-        </p:nvSpPr>
-        <p:spPr>
-          <a:xfrm xmlns:a="http://schemas.openxmlformats.org/drawingml/2006/main">
-            <a:off x="1190625" y="5343525"/>
-            <a:ext cx="9810750" cy="323850"/>
+                <a16:creationId xmlns:a16="http://schemas.microsoft.com/office/drawing/2014/main" id="{065BB7C4-C169-40C9-ACFD-C5D406D2241C}"/>
+              </a:ext>
+            </a:extLst>
+          </p:cNvPr>
+          <p:cNvSpPr>
+            <a:spLocks xmlns:a="http://schemas.openxmlformats.org/drawingml/2006/main" noGrp="1"/>
+          </p:cNvSpPr>
+          <p:nvPr/>
+        </p:nvSpPr>
+        <p:spPr>
+          <a:xfrm xmlns:a="http://schemas.openxmlformats.org/drawingml/2006/main">
+            <a:off x="7667625" y="2809875"/>
+            <a:ext cx="666750" cy="571500"/>
           </a:xfrm>
           <a:prstGeom xmlns:a="http://schemas.openxmlformats.org/drawingml/2006/main" prst="rect">
             <a:avLst/>
@@ -10650,19 +10675,154 @@
           <a:p xmlns:a="http://schemas.openxmlformats.org/drawingml/2006/main">
             <a:pPr algn="ctr">
               <a:buNone/>
-              <a:defRPr sz="1650" b="1">
-                <a:solidFill>
-                  <a:srgbClr val="0B2239"/>
-                </a:solidFill>
-              </a:defRPr>
-            </a:pPr>
-            <a:r>
-              <a:rPr sz="1650" b="1">
-                <a:solidFill>
-                  <a:srgbClr val="0B2239"/>
-                </a:solidFill>
-              </a:rPr>
-              <a:t>寫 while 前，先回答三個問題。</a:t>
+              <a:defRPr sz="3300" b="1">
+                <a:solidFill>
+                  <a:srgbClr val="1F9AA5"/>
+                </a:solidFill>
+              </a:defRPr>
+            </a:pPr>
+            <a:r>
+              <a:rPr sz="3300" b="1">
+                <a:solidFill>
+                  <a:srgbClr val="1F9AA5"/>
+                </a:solidFill>
+              </a:rPr>
+              <a:t>→</a:t>
+            </a:r>
+          </a:p>
+        </p:txBody>
+      </p:sp>
+      <p:sp>
+        <p:nvSpPr>
+          <p:cNvPr id="13" name="">
+            <a:extLst xmlns:a="http://schemas.openxmlformats.org/drawingml/2006/main">
+              <a:ext uri="{FF2B5EF4-FFF2-40B4-BE49-F238E27FC236}">
+                <a16:creationId xmlns:a16="http://schemas.microsoft.com/office/drawing/2014/main" id="{A01B800B-2D00-47E3-AA5A-F5DD7D34EC4B}"/>
+              </a:ext>
+            </a:extLst>
+          </p:cNvPr>
+          <p:cNvSpPr>
+            <a:spLocks xmlns:a="http://schemas.openxmlformats.org/drawingml/2006/main" noGrp="1"/>
+          </p:cNvSpPr>
+          <p:nvPr/>
+        </p:nvSpPr>
+        <p:spPr>
+          <a:xfrm xmlns:a="http://schemas.openxmlformats.org/drawingml/2006/main">
+            <a:off x="8572500" y="2143125"/>
+            <a:ext cx="2667000" cy="2000250"/>
+          </a:xfrm>
+          <a:prstGeom xmlns:a="http://schemas.openxmlformats.org/drawingml/2006/main" prst="roundRect">
+            <a:avLst>
+              <a:gd name="adj" fmla="val 7619"/>
+            </a:avLst>
+          </a:prstGeom>
+          <a:solidFill xmlns:a="http://schemas.openxmlformats.org/drawingml/2006/main">
+            <a:srgbClr val="1F9AA5"/>
+          </a:solidFill>
+          <a:ln xmlns:a="http://schemas.openxmlformats.org/drawingml/2006/main" w="0">
+            <a:noFill/>
+            <a:prstDash val="solid"/>
+          </a:ln>
+        </p:spPr>
+      </p:sp>
+      <p:sp>
+        <p:nvSpPr>
+          <p:cNvPr id="14" name="">
+            <a:extLst xmlns:a="http://schemas.openxmlformats.org/drawingml/2006/main">
+              <a:ext uri="{FF2B5EF4-FFF2-40B4-BE49-F238E27FC236}">
+                <a16:creationId xmlns:a16="http://schemas.microsoft.com/office/drawing/2014/main" id="{9B5B932D-54B2-4945-B9F3-C155C927B64B}"/>
+              </a:ext>
+            </a:extLst>
+          </p:cNvPr>
+          <p:cNvSpPr>
+            <a:spLocks xmlns:a="http://schemas.openxmlformats.org/drawingml/2006/main" noGrp="1"/>
+          </p:cNvSpPr>
+          <p:nvPr/>
+        </p:nvSpPr>
+        <p:spPr>
+          <a:xfrm xmlns:a="http://schemas.openxmlformats.org/drawingml/2006/main">
+            <a:off x="8858250" y="2524125"/>
+            <a:ext cx="2095500" cy="476250"/>
+          </a:xfrm>
+          <a:prstGeom xmlns:a="http://schemas.openxmlformats.org/drawingml/2006/main" prst="rect">
+            <a:avLst/>
+          </a:prstGeom>
+          <a:noFill xmlns:a="http://schemas.openxmlformats.org/drawingml/2006/main"/>
+          <a:ln xmlns:a="http://schemas.openxmlformats.org/drawingml/2006/main" w="0">
+            <a:noFill/>
+            <a:prstDash val="solid"/>
+          </a:ln>
+        </p:spPr>
+        <p:txBody>
+          <a:bodyPr xmlns:a="http://schemas.openxmlformats.org/drawingml/2006/main"/>
+          <a:lstStyle xmlns:a="http://schemas.openxmlformats.org/drawingml/2006/main"/>
+          <a:p xmlns:a="http://schemas.openxmlformats.org/drawingml/2006/main">
+            <a:pPr algn="ctr">
+              <a:buNone/>
+              <a:defRPr sz="2550" b="1">
+                <a:solidFill>
+                  <a:srgbClr val="FFFFFF"/>
+                </a:solidFill>
+              </a:defRPr>
+            </a:pPr>
+            <a:r>
+              <a:rPr sz="2550" b="1">
+                <a:solidFill>
+                  <a:srgbClr val="FFFFFF"/>
+                </a:solidFill>
+              </a:rPr>
+              <a:t>3</a:t>
+            </a:r>
+          </a:p>
+        </p:txBody>
+      </p:sp>
+      <p:sp>
+        <p:nvSpPr>
+          <p:cNvPr id="15" name="">
+            <a:extLst xmlns:a="http://schemas.openxmlformats.org/drawingml/2006/main">
+              <a:ext uri="{FF2B5EF4-FFF2-40B4-BE49-F238E27FC236}">
+                <a16:creationId xmlns:a16="http://schemas.microsoft.com/office/drawing/2014/main" id="{ADEE76B3-E66C-4374-B24B-91C18AC8028F}"/>
+              </a:ext>
+            </a:extLst>
+          </p:cNvPr>
+          <p:cNvSpPr>
+            <a:spLocks xmlns:a="http://schemas.openxmlformats.org/drawingml/2006/main" noGrp="1"/>
+          </p:cNvSpPr>
+          <p:nvPr/>
+        </p:nvSpPr>
+        <p:spPr>
+          <a:xfrm xmlns:a="http://schemas.openxmlformats.org/drawingml/2006/main">
+            <a:off x="8858250" y="3286125"/>
+            <a:ext cx="2095500" cy="304800"/>
+          </a:xfrm>
+          <a:prstGeom xmlns:a="http://schemas.openxmlformats.org/drawingml/2006/main" prst="rect">
+            <a:avLst/>
+          </a:prstGeom>
+          <a:noFill xmlns:a="http://schemas.openxmlformats.org/drawingml/2006/main"/>
+          <a:ln xmlns:a="http://schemas.openxmlformats.org/drawingml/2006/main" w="0">
+            <a:noFill/>
+            <a:prstDash val="solid"/>
+          </a:ln>
+        </p:spPr>
+        <p:txBody>
+          <a:bodyPr xmlns:a="http://schemas.openxmlformats.org/drawingml/2006/main"/>
+          <a:lstStyle xmlns:a="http://schemas.openxmlformats.org/drawingml/2006/main"/>
+          <a:p xmlns:a="http://schemas.openxmlformats.org/drawingml/2006/main">
+            <a:pPr algn="ctr">
+              <a:buNone/>
+              <a:defRPr sz="1500" b="0">
+                <a:solidFill>
+                  <a:srgbClr val="E8F4F5"/>
+                </a:solidFill>
+              </a:defRPr>
+            </a:pPr>
+            <a:r>
+              <a:rPr sz="1500" b="0">
+                <a:solidFill>
+                  <a:srgbClr val="E8F4F5"/>
+                </a:solidFill>
+              </a:rPr>
+              <a:t>count += 1</a:t>
             </a:r>
           </a:p>
         </p:txBody>
@@ -10670,7 +10830,7 @@
     </p:spTree>
     <p:extLst>
       <p:ext uri="{BB962C8B-B14F-4D97-AF65-F5344CB8AC3E}">
-        <p14:creationId xmlns:p14="http://schemas.microsoft.com/office/powerpoint/2010/main" val="1788113963"/>
+        <p14:creationId xmlns:p14="http://schemas.microsoft.com/office/powerpoint/2010/main" val="778389022"/>
       </p:ext>
     </p:extLst>
   </p:cSld>
@@ -10698,10 +10858,10 @@
       </p:grpSpPr>
       <p:sp>
         <p:nvSpPr>
-          <p:cNvPr id="10" name="">
-            <a:extLst xmlns:a="http://schemas.openxmlformats.org/drawingml/2006/main">
-              <a:ext uri="{FF2B5EF4-FFF2-40B4-BE49-F238E27FC236}">
-                <a16:creationId xmlns:a16="http://schemas.microsoft.com/office/drawing/2014/main" id="{BBD3928B-E337-4743-86DF-26A9CECC1EB2}"/>
+          <p:cNvPr id="13" name="">
+            <a:extLst xmlns:a="http://schemas.openxmlformats.org/drawingml/2006/main">
+              <a:ext uri="{FF2B5EF4-FFF2-40B4-BE49-F238E27FC236}">
+                <a16:creationId xmlns:a16="http://schemas.microsoft.com/office/drawing/2014/main" id="{4B8E990D-1874-4524-A96F-1EFA3A69B4C7}"/>
               </a:ext>
             </a:extLst>
           </p:cNvPr>
@@ -10732,7 +10892,7 @@
           <p:cNvPr id="2" name="">
             <a:extLst xmlns:a="http://schemas.openxmlformats.org/drawingml/2006/main">
               <a:ext uri="{FF2B5EF4-FFF2-40B4-BE49-F238E27FC236}">
-                <a16:creationId xmlns:a16="http://schemas.microsoft.com/office/drawing/2014/main" id="{16472B74-C036-4D4C-BED1-24901CCFA093}"/>
+                <a16:creationId xmlns:a16="http://schemas.microsoft.com/office/drawing/2014/main" id="{55D4A92E-2E51-4606-9EDA-112FA6EC61EA}"/>
               </a:ext>
             </a:extLst>
           </p:cNvPr>
@@ -10773,7 +10933,7 @@
                   <a:srgbClr val="1F9AA5"/>
                 </a:solidFill>
               </a:rPr>
-              <a:t>流程控制</a:t>
+              <a:t>安全檢查</a:t>
             </a:r>
           </a:p>
         </p:txBody>
@@ -10783,7 +10943,7 @@
           <p:cNvPr id="3" name="">
             <a:extLst xmlns:a="http://schemas.openxmlformats.org/drawingml/2006/main">
               <a:ext uri="{FF2B5EF4-FFF2-40B4-BE49-F238E27FC236}">
-                <a16:creationId xmlns:a16="http://schemas.microsoft.com/office/drawing/2014/main" id="{3A5A86C6-0887-42BE-8895-113A9DACDD85}"/>
+                <a16:creationId xmlns:a16="http://schemas.microsoft.com/office/drawing/2014/main" id="{83F7DE7F-D087-4B2A-8633-BC508E0AD1CD}"/>
               </a:ext>
             </a:extLst>
           </p:cNvPr>
@@ -10824,7 +10984,7 @@
                   <a:srgbClr val="0B2239"/>
                 </a:solidFill>
               </a:rPr>
-              <a:t>break 結束；continue 跳到下一輪</a:t>
+              <a:t>沒有更新變數，可能形成無限迴圈</a:t>
             </a:r>
           </a:p>
         </p:txBody>
@@ -10834,7 +10994,7 @@
           <p:cNvPr id="4" name="">
             <a:extLst xmlns:a="http://schemas.openxmlformats.org/drawingml/2006/main">
               <a:ext uri="{FF2B5EF4-FFF2-40B4-BE49-F238E27FC236}">
-                <a16:creationId xmlns:a16="http://schemas.microsoft.com/office/drawing/2014/main" id="{22570886-86BA-40DD-9B49-6FDBC0A9E8F4}"/>
+                <a16:creationId xmlns:a16="http://schemas.microsoft.com/office/drawing/2014/main" id="{A0CB12E9-F2CB-49EB-AF10-BB4A5E509494}"/>
               </a:ext>
             </a:extLst>
           </p:cNvPr>
@@ -10885,48 +11045,48 @@
           <p:cNvPr id="5" name="">
             <a:extLst xmlns:a="http://schemas.openxmlformats.org/drawingml/2006/main">
               <a:ext uri="{FF2B5EF4-FFF2-40B4-BE49-F238E27FC236}">
-                <a16:creationId xmlns:a16="http://schemas.microsoft.com/office/drawing/2014/main" id="{AAFC63A5-DBFA-4BF1-9C60-3D1E59F4A7BB}"/>
-              </a:ext>
-            </a:extLst>
-          </p:cNvPr>
-          <p:cNvSpPr>
-            <a:spLocks xmlns:a="http://schemas.openxmlformats.org/drawingml/2006/main" noGrp="1"/>
-          </p:cNvSpPr>
-          <p:nvPr/>
-        </p:nvSpPr>
-        <p:spPr>
-          <a:xfrm xmlns:a="http://schemas.openxmlformats.org/drawingml/2006/main">
-            <a:off x="1333500" y="2143125"/>
-            <a:ext cx="9525000" cy="781050"/>
-          </a:xfrm>
-          <a:prstGeom xmlns:a="http://schemas.openxmlformats.org/drawingml/2006/main" prst="rect">
-            <a:avLst/>
-          </a:prstGeom>
-          <a:noFill xmlns:a="http://schemas.openxmlformats.org/drawingml/2006/main"/>
-          <a:ln xmlns:a="http://schemas.openxmlformats.org/drawingml/2006/main" w="0">
-            <a:noFill/>
-            <a:prstDash val="solid"/>
-          </a:ln>
-        </p:spPr>
-        <p:txBody>
-          <a:bodyPr xmlns:a="http://schemas.openxmlformats.org/drawingml/2006/main"/>
-          <a:lstStyle xmlns:a="http://schemas.openxmlformats.org/drawingml/2006/main"/>
-          <a:p xmlns:a="http://schemas.openxmlformats.org/drawingml/2006/main">
-            <a:pPr algn="ctr">
-              <a:buNone/>
-              <a:defRPr sz="3300" b="1">
+                <a16:creationId xmlns:a16="http://schemas.microsoft.com/office/drawing/2014/main" id="{2030CC05-7172-4642-9F5B-30B1DBA40C0F}"/>
+              </a:ext>
+            </a:extLst>
+          </p:cNvPr>
+          <p:cNvSpPr>
+            <a:spLocks xmlns:a="http://schemas.openxmlformats.org/drawingml/2006/main" noGrp="1"/>
+          </p:cNvSpPr>
+          <p:nvPr/>
+        </p:nvSpPr>
+        <p:spPr>
+          <a:xfrm xmlns:a="http://schemas.openxmlformats.org/drawingml/2006/main">
+            <a:off x="1047750" y="2095500"/>
+            <a:ext cx="266700" cy="381000"/>
+          </a:xfrm>
+          <a:prstGeom xmlns:a="http://schemas.openxmlformats.org/drawingml/2006/main" prst="rect">
+            <a:avLst/>
+          </a:prstGeom>
+          <a:noFill xmlns:a="http://schemas.openxmlformats.org/drawingml/2006/main"/>
+          <a:ln xmlns:a="http://schemas.openxmlformats.org/drawingml/2006/main" w="0">
+            <a:noFill/>
+            <a:prstDash val="solid"/>
+          </a:ln>
+        </p:spPr>
+        <p:txBody>
+          <a:bodyPr xmlns:a="http://schemas.openxmlformats.org/drawingml/2006/main"/>
+          <a:lstStyle xmlns:a="http://schemas.openxmlformats.org/drawingml/2006/main"/>
+          <a:p xmlns:a="http://schemas.openxmlformats.org/drawingml/2006/main">
+            <a:pPr algn="l">
+              <a:buNone/>
+              <a:defRPr sz="2325" b="1">
                 <a:solidFill>
                   <a:srgbClr val="1F9AA5"/>
                 </a:solidFill>
               </a:defRPr>
             </a:pPr>
             <a:r>
-              <a:rPr sz="3300" b="1">
+              <a:rPr sz="2325" b="1">
                 <a:solidFill>
                   <a:srgbClr val="1F9AA5"/>
                 </a:solidFill>
               </a:rPr>
-              <a:t>break   |   continue</a:t>
+              <a:t>•</a:t>
             </a:r>
           </a:p>
         </p:txBody>
@@ -10936,54 +11096,307 @@
           <p:cNvPr id="6" name="">
             <a:extLst xmlns:a="http://schemas.openxmlformats.org/drawingml/2006/main">
               <a:ext uri="{FF2B5EF4-FFF2-40B4-BE49-F238E27FC236}">
-                <a16:creationId xmlns:a16="http://schemas.microsoft.com/office/drawing/2014/main" id="{D3F7D34F-8583-433B-B4A1-D92A98427FF1}"/>
-              </a:ext>
-            </a:extLst>
-          </p:cNvPr>
-          <p:cNvSpPr>
-            <a:spLocks xmlns:a="http://schemas.openxmlformats.org/drawingml/2006/main" noGrp="1"/>
-          </p:cNvSpPr>
-          <p:nvPr/>
-        </p:nvSpPr>
-        <p:spPr>
-          <a:xfrm xmlns:a="http://schemas.openxmlformats.org/drawingml/2006/main">
-            <a:off x="1809750" y="3333750"/>
-            <a:ext cx="8572500" cy="1190625"/>
+                <a16:creationId xmlns:a16="http://schemas.microsoft.com/office/drawing/2014/main" id="{24F5F332-7B3B-40C5-AF91-1940670C9831}"/>
+              </a:ext>
+            </a:extLst>
+          </p:cNvPr>
+          <p:cNvSpPr>
+            <a:spLocks xmlns:a="http://schemas.openxmlformats.org/drawingml/2006/main" noGrp="1"/>
+          </p:cNvSpPr>
+          <p:nvPr/>
+        </p:nvSpPr>
+        <p:spPr>
+          <a:xfrm xmlns:a="http://schemas.openxmlformats.org/drawingml/2006/main">
+            <a:off x="1428750" y="2095500"/>
+            <a:ext cx="9525000" cy="552450"/>
+          </a:xfrm>
+          <a:prstGeom xmlns:a="http://schemas.openxmlformats.org/drawingml/2006/main" prst="rect">
+            <a:avLst/>
+          </a:prstGeom>
+          <a:noFill xmlns:a="http://schemas.openxmlformats.org/drawingml/2006/main"/>
+          <a:ln xmlns:a="http://schemas.openxmlformats.org/drawingml/2006/main" w="0">
+            <a:noFill/>
+            <a:prstDash val="solid"/>
+          </a:ln>
+        </p:spPr>
+        <p:txBody>
+          <a:bodyPr xmlns:a="http://schemas.openxmlformats.org/drawingml/2006/main"/>
+          <a:lstStyle xmlns:a="http://schemas.openxmlformats.org/drawingml/2006/main"/>
+          <a:p xmlns:a="http://schemas.openxmlformats.org/drawingml/2006/main">
+            <a:pPr algn="l">
+              <a:buNone/>
+              <a:defRPr sz="2100" b="0">
+                <a:solidFill>
+                  <a:srgbClr val="15202B"/>
+                </a:solidFill>
+              </a:defRPr>
+            </a:pPr>
+            <a:r>
+              <a:rPr sz="2100" b="0">
+                <a:solidFill>
+                  <a:srgbClr val="15202B"/>
+                </a:solidFill>
+              </a:rPr>
+              <a:t>成功後會停止嗎？</a:t>
+            </a:r>
+          </a:p>
+        </p:txBody>
+      </p:sp>
+      <p:sp>
+        <p:nvSpPr>
+          <p:cNvPr id="7" name="">
+            <a:extLst xmlns:a="http://schemas.openxmlformats.org/drawingml/2006/main">
+              <a:ext uri="{FF2B5EF4-FFF2-40B4-BE49-F238E27FC236}">
+                <a16:creationId xmlns:a16="http://schemas.microsoft.com/office/drawing/2014/main" id="{C1D5870B-7881-4637-8631-F3BA9A3A7445}"/>
+              </a:ext>
+            </a:extLst>
+          </p:cNvPr>
+          <p:cNvSpPr>
+            <a:spLocks xmlns:a="http://schemas.openxmlformats.org/drawingml/2006/main" noGrp="1"/>
+          </p:cNvSpPr>
+          <p:nvPr/>
+        </p:nvSpPr>
+        <p:spPr>
+          <a:xfrm xmlns:a="http://schemas.openxmlformats.org/drawingml/2006/main">
+            <a:off x="1047750" y="3095625"/>
+            <a:ext cx="266700" cy="381000"/>
+          </a:xfrm>
+          <a:prstGeom xmlns:a="http://schemas.openxmlformats.org/drawingml/2006/main" prst="rect">
+            <a:avLst/>
+          </a:prstGeom>
+          <a:noFill xmlns:a="http://schemas.openxmlformats.org/drawingml/2006/main"/>
+          <a:ln xmlns:a="http://schemas.openxmlformats.org/drawingml/2006/main" w="0">
+            <a:noFill/>
+            <a:prstDash val="solid"/>
+          </a:ln>
+        </p:spPr>
+        <p:txBody>
+          <a:bodyPr xmlns:a="http://schemas.openxmlformats.org/drawingml/2006/main"/>
+          <a:lstStyle xmlns:a="http://schemas.openxmlformats.org/drawingml/2006/main"/>
+          <a:p xmlns:a="http://schemas.openxmlformats.org/drawingml/2006/main">
+            <a:pPr algn="l">
+              <a:buNone/>
+              <a:defRPr sz="2325" b="1">
+                <a:solidFill>
+                  <a:srgbClr val="1F9AA5"/>
+                </a:solidFill>
+              </a:defRPr>
+            </a:pPr>
+            <a:r>
+              <a:rPr sz="2325" b="1">
+                <a:solidFill>
+                  <a:srgbClr val="1F9AA5"/>
+                </a:solidFill>
+              </a:rPr>
+              <a:t>•</a:t>
+            </a:r>
+          </a:p>
+        </p:txBody>
+      </p:sp>
+      <p:sp>
+        <p:nvSpPr>
+          <p:cNvPr id="8" name="">
+            <a:extLst xmlns:a="http://schemas.openxmlformats.org/drawingml/2006/main">
+              <a:ext uri="{FF2B5EF4-FFF2-40B4-BE49-F238E27FC236}">
+                <a16:creationId xmlns:a16="http://schemas.microsoft.com/office/drawing/2014/main" id="{9D628709-2125-4DFB-82DD-768184E11539}"/>
+              </a:ext>
+            </a:extLst>
+          </p:cNvPr>
+          <p:cNvSpPr>
+            <a:spLocks xmlns:a="http://schemas.openxmlformats.org/drawingml/2006/main" noGrp="1"/>
+          </p:cNvSpPr>
+          <p:nvPr/>
+        </p:nvSpPr>
+        <p:spPr>
+          <a:xfrm xmlns:a="http://schemas.openxmlformats.org/drawingml/2006/main">
+            <a:off x="1428750" y="3095625"/>
+            <a:ext cx="9525000" cy="552450"/>
+          </a:xfrm>
+          <a:prstGeom xmlns:a="http://schemas.openxmlformats.org/drawingml/2006/main" prst="rect">
+            <a:avLst/>
+          </a:prstGeom>
+          <a:noFill xmlns:a="http://schemas.openxmlformats.org/drawingml/2006/main"/>
+          <a:ln xmlns:a="http://schemas.openxmlformats.org/drawingml/2006/main" w="0">
+            <a:noFill/>
+            <a:prstDash val="solid"/>
+          </a:ln>
+        </p:spPr>
+        <p:txBody>
+          <a:bodyPr xmlns:a="http://schemas.openxmlformats.org/drawingml/2006/main"/>
+          <a:lstStyle xmlns:a="http://schemas.openxmlformats.org/drawingml/2006/main"/>
+          <a:p xmlns:a="http://schemas.openxmlformats.org/drawingml/2006/main">
+            <a:pPr algn="l">
+              <a:buNone/>
+              <a:defRPr sz="2100" b="0">
+                <a:solidFill>
+                  <a:srgbClr val="15202B"/>
+                </a:solidFill>
+              </a:defRPr>
+            </a:pPr>
+            <a:r>
+              <a:rPr sz="2100" b="0">
+                <a:solidFill>
+                  <a:srgbClr val="15202B"/>
+                </a:solidFill>
+              </a:rPr>
+              <a:t>每一輪都更新控制變數</a:t>
+            </a:r>
+          </a:p>
+        </p:txBody>
+      </p:sp>
+      <p:sp>
+        <p:nvSpPr>
+          <p:cNvPr id="9" name="">
+            <a:extLst xmlns:a="http://schemas.openxmlformats.org/drawingml/2006/main">
+              <a:ext uri="{FF2B5EF4-FFF2-40B4-BE49-F238E27FC236}">
+                <a16:creationId xmlns:a16="http://schemas.microsoft.com/office/drawing/2014/main" id="{1B05DE22-6308-4D9E-AA28-AAD8FBB95A4A}"/>
+              </a:ext>
+            </a:extLst>
+          </p:cNvPr>
+          <p:cNvSpPr>
+            <a:spLocks xmlns:a="http://schemas.openxmlformats.org/drawingml/2006/main" noGrp="1"/>
+          </p:cNvSpPr>
+          <p:nvPr/>
+        </p:nvSpPr>
+        <p:spPr>
+          <a:xfrm xmlns:a="http://schemas.openxmlformats.org/drawingml/2006/main">
+            <a:off x="1047750" y="4095750"/>
+            <a:ext cx="266700" cy="381000"/>
+          </a:xfrm>
+          <a:prstGeom xmlns:a="http://schemas.openxmlformats.org/drawingml/2006/main" prst="rect">
+            <a:avLst/>
+          </a:prstGeom>
+          <a:noFill xmlns:a="http://schemas.openxmlformats.org/drawingml/2006/main"/>
+          <a:ln xmlns:a="http://schemas.openxmlformats.org/drawingml/2006/main" w="0">
+            <a:noFill/>
+            <a:prstDash val="solid"/>
+          </a:ln>
+        </p:spPr>
+        <p:txBody>
+          <a:bodyPr xmlns:a="http://schemas.openxmlformats.org/drawingml/2006/main"/>
+          <a:lstStyle xmlns:a="http://schemas.openxmlformats.org/drawingml/2006/main"/>
+          <a:p xmlns:a="http://schemas.openxmlformats.org/drawingml/2006/main">
+            <a:pPr algn="l">
+              <a:buNone/>
+              <a:defRPr sz="2325" b="1">
+                <a:solidFill>
+                  <a:srgbClr val="1F9AA5"/>
+                </a:solidFill>
+              </a:defRPr>
+            </a:pPr>
+            <a:r>
+              <a:rPr sz="2325" b="1">
+                <a:solidFill>
+                  <a:srgbClr val="1F9AA5"/>
+                </a:solidFill>
+              </a:rPr>
+              <a:t>•</a:t>
+            </a:r>
+          </a:p>
+        </p:txBody>
+      </p:sp>
+      <p:sp>
+        <p:nvSpPr>
+          <p:cNvPr id="10" name="">
+            <a:extLst xmlns:a="http://schemas.openxmlformats.org/drawingml/2006/main">
+              <a:ext uri="{FF2B5EF4-FFF2-40B4-BE49-F238E27FC236}">
+                <a16:creationId xmlns:a16="http://schemas.microsoft.com/office/drawing/2014/main" id="{ECF2DE03-7068-41CB-81FF-0153E56FF909}"/>
+              </a:ext>
+            </a:extLst>
+          </p:cNvPr>
+          <p:cNvSpPr>
+            <a:spLocks xmlns:a="http://schemas.openxmlformats.org/drawingml/2006/main" noGrp="1"/>
+          </p:cNvSpPr>
+          <p:nvPr/>
+        </p:nvSpPr>
+        <p:spPr>
+          <a:xfrm xmlns:a="http://schemas.openxmlformats.org/drawingml/2006/main">
+            <a:off x="1428750" y="4095750"/>
+            <a:ext cx="9525000" cy="552450"/>
+          </a:xfrm>
+          <a:prstGeom xmlns:a="http://schemas.openxmlformats.org/drawingml/2006/main" prst="rect">
+            <a:avLst/>
+          </a:prstGeom>
+          <a:noFill xmlns:a="http://schemas.openxmlformats.org/drawingml/2006/main"/>
+          <a:ln xmlns:a="http://schemas.openxmlformats.org/drawingml/2006/main" w="0">
+            <a:noFill/>
+            <a:prstDash val="solid"/>
+          </a:ln>
+        </p:spPr>
+        <p:txBody>
+          <a:bodyPr xmlns:a="http://schemas.openxmlformats.org/drawingml/2006/main"/>
+          <a:lstStyle xmlns:a="http://schemas.openxmlformats.org/drawingml/2006/main"/>
+          <a:p xmlns:a="http://schemas.openxmlformats.org/drawingml/2006/main">
+            <a:pPr algn="l">
+              <a:buNone/>
+              <a:defRPr sz="2100" b="0">
+                <a:solidFill>
+                  <a:srgbClr val="15202B"/>
+                </a:solidFill>
+              </a:defRPr>
+            </a:pPr>
+            <a:r>
+              <a:rPr sz="2100" b="0">
+                <a:solidFill>
+                  <a:srgbClr val="15202B"/>
+                </a:solidFill>
+              </a:rPr>
+              <a:t>錯誤輸入能被處理嗎？</a:t>
+            </a:r>
+          </a:p>
+        </p:txBody>
+      </p:sp>
+      <p:sp>
+        <p:nvSpPr>
+          <p:cNvPr id="11" name="">
+            <a:extLst xmlns:a="http://schemas.openxmlformats.org/drawingml/2006/main">
+              <a:ext uri="{FF2B5EF4-FFF2-40B4-BE49-F238E27FC236}">
+                <a16:creationId xmlns:a16="http://schemas.microsoft.com/office/drawing/2014/main" id="{CC752829-D13C-4A89-A84E-8DAC62578409}"/>
+              </a:ext>
+            </a:extLst>
+          </p:cNvPr>
+          <p:cNvSpPr>
+            <a:spLocks xmlns:a="http://schemas.openxmlformats.org/drawingml/2006/main" noGrp="1"/>
+          </p:cNvSpPr>
+          <p:nvPr/>
+        </p:nvSpPr>
+        <p:spPr>
+          <a:xfrm xmlns:a="http://schemas.openxmlformats.org/drawingml/2006/main">
+            <a:off x="952500" y="5219700"/>
+            <a:ext cx="10287000" cy="552450"/>
           </a:xfrm>
           <a:prstGeom xmlns:a="http://schemas.openxmlformats.org/drawingml/2006/main" prst="roundRect">
             <a:avLst>
-              <a:gd name="adj" fmla="val 12800"/>
+              <a:gd name="adj" fmla="val 20690"/>
             </a:avLst>
           </a:prstGeom>
           <a:solidFill xmlns:a="http://schemas.openxmlformats.org/drawingml/2006/main">
-            <a:srgbClr val="FFFFFF"/>
+            <a:srgbClr val="F7C948"/>
           </a:solidFill>
-          <a:ln xmlns:a="http://schemas.openxmlformats.org/drawingml/2006/main" w="9525">
-            <a:solidFill>
-              <a:srgbClr val="D5DEE5"/>
-            </a:solidFill>
-            <a:prstDash val="solid"/>
-          </a:ln>
-        </p:spPr>
-      </p:sp>
-      <p:sp>
-        <p:nvSpPr>
-          <p:cNvPr id="7" name="">
-            <a:extLst xmlns:a="http://schemas.openxmlformats.org/drawingml/2006/main">
-              <a:ext uri="{FF2B5EF4-FFF2-40B4-BE49-F238E27FC236}">
-                <a16:creationId xmlns:a16="http://schemas.microsoft.com/office/drawing/2014/main" id="{35DDA6A4-C229-447A-B4E8-9C544E7CC5FD}"/>
-              </a:ext>
-            </a:extLst>
-          </p:cNvPr>
-          <p:cNvSpPr>
-            <a:spLocks xmlns:a="http://schemas.openxmlformats.org/drawingml/2006/main" noGrp="1"/>
-          </p:cNvSpPr>
-          <p:nvPr/>
-        </p:nvSpPr>
-        <p:spPr>
-          <a:xfrm xmlns:a="http://schemas.openxmlformats.org/drawingml/2006/main">
-            <a:off x="2095500" y="3600450"/>
-            <a:ext cx="8001000" cy="381000"/>
+          <a:ln xmlns:a="http://schemas.openxmlformats.org/drawingml/2006/main" w="0">
+            <a:noFill/>
+            <a:prstDash val="solid"/>
+          </a:ln>
+        </p:spPr>
+      </p:sp>
+      <p:sp>
+        <p:nvSpPr>
+          <p:cNvPr id="12" name="">
+            <a:extLst xmlns:a="http://schemas.openxmlformats.org/drawingml/2006/main">
+              <a:ext uri="{FF2B5EF4-FFF2-40B4-BE49-F238E27FC236}">
+                <a16:creationId xmlns:a16="http://schemas.microsoft.com/office/drawing/2014/main" id="{FB578D74-C19C-44E2-833C-AAFFA93CCBE7}"/>
+              </a:ext>
+            </a:extLst>
+          </p:cNvPr>
+          <p:cNvSpPr>
+            <a:spLocks xmlns:a="http://schemas.openxmlformats.org/drawingml/2006/main" noGrp="1"/>
+          </p:cNvSpPr>
+          <p:nvPr/>
+        </p:nvSpPr>
+        <p:spPr>
+          <a:xfrm xmlns:a="http://schemas.openxmlformats.org/drawingml/2006/main">
+            <a:off x="1190625" y="5343525"/>
+            <a:ext cx="9810750" cy="323850"/>
           </a:xfrm>
           <a:prstGeom xmlns:a="http://schemas.openxmlformats.org/drawingml/2006/main" prst="rect">
             <a:avLst/>
@@ -11000,121 +11413,19 @@
           <a:p xmlns:a="http://schemas.openxmlformats.org/drawingml/2006/main">
             <a:pPr algn="ctr">
               <a:buNone/>
-              <a:defRPr sz="2025" b="1">
+              <a:defRPr sz="1650" b="1">
                 <a:solidFill>
                   <a:srgbClr val="0B2239"/>
                 </a:solidFill>
               </a:defRPr>
             </a:pPr>
             <a:r>
-              <a:rPr sz="2025" b="1">
+              <a:rPr sz="1650" b="1">
                 <a:solidFill>
                   <a:srgbClr val="0B2239"/>
                 </a:solidFill>
               </a:rPr>
-              <a:t>break：立刻離開整個迴圈</a:t>
-            </a:r>
-          </a:p>
-        </p:txBody>
-      </p:sp>
-      <p:sp>
-        <p:nvSpPr>
-          <p:cNvPr id="8" name="">
-            <a:extLst xmlns:a="http://schemas.openxmlformats.org/drawingml/2006/main">
-              <a:ext uri="{FF2B5EF4-FFF2-40B4-BE49-F238E27FC236}">
-                <a16:creationId xmlns:a16="http://schemas.microsoft.com/office/drawing/2014/main" id="{32CB20FB-1566-4CE1-9915-AE0A4ACD2B1F}"/>
-              </a:ext>
-            </a:extLst>
-          </p:cNvPr>
-          <p:cNvSpPr>
-            <a:spLocks xmlns:a="http://schemas.openxmlformats.org/drawingml/2006/main" noGrp="1"/>
-          </p:cNvSpPr>
-          <p:nvPr/>
-        </p:nvSpPr>
-        <p:spPr>
-          <a:xfrm xmlns:a="http://schemas.openxmlformats.org/drawingml/2006/main">
-            <a:off x="2095500" y="4095750"/>
-            <a:ext cx="8001000" cy="304800"/>
-          </a:xfrm>
-          <a:prstGeom xmlns:a="http://schemas.openxmlformats.org/drawingml/2006/main" prst="rect">
-            <a:avLst/>
-          </a:prstGeom>
-          <a:noFill xmlns:a="http://schemas.openxmlformats.org/drawingml/2006/main"/>
-          <a:ln xmlns:a="http://schemas.openxmlformats.org/drawingml/2006/main" w="0">
-            <a:noFill/>
-            <a:prstDash val="solid"/>
-          </a:ln>
-        </p:spPr>
-        <p:txBody>
-          <a:bodyPr xmlns:a="http://schemas.openxmlformats.org/drawingml/2006/main"/>
-          <a:lstStyle xmlns:a="http://schemas.openxmlformats.org/drawingml/2006/main"/>
-          <a:p xmlns:a="http://schemas.openxmlformats.org/drawingml/2006/main">
-            <a:pPr algn="ctr">
-              <a:buNone/>
-              <a:defRPr sz="1500" b="0">
-                <a:solidFill>
-                  <a:srgbClr val="536271"/>
-                </a:solidFill>
-              </a:defRPr>
-            </a:pPr>
-            <a:r>
-              <a:rPr sz="1500" b="0">
-                <a:solidFill>
-                  <a:srgbClr val="536271"/>
-                </a:solidFill>
-              </a:rPr>
-              <a:t>continue：跳過本輪，回到條件</a:t>
-            </a:r>
-          </a:p>
-        </p:txBody>
-      </p:sp>
-      <p:sp>
-        <p:nvSpPr>
-          <p:cNvPr id="9" name="">
-            <a:extLst xmlns:a="http://schemas.openxmlformats.org/drawingml/2006/main">
-              <a:ext uri="{FF2B5EF4-FFF2-40B4-BE49-F238E27FC236}">
-                <a16:creationId xmlns:a16="http://schemas.microsoft.com/office/drawing/2014/main" id="{7A493768-661F-4EC1-B180-807B46CCFB84}"/>
-              </a:ext>
-            </a:extLst>
-          </p:cNvPr>
-          <p:cNvSpPr>
-            <a:spLocks xmlns:a="http://schemas.openxmlformats.org/drawingml/2006/main" noGrp="1"/>
-          </p:cNvSpPr>
-          <p:nvPr/>
-        </p:nvSpPr>
-        <p:spPr>
-          <a:xfrm xmlns:a="http://schemas.openxmlformats.org/drawingml/2006/main">
-            <a:off x="2476500" y="5095875"/>
-            <a:ext cx="7239000" cy="361950"/>
-          </a:xfrm>
-          <a:prstGeom xmlns:a="http://schemas.openxmlformats.org/drawingml/2006/main" prst="rect">
-            <a:avLst/>
-          </a:prstGeom>
-          <a:noFill xmlns:a="http://schemas.openxmlformats.org/drawingml/2006/main"/>
-          <a:ln xmlns:a="http://schemas.openxmlformats.org/drawingml/2006/main" w="0">
-            <a:noFill/>
-            <a:prstDash val="solid"/>
-          </a:ln>
-        </p:spPr>
-        <p:txBody>
-          <a:bodyPr xmlns:a="http://schemas.openxmlformats.org/drawingml/2006/main"/>
-          <a:lstStyle xmlns:a="http://schemas.openxmlformats.org/drawingml/2006/main"/>
-          <a:p xmlns:a="http://schemas.openxmlformats.org/drawingml/2006/main">
-            <a:pPr algn="ctr">
-              <a:buNone/>
-              <a:defRPr sz="1650" b="1">
-                <a:solidFill>
-                  <a:srgbClr val="C74B50"/>
-                </a:solidFill>
-              </a:defRPr>
-            </a:pPr>
-            <a:r>
-              <a:rPr sz="1650" b="1">
-                <a:solidFill>
-                  <a:srgbClr val="C74B50"/>
-                </a:solidFill>
-              </a:rPr>
-              <a:t>兩者都要先確認停止條件。</a:t>
+              <a:t>寫 while 前，先回答三個問題。</a:t>
             </a:r>
           </a:p>
         </p:txBody>
@@ -11122,7 +11433,7 @@
     </p:spTree>
     <p:extLst>
       <p:ext uri="{BB962C8B-B14F-4D97-AF65-F5344CB8AC3E}">
-        <p14:creationId xmlns:p14="http://schemas.microsoft.com/office/powerpoint/2010/main" val="1055372531"/>
+        <p14:creationId xmlns:p14="http://schemas.microsoft.com/office/powerpoint/2010/main" val="1788113963"/>
       </p:ext>
     </p:extLst>
   </p:cSld>
@@ -11150,10 +11461,10 @@
       </p:grpSpPr>
       <p:sp>
         <p:nvSpPr>
-          <p:cNvPr id="11" name="">
-            <a:extLst xmlns:a="http://schemas.openxmlformats.org/drawingml/2006/main">
-              <a:ext uri="{FF2B5EF4-FFF2-40B4-BE49-F238E27FC236}">
-                <a16:creationId xmlns:a16="http://schemas.microsoft.com/office/drawing/2014/main" id="{4BB93321-73C1-425A-ACD3-1D738C945B00}"/>
+          <p:cNvPr id="10" name="">
+            <a:extLst xmlns:a="http://schemas.openxmlformats.org/drawingml/2006/main">
+              <a:ext uri="{FF2B5EF4-FFF2-40B4-BE49-F238E27FC236}">
+                <a16:creationId xmlns:a16="http://schemas.microsoft.com/office/drawing/2014/main" id="{BBD3928B-E337-4743-86DF-26A9CECC1EB2}"/>
               </a:ext>
             </a:extLst>
           </p:cNvPr>
@@ -11184,7 +11495,7 @@
           <p:cNvPr id="2" name="">
             <a:extLst xmlns:a="http://schemas.openxmlformats.org/drawingml/2006/main">
               <a:ext uri="{FF2B5EF4-FFF2-40B4-BE49-F238E27FC236}">
-                <a16:creationId xmlns:a16="http://schemas.microsoft.com/office/drawing/2014/main" id="{13EF444B-01BF-4A4B-8944-EE903C160C92}"/>
+                <a16:creationId xmlns:a16="http://schemas.microsoft.com/office/drawing/2014/main" id="{16472B74-C036-4D4C-BED1-24901CCFA093}"/>
               </a:ext>
             </a:extLst>
           </p:cNvPr>
@@ -11225,7 +11536,7 @@
                   <a:srgbClr val="1F9AA5"/>
                 </a:solidFill>
               </a:rPr>
-              <a:t>登入重試</a:t>
+              <a:t>流程控制</a:t>
             </a:r>
           </a:p>
         </p:txBody>
@@ -11235,7 +11546,7 @@
           <p:cNvPr id="3" name="">
             <a:extLst xmlns:a="http://schemas.openxmlformats.org/drawingml/2006/main">
               <a:ext uri="{FF2B5EF4-FFF2-40B4-BE49-F238E27FC236}">
-                <a16:creationId xmlns:a16="http://schemas.microsoft.com/office/drawing/2014/main" id="{23B36091-3DEF-464B-8B37-A611337BFE52}"/>
+                <a16:creationId xmlns:a16="http://schemas.microsoft.com/office/drawing/2014/main" id="{3A5A86C6-0887-42BE-8895-113A9DACDD85}"/>
               </a:ext>
             </a:extLst>
           </p:cNvPr>
@@ -11276,7 +11587,7 @@
                   <a:srgbClr val="0B2239"/>
                 </a:solidFill>
               </a:rPr>
-              <a:t>最多三次，成功就立刻停止</a:t>
+              <a:t>break 結束；continue 跳到下一輪</a:t>
             </a:r>
           </a:p>
         </p:txBody>
@@ -11286,7 +11597,7 @@
           <p:cNvPr id="4" name="">
             <a:extLst xmlns:a="http://schemas.openxmlformats.org/drawingml/2006/main">
               <a:ext uri="{FF2B5EF4-FFF2-40B4-BE49-F238E27FC236}">
-                <a16:creationId xmlns:a16="http://schemas.microsoft.com/office/drawing/2014/main" id="{F58E7EE8-AD53-4B72-BA9D-410A3502F197}"/>
+                <a16:creationId xmlns:a16="http://schemas.microsoft.com/office/drawing/2014/main" id="{22570886-86BA-40DD-9B49-6FDBC0A9E8F4}"/>
               </a:ext>
             </a:extLst>
           </p:cNvPr>
@@ -11337,23 +11648,74 @@
           <p:cNvPr id="5" name="">
             <a:extLst xmlns:a="http://schemas.openxmlformats.org/drawingml/2006/main">
               <a:ext uri="{FF2B5EF4-FFF2-40B4-BE49-F238E27FC236}">
-                <a16:creationId xmlns:a16="http://schemas.microsoft.com/office/drawing/2014/main" id="{1839F911-D622-4FA5-A6AA-267AE7BCDCDA}"/>
-              </a:ext>
-            </a:extLst>
-          </p:cNvPr>
-          <p:cNvSpPr>
-            <a:spLocks xmlns:a="http://schemas.openxmlformats.org/drawingml/2006/main" noGrp="1"/>
-          </p:cNvSpPr>
-          <p:nvPr/>
-        </p:nvSpPr>
-        <p:spPr>
-          <a:xfrm xmlns:a="http://schemas.openxmlformats.org/drawingml/2006/main">
-            <a:off x="762000" y="1857375"/>
-            <a:ext cx="5095875" cy="3143250"/>
+                <a16:creationId xmlns:a16="http://schemas.microsoft.com/office/drawing/2014/main" id="{AAFC63A5-DBFA-4BF1-9C60-3D1E59F4A7BB}"/>
+              </a:ext>
+            </a:extLst>
+          </p:cNvPr>
+          <p:cNvSpPr>
+            <a:spLocks xmlns:a="http://schemas.openxmlformats.org/drawingml/2006/main" noGrp="1"/>
+          </p:cNvSpPr>
+          <p:nvPr/>
+        </p:nvSpPr>
+        <p:spPr>
+          <a:xfrm xmlns:a="http://schemas.openxmlformats.org/drawingml/2006/main">
+            <a:off x="1333500" y="2143125"/>
+            <a:ext cx="9525000" cy="781050"/>
+          </a:xfrm>
+          <a:prstGeom xmlns:a="http://schemas.openxmlformats.org/drawingml/2006/main" prst="rect">
+            <a:avLst/>
+          </a:prstGeom>
+          <a:noFill xmlns:a="http://schemas.openxmlformats.org/drawingml/2006/main"/>
+          <a:ln xmlns:a="http://schemas.openxmlformats.org/drawingml/2006/main" w="0">
+            <a:noFill/>
+            <a:prstDash val="solid"/>
+          </a:ln>
+        </p:spPr>
+        <p:txBody>
+          <a:bodyPr xmlns:a="http://schemas.openxmlformats.org/drawingml/2006/main"/>
+          <a:lstStyle xmlns:a="http://schemas.openxmlformats.org/drawingml/2006/main"/>
+          <a:p xmlns:a="http://schemas.openxmlformats.org/drawingml/2006/main">
+            <a:pPr algn="ctr">
+              <a:buNone/>
+              <a:defRPr sz="3300" b="1">
+                <a:solidFill>
+                  <a:srgbClr val="1F9AA5"/>
+                </a:solidFill>
+              </a:defRPr>
+            </a:pPr>
+            <a:r>
+              <a:rPr sz="3300" b="1">
+                <a:solidFill>
+                  <a:srgbClr val="1F9AA5"/>
+                </a:solidFill>
+              </a:rPr>
+              <a:t>break   |   continue</a:t>
+            </a:r>
+          </a:p>
+        </p:txBody>
+      </p:sp>
+      <p:sp>
+        <p:nvSpPr>
+          <p:cNvPr id="6" name="">
+            <a:extLst xmlns:a="http://schemas.openxmlformats.org/drawingml/2006/main">
+              <a:ext uri="{FF2B5EF4-FFF2-40B4-BE49-F238E27FC236}">
+                <a16:creationId xmlns:a16="http://schemas.microsoft.com/office/drawing/2014/main" id="{D3F7D34F-8583-433B-B4A1-D92A98427FF1}"/>
+              </a:ext>
+            </a:extLst>
+          </p:cNvPr>
+          <p:cNvSpPr>
+            <a:spLocks xmlns:a="http://schemas.openxmlformats.org/drawingml/2006/main" noGrp="1"/>
+          </p:cNvSpPr>
+          <p:nvPr/>
+        </p:nvSpPr>
+        <p:spPr>
+          <a:xfrm xmlns:a="http://schemas.openxmlformats.org/drawingml/2006/main">
+            <a:off x="1809750" y="3333750"/>
+            <a:ext cx="8572500" cy="1190625"/>
           </a:xfrm>
           <a:prstGeom xmlns:a="http://schemas.openxmlformats.org/drawingml/2006/main" prst="roundRect">
             <a:avLst>
-              <a:gd name="adj" fmla="val 4848"/>
+              <a:gd name="adj" fmla="val 12800"/>
             </a:avLst>
           </a:prstGeom>
           <a:solidFill xmlns:a="http://schemas.openxmlformats.org/drawingml/2006/main">
@@ -11369,102 +11731,51 @@
       </p:sp>
       <p:sp>
         <p:nvSpPr>
-          <p:cNvPr id="6" name="">
-            <a:extLst xmlns:a="http://schemas.openxmlformats.org/drawingml/2006/main">
-              <a:ext uri="{FF2B5EF4-FFF2-40B4-BE49-F238E27FC236}">
-                <a16:creationId xmlns:a16="http://schemas.microsoft.com/office/drawing/2014/main" id="{73EB0691-40AC-4384-8469-D33BE5A5DDF7}"/>
-              </a:ext>
-            </a:extLst>
-          </p:cNvPr>
-          <p:cNvSpPr>
-            <a:spLocks xmlns:a="http://schemas.openxmlformats.org/drawingml/2006/main" noGrp="1"/>
-          </p:cNvSpPr>
-          <p:nvPr/>
-        </p:nvSpPr>
-        <p:spPr>
-          <a:xfrm xmlns:a="http://schemas.openxmlformats.org/drawingml/2006/main">
-            <a:off x="1047750" y="2143125"/>
-            <a:ext cx="4524375" cy="438150"/>
-          </a:xfrm>
-          <a:prstGeom xmlns:a="http://schemas.openxmlformats.org/drawingml/2006/main" prst="rect">
-            <a:avLst/>
-          </a:prstGeom>
-          <a:noFill xmlns:a="http://schemas.openxmlformats.org/drawingml/2006/main"/>
-          <a:ln xmlns:a="http://schemas.openxmlformats.org/drawingml/2006/main" w="0">
-            <a:noFill/>
-            <a:prstDash val="solid"/>
-          </a:ln>
-        </p:spPr>
-        <p:txBody>
-          <a:bodyPr xmlns:a="http://schemas.openxmlformats.org/drawingml/2006/main"/>
-          <a:lstStyle xmlns:a="http://schemas.openxmlformats.org/drawingml/2006/main"/>
-          <a:p xmlns:a="http://schemas.openxmlformats.org/drawingml/2006/main">
-            <a:pPr algn="l">
-              <a:buNone/>
-              <a:defRPr sz="2250" b="1">
+          <p:cNvPr id="7" name="">
+            <a:extLst xmlns:a="http://schemas.openxmlformats.org/drawingml/2006/main">
+              <a:ext uri="{FF2B5EF4-FFF2-40B4-BE49-F238E27FC236}">
+                <a16:creationId xmlns:a16="http://schemas.microsoft.com/office/drawing/2014/main" id="{35DDA6A4-C229-447A-B4E8-9C544E7CC5FD}"/>
+              </a:ext>
+            </a:extLst>
+          </p:cNvPr>
+          <p:cNvSpPr>
+            <a:spLocks xmlns:a="http://schemas.openxmlformats.org/drawingml/2006/main" noGrp="1"/>
+          </p:cNvSpPr>
+          <p:nvPr/>
+        </p:nvSpPr>
+        <p:spPr>
+          <a:xfrm xmlns:a="http://schemas.openxmlformats.org/drawingml/2006/main">
+            <a:off x="2095500" y="3600450"/>
+            <a:ext cx="8001000" cy="381000"/>
+          </a:xfrm>
+          <a:prstGeom xmlns:a="http://schemas.openxmlformats.org/drawingml/2006/main" prst="rect">
+            <a:avLst/>
+          </a:prstGeom>
+          <a:noFill xmlns:a="http://schemas.openxmlformats.org/drawingml/2006/main"/>
+          <a:ln xmlns:a="http://schemas.openxmlformats.org/drawingml/2006/main" w="0">
+            <a:noFill/>
+            <a:prstDash val="solid"/>
+          </a:ln>
+        </p:spPr>
+        <p:txBody>
+          <a:bodyPr xmlns:a="http://schemas.openxmlformats.org/drawingml/2006/main"/>
+          <a:lstStyle xmlns:a="http://schemas.openxmlformats.org/drawingml/2006/main"/>
+          <a:p xmlns:a="http://schemas.openxmlformats.org/drawingml/2006/main">
+            <a:pPr algn="ctr">
+              <a:buNone/>
+              <a:defRPr sz="2025" b="1">
                 <a:solidFill>
                   <a:srgbClr val="0B2239"/>
                 </a:solidFill>
               </a:defRPr>
             </a:pPr>
             <a:r>
-              <a:rPr sz="2250" b="1">
+              <a:rPr sz="2025" b="1">
                 <a:solidFill>
                   <a:srgbClr val="0B2239"/>
                 </a:solidFill>
               </a:rPr>
-              <a:t>成功</a:t>
-            </a:r>
-          </a:p>
-        </p:txBody>
-      </p:sp>
-      <p:sp>
-        <p:nvSpPr>
-          <p:cNvPr id="7" name="">
-            <a:extLst xmlns:a="http://schemas.openxmlformats.org/drawingml/2006/main">
-              <a:ext uri="{FF2B5EF4-FFF2-40B4-BE49-F238E27FC236}">
-                <a16:creationId xmlns:a16="http://schemas.microsoft.com/office/drawing/2014/main" id="{6FFFA900-3FA5-466B-BEEC-8512E30E9041}"/>
-              </a:ext>
-            </a:extLst>
-          </p:cNvPr>
-          <p:cNvSpPr>
-            <a:spLocks xmlns:a="http://schemas.openxmlformats.org/drawingml/2006/main" noGrp="1"/>
-          </p:cNvSpPr>
-          <p:nvPr/>
-        </p:nvSpPr>
-        <p:spPr>
-          <a:xfrm xmlns:a="http://schemas.openxmlformats.org/drawingml/2006/main">
-            <a:off x="1047750" y="2857500"/>
-            <a:ext cx="4333875" cy="1809750"/>
-          </a:xfrm>
-          <a:prstGeom xmlns:a="http://schemas.openxmlformats.org/drawingml/2006/main" prst="rect">
-            <a:avLst/>
-          </a:prstGeom>
-          <a:noFill xmlns:a="http://schemas.openxmlformats.org/drawingml/2006/main"/>
-          <a:ln xmlns:a="http://schemas.openxmlformats.org/drawingml/2006/main" w="0">
-            <a:noFill/>
-            <a:prstDash val="solid"/>
-          </a:ln>
-        </p:spPr>
-        <p:txBody>
-          <a:bodyPr xmlns:a="http://schemas.openxmlformats.org/drawingml/2006/main"/>
-          <a:lstStyle xmlns:a="http://schemas.openxmlformats.org/drawingml/2006/main"/>
-          <a:p xmlns:a="http://schemas.openxmlformats.org/drawingml/2006/main">
-            <a:pPr algn="l">
-              <a:buNone/>
-              <a:defRPr sz="1800" b="0">
-                <a:solidFill>
-                  <a:srgbClr val="15202B"/>
-                </a:solidFill>
-              </a:defRPr>
-            </a:pPr>
-            <a:r>
-              <a:rPr sz="1800" b="0">
-                <a:solidFill>
-                  <a:srgbClr val="15202B"/>
-                </a:solidFill>
-              </a:rPr>
-              <a:t>密碼正確 → 顯示登入成功 → break</a:t>
+              <a:t>break：立刻離開整個迴圈</a:t>
             </a:r>
           </a:p>
         </p:txBody>
@@ -11474,170 +11785,99 @@
           <p:cNvPr id="8" name="">
             <a:extLst xmlns:a="http://schemas.openxmlformats.org/drawingml/2006/main">
               <a:ext uri="{FF2B5EF4-FFF2-40B4-BE49-F238E27FC236}">
-                <a16:creationId xmlns:a16="http://schemas.microsoft.com/office/drawing/2014/main" id="{49ACFB57-94D3-417E-B292-7095704B3B8D}"/>
-              </a:ext>
-            </a:extLst>
-          </p:cNvPr>
-          <p:cNvSpPr>
-            <a:spLocks xmlns:a="http://schemas.openxmlformats.org/drawingml/2006/main" noGrp="1"/>
-          </p:cNvSpPr>
-          <p:nvPr/>
-        </p:nvSpPr>
-        <p:spPr>
-          <a:xfrm xmlns:a="http://schemas.openxmlformats.org/drawingml/2006/main">
-            <a:off x="6334125" y="1857375"/>
-            <a:ext cx="5095875" cy="3143250"/>
-          </a:xfrm>
-          <a:prstGeom xmlns:a="http://schemas.openxmlformats.org/drawingml/2006/main" prst="roundRect">
-            <a:avLst>
-              <a:gd name="adj" fmla="val 4848"/>
-            </a:avLst>
-          </a:prstGeom>
-          <a:solidFill xmlns:a="http://schemas.openxmlformats.org/drawingml/2006/main">
-            <a:srgbClr val="FFFFFF"/>
-          </a:solidFill>
-          <a:ln xmlns:a="http://schemas.openxmlformats.org/drawingml/2006/main" w="9525">
-            <a:solidFill>
-              <a:srgbClr val="D5DEE5"/>
-            </a:solidFill>
-            <a:prstDash val="solid"/>
-          </a:ln>
-        </p:spPr>
+                <a16:creationId xmlns:a16="http://schemas.microsoft.com/office/drawing/2014/main" id="{32CB20FB-1566-4CE1-9915-AE0A4ACD2B1F}"/>
+              </a:ext>
+            </a:extLst>
+          </p:cNvPr>
+          <p:cNvSpPr>
+            <a:spLocks xmlns:a="http://schemas.openxmlformats.org/drawingml/2006/main" noGrp="1"/>
+          </p:cNvSpPr>
+          <p:nvPr/>
+        </p:nvSpPr>
+        <p:spPr>
+          <a:xfrm xmlns:a="http://schemas.openxmlformats.org/drawingml/2006/main">
+            <a:off x="2095500" y="4095750"/>
+            <a:ext cx="8001000" cy="304800"/>
+          </a:xfrm>
+          <a:prstGeom xmlns:a="http://schemas.openxmlformats.org/drawingml/2006/main" prst="rect">
+            <a:avLst/>
+          </a:prstGeom>
+          <a:noFill xmlns:a="http://schemas.openxmlformats.org/drawingml/2006/main"/>
+          <a:ln xmlns:a="http://schemas.openxmlformats.org/drawingml/2006/main" w="0">
+            <a:noFill/>
+            <a:prstDash val="solid"/>
+          </a:ln>
+        </p:spPr>
+        <p:txBody>
+          <a:bodyPr xmlns:a="http://schemas.openxmlformats.org/drawingml/2006/main"/>
+          <a:lstStyle xmlns:a="http://schemas.openxmlformats.org/drawingml/2006/main"/>
+          <a:p xmlns:a="http://schemas.openxmlformats.org/drawingml/2006/main">
+            <a:pPr algn="ctr">
+              <a:buNone/>
+              <a:defRPr sz="1500" b="0">
+                <a:solidFill>
+                  <a:srgbClr val="536271"/>
+                </a:solidFill>
+              </a:defRPr>
+            </a:pPr>
+            <a:r>
+              <a:rPr sz="1500" b="0">
+                <a:solidFill>
+                  <a:srgbClr val="536271"/>
+                </a:solidFill>
+              </a:rPr>
+              <a:t>continue：跳過本輪，回到條件</a:t>
+            </a:r>
+          </a:p>
+        </p:txBody>
       </p:sp>
       <p:sp>
         <p:nvSpPr>
           <p:cNvPr id="9" name="">
             <a:extLst xmlns:a="http://schemas.openxmlformats.org/drawingml/2006/main">
               <a:ext uri="{FF2B5EF4-FFF2-40B4-BE49-F238E27FC236}">
-                <a16:creationId xmlns:a16="http://schemas.microsoft.com/office/drawing/2014/main" id="{F8564DC8-4BC7-439B-9302-C372EAE8C628}"/>
-              </a:ext>
-            </a:extLst>
-          </p:cNvPr>
-          <p:cNvSpPr>
-            <a:spLocks xmlns:a="http://schemas.openxmlformats.org/drawingml/2006/main" noGrp="1"/>
-          </p:cNvSpPr>
-          <p:nvPr/>
-        </p:nvSpPr>
-        <p:spPr>
-          <a:xfrm xmlns:a="http://schemas.openxmlformats.org/drawingml/2006/main">
-            <a:off x="6619875" y="2143125"/>
-            <a:ext cx="4524375" cy="438150"/>
-          </a:xfrm>
-          <a:prstGeom xmlns:a="http://schemas.openxmlformats.org/drawingml/2006/main" prst="rect">
-            <a:avLst/>
-          </a:prstGeom>
-          <a:noFill xmlns:a="http://schemas.openxmlformats.org/drawingml/2006/main"/>
-          <a:ln xmlns:a="http://schemas.openxmlformats.org/drawingml/2006/main" w="0">
-            <a:noFill/>
-            <a:prstDash val="solid"/>
-          </a:ln>
-        </p:spPr>
-        <p:txBody>
-          <a:bodyPr xmlns:a="http://schemas.openxmlformats.org/drawingml/2006/main"/>
-          <a:lstStyle xmlns:a="http://schemas.openxmlformats.org/drawingml/2006/main"/>
-          <a:p xmlns:a="http://schemas.openxmlformats.org/drawingml/2006/main">
-            <a:pPr algn="l">
-              <a:buNone/>
-              <a:defRPr sz="2250" b="1">
-                <a:solidFill>
-                  <a:srgbClr val="0B2239"/>
-                </a:solidFill>
-              </a:defRPr>
-            </a:pPr>
-            <a:r>
-              <a:rPr sz="2250" b="1">
-                <a:solidFill>
-                  <a:srgbClr val="0B2239"/>
-                </a:solidFill>
-              </a:rPr>
-              <a:t>失敗</a:t>
-            </a:r>
-          </a:p>
-        </p:txBody>
-      </p:sp>
-      <p:sp>
-        <p:nvSpPr>
-          <p:cNvPr id="10" name="">
-            <a:extLst xmlns:a="http://schemas.openxmlformats.org/drawingml/2006/main">
-              <a:ext uri="{FF2B5EF4-FFF2-40B4-BE49-F238E27FC236}">
-                <a16:creationId xmlns:a16="http://schemas.microsoft.com/office/drawing/2014/main" id="{90C622B6-8526-4A06-96D7-A1390F1E6826}"/>
-              </a:ext>
-            </a:extLst>
-          </p:cNvPr>
-          <p:cNvSpPr>
-            <a:spLocks xmlns:a="http://schemas.openxmlformats.org/drawingml/2006/main" noGrp="1"/>
-          </p:cNvSpPr>
-          <p:nvPr/>
-        </p:nvSpPr>
-        <p:spPr>
-          <a:xfrm xmlns:a="http://schemas.openxmlformats.org/drawingml/2006/main">
-            <a:off x="6619875" y="2857500"/>
-            <a:ext cx="4333875" cy="1809750"/>
-          </a:xfrm>
-          <a:prstGeom xmlns:a="http://schemas.openxmlformats.org/drawingml/2006/main" prst="rect">
-            <a:avLst/>
-          </a:prstGeom>
-          <a:noFill xmlns:a="http://schemas.openxmlformats.org/drawingml/2006/main"/>
-          <a:ln xmlns:a="http://schemas.openxmlformats.org/drawingml/2006/main" w="0">
-            <a:noFill/>
-            <a:prstDash val="solid"/>
-          </a:ln>
-        </p:spPr>
-        <p:txBody>
-          <a:bodyPr xmlns:a="http://schemas.openxmlformats.org/drawingml/2006/main"/>
-          <a:lstStyle xmlns:a="http://schemas.openxmlformats.org/drawingml/2006/main"/>
-          <a:p xmlns:a="http://schemas.openxmlformats.org/drawingml/2006/main">
-            <a:pPr algn="l">
-              <a:buNone/>
-              <a:defRPr sz="1800" b="0">
-                <a:solidFill>
-                  <a:srgbClr val="15202B"/>
-                </a:solidFill>
-              </a:defRPr>
-            </a:pPr>
-            <a:r>
-              <a:rPr sz="1800" b="0">
-                <a:solidFill>
-                  <a:srgbClr val="15202B"/>
-                </a:solidFill>
-              </a:rPr>
-              <a:t>attempts += 1</a:t>
-            </a:r>
-          </a:p>
-          <a:p xmlns:a="http://schemas.openxmlformats.org/drawingml/2006/main">
-            <a:pPr algn="l">
-              <a:buNone/>
-              <a:defRPr sz="1800" b="0">
-                <a:solidFill>
-                  <a:srgbClr val="15202B"/>
-                </a:solidFill>
-              </a:defRPr>
-            </a:pPr>
-            <a:r>
-              <a:rPr sz="1800" b="0">
-                <a:solidFill>
-                  <a:srgbClr val="15202B"/>
-                </a:solidFill>
-              </a:rPr>
-              <a:t>顯示剩餘次數</a:t>
-            </a:r>
-          </a:p>
-          <a:p xmlns:a="http://schemas.openxmlformats.org/drawingml/2006/main">
-            <a:pPr algn="l">
-              <a:buNone/>
-              <a:defRPr sz="1800" b="0">
-                <a:solidFill>
-                  <a:srgbClr val="15202B"/>
-                </a:solidFill>
-              </a:defRPr>
-            </a:pPr>
-            <a:r>
-              <a:rPr sz="1800" b="0">
-                <a:solidFill>
-                  <a:srgbClr val="15202B"/>
-                </a:solidFill>
-              </a:rPr>
-              <a:t>三次後鎖定</a:t>
+                <a16:creationId xmlns:a16="http://schemas.microsoft.com/office/drawing/2014/main" id="{7A493768-661F-4EC1-B180-807B46CCFB84}"/>
+              </a:ext>
+            </a:extLst>
+          </p:cNvPr>
+          <p:cNvSpPr>
+            <a:spLocks xmlns:a="http://schemas.openxmlformats.org/drawingml/2006/main" noGrp="1"/>
+          </p:cNvSpPr>
+          <p:nvPr/>
+        </p:nvSpPr>
+        <p:spPr>
+          <a:xfrm xmlns:a="http://schemas.openxmlformats.org/drawingml/2006/main">
+            <a:off x="2476500" y="5095875"/>
+            <a:ext cx="7239000" cy="361950"/>
+          </a:xfrm>
+          <a:prstGeom xmlns:a="http://schemas.openxmlformats.org/drawingml/2006/main" prst="rect">
+            <a:avLst/>
+          </a:prstGeom>
+          <a:noFill xmlns:a="http://schemas.openxmlformats.org/drawingml/2006/main"/>
+          <a:ln xmlns:a="http://schemas.openxmlformats.org/drawingml/2006/main" w="0">
+            <a:noFill/>
+            <a:prstDash val="solid"/>
+          </a:ln>
+        </p:spPr>
+        <p:txBody>
+          <a:bodyPr xmlns:a="http://schemas.openxmlformats.org/drawingml/2006/main"/>
+          <a:lstStyle xmlns:a="http://schemas.openxmlformats.org/drawingml/2006/main"/>
+          <a:p xmlns:a="http://schemas.openxmlformats.org/drawingml/2006/main">
+            <a:pPr algn="ctr">
+              <a:buNone/>
+              <a:defRPr sz="1650" b="1">
+                <a:solidFill>
+                  <a:srgbClr val="C74B50"/>
+                </a:solidFill>
+              </a:defRPr>
+            </a:pPr>
+            <a:r>
+              <a:rPr sz="1650" b="1">
+                <a:solidFill>
+                  <a:srgbClr val="C74B50"/>
+                </a:solidFill>
+              </a:rPr>
+              <a:t>兩者都要先確認停止條件。</a:t>
             </a:r>
           </a:p>
         </p:txBody>
@@ -11645,7 +11885,7 @@
     </p:spTree>
     <p:extLst>
       <p:ext uri="{BB962C8B-B14F-4D97-AF65-F5344CB8AC3E}">
-        <p14:creationId xmlns:p14="http://schemas.microsoft.com/office/powerpoint/2010/main" val="1068828119"/>
+        <p14:creationId xmlns:p14="http://schemas.microsoft.com/office/powerpoint/2010/main" val="1055372531"/>
       </p:ext>
     </p:extLst>
   </p:cSld>
@@ -11673,10 +11913,10 @@
       </p:grpSpPr>
       <p:sp>
         <p:nvSpPr>
-          <p:cNvPr id="8" name="">
-            <a:extLst xmlns:a="http://schemas.openxmlformats.org/drawingml/2006/main">
-              <a:ext uri="{FF2B5EF4-FFF2-40B4-BE49-F238E27FC236}">
-                <a16:creationId xmlns:a16="http://schemas.microsoft.com/office/drawing/2014/main" id="{5F116DC5-4F1D-4CF5-9D76-1B9BDD10AFB6}"/>
+          <p:cNvPr id="11" name="">
+            <a:extLst xmlns:a="http://schemas.openxmlformats.org/drawingml/2006/main">
+              <a:ext uri="{FF2B5EF4-FFF2-40B4-BE49-F238E27FC236}">
+                <a16:creationId xmlns:a16="http://schemas.microsoft.com/office/drawing/2014/main" id="{4BB93321-73C1-425A-ACD3-1D738C945B00}"/>
               </a:ext>
             </a:extLst>
           </p:cNvPr>
@@ -11707,7 +11947,7 @@
           <p:cNvPr id="2" name="">
             <a:extLst xmlns:a="http://schemas.openxmlformats.org/drawingml/2006/main">
               <a:ext uri="{FF2B5EF4-FFF2-40B4-BE49-F238E27FC236}">
-                <a16:creationId xmlns:a16="http://schemas.microsoft.com/office/drawing/2014/main" id="{874FE8DB-E3E1-4584-BB1C-5F37F925AC76}"/>
+                <a16:creationId xmlns:a16="http://schemas.microsoft.com/office/drawing/2014/main" id="{13EF444B-01BF-4A4B-8944-EE903C160C92}"/>
               </a:ext>
             </a:extLst>
           </p:cNvPr>
@@ -11748,7 +11988,7 @@
                   <a:srgbClr val="1F9AA5"/>
                 </a:solidFill>
               </a:rPr>
-              <a:t>數字驗證</a:t>
+              <a:t>登入重試</a:t>
             </a:r>
           </a:p>
         </p:txBody>
@@ -11758,7 +11998,7 @@
           <p:cNvPr id="3" name="">
             <a:extLst xmlns:a="http://schemas.openxmlformats.org/drawingml/2006/main">
               <a:ext uri="{FF2B5EF4-FFF2-40B4-BE49-F238E27FC236}">
-                <a16:creationId xmlns:a16="http://schemas.microsoft.com/office/drawing/2014/main" id="{A5E6831C-8781-4E70-94C4-EFA164EEDB11}"/>
+                <a16:creationId xmlns:a16="http://schemas.microsoft.com/office/drawing/2014/main" id="{23B36091-3DEF-464B-8B37-A611337BFE52}"/>
               </a:ext>
             </a:extLst>
           </p:cNvPr>
@@ -11799,7 +12039,7 @@
                   <a:srgbClr val="0B2239"/>
                 </a:solidFill>
               </a:rPr>
-              <a:t>input 得到字串，轉型可能失敗</a:t>
+              <a:t>最多三次，成功就立刻停止</a:t>
             </a:r>
           </a:p>
         </p:txBody>
@@ -11809,7 +12049,7 @@
           <p:cNvPr id="4" name="">
             <a:extLst xmlns:a="http://schemas.openxmlformats.org/drawingml/2006/main">
               <a:ext uri="{FF2B5EF4-FFF2-40B4-BE49-F238E27FC236}">
-                <a16:creationId xmlns:a16="http://schemas.microsoft.com/office/drawing/2014/main" id="{F0CDCEA7-2959-4491-B486-CCBCF922EC93}"/>
+                <a16:creationId xmlns:a16="http://schemas.microsoft.com/office/drawing/2014/main" id="{F58E7EE8-AD53-4B72-BA9D-410A3502F197}"/>
               </a:ext>
             </a:extLst>
           </p:cNvPr>
@@ -11860,30 +12100,32 @@
           <p:cNvPr id="5" name="">
             <a:extLst xmlns:a="http://schemas.openxmlformats.org/drawingml/2006/main">
               <a:ext uri="{FF2B5EF4-FFF2-40B4-BE49-F238E27FC236}">
-                <a16:creationId xmlns:a16="http://schemas.microsoft.com/office/drawing/2014/main" id="{55CA46A3-90E1-43AF-879E-0755E3C26768}"/>
-              </a:ext>
-            </a:extLst>
-          </p:cNvPr>
-          <p:cNvSpPr>
-            <a:spLocks xmlns:a="http://schemas.openxmlformats.org/drawingml/2006/main" noGrp="1"/>
-          </p:cNvSpPr>
-          <p:nvPr/>
-        </p:nvSpPr>
-        <p:spPr>
-          <a:xfrm xmlns:a="http://schemas.openxmlformats.org/drawingml/2006/main">
-            <a:off x="1714500" y="2095500"/>
-            <a:ext cx="8763000" cy="2333625"/>
+                <a16:creationId xmlns:a16="http://schemas.microsoft.com/office/drawing/2014/main" id="{1839F911-D622-4FA5-A6AA-267AE7BCDCDA}"/>
+              </a:ext>
+            </a:extLst>
+          </p:cNvPr>
+          <p:cNvSpPr>
+            <a:spLocks xmlns:a="http://schemas.openxmlformats.org/drawingml/2006/main" noGrp="1"/>
+          </p:cNvSpPr>
+          <p:nvPr/>
+        </p:nvSpPr>
+        <p:spPr>
+          <a:xfrm xmlns:a="http://schemas.openxmlformats.org/drawingml/2006/main">
+            <a:off x="762000" y="1857375"/>
+            <a:ext cx="5095875" cy="3143250"/>
           </a:xfrm>
           <a:prstGeom xmlns:a="http://schemas.openxmlformats.org/drawingml/2006/main" prst="roundRect">
             <a:avLst>
-              <a:gd name="adj" fmla="val 6531"/>
+              <a:gd name="adj" fmla="val 4848"/>
             </a:avLst>
           </a:prstGeom>
           <a:solidFill xmlns:a="http://schemas.openxmlformats.org/drawingml/2006/main">
-            <a:srgbClr val="0B2239"/>
+            <a:srgbClr val="FFFFFF"/>
           </a:solidFill>
-          <a:ln xmlns:a="http://schemas.openxmlformats.org/drawingml/2006/main" w="0">
-            <a:noFill/>
+          <a:ln xmlns:a="http://schemas.openxmlformats.org/drawingml/2006/main" w="9525">
+            <a:solidFill>
+              <a:srgbClr val="D5DEE5"/>
+            </a:solidFill>
             <a:prstDash val="solid"/>
           </a:ln>
         </p:spPr>
@@ -11893,48 +12135,48 @@
           <p:cNvPr id="6" name="">
             <a:extLst xmlns:a="http://schemas.openxmlformats.org/drawingml/2006/main">
               <a:ext uri="{FF2B5EF4-FFF2-40B4-BE49-F238E27FC236}">
-                <a16:creationId xmlns:a16="http://schemas.microsoft.com/office/drawing/2014/main" id="{23613AEB-12AD-435B-AE84-7E9D42CB0268}"/>
-              </a:ext>
-            </a:extLst>
-          </p:cNvPr>
-          <p:cNvSpPr>
-            <a:spLocks xmlns:a="http://schemas.openxmlformats.org/drawingml/2006/main" noGrp="1"/>
-          </p:cNvSpPr>
-          <p:nvPr/>
-        </p:nvSpPr>
-        <p:spPr>
-          <a:xfrm xmlns:a="http://schemas.openxmlformats.org/drawingml/2006/main">
-            <a:off x="2190750" y="2714625"/>
-            <a:ext cx="7810500" cy="590550"/>
-          </a:xfrm>
-          <a:prstGeom xmlns:a="http://schemas.openxmlformats.org/drawingml/2006/main" prst="rect">
-            <a:avLst/>
-          </a:prstGeom>
-          <a:noFill xmlns:a="http://schemas.openxmlformats.org/drawingml/2006/main"/>
-          <a:ln xmlns:a="http://schemas.openxmlformats.org/drawingml/2006/main" w="0">
-            <a:noFill/>
-            <a:prstDash val="solid"/>
-          </a:ln>
-        </p:spPr>
-        <p:txBody>
-          <a:bodyPr xmlns:a="http://schemas.openxmlformats.org/drawingml/2006/main"/>
-          <a:lstStyle xmlns:a="http://schemas.openxmlformats.org/drawingml/2006/main"/>
-          <a:p xmlns:a="http://schemas.openxmlformats.org/drawingml/2006/main">
-            <a:pPr algn="ctr">
-              <a:buNone/>
-              <a:defRPr sz="2850" b="1">
-                <a:solidFill>
-                  <a:srgbClr val="FFFFFF"/>
-                </a:solidFill>
-              </a:defRPr>
-            </a:pPr>
-            <a:r>
-              <a:rPr sz="2850" b="1">
-                <a:solidFill>
-                  <a:srgbClr val="FFFFFF"/>
-                </a:solidFill>
-              </a:rPr>
-              <a:t>try → int(input()) → except ValueError</a:t>
+                <a16:creationId xmlns:a16="http://schemas.microsoft.com/office/drawing/2014/main" id="{73EB0691-40AC-4384-8469-D33BE5A5DDF7}"/>
+              </a:ext>
+            </a:extLst>
+          </p:cNvPr>
+          <p:cNvSpPr>
+            <a:spLocks xmlns:a="http://schemas.openxmlformats.org/drawingml/2006/main" noGrp="1"/>
+          </p:cNvSpPr>
+          <p:nvPr/>
+        </p:nvSpPr>
+        <p:spPr>
+          <a:xfrm xmlns:a="http://schemas.openxmlformats.org/drawingml/2006/main">
+            <a:off x="1047750" y="2143125"/>
+            <a:ext cx="4524375" cy="438150"/>
+          </a:xfrm>
+          <a:prstGeom xmlns:a="http://schemas.openxmlformats.org/drawingml/2006/main" prst="rect">
+            <a:avLst/>
+          </a:prstGeom>
+          <a:noFill xmlns:a="http://schemas.openxmlformats.org/drawingml/2006/main"/>
+          <a:ln xmlns:a="http://schemas.openxmlformats.org/drawingml/2006/main" w="0">
+            <a:noFill/>
+            <a:prstDash val="solid"/>
+          </a:ln>
+        </p:spPr>
+        <p:txBody>
+          <a:bodyPr xmlns:a="http://schemas.openxmlformats.org/drawingml/2006/main"/>
+          <a:lstStyle xmlns:a="http://schemas.openxmlformats.org/drawingml/2006/main"/>
+          <a:p xmlns:a="http://schemas.openxmlformats.org/drawingml/2006/main">
+            <a:pPr algn="l">
+              <a:buNone/>
+              <a:defRPr sz="2250" b="1">
+                <a:solidFill>
+                  <a:srgbClr val="0B2239"/>
+                </a:solidFill>
+              </a:defRPr>
+            </a:pPr>
+            <a:r>
+              <a:rPr sz="2250" b="1">
+                <a:solidFill>
+                  <a:srgbClr val="0B2239"/>
+                </a:solidFill>
+              </a:rPr>
+              <a:t>成功</a:t>
             </a:r>
           </a:p>
         </p:txBody>
@@ -11944,48 +12186,221 @@
           <p:cNvPr id="7" name="">
             <a:extLst xmlns:a="http://schemas.openxmlformats.org/drawingml/2006/main">
               <a:ext uri="{FF2B5EF4-FFF2-40B4-BE49-F238E27FC236}">
-                <a16:creationId xmlns:a16="http://schemas.microsoft.com/office/drawing/2014/main" id="{C73AD7C5-BA28-4AA0-8662-E48330CEBD0C}"/>
-              </a:ext>
-            </a:extLst>
-          </p:cNvPr>
-          <p:cNvSpPr>
-            <a:spLocks xmlns:a="http://schemas.openxmlformats.org/drawingml/2006/main" noGrp="1"/>
-          </p:cNvSpPr>
-          <p:nvPr/>
-        </p:nvSpPr>
-        <p:spPr>
-          <a:xfrm xmlns:a="http://schemas.openxmlformats.org/drawingml/2006/main">
-            <a:off x="2190750" y="3571875"/>
-            <a:ext cx="7810500" cy="342900"/>
-          </a:xfrm>
-          <a:prstGeom xmlns:a="http://schemas.openxmlformats.org/drawingml/2006/main" prst="rect">
-            <a:avLst/>
-          </a:prstGeom>
-          <a:noFill xmlns:a="http://schemas.openxmlformats.org/drawingml/2006/main"/>
-          <a:ln xmlns:a="http://schemas.openxmlformats.org/drawingml/2006/main" w="0">
-            <a:noFill/>
-            <a:prstDash val="solid"/>
-          </a:ln>
-        </p:spPr>
-        <p:txBody>
-          <a:bodyPr xmlns:a="http://schemas.openxmlformats.org/drawingml/2006/main"/>
-          <a:lstStyle xmlns:a="http://schemas.openxmlformats.org/drawingml/2006/main"/>
-          <a:p xmlns:a="http://schemas.openxmlformats.org/drawingml/2006/main">
-            <a:pPr algn="ctr">
-              <a:buNone/>
-              <a:defRPr sz="1650" b="0">
-                <a:solidFill>
-                  <a:srgbClr val="84D6D9"/>
-                </a:solidFill>
-              </a:defRPr>
-            </a:pPr>
-            <a:r>
-              <a:rPr sz="1650" b="0">
-                <a:solidFill>
-                  <a:srgbClr val="84D6D9"/>
-                </a:solidFill>
-              </a:rPr>
-              <a:t>輸入整數後再檢查合理範圍</a:t>
+                <a16:creationId xmlns:a16="http://schemas.microsoft.com/office/drawing/2014/main" id="{6FFFA900-3FA5-466B-BEEC-8512E30E9041}"/>
+              </a:ext>
+            </a:extLst>
+          </p:cNvPr>
+          <p:cNvSpPr>
+            <a:spLocks xmlns:a="http://schemas.openxmlformats.org/drawingml/2006/main" noGrp="1"/>
+          </p:cNvSpPr>
+          <p:nvPr/>
+        </p:nvSpPr>
+        <p:spPr>
+          <a:xfrm xmlns:a="http://schemas.openxmlformats.org/drawingml/2006/main">
+            <a:off x="1047750" y="2857500"/>
+            <a:ext cx="4333875" cy="1809750"/>
+          </a:xfrm>
+          <a:prstGeom xmlns:a="http://schemas.openxmlformats.org/drawingml/2006/main" prst="rect">
+            <a:avLst/>
+          </a:prstGeom>
+          <a:noFill xmlns:a="http://schemas.openxmlformats.org/drawingml/2006/main"/>
+          <a:ln xmlns:a="http://schemas.openxmlformats.org/drawingml/2006/main" w="0">
+            <a:noFill/>
+            <a:prstDash val="solid"/>
+          </a:ln>
+        </p:spPr>
+        <p:txBody>
+          <a:bodyPr xmlns:a="http://schemas.openxmlformats.org/drawingml/2006/main"/>
+          <a:lstStyle xmlns:a="http://schemas.openxmlformats.org/drawingml/2006/main"/>
+          <a:p xmlns:a="http://schemas.openxmlformats.org/drawingml/2006/main">
+            <a:pPr algn="l">
+              <a:buNone/>
+              <a:defRPr sz="1800" b="0">
+                <a:solidFill>
+                  <a:srgbClr val="15202B"/>
+                </a:solidFill>
+              </a:defRPr>
+            </a:pPr>
+            <a:r>
+              <a:rPr sz="1800" b="0">
+                <a:solidFill>
+                  <a:srgbClr val="15202B"/>
+                </a:solidFill>
+              </a:rPr>
+              <a:t>密碼正確 → 顯示登入成功 → break</a:t>
+            </a:r>
+          </a:p>
+        </p:txBody>
+      </p:sp>
+      <p:sp>
+        <p:nvSpPr>
+          <p:cNvPr id="8" name="">
+            <a:extLst xmlns:a="http://schemas.openxmlformats.org/drawingml/2006/main">
+              <a:ext uri="{FF2B5EF4-FFF2-40B4-BE49-F238E27FC236}">
+                <a16:creationId xmlns:a16="http://schemas.microsoft.com/office/drawing/2014/main" id="{49ACFB57-94D3-417E-B292-7095704B3B8D}"/>
+              </a:ext>
+            </a:extLst>
+          </p:cNvPr>
+          <p:cNvSpPr>
+            <a:spLocks xmlns:a="http://schemas.openxmlformats.org/drawingml/2006/main" noGrp="1"/>
+          </p:cNvSpPr>
+          <p:nvPr/>
+        </p:nvSpPr>
+        <p:spPr>
+          <a:xfrm xmlns:a="http://schemas.openxmlformats.org/drawingml/2006/main">
+            <a:off x="6334125" y="1857375"/>
+            <a:ext cx="5095875" cy="3143250"/>
+          </a:xfrm>
+          <a:prstGeom xmlns:a="http://schemas.openxmlformats.org/drawingml/2006/main" prst="roundRect">
+            <a:avLst>
+              <a:gd name="adj" fmla="val 4848"/>
+            </a:avLst>
+          </a:prstGeom>
+          <a:solidFill xmlns:a="http://schemas.openxmlformats.org/drawingml/2006/main">
+            <a:srgbClr val="FFFFFF"/>
+          </a:solidFill>
+          <a:ln xmlns:a="http://schemas.openxmlformats.org/drawingml/2006/main" w="9525">
+            <a:solidFill>
+              <a:srgbClr val="D5DEE5"/>
+            </a:solidFill>
+            <a:prstDash val="solid"/>
+          </a:ln>
+        </p:spPr>
+      </p:sp>
+      <p:sp>
+        <p:nvSpPr>
+          <p:cNvPr id="9" name="">
+            <a:extLst xmlns:a="http://schemas.openxmlformats.org/drawingml/2006/main">
+              <a:ext uri="{FF2B5EF4-FFF2-40B4-BE49-F238E27FC236}">
+                <a16:creationId xmlns:a16="http://schemas.microsoft.com/office/drawing/2014/main" id="{F8564DC8-4BC7-439B-9302-C372EAE8C628}"/>
+              </a:ext>
+            </a:extLst>
+          </p:cNvPr>
+          <p:cNvSpPr>
+            <a:spLocks xmlns:a="http://schemas.openxmlformats.org/drawingml/2006/main" noGrp="1"/>
+          </p:cNvSpPr>
+          <p:nvPr/>
+        </p:nvSpPr>
+        <p:spPr>
+          <a:xfrm xmlns:a="http://schemas.openxmlformats.org/drawingml/2006/main">
+            <a:off x="6619875" y="2143125"/>
+            <a:ext cx="4524375" cy="438150"/>
+          </a:xfrm>
+          <a:prstGeom xmlns:a="http://schemas.openxmlformats.org/drawingml/2006/main" prst="rect">
+            <a:avLst/>
+          </a:prstGeom>
+          <a:noFill xmlns:a="http://schemas.openxmlformats.org/drawingml/2006/main"/>
+          <a:ln xmlns:a="http://schemas.openxmlformats.org/drawingml/2006/main" w="0">
+            <a:noFill/>
+            <a:prstDash val="solid"/>
+          </a:ln>
+        </p:spPr>
+        <p:txBody>
+          <a:bodyPr xmlns:a="http://schemas.openxmlformats.org/drawingml/2006/main"/>
+          <a:lstStyle xmlns:a="http://schemas.openxmlformats.org/drawingml/2006/main"/>
+          <a:p xmlns:a="http://schemas.openxmlformats.org/drawingml/2006/main">
+            <a:pPr algn="l">
+              <a:buNone/>
+              <a:defRPr sz="2250" b="1">
+                <a:solidFill>
+                  <a:srgbClr val="0B2239"/>
+                </a:solidFill>
+              </a:defRPr>
+            </a:pPr>
+            <a:r>
+              <a:rPr sz="2250" b="1">
+                <a:solidFill>
+                  <a:srgbClr val="0B2239"/>
+                </a:solidFill>
+              </a:rPr>
+              <a:t>失敗</a:t>
+            </a:r>
+          </a:p>
+        </p:txBody>
+      </p:sp>
+      <p:sp>
+        <p:nvSpPr>
+          <p:cNvPr id="10" name="">
+            <a:extLst xmlns:a="http://schemas.openxmlformats.org/drawingml/2006/main">
+              <a:ext uri="{FF2B5EF4-FFF2-40B4-BE49-F238E27FC236}">
+                <a16:creationId xmlns:a16="http://schemas.microsoft.com/office/drawing/2014/main" id="{90C622B6-8526-4A06-96D7-A1390F1E6826}"/>
+              </a:ext>
+            </a:extLst>
+          </p:cNvPr>
+          <p:cNvSpPr>
+            <a:spLocks xmlns:a="http://schemas.openxmlformats.org/drawingml/2006/main" noGrp="1"/>
+          </p:cNvSpPr>
+          <p:nvPr/>
+        </p:nvSpPr>
+        <p:spPr>
+          <a:xfrm xmlns:a="http://schemas.openxmlformats.org/drawingml/2006/main">
+            <a:off x="6619875" y="2857500"/>
+            <a:ext cx="4333875" cy="1809750"/>
+          </a:xfrm>
+          <a:prstGeom xmlns:a="http://schemas.openxmlformats.org/drawingml/2006/main" prst="rect">
+            <a:avLst/>
+          </a:prstGeom>
+          <a:noFill xmlns:a="http://schemas.openxmlformats.org/drawingml/2006/main"/>
+          <a:ln xmlns:a="http://schemas.openxmlformats.org/drawingml/2006/main" w="0">
+            <a:noFill/>
+            <a:prstDash val="solid"/>
+          </a:ln>
+        </p:spPr>
+        <p:txBody>
+          <a:bodyPr xmlns:a="http://schemas.openxmlformats.org/drawingml/2006/main"/>
+          <a:lstStyle xmlns:a="http://schemas.openxmlformats.org/drawingml/2006/main"/>
+          <a:p xmlns:a="http://schemas.openxmlformats.org/drawingml/2006/main">
+            <a:pPr algn="l">
+              <a:buNone/>
+              <a:defRPr sz="1800" b="0">
+                <a:solidFill>
+                  <a:srgbClr val="15202B"/>
+                </a:solidFill>
+              </a:defRPr>
+            </a:pPr>
+            <a:r>
+              <a:rPr sz="1800" b="0">
+                <a:solidFill>
+                  <a:srgbClr val="15202B"/>
+                </a:solidFill>
+              </a:rPr>
+              <a:t>attempts += 1</a:t>
+            </a:r>
+          </a:p>
+          <a:p xmlns:a="http://schemas.openxmlformats.org/drawingml/2006/main">
+            <a:pPr algn="l">
+              <a:buNone/>
+              <a:defRPr sz="1800" b="0">
+                <a:solidFill>
+                  <a:srgbClr val="15202B"/>
+                </a:solidFill>
+              </a:defRPr>
+            </a:pPr>
+            <a:r>
+              <a:rPr sz="1800" b="0">
+                <a:solidFill>
+                  <a:srgbClr val="15202B"/>
+                </a:solidFill>
+              </a:rPr>
+              <a:t>顯示剩餘次數</a:t>
+            </a:r>
+          </a:p>
+          <a:p xmlns:a="http://schemas.openxmlformats.org/drawingml/2006/main">
+            <a:pPr algn="l">
+              <a:buNone/>
+              <a:defRPr sz="1800" b="0">
+                <a:solidFill>
+                  <a:srgbClr val="15202B"/>
+                </a:solidFill>
+              </a:defRPr>
+            </a:pPr>
+            <a:r>
+              <a:rPr sz="1800" b="0">
+                <a:solidFill>
+                  <a:srgbClr val="15202B"/>
+                </a:solidFill>
+              </a:rPr>
+              <a:t>三次後鎖定</a:t>
             </a:r>
           </a:p>
         </p:txBody>
@@ -11993,7 +12408,7 @@
     </p:spTree>
     <p:extLst>
       <p:ext uri="{BB962C8B-B14F-4D97-AF65-F5344CB8AC3E}">
-        <p14:creationId xmlns:p14="http://schemas.microsoft.com/office/powerpoint/2010/main" val="1667864155"/>
+        <p14:creationId xmlns:p14="http://schemas.microsoft.com/office/powerpoint/2010/main" val="1068828119"/>
       </p:ext>
     </p:extLst>
   </p:cSld>
